--- a/Summary/figures.pptx
+++ b/Summary/figures.pptx
@@ -5,7 +5,7 @@
     <p:sldMasterId id="2147483672" r:id="rId1"/>
   </p:sldMasterIdLst>
   <p:notesMasterIdLst>
-    <p:notesMasterId r:id="rId17"/>
+    <p:notesMasterId r:id="rId19"/>
   </p:notesMasterIdLst>
   <p:sldIdLst>
     <p:sldId id="422" r:id="rId2"/>
@@ -17,12 +17,14 @@
     <p:sldId id="516" r:id="rId8"/>
     <p:sldId id="512" r:id="rId9"/>
     <p:sldId id="517" r:id="rId10"/>
-    <p:sldId id="518" r:id="rId11"/>
-    <p:sldId id="513" r:id="rId12"/>
-    <p:sldId id="519" r:id="rId13"/>
-    <p:sldId id="521" r:id="rId14"/>
-    <p:sldId id="522" r:id="rId15"/>
-    <p:sldId id="523" r:id="rId16"/>
+    <p:sldId id="524" r:id="rId11"/>
+    <p:sldId id="525" r:id="rId12"/>
+    <p:sldId id="518" r:id="rId13"/>
+    <p:sldId id="513" r:id="rId14"/>
+    <p:sldId id="519" r:id="rId15"/>
+    <p:sldId id="521" r:id="rId16"/>
+    <p:sldId id="522" r:id="rId17"/>
+    <p:sldId id="523" r:id="rId18"/>
   </p:sldIdLst>
   <p:sldSz cx="22860000" cy="22860000"/>
   <p:notesSz cx="6858000" cy="9144000"/>
@@ -135,6 +137,8 @@
             <p14:sldId id="516"/>
             <p14:sldId id="512"/>
             <p14:sldId id="517"/>
+            <p14:sldId id="524"/>
+            <p14:sldId id="525"/>
             <p14:sldId id="518"/>
             <p14:sldId id="513"/>
             <p14:sldId id="519"/>
@@ -152,20 +156,60 @@
 </p:presentation>
 </file>
 
-<file path=ppt/revisionInfo.xml><?xml version="1.0" encoding="utf-8"?>
-<p1510:revInfo xmlns:a="http://schemas.openxmlformats.org/drawingml/2006/main" xmlns:r="http://schemas.openxmlformats.org/officeDocument/2006/relationships" xmlns:p1510="http://schemas.microsoft.com/office/powerpoint/2015/10/main">
-  <p1510:revLst>
-    <p1510:client id="{730C71DC-DAFB-43B5-B051-E3D49CCA0357}" v="40" dt="2026-02-18T20:34:06.330"/>
-  </p1510:revLst>
-</p1510:revInfo>
-</file>
-
 <file path=ppt/changesInfos/changesInfo1.xml><?xml version="1.0" encoding="utf-8"?>
 <pc:chgInfo xmlns:a="http://schemas.openxmlformats.org/drawingml/2006/main" xmlns:r="http://schemas.openxmlformats.org/officeDocument/2006/relationships" xmlns:ac="http://schemas.microsoft.com/office/drawing/2013/main/command" xmlns:pc="http://schemas.microsoft.com/office/powerpoint/2013/main/command">
   <pc:docChgLst>
+    <pc:chgData name="Jonathan Mah" userId="5261b2f2f3e51194" providerId="LiveId" clId="{A5D66373-2F43-49C1-972D-0BE2B77E544E}"/>
+    <pc:docChg chg="custSel modSld">
+      <pc:chgData name="Jonathan Mah" userId="5261b2f2f3e51194" providerId="LiveId" clId="{A5D66373-2F43-49C1-972D-0BE2B77E544E}" dt="2026-03-06T11:37:45.814" v="9" actId="1076"/>
+      <pc:docMkLst>
+        <pc:docMk/>
+      </pc:docMkLst>
+      <pc:sldChg chg="addSp delSp modSp mod">
+        <pc:chgData name="Jonathan Mah" userId="5261b2f2f3e51194" providerId="LiveId" clId="{A5D66373-2F43-49C1-972D-0BE2B77E544E}" dt="2026-03-06T11:37:45.814" v="9" actId="1076"/>
+        <pc:sldMkLst>
+          <pc:docMk/>
+          <pc:sldMk cId="2756291988" sldId="517"/>
+        </pc:sldMkLst>
+        <pc:spChg chg="mod">
+          <ac:chgData name="Jonathan Mah" userId="5261b2f2f3e51194" providerId="LiveId" clId="{A5D66373-2F43-49C1-972D-0BE2B77E544E}" dt="2026-03-06T11:37:45.814" v="9" actId="1076"/>
+          <ac:spMkLst>
+            <pc:docMk/>
+            <pc:sldMk cId="2756291988" sldId="517"/>
+            <ac:spMk id="6" creationId="{BBD625A1-63C5-F220-8C4F-1BA0CA7ED464}"/>
+          </ac:spMkLst>
+        </pc:spChg>
+        <pc:spChg chg="mod">
+          <ac:chgData name="Jonathan Mah" userId="5261b2f2f3e51194" providerId="LiveId" clId="{A5D66373-2F43-49C1-972D-0BE2B77E544E}" dt="2026-03-06T11:37:45.814" v="9" actId="1076"/>
+          <ac:spMkLst>
+            <pc:docMk/>
+            <pc:sldMk cId="2756291988" sldId="517"/>
+            <ac:spMk id="7" creationId="{42EB3CC8-DA01-9759-CCD5-B16E85F984DD}"/>
+          </ac:spMkLst>
+        </pc:spChg>
+        <pc:picChg chg="add mod ord">
+          <ac:chgData name="Jonathan Mah" userId="5261b2f2f3e51194" providerId="LiveId" clId="{A5D66373-2F43-49C1-972D-0BE2B77E544E}" dt="2026-03-06T11:37:36.837" v="7" actId="1076"/>
+          <ac:picMkLst>
+            <pc:docMk/>
+            <pc:sldMk cId="2756291988" sldId="517"/>
+            <ac:picMk id="3" creationId="{2C5A7DC2-EC6A-664E-08EB-A4697CF4145D}"/>
+          </ac:picMkLst>
+        </pc:picChg>
+        <pc:picChg chg="del">
+          <ac:chgData name="Jonathan Mah" userId="5261b2f2f3e51194" providerId="LiveId" clId="{A5D66373-2F43-49C1-972D-0BE2B77E544E}" dt="2026-03-06T11:36:47.296" v="0" actId="478"/>
+          <ac:picMkLst>
+            <pc:docMk/>
+            <pc:sldMk cId="2756291988" sldId="517"/>
+            <ac:picMk id="5" creationId="{D28E183A-4C31-52B0-0727-47F9DC3F9356}"/>
+          </ac:picMkLst>
+        </pc:picChg>
+      </pc:sldChg>
+    </pc:docChg>
+  </pc:docChgLst>
+  <pc:docChgLst>
     <pc:chgData name="Jonathan Mah" userId="5261b2f2f3e51194" providerId="LiveId" clId="{DB9BCF8B-E91B-491C-8171-92D39BBC1534}"/>
     <pc:docChg chg="undo redo custSel addSld modSld sldOrd modSection">
-      <pc:chgData name="Jonathan Mah" userId="5261b2f2f3e51194" providerId="LiveId" clId="{DB9BCF8B-E91B-491C-8171-92D39BBC1534}" dt="2026-02-18T20:34:24.213" v="1113" actId="20577"/>
+      <pc:chgData name="Jonathan Mah" userId="5261b2f2f3e51194" providerId="LiveId" clId="{DB9BCF8B-E91B-491C-8171-92D39BBC1534}" dt="2026-03-06T15:36:09.862" v="1228" actId="1038"/>
       <pc:docMkLst>
         <pc:docMk/>
       </pc:docMkLst>
@@ -302,14 +346,6 @@
             <ac:spMk id="6" creationId="{9160EB17-883E-0B7B-2B81-484C6D598F42}"/>
           </ac:spMkLst>
         </pc:spChg>
-        <pc:spChg chg="del">
-          <ac:chgData name="Jonathan Mah" userId="5261b2f2f3e51194" providerId="LiveId" clId="{DB9BCF8B-E91B-491C-8171-92D39BBC1534}" dt="2026-02-18T16:31:47.027" v="324" actId="478"/>
-          <ac:spMkLst>
-            <pc:docMk/>
-            <pc:sldMk cId="1663706368" sldId="513"/>
-            <ac:spMk id="8" creationId="{E4C19948-9DC0-5FD6-37A1-A17971347241}"/>
-          </ac:spMkLst>
-        </pc:spChg>
         <pc:spChg chg="add mod">
           <ac:chgData name="Jonathan Mah" userId="5261b2f2f3e51194" providerId="LiveId" clId="{DB9BCF8B-E91B-491C-8171-92D39BBC1534}" dt="2026-02-18T16:28:23.714" v="214" actId="1076"/>
           <ac:spMkLst>
@@ -372,86 +408,6 @@
             <pc:docMk/>
             <pc:sldMk cId="1663706368" sldId="513"/>
             <ac:spMk id="39" creationId="{75181FFF-4A0B-C576-74C0-3EC0FC1BBCF3}"/>
-          </ac:spMkLst>
-        </pc:spChg>
-        <pc:spChg chg="del">
-          <ac:chgData name="Jonathan Mah" userId="5261b2f2f3e51194" providerId="LiveId" clId="{DB9BCF8B-E91B-491C-8171-92D39BBC1534}" dt="2026-02-18T16:31:47.027" v="324" actId="478"/>
-          <ac:spMkLst>
-            <pc:docMk/>
-            <pc:sldMk cId="1663706368" sldId="513"/>
-            <ac:spMk id="40" creationId="{4BADBDCF-86B6-D17F-1D38-3D1292745407}"/>
-          </ac:spMkLst>
-        </pc:spChg>
-        <pc:spChg chg="del mod">
-          <ac:chgData name="Jonathan Mah" userId="5261b2f2f3e51194" providerId="LiveId" clId="{DB9BCF8B-E91B-491C-8171-92D39BBC1534}" dt="2026-02-18T16:31:47.027" v="324" actId="478"/>
-          <ac:spMkLst>
-            <pc:docMk/>
-            <pc:sldMk cId="1663706368" sldId="513"/>
-            <ac:spMk id="538" creationId="{6330B629-D011-F42B-B0E3-A53B714D3870}"/>
-          </ac:spMkLst>
-        </pc:spChg>
-        <pc:spChg chg="del mod">
-          <ac:chgData name="Jonathan Mah" userId="5261b2f2f3e51194" providerId="LiveId" clId="{DB9BCF8B-E91B-491C-8171-92D39BBC1534}" dt="2026-02-18T16:31:47.027" v="324" actId="478"/>
-          <ac:spMkLst>
-            <pc:docMk/>
-            <pc:sldMk cId="1663706368" sldId="513"/>
-            <ac:spMk id="539" creationId="{288CF384-909F-D4CB-763F-B61C4A338A8B}"/>
-          </ac:spMkLst>
-        </pc:spChg>
-        <pc:spChg chg="del mod">
-          <ac:chgData name="Jonathan Mah" userId="5261b2f2f3e51194" providerId="LiveId" clId="{DB9BCF8B-E91B-491C-8171-92D39BBC1534}" dt="2026-02-18T16:31:47.027" v="324" actId="478"/>
-          <ac:spMkLst>
-            <pc:docMk/>
-            <pc:sldMk cId="1663706368" sldId="513"/>
-            <ac:spMk id="540" creationId="{44ED7668-2965-3F3C-8515-93D74C3EEF98}"/>
-          </ac:spMkLst>
-        </pc:spChg>
-        <pc:spChg chg="del">
-          <ac:chgData name="Jonathan Mah" userId="5261b2f2f3e51194" providerId="LiveId" clId="{DB9BCF8B-E91B-491C-8171-92D39BBC1534}" dt="2026-02-18T16:26:15.875" v="137" actId="478"/>
-          <ac:spMkLst>
-            <pc:docMk/>
-            <pc:sldMk cId="1663706368" sldId="513"/>
-            <ac:spMk id="541" creationId="{8FFC02D5-F71E-13F4-1E75-32C44BB7F7D2}"/>
-          </ac:spMkLst>
-        </pc:spChg>
-        <pc:spChg chg="del">
-          <ac:chgData name="Jonathan Mah" userId="5261b2f2f3e51194" providerId="LiveId" clId="{DB9BCF8B-E91B-491C-8171-92D39BBC1534}" dt="2026-02-18T16:31:47.027" v="324" actId="478"/>
-          <ac:spMkLst>
-            <pc:docMk/>
-            <pc:sldMk cId="1663706368" sldId="513"/>
-            <ac:spMk id="542" creationId="{5C4849F4-CE36-7363-C00B-F53250F6ACEC}"/>
-          </ac:spMkLst>
-        </pc:spChg>
-        <pc:spChg chg="del">
-          <ac:chgData name="Jonathan Mah" userId="5261b2f2f3e51194" providerId="LiveId" clId="{DB9BCF8B-E91B-491C-8171-92D39BBC1534}" dt="2026-02-18T16:31:47.027" v="324" actId="478"/>
-          <ac:spMkLst>
-            <pc:docMk/>
-            <pc:sldMk cId="1663706368" sldId="513"/>
-            <ac:spMk id="543" creationId="{14780343-7233-C5D1-07FC-2B477302258F}"/>
-          </ac:spMkLst>
-        </pc:spChg>
-        <pc:spChg chg="del">
-          <ac:chgData name="Jonathan Mah" userId="5261b2f2f3e51194" providerId="LiveId" clId="{DB9BCF8B-E91B-491C-8171-92D39BBC1534}" dt="2026-02-18T16:31:47.027" v="324" actId="478"/>
-          <ac:spMkLst>
-            <pc:docMk/>
-            <pc:sldMk cId="1663706368" sldId="513"/>
-            <ac:spMk id="544" creationId="{36EDF656-7D13-ADFC-D4C9-2E881468601A}"/>
-          </ac:spMkLst>
-        </pc:spChg>
-        <pc:spChg chg="del">
-          <ac:chgData name="Jonathan Mah" userId="5261b2f2f3e51194" providerId="LiveId" clId="{DB9BCF8B-E91B-491C-8171-92D39BBC1534}" dt="2026-02-18T16:31:47.027" v="324" actId="478"/>
-          <ac:spMkLst>
-            <pc:docMk/>
-            <pc:sldMk cId="1663706368" sldId="513"/>
-            <ac:spMk id="546" creationId="{EC3C7F2D-A40A-9398-EFFD-E9FBF720EAE9}"/>
-          </ac:spMkLst>
-        </pc:spChg>
-        <pc:spChg chg="del">
-          <ac:chgData name="Jonathan Mah" userId="5261b2f2f3e51194" providerId="LiveId" clId="{DB9BCF8B-E91B-491C-8171-92D39BBC1534}" dt="2026-02-18T16:31:47.027" v="324" actId="478"/>
-          <ac:spMkLst>
-            <pc:docMk/>
-            <pc:sldMk cId="1663706368" sldId="513"/>
-            <ac:spMk id="547" creationId="{2C4AE86C-9595-E99B-F26D-B14308D5F3F4}"/>
           </ac:spMkLst>
         </pc:spChg>
         <pc:spChg chg="mod">
@@ -535,51 +491,11 @@
           </ac:cxnSpMkLst>
         </pc:cxnChg>
         <pc:cxnChg chg="mod">
-          <ac:chgData name="Jonathan Mah" userId="5261b2f2f3e51194" providerId="LiveId" clId="{DB9BCF8B-E91B-491C-8171-92D39BBC1534}" dt="2026-02-18T16:27:42.398" v="210" actId="1035"/>
-          <ac:cxnSpMkLst>
-            <pc:docMk/>
-            <pc:sldMk cId="1663706368" sldId="513"/>
-            <ac:cxnSpMk id="43" creationId="{0647F9EB-6456-AE24-65DA-EA4757D24CFF}"/>
-          </ac:cxnSpMkLst>
-        </pc:cxnChg>
-        <pc:cxnChg chg="del">
-          <ac:chgData name="Jonathan Mah" userId="5261b2f2f3e51194" providerId="LiveId" clId="{DB9BCF8B-E91B-491C-8171-92D39BBC1534}" dt="2026-02-18T16:26:13.917" v="136" actId="478"/>
-          <ac:cxnSpMkLst>
-            <pc:docMk/>
-            <pc:sldMk cId="1663706368" sldId="513"/>
-            <ac:cxnSpMk id="44" creationId="{1AF2C6E5-CBB5-1AB2-C438-02589CA06572}"/>
-          </ac:cxnSpMkLst>
-        </pc:cxnChg>
-        <pc:cxnChg chg="mod">
           <ac:chgData name="Jonathan Mah" userId="5261b2f2f3e51194" providerId="LiveId" clId="{DB9BCF8B-E91B-491C-8171-92D39BBC1534}" dt="2026-02-18T16:26:44.115" v="156" actId="14100"/>
           <ac:cxnSpMkLst>
             <pc:docMk/>
             <pc:sldMk cId="1663706368" sldId="513"/>
             <ac:cxnSpMk id="54" creationId="{E5EA91F2-176D-298A-EAFF-7550A8200703}"/>
-          </ac:cxnSpMkLst>
-        </pc:cxnChg>
-        <pc:cxnChg chg="del">
-          <ac:chgData name="Jonathan Mah" userId="5261b2f2f3e51194" providerId="LiveId" clId="{DB9BCF8B-E91B-491C-8171-92D39BBC1534}" dt="2026-02-18T16:26:37.416" v="153" actId="478"/>
-          <ac:cxnSpMkLst>
-            <pc:docMk/>
-            <pc:sldMk cId="1663706368" sldId="513"/>
-            <ac:cxnSpMk id="559" creationId="{872B991D-0ADA-E25A-D346-8B4B3892DB9F}"/>
-          </ac:cxnSpMkLst>
-        </pc:cxnChg>
-        <pc:cxnChg chg="del">
-          <ac:chgData name="Jonathan Mah" userId="5261b2f2f3e51194" providerId="LiveId" clId="{DB9BCF8B-E91B-491C-8171-92D39BBC1534}" dt="2026-02-18T16:26:39.865" v="155" actId="478"/>
-          <ac:cxnSpMkLst>
-            <pc:docMk/>
-            <pc:sldMk cId="1663706368" sldId="513"/>
-            <ac:cxnSpMk id="560" creationId="{E9E6ABFA-AA21-27AA-354C-0D017E6BD393}"/>
-          </ac:cxnSpMkLst>
-        </pc:cxnChg>
-        <pc:cxnChg chg="del">
-          <ac:chgData name="Jonathan Mah" userId="5261b2f2f3e51194" providerId="LiveId" clId="{DB9BCF8B-E91B-491C-8171-92D39BBC1534}" dt="2026-02-18T16:26:39.484" v="154" actId="478"/>
-          <ac:cxnSpMkLst>
-            <pc:docMk/>
-            <pc:sldMk cId="1663706368" sldId="513"/>
-            <ac:cxnSpMk id="562" creationId="{10ED7B93-EB71-3679-38B5-10F02460AA5F}"/>
           </ac:cxnSpMkLst>
         </pc:cxnChg>
         <pc:cxnChg chg="mod">
@@ -710,14 +626,6 @@
           </ac:spMkLst>
         </pc:spChg>
         <pc:picChg chg="add mod">
-          <ac:chgData name="Jonathan Mah" userId="5261b2f2f3e51194" providerId="LiveId" clId="{DB9BCF8B-E91B-491C-8171-92D39BBC1534}" dt="2026-02-07T10:07:17.383" v="26" actId="14100"/>
-          <ac:picMkLst>
-            <pc:docMk/>
-            <pc:sldMk cId="2756291988" sldId="517"/>
-            <ac:picMk id="5" creationId="{D28E183A-4C31-52B0-0727-47F9DC3F9356}"/>
-          </ac:picMkLst>
-        </pc:picChg>
-        <pc:picChg chg="add mod">
           <ac:chgData name="Jonathan Mah" userId="5261b2f2f3e51194" providerId="LiveId" clId="{DB9BCF8B-E91B-491C-8171-92D39BBC1534}" dt="2026-02-07T10:11:28.661" v="51" actId="1076"/>
           <ac:picMkLst>
             <pc:docMk/>
@@ -835,46 +743,6 @@
           <pc:docMk/>
           <pc:sldMk cId="2539197924" sldId="519"/>
         </pc:sldMkLst>
-        <pc:spChg chg="add del">
-          <ac:chgData name="Jonathan Mah" userId="5261b2f2f3e51194" providerId="LiveId" clId="{DB9BCF8B-E91B-491C-8171-92D39BBC1534}" dt="2026-02-18T16:38:55.758" v="487" actId="478"/>
-          <ac:spMkLst>
-            <pc:docMk/>
-            <pc:sldMk cId="2539197924" sldId="519"/>
-            <ac:spMk id="5" creationId="{45ACBB2A-97F2-1C04-EA2B-CF1269A2FCE9}"/>
-          </ac:spMkLst>
-        </pc:spChg>
-        <pc:spChg chg="del">
-          <ac:chgData name="Jonathan Mah" userId="5261b2f2f3e51194" providerId="LiveId" clId="{DB9BCF8B-E91B-491C-8171-92D39BBC1534}" dt="2026-02-18T16:39:00.462" v="489" actId="478"/>
-          <ac:spMkLst>
-            <pc:docMk/>
-            <pc:sldMk cId="2539197924" sldId="519"/>
-            <ac:spMk id="6" creationId="{A9630A5B-E59A-CD3A-12A8-20E401DC8D87}"/>
-          </ac:spMkLst>
-        </pc:spChg>
-        <pc:spChg chg="add del mod">
-          <ac:chgData name="Jonathan Mah" userId="5261b2f2f3e51194" providerId="LiveId" clId="{DB9BCF8B-E91B-491C-8171-92D39BBC1534}" dt="2026-02-18T16:50:01.927" v="864" actId="478"/>
-          <ac:spMkLst>
-            <pc:docMk/>
-            <pc:sldMk cId="2539197924" sldId="519"/>
-            <ac:spMk id="8" creationId="{734FC352-A9F8-DAC0-2019-E3423FFBFAA1}"/>
-          </ac:spMkLst>
-        </pc:spChg>
-        <pc:spChg chg="add del mod">
-          <ac:chgData name="Jonathan Mah" userId="5261b2f2f3e51194" providerId="LiveId" clId="{DB9BCF8B-E91B-491C-8171-92D39BBC1534}" dt="2026-02-18T16:50:01.927" v="864" actId="478"/>
-          <ac:spMkLst>
-            <pc:docMk/>
-            <pc:sldMk cId="2539197924" sldId="519"/>
-            <ac:spMk id="9" creationId="{9A324380-D5F3-14D4-EC4C-760AFC2BF783}"/>
-          </ac:spMkLst>
-        </pc:spChg>
-        <pc:spChg chg="add del mod">
-          <ac:chgData name="Jonathan Mah" userId="5261b2f2f3e51194" providerId="LiveId" clId="{DB9BCF8B-E91B-491C-8171-92D39BBC1534}" dt="2026-02-18T16:50:01.927" v="864" actId="478"/>
-          <ac:spMkLst>
-            <pc:docMk/>
-            <pc:sldMk cId="2539197924" sldId="519"/>
-            <ac:spMk id="10" creationId="{70EBCE85-BA31-775E-10E4-D593F416DD46}"/>
-          </ac:spMkLst>
-        </pc:spChg>
         <pc:spChg chg="add mod">
           <ac:chgData name="Jonathan Mah" userId="5261b2f2f3e51194" providerId="LiveId" clId="{DB9BCF8B-E91B-491C-8171-92D39BBC1534}" dt="2026-02-18T16:58:11.132" v="1017" actId="207"/>
           <ac:spMkLst>
@@ -899,22 +767,6 @@
             <ac:spMk id="13" creationId="{DBE30083-F436-846E-DA62-08A5B16657E2}"/>
           </ac:spMkLst>
         </pc:spChg>
-        <pc:spChg chg="add del mod">
-          <ac:chgData name="Jonathan Mah" userId="5261b2f2f3e51194" providerId="LiveId" clId="{DB9BCF8B-E91B-491C-8171-92D39BBC1534}" dt="2026-02-18T16:50:01.927" v="864" actId="478"/>
-          <ac:spMkLst>
-            <pc:docMk/>
-            <pc:sldMk cId="2539197924" sldId="519"/>
-            <ac:spMk id="15" creationId="{7965C7F0-42D4-B72E-F56D-6F19EF311C7F}"/>
-          </ac:spMkLst>
-        </pc:spChg>
-        <pc:spChg chg="add del mod">
-          <ac:chgData name="Jonathan Mah" userId="5261b2f2f3e51194" providerId="LiveId" clId="{DB9BCF8B-E91B-491C-8171-92D39BBC1534}" dt="2026-02-18T16:50:01.927" v="864" actId="478"/>
-          <ac:spMkLst>
-            <pc:docMk/>
-            <pc:sldMk cId="2539197924" sldId="519"/>
-            <ac:spMk id="16" creationId="{BDFF4EA2-DE6B-783F-EC6E-E5D9941C1C7D}"/>
-          </ac:spMkLst>
-        </pc:spChg>
         <pc:spChg chg="mod">
           <ac:chgData name="Jonathan Mah" userId="5261b2f2f3e51194" providerId="LiveId" clId="{DB9BCF8B-E91B-491C-8171-92D39BBC1534}" dt="2026-02-18T16:57:23.745" v="1014" actId="1038"/>
           <ac:spMkLst>
@@ -932,67 +784,11 @@
           </ac:spMkLst>
         </pc:spChg>
         <pc:spChg chg="add del mod">
-          <ac:chgData name="Jonathan Mah" userId="5261b2f2f3e51194" providerId="LiveId" clId="{DB9BCF8B-E91B-491C-8171-92D39BBC1534}" dt="2026-02-18T16:50:01.927" v="864" actId="478"/>
-          <ac:spMkLst>
-            <pc:docMk/>
-            <pc:sldMk cId="2539197924" sldId="519"/>
-            <ac:spMk id="23" creationId="{B4C8FF9A-6830-28AA-D759-C30B6C5B1176}"/>
-          </ac:spMkLst>
-        </pc:spChg>
-        <pc:spChg chg="add del">
-          <ac:chgData name="Jonathan Mah" userId="5261b2f2f3e51194" providerId="LiveId" clId="{DB9BCF8B-E91B-491C-8171-92D39BBC1534}" dt="2026-02-18T16:38:58.912" v="488" actId="478"/>
-          <ac:spMkLst>
-            <pc:docMk/>
-            <pc:sldMk cId="2539197924" sldId="519"/>
-            <ac:spMk id="24" creationId="{61A186D6-4675-6189-DF76-47F2B90F65D9}"/>
-          </ac:spMkLst>
-        </pc:spChg>
-        <pc:spChg chg="add del">
-          <ac:chgData name="Jonathan Mah" userId="5261b2f2f3e51194" providerId="LiveId" clId="{DB9BCF8B-E91B-491C-8171-92D39BBC1534}" dt="2026-02-18T16:38:58.912" v="488" actId="478"/>
-          <ac:spMkLst>
-            <pc:docMk/>
-            <pc:sldMk cId="2539197924" sldId="519"/>
-            <ac:spMk id="25" creationId="{1BC6BEF9-37A2-7CD3-A5A0-4CBCEDF41446}"/>
-          </ac:spMkLst>
-        </pc:spChg>
-        <pc:spChg chg="add del">
-          <ac:chgData name="Jonathan Mah" userId="5261b2f2f3e51194" providerId="LiveId" clId="{DB9BCF8B-E91B-491C-8171-92D39BBC1534}" dt="2026-02-18T16:38:58.912" v="488" actId="478"/>
-          <ac:spMkLst>
-            <pc:docMk/>
-            <pc:sldMk cId="2539197924" sldId="519"/>
-            <ac:spMk id="26" creationId="{F52F1262-D968-AED5-9373-84670E075AAB}"/>
-          </ac:spMkLst>
-        </pc:spChg>
-        <pc:spChg chg="add del mod">
-          <ac:chgData name="Jonathan Mah" userId="5261b2f2f3e51194" providerId="LiveId" clId="{DB9BCF8B-E91B-491C-8171-92D39BBC1534}" dt="2026-02-18T16:39:57.319" v="597" actId="478"/>
-          <ac:spMkLst>
-            <pc:docMk/>
-            <pc:sldMk cId="2539197924" sldId="519"/>
-            <ac:spMk id="27" creationId="{C94AD9CD-7D68-A0DF-2CD1-D5838C544B42}"/>
-          </ac:spMkLst>
-        </pc:spChg>
-        <pc:spChg chg="add del mod">
-          <ac:chgData name="Jonathan Mah" userId="5261b2f2f3e51194" providerId="LiveId" clId="{DB9BCF8B-E91B-491C-8171-92D39BBC1534}" dt="2026-02-18T16:39:57.319" v="597" actId="478"/>
-          <ac:spMkLst>
-            <pc:docMk/>
-            <pc:sldMk cId="2539197924" sldId="519"/>
-            <ac:spMk id="28" creationId="{549E14A2-3CE9-9D2E-09CE-0AAFF788350E}"/>
-          </ac:spMkLst>
-        </pc:spChg>
-        <pc:spChg chg="add del mod">
           <ac:chgData name="Jonathan Mah" userId="5261b2f2f3e51194" providerId="LiveId" clId="{DB9BCF8B-E91B-491C-8171-92D39BBC1534}" dt="2026-02-18T16:59:00.667" v="1024" actId="14100"/>
           <ac:spMkLst>
             <pc:docMk/>
             <pc:sldMk cId="2539197924" sldId="519"/>
             <ac:spMk id="29" creationId="{D9C4A69C-2F5A-C74D-E288-127EB93B7013}"/>
-          </ac:spMkLst>
-        </pc:spChg>
-        <pc:spChg chg="add del mod">
-          <ac:chgData name="Jonathan Mah" userId="5261b2f2f3e51194" providerId="LiveId" clId="{DB9BCF8B-E91B-491C-8171-92D39BBC1534}" dt="2026-02-18T16:40:12.280" v="602" actId="478"/>
-          <ac:spMkLst>
-            <pc:docMk/>
-            <pc:sldMk cId="2539197924" sldId="519"/>
-            <ac:spMk id="30" creationId="{A9D17791-A680-D6F8-15D6-F3E73CC55AA7}"/>
           </ac:spMkLst>
         </pc:spChg>
         <pc:spChg chg="add mod">
@@ -1004,83 +800,11 @@
           </ac:spMkLst>
         </pc:spChg>
         <pc:spChg chg="add mod">
-          <ac:chgData name="Jonathan Mah" userId="5261b2f2f3e51194" providerId="LiveId" clId="{DB9BCF8B-E91B-491C-8171-92D39BBC1534}" dt="2026-02-18T16:40:26.880" v="607" actId="1076"/>
-          <ac:spMkLst>
-            <pc:docMk/>
-            <pc:sldMk cId="2539197924" sldId="519"/>
-            <ac:spMk id="32" creationId="{6759C9F3-F3CA-0A81-B72B-3B9F9F2BE85C}"/>
-          </ac:spMkLst>
-        </pc:spChg>
-        <pc:spChg chg="add mod">
           <ac:chgData name="Jonathan Mah" userId="5261b2f2f3e51194" providerId="LiveId" clId="{DB9BCF8B-E91B-491C-8171-92D39BBC1534}" dt="2026-02-18T16:41:13.107" v="620" actId="1076"/>
           <ac:spMkLst>
             <pc:docMk/>
             <pc:sldMk cId="2539197924" sldId="519"/>
             <ac:spMk id="33" creationId="{BC5CFE60-7CDC-A5CC-4580-7260E2DEFE2C}"/>
-          </ac:spMkLst>
-        </pc:spChg>
-        <pc:spChg chg="add del">
-          <ac:chgData name="Jonathan Mah" userId="5261b2f2f3e51194" providerId="LiveId" clId="{DB9BCF8B-E91B-491C-8171-92D39BBC1534}" dt="2026-02-18T16:38:58.912" v="488" actId="478"/>
-          <ac:spMkLst>
-            <pc:docMk/>
-            <pc:sldMk cId="2539197924" sldId="519"/>
-            <ac:spMk id="35" creationId="{B212DEA9-D42D-AA8D-CFC7-31CDA6321CEB}"/>
-          </ac:spMkLst>
-        </pc:spChg>
-        <pc:spChg chg="add del">
-          <ac:chgData name="Jonathan Mah" userId="5261b2f2f3e51194" providerId="LiveId" clId="{DB9BCF8B-E91B-491C-8171-92D39BBC1534}" dt="2026-02-18T16:38:58.912" v="488" actId="478"/>
-          <ac:spMkLst>
-            <pc:docMk/>
-            <pc:sldMk cId="2539197924" sldId="519"/>
-            <ac:spMk id="36" creationId="{496FD707-6E53-E27B-97F1-B52DA0070CB0}"/>
-          </ac:spMkLst>
-        </pc:spChg>
-        <pc:spChg chg="add del">
-          <ac:chgData name="Jonathan Mah" userId="5261b2f2f3e51194" providerId="LiveId" clId="{DB9BCF8B-E91B-491C-8171-92D39BBC1534}" dt="2026-02-18T16:38:58.912" v="488" actId="478"/>
-          <ac:spMkLst>
-            <pc:docMk/>
-            <pc:sldMk cId="2539197924" sldId="519"/>
-            <ac:spMk id="37" creationId="{0C87AA6E-AFF0-707A-3163-AA5774AF48BA}"/>
-          </ac:spMkLst>
-        </pc:spChg>
-        <pc:spChg chg="del">
-          <ac:chgData name="Jonathan Mah" userId="5261b2f2f3e51194" providerId="LiveId" clId="{DB9BCF8B-E91B-491C-8171-92D39BBC1534}" dt="2026-02-18T16:38:58.912" v="488" actId="478"/>
-          <ac:spMkLst>
-            <pc:docMk/>
-            <pc:sldMk cId="2539197924" sldId="519"/>
-            <ac:spMk id="38" creationId="{CA930185-3DBF-890B-6903-68BECBE9D2D0}"/>
-          </ac:spMkLst>
-        </pc:spChg>
-        <pc:spChg chg="del">
-          <ac:chgData name="Jonathan Mah" userId="5261b2f2f3e51194" providerId="LiveId" clId="{DB9BCF8B-E91B-491C-8171-92D39BBC1534}" dt="2026-02-18T16:39:00.462" v="489" actId="478"/>
-          <ac:spMkLst>
-            <pc:docMk/>
-            <pc:sldMk cId="2539197924" sldId="519"/>
-            <ac:spMk id="39" creationId="{F07BD1F9-4E71-9106-4F7C-CDD56ABA4E98}"/>
-          </ac:spMkLst>
-        </pc:spChg>
-        <pc:spChg chg="add del mod">
-          <ac:chgData name="Jonathan Mah" userId="5261b2f2f3e51194" providerId="LiveId" clId="{DB9BCF8B-E91B-491C-8171-92D39BBC1534}" dt="2026-02-18T16:46:26.356" v="824" actId="478"/>
-          <ac:spMkLst>
-            <pc:docMk/>
-            <pc:sldMk cId="2539197924" sldId="519"/>
-            <ac:spMk id="42" creationId="{E86FA0F7-C4B6-E858-0027-9FC99E49FFC3}"/>
-          </ac:spMkLst>
-        </pc:spChg>
-        <pc:spChg chg="add del mod">
-          <ac:chgData name="Jonathan Mah" userId="5261b2f2f3e51194" providerId="LiveId" clId="{DB9BCF8B-E91B-491C-8171-92D39BBC1534}" dt="2026-02-18T16:46:26.356" v="824" actId="478"/>
-          <ac:spMkLst>
-            <pc:docMk/>
-            <pc:sldMk cId="2539197924" sldId="519"/>
-            <ac:spMk id="43" creationId="{169A3C0B-B367-8414-BB2A-93CB39074FB1}"/>
-          </ac:spMkLst>
-        </pc:spChg>
-        <pc:spChg chg="add del mod">
-          <ac:chgData name="Jonathan Mah" userId="5261b2f2f3e51194" providerId="LiveId" clId="{DB9BCF8B-E91B-491C-8171-92D39BBC1534}" dt="2026-02-18T16:46:26.356" v="824" actId="478"/>
-          <ac:spMkLst>
-            <pc:docMk/>
-            <pc:sldMk cId="2539197924" sldId="519"/>
-            <ac:spMk id="44" creationId="{A08A27A0-0523-EED3-CFCA-4CCD3D074524}"/>
           </ac:spMkLst>
         </pc:spChg>
         <pc:spChg chg="add mod">
@@ -1105,46 +829,6 @@
             <pc:docMk/>
             <pc:sldMk cId="2539197924" sldId="519"/>
             <ac:spMk id="47" creationId="{9ECAD82C-1410-AB64-39D3-34D9D6FB8684}"/>
-          </ac:spMkLst>
-        </pc:spChg>
-        <pc:spChg chg="add del mod">
-          <ac:chgData name="Jonathan Mah" userId="5261b2f2f3e51194" providerId="LiveId" clId="{DB9BCF8B-E91B-491C-8171-92D39BBC1534}" dt="2026-02-18T16:46:26.356" v="824" actId="478"/>
-          <ac:spMkLst>
-            <pc:docMk/>
-            <pc:sldMk cId="2539197924" sldId="519"/>
-            <ac:spMk id="49" creationId="{CA5443DB-FCFA-CC8C-2975-D1AA89F0B196}"/>
-          </ac:spMkLst>
-        </pc:spChg>
-        <pc:spChg chg="add del mod">
-          <ac:chgData name="Jonathan Mah" userId="5261b2f2f3e51194" providerId="LiveId" clId="{DB9BCF8B-E91B-491C-8171-92D39BBC1534}" dt="2026-02-18T16:46:26.356" v="824" actId="478"/>
-          <ac:spMkLst>
-            <pc:docMk/>
-            <pc:sldMk cId="2539197924" sldId="519"/>
-            <ac:spMk id="50" creationId="{E77FBAF9-3D61-4762-25C5-0E15680B5EE0}"/>
-          </ac:spMkLst>
-        </pc:spChg>
-        <pc:spChg chg="add del mod">
-          <ac:chgData name="Jonathan Mah" userId="5261b2f2f3e51194" providerId="LiveId" clId="{DB9BCF8B-E91B-491C-8171-92D39BBC1534}" dt="2026-02-18T16:46:26.356" v="824" actId="478"/>
-          <ac:spMkLst>
-            <pc:docMk/>
-            <pc:sldMk cId="2539197924" sldId="519"/>
-            <ac:spMk id="51" creationId="{60FA3A3A-1CD1-7D11-C4F5-C19F57E98422}"/>
-          </ac:spMkLst>
-        </pc:spChg>
-        <pc:spChg chg="add del mod">
-          <ac:chgData name="Jonathan Mah" userId="5261b2f2f3e51194" providerId="LiveId" clId="{DB9BCF8B-E91B-491C-8171-92D39BBC1534}" dt="2026-02-18T16:48:42.164" v="843" actId="478"/>
-          <ac:spMkLst>
-            <pc:docMk/>
-            <pc:sldMk cId="2539197924" sldId="519"/>
-            <ac:spMk id="52" creationId="{278C6359-9B47-8960-5B02-BF60CA0B7104}"/>
-          </ac:spMkLst>
-        </pc:spChg>
-        <pc:spChg chg="del">
-          <ac:chgData name="Jonathan Mah" userId="5261b2f2f3e51194" providerId="LiveId" clId="{DB9BCF8B-E91B-491C-8171-92D39BBC1534}" dt="2026-02-18T16:48:42.703" v="844" actId="478"/>
-          <ac:spMkLst>
-            <pc:docMk/>
-            <pc:sldMk cId="2539197924" sldId="519"/>
-            <ac:spMk id="53" creationId="{07C46E35-E453-52EA-ACCE-B5F03EC22399}"/>
           </ac:spMkLst>
         </pc:spChg>
         <pc:spChg chg="add mod">
@@ -1275,126 +959,6 @@
             <ac:spMk id="71" creationId="{CC17C4FC-0B6E-E13F-C393-0013EC5A3A74}"/>
           </ac:spMkLst>
         </pc:spChg>
-        <pc:spChg chg="del">
-          <ac:chgData name="Jonathan Mah" userId="5261b2f2f3e51194" providerId="LiveId" clId="{DB9BCF8B-E91B-491C-8171-92D39BBC1534}" dt="2026-02-18T16:39:00.462" v="489" actId="478"/>
-          <ac:spMkLst>
-            <pc:docMk/>
-            <pc:sldMk cId="2539197924" sldId="519"/>
-            <ac:spMk id="549" creationId="{A78428BB-A974-2936-92A4-EE1BB4BF2433}"/>
-          </ac:spMkLst>
-        </pc:spChg>
-        <pc:spChg chg="del">
-          <ac:chgData name="Jonathan Mah" userId="5261b2f2f3e51194" providerId="LiveId" clId="{DB9BCF8B-E91B-491C-8171-92D39BBC1534}" dt="2026-02-18T16:39:00.462" v="489" actId="478"/>
-          <ac:spMkLst>
-            <pc:docMk/>
-            <pc:sldMk cId="2539197924" sldId="519"/>
-            <ac:spMk id="550" creationId="{688BE8B7-E7D2-BE09-948A-71A6E6DDC99B}"/>
-          </ac:spMkLst>
-        </pc:spChg>
-        <pc:spChg chg="del">
-          <ac:chgData name="Jonathan Mah" userId="5261b2f2f3e51194" providerId="LiveId" clId="{DB9BCF8B-E91B-491C-8171-92D39BBC1534}" dt="2026-02-18T16:39:00.462" v="489" actId="478"/>
-          <ac:spMkLst>
-            <pc:docMk/>
-            <pc:sldMk cId="2539197924" sldId="519"/>
-            <ac:spMk id="553" creationId="{F017895E-8271-DCE6-0AD5-EBE762C7B162}"/>
-          </ac:spMkLst>
-        </pc:spChg>
-        <pc:spChg chg="del">
-          <ac:chgData name="Jonathan Mah" userId="5261b2f2f3e51194" providerId="LiveId" clId="{DB9BCF8B-E91B-491C-8171-92D39BBC1534}" dt="2026-02-18T16:39:00.462" v="489" actId="478"/>
-          <ac:spMkLst>
-            <pc:docMk/>
-            <pc:sldMk cId="2539197924" sldId="519"/>
-            <ac:spMk id="554" creationId="{83A159E8-CE4C-6936-7C89-6EC9A519EA3D}"/>
-          </ac:spMkLst>
-        </pc:spChg>
-        <pc:spChg chg="del">
-          <ac:chgData name="Jonathan Mah" userId="5261b2f2f3e51194" providerId="LiveId" clId="{DB9BCF8B-E91B-491C-8171-92D39BBC1534}" dt="2026-02-18T16:39:00.462" v="489" actId="478"/>
-          <ac:spMkLst>
-            <pc:docMk/>
-            <pc:sldMk cId="2539197924" sldId="519"/>
-            <ac:spMk id="555" creationId="{B9667C96-4B2B-F0E8-C50B-4F1881BD5E66}"/>
-          </ac:spMkLst>
-        </pc:spChg>
-        <pc:spChg chg="add del">
-          <ac:chgData name="Jonathan Mah" userId="5261b2f2f3e51194" providerId="LiveId" clId="{DB9BCF8B-E91B-491C-8171-92D39BBC1534}" dt="2026-02-18T16:38:58.912" v="488" actId="478"/>
-          <ac:spMkLst>
-            <pc:docMk/>
-            <pc:sldMk cId="2539197924" sldId="519"/>
-            <ac:spMk id="605" creationId="{F6F9EB96-E65A-3C15-BC95-AD528AA7379C}"/>
-          </ac:spMkLst>
-        </pc:spChg>
-        <pc:spChg chg="del">
-          <ac:chgData name="Jonathan Mah" userId="5261b2f2f3e51194" providerId="LiveId" clId="{DB9BCF8B-E91B-491C-8171-92D39BBC1534}" dt="2026-02-18T16:39:00.462" v="489" actId="478"/>
-          <ac:spMkLst>
-            <pc:docMk/>
-            <pc:sldMk cId="2539197924" sldId="519"/>
-            <ac:spMk id="606" creationId="{2A2A183B-5579-A06A-3633-3E9F05914AC3}"/>
-          </ac:spMkLst>
-        </pc:spChg>
-        <pc:spChg chg="add del">
-          <ac:chgData name="Jonathan Mah" userId="5261b2f2f3e51194" providerId="LiveId" clId="{DB9BCF8B-E91B-491C-8171-92D39BBC1534}" dt="2026-02-18T16:38:58.912" v="488" actId="478"/>
-          <ac:spMkLst>
-            <pc:docMk/>
-            <pc:sldMk cId="2539197924" sldId="519"/>
-            <ac:spMk id="607" creationId="{B6C39D13-D5A9-4F53-A98F-05FCDC963931}"/>
-          </ac:spMkLst>
-        </pc:spChg>
-        <pc:spChg chg="add del mod">
-          <ac:chgData name="Jonathan Mah" userId="5261b2f2f3e51194" providerId="LiveId" clId="{DB9BCF8B-E91B-491C-8171-92D39BBC1534}" dt="2026-02-18T16:38:58.912" v="488" actId="478"/>
-          <ac:spMkLst>
-            <pc:docMk/>
-            <pc:sldMk cId="2539197924" sldId="519"/>
-            <ac:spMk id="608" creationId="{79617ED7-EDAC-463C-E612-EDC6465516C8}"/>
-          </ac:spMkLst>
-        </pc:spChg>
-        <pc:spChg chg="del">
-          <ac:chgData name="Jonathan Mah" userId="5261b2f2f3e51194" providerId="LiveId" clId="{DB9BCF8B-E91B-491C-8171-92D39BBC1534}" dt="2026-02-18T16:39:00.462" v="489" actId="478"/>
-          <ac:spMkLst>
-            <pc:docMk/>
-            <pc:sldMk cId="2539197924" sldId="519"/>
-            <ac:spMk id="609" creationId="{B8A6A69C-5CB4-E5CF-0C09-B6C110722695}"/>
-          </ac:spMkLst>
-        </pc:spChg>
-        <pc:spChg chg="del mod">
-          <ac:chgData name="Jonathan Mah" userId="5261b2f2f3e51194" providerId="LiveId" clId="{DB9BCF8B-E91B-491C-8171-92D39BBC1534}" dt="2026-02-18T16:39:00.462" v="489" actId="478"/>
-          <ac:spMkLst>
-            <pc:docMk/>
-            <pc:sldMk cId="2539197924" sldId="519"/>
-            <ac:spMk id="610" creationId="{BCC50CD1-E4C6-4CDC-55EC-950310A7B660}"/>
-          </ac:spMkLst>
-        </pc:spChg>
-        <pc:picChg chg="add mod">
-          <ac:chgData name="Jonathan Mah" userId="5261b2f2f3e51194" providerId="LiveId" clId="{DB9BCF8B-E91B-491C-8171-92D39BBC1534}" dt="2026-02-18T16:35:26.335" v="469" actId="14100"/>
-          <ac:picMkLst>
-            <pc:docMk/>
-            <pc:sldMk cId="2539197924" sldId="519"/>
-            <ac:picMk id="3" creationId="{636A7897-4008-FE76-76DA-C1ED7A064B78}"/>
-          </ac:picMkLst>
-        </pc:picChg>
-        <pc:picChg chg="add del mod">
-          <ac:chgData name="Jonathan Mah" userId="5261b2f2f3e51194" providerId="LiveId" clId="{DB9BCF8B-E91B-491C-8171-92D39BBC1534}" dt="2026-02-18T16:39:02.270" v="490" actId="478"/>
-          <ac:picMkLst>
-            <pc:docMk/>
-            <pc:sldMk cId="2539197924" sldId="519"/>
-            <ac:picMk id="7" creationId="{35276003-EB69-D491-53AD-3AFCBB0F953B}"/>
-          </ac:picMkLst>
-        </pc:picChg>
-        <pc:picChg chg="add del mod">
-          <ac:chgData name="Jonathan Mah" userId="5261b2f2f3e51194" providerId="LiveId" clId="{DB9BCF8B-E91B-491C-8171-92D39BBC1534}" dt="2026-02-18T16:55:28.492" v="989" actId="478"/>
-          <ac:picMkLst>
-            <pc:docMk/>
-            <pc:sldMk cId="2539197924" sldId="519"/>
-            <ac:picMk id="14" creationId="{816A8C99-0D48-4FFC-A763-1452B98A66F8}"/>
-          </ac:picMkLst>
-        </pc:picChg>
-        <pc:picChg chg="add del mod">
-          <ac:chgData name="Jonathan Mah" userId="5261b2f2f3e51194" providerId="LiveId" clId="{DB9BCF8B-E91B-491C-8171-92D39BBC1534}" dt="2026-02-18T16:55:28.051" v="988" actId="478"/>
-          <ac:picMkLst>
-            <pc:docMk/>
-            <pc:sldMk cId="2539197924" sldId="519"/>
-            <ac:picMk id="41" creationId="{B8183B00-1CA7-EDD7-FCAF-8919ECBF7BE2}"/>
-          </ac:picMkLst>
-        </pc:picChg>
         <pc:picChg chg="add mod">
           <ac:chgData name="Jonathan Mah" userId="5261b2f2f3e51194" providerId="LiveId" clId="{DB9BCF8B-E91B-491C-8171-92D39BBC1534}" dt="2026-02-18T16:56:43.533" v="995" actId="14100"/>
           <ac:picMkLst>
@@ -1411,166 +975,6 @@
             <ac:picMk id="76" creationId="{5C29D671-5071-657F-992E-138B9DD1869D}"/>
           </ac:picMkLst>
         </pc:picChg>
-        <pc:cxnChg chg="del">
-          <ac:chgData name="Jonathan Mah" userId="5261b2f2f3e51194" providerId="LiveId" clId="{DB9BCF8B-E91B-491C-8171-92D39BBC1534}" dt="2026-02-18T16:34:52.192" v="465" actId="478"/>
-          <ac:cxnSpMkLst>
-            <pc:docMk/>
-            <pc:sldMk cId="2539197924" sldId="519"/>
-            <ac:cxnSpMk id="17" creationId="{4B4EB99E-65A9-F798-5831-119C93D9B928}"/>
-          </ac:cxnSpMkLst>
-        </pc:cxnChg>
-        <pc:cxnChg chg="del">
-          <ac:chgData name="Jonathan Mah" userId="5261b2f2f3e51194" providerId="LiveId" clId="{DB9BCF8B-E91B-491C-8171-92D39BBC1534}" dt="2026-02-18T16:34:52.192" v="465" actId="478"/>
-          <ac:cxnSpMkLst>
-            <pc:docMk/>
-            <pc:sldMk cId="2539197924" sldId="519"/>
-            <ac:cxnSpMk id="18" creationId="{02137858-4CC5-932A-CEA1-0E1DC99FD944}"/>
-          </ac:cxnSpMkLst>
-        </pc:cxnChg>
-        <pc:cxnChg chg="del">
-          <ac:chgData name="Jonathan Mah" userId="5261b2f2f3e51194" providerId="LiveId" clId="{DB9BCF8B-E91B-491C-8171-92D39BBC1534}" dt="2026-02-18T16:34:52.192" v="465" actId="478"/>
-          <ac:cxnSpMkLst>
-            <pc:docMk/>
-            <pc:sldMk cId="2539197924" sldId="519"/>
-            <ac:cxnSpMk id="21" creationId="{BBAE8B24-1ACE-A200-1098-5BDC2ED2EA66}"/>
-          </ac:cxnSpMkLst>
-        </pc:cxnChg>
-        <pc:cxnChg chg="del">
-          <ac:chgData name="Jonathan Mah" userId="5261b2f2f3e51194" providerId="LiveId" clId="{DB9BCF8B-E91B-491C-8171-92D39BBC1534}" dt="2026-02-18T16:34:52.192" v="465" actId="478"/>
-          <ac:cxnSpMkLst>
-            <pc:docMk/>
-            <pc:sldMk cId="2539197924" sldId="519"/>
-            <ac:cxnSpMk id="22" creationId="{C547E402-3D13-D679-5AFA-45D1BBFD42F9}"/>
-          </ac:cxnSpMkLst>
-        </pc:cxnChg>
-        <pc:cxnChg chg="del">
-          <ac:chgData name="Jonathan Mah" userId="5261b2f2f3e51194" providerId="LiveId" clId="{DB9BCF8B-E91B-491C-8171-92D39BBC1534}" dt="2026-02-18T16:34:52.192" v="465" actId="478"/>
-          <ac:cxnSpMkLst>
-            <pc:docMk/>
-            <pc:sldMk cId="2539197924" sldId="519"/>
-            <ac:cxnSpMk id="48" creationId="{7E05FCDB-E30F-ADA8-EF61-F05F91E8253B}"/>
-          </ac:cxnSpMkLst>
-        </pc:cxnChg>
-        <pc:cxnChg chg="del">
-          <ac:chgData name="Jonathan Mah" userId="5261b2f2f3e51194" providerId="LiveId" clId="{DB9BCF8B-E91B-491C-8171-92D39BBC1534}" dt="2026-02-18T16:34:52.192" v="465" actId="478"/>
-          <ac:cxnSpMkLst>
-            <pc:docMk/>
-            <pc:sldMk cId="2539197924" sldId="519"/>
-            <ac:cxnSpMk id="54" creationId="{F1906E9E-309B-4EDC-F885-BD46DE6D6E7A}"/>
-          </ac:cxnSpMkLst>
-        </pc:cxnChg>
-        <pc:cxnChg chg="del">
-          <ac:chgData name="Jonathan Mah" userId="5261b2f2f3e51194" providerId="LiveId" clId="{DB9BCF8B-E91B-491C-8171-92D39BBC1534}" dt="2026-02-18T16:34:52.192" v="465" actId="478"/>
-          <ac:cxnSpMkLst>
-            <pc:docMk/>
-            <pc:sldMk cId="2539197924" sldId="519"/>
-            <ac:cxnSpMk id="72" creationId="{9BEB3BB2-8607-6F40-DE36-024E33EE9A8E}"/>
-          </ac:cxnSpMkLst>
-        </pc:cxnChg>
-        <pc:cxnChg chg="del">
-          <ac:chgData name="Jonathan Mah" userId="5261b2f2f3e51194" providerId="LiveId" clId="{DB9BCF8B-E91B-491C-8171-92D39BBC1534}" dt="2026-02-18T16:34:52.192" v="465" actId="478"/>
-          <ac:cxnSpMkLst>
-            <pc:docMk/>
-            <pc:sldMk cId="2539197924" sldId="519"/>
-            <ac:cxnSpMk id="563" creationId="{A4D82A3A-63E2-70A7-99DC-25D4EAAA361D}"/>
-          </ac:cxnSpMkLst>
-        </pc:cxnChg>
-        <pc:cxnChg chg="del">
-          <ac:chgData name="Jonathan Mah" userId="5261b2f2f3e51194" providerId="LiveId" clId="{DB9BCF8B-E91B-491C-8171-92D39BBC1534}" dt="2026-02-18T16:34:52.192" v="465" actId="478"/>
-          <ac:cxnSpMkLst>
-            <pc:docMk/>
-            <pc:sldMk cId="2539197924" sldId="519"/>
-            <ac:cxnSpMk id="564" creationId="{92AB7E51-6B73-31D9-1E2B-9AA51A738A86}"/>
-          </ac:cxnSpMkLst>
-        </pc:cxnChg>
-        <pc:cxnChg chg="del">
-          <ac:chgData name="Jonathan Mah" userId="5261b2f2f3e51194" providerId="LiveId" clId="{DB9BCF8B-E91B-491C-8171-92D39BBC1534}" dt="2026-02-18T16:34:52.192" v="465" actId="478"/>
-          <ac:cxnSpMkLst>
-            <pc:docMk/>
-            <pc:sldMk cId="2539197924" sldId="519"/>
-            <ac:cxnSpMk id="565" creationId="{60DF7A18-5931-15B4-8B33-C19A2F8E2D88}"/>
-          </ac:cxnSpMkLst>
-        </pc:cxnChg>
-        <pc:cxnChg chg="del">
-          <ac:chgData name="Jonathan Mah" userId="5261b2f2f3e51194" providerId="LiveId" clId="{DB9BCF8B-E91B-491C-8171-92D39BBC1534}" dt="2026-02-18T16:34:49.459" v="464" actId="478"/>
-          <ac:cxnSpMkLst>
-            <pc:docMk/>
-            <pc:sldMk cId="2539197924" sldId="519"/>
-            <ac:cxnSpMk id="569" creationId="{30095496-4744-3706-EFDA-6D289305A80A}"/>
-          </ac:cxnSpMkLst>
-        </pc:cxnChg>
-        <pc:cxnChg chg="del">
-          <ac:chgData name="Jonathan Mah" userId="5261b2f2f3e51194" providerId="LiveId" clId="{DB9BCF8B-E91B-491C-8171-92D39BBC1534}" dt="2026-02-18T16:34:49.459" v="464" actId="478"/>
-          <ac:cxnSpMkLst>
-            <pc:docMk/>
-            <pc:sldMk cId="2539197924" sldId="519"/>
-            <ac:cxnSpMk id="575" creationId="{8953C9AF-5B6E-AD64-7D9E-D1CBEAB133DC}"/>
-          </ac:cxnSpMkLst>
-        </pc:cxnChg>
-        <pc:cxnChg chg="del">
-          <ac:chgData name="Jonathan Mah" userId="5261b2f2f3e51194" providerId="LiveId" clId="{DB9BCF8B-E91B-491C-8171-92D39BBC1534}" dt="2026-02-18T16:34:49.459" v="464" actId="478"/>
-          <ac:cxnSpMkLst>
-            <pc:docMk/>
-            <pc:sldMk cId="2539197924" sldId="519"/>
-            <ac:cxnSpMk id="577" creationId="{ACB59257-2B9D-0219-8E78-ECC5EFA55F7B}"/>
-          </ac:cxnSpMkLst>
-        </pc:cxnChg>
-        <pc:cxnChg chg="del">
-          <ac:chgData name="Jonathan Mah" userId="5261b2f2f3e51194" providerId="LiveId" clId="{DB9BCF8B-E91B-491C-8171-92D39BBC1534}" dt="2026-02-18T16:34:49.459" v="464" actId="478"/>
-          <ac:cxnSpMkLst>
-            <pc:docMk/>
-            <pc:sldMk cId="2539197924" sldId="519"/>
-            <ac:cxnSpMk id="578" creationId="{A039F1EE-DF4E-6056-E796-4D643256C21C}"/>
-          </ac:cxnSpMkLst>
-        </pc:cxnChg>
-        <pc:cxnChg chg="del">
-          <ac:chgData name="Jonathan Mah" userId="5261b2f2f3e51194" providerId="LiveId" clId="{DB9BCF8B-E91B-491C-8171-92D39BBC1534}" dt="2026-02-18T16:34:49.459" v="464" actId="478"/>
-          <ac:cxnSpMkLst>
-            <pc:docMk/>
-            <pc:sldMk cId="2539197924" sldId="519"/>
-            <ac:cxnSpMk id="581" creationId="{01431DA3-28E0-4B20-92E4-CCB4FBB8EFA5}"/>
-          </ac:cxnSpMkLst>
-        </pc:cxnChg>
-        <pc:cxnChg chg="del">
-          <ac:chgData name="Jonathan Mah" userId="5261b2f2f3e51194" providerId="LiveId" clId="{DB9BCF8B-E91B-491C-8171-92D39BBC1534}" dt="2026-02-18T16:34:49.459" v="464" actId="478"/>
-          <ac:cxnSpMkLst>
-            <pc:docMk/>
-            <pc:sldMk cId="2539197924" sldId="519"/>
-            <ac:cxnSpMk id="589" creationId="{FE259602-D0E7-2CEF-B60E-B6173AD53427}"/>
-          </ac:cxnSpMkLst>
-        </pc:cxnChg>
-        <pc:cxnChg chg="del">
-          <ac:chgData name="Jonathan Mah" userId="5261b2f2f3e51194" providerId="LiveId" clId="{DB9BCF8B-E91B-491C-8171-92D39BBC1534}" dt="2026-02-18T16:34:49.459" v="464" actId="478"/>
-          <ac:cxnSpMkLst>
-            <pc:docMk/>
-            <pc:sldMk cId="2539197924" sldId="519"/>
-            <ac:cxnSpMk id="591" creationId="{09DA6544-1E7A-ACC1-227D-10D8EEE4E3D0}"/>
-          </ac:cxnSpMkLst>
-        </pc:cxnChg>
-        <pc:cxnChg chg="del">
-          <ac:chgData name="Jonathan Mah" userId="5261b2f2f3e51194" providerId="LiveId" clId="{DB9BCF8B-E91B-491C-8171-92D39BBC1534}" dt="2026-02-18T16:34:49.459" v="464" actId="478"/>
-          <ac:cxnSpMkLst>
-            <pc:docMk/>
-            <pc:sldMk cId="2539197924" sldId="519"/>
-            <ac:cxnSpMk id="592" creationId="{C33638A5-83E3-C38D-7FA5-A29EC873D6EB}"/>
-          </ac:cxnSpMkLst>
-        </pc:cxnChg>
-        <pc:cxnChg chg="del">
-          <ac:chgData name="Jonathan Mah" userId="5261b2f2f3e51194" providerId="LiveId" clId="{DB9BCF8B-E91B-491C-8171-92D39BBC1534}" dt="2026-02-18T16:34:49.459" v="464" actId="478"/>
-          <ac:cxnSpMkLst>
-            <pc:docMk/>
-            <pc:sldMk cId="2539197924" sldId="519"/>
-            <ac:cxnSpMk id="598" creationId="{F9CF0472-0A7D-E7F2-022A-31C6594F694B}"/>
-          </ac:cxnSpMkLst>
-        </pc:cxnChg>
-        <pc:cxnChg chg="del">
-          <ac:chgData name="Jonathan Mah" userId="5261b2f2f3e51194" providerId="LiveId" clId="{DB9BCF8B-E91B-491C-8171-92D39BBC1534}" dt="2026-02-18T16:34:49.459" v="464" actId="478"/>
-          <ac:cxnSpMkLst>
-            <pc:docMk/>
-            <pc:sldMk cId="2539197924" sldId="519"/>
-            <ac:cxnSpMk id="604" creationId="{1F937A88-0507-4641-7DA3-E4E1973FD02C}"/>
-          </ac:cxnSpMkLst>
-        </pc:cxnChg>
       </pc:sldChg>
       <pc:sldChg chg="delSp modSp add mod">
         <pc:chgData name="Jonathan Mah" userId="5261b2f2f3e51194" providerId="LiveId" clId="{DB9BCF8B-E91B-491C-8171-92D39BBC1534}" dt="2026-02-18T16:43:54.101" v="724" actId="1035"/>
@@ -1602,14 +1006,6 @@
             <ac:spMk id="540" creationId="{8F7549B5-C855-375E-5695-875B8385BDAD}"/>
           </ac:spMkLst>
         </pc:spChg>
-        <pc:spChg chg="del">
-          <ac:chgData name="Jonathan Mah" userId="5261b2f2f3e51194" providerId="LiveId" clId="{DB9BCF8B-E91B-491C-8171-92D39BBC1534}" dt="2026-02-18T16:42:15.232" v="632" actId="478"/>
-          <ac:spMkLst>
-            <pc:docMk/>
-            <pc:sldMk cId="1175831132" sldId="520"/>
-            <ac:spMk id="541" creationId="{C354F10F-6EA2-53FE-F903-741739E9BFA2}"/>
-          </ac:spMkLst>
-        </pc:spChg>
         <pc:cxnChg chg="mod">
           <ac:chgData name="Jonathan Mah" userId="5261b2f2f3e51194" providerId="LiveId" clId="{DB9BCF8B-E91B-491C-8171-92D39BBC1534}" dt="2026-02-18T16:42:38.704" v="690" actId="14100"/>
           <ac:cxnSpMkLst>
@@ -1626,44 +1022,12 @@
             <ac:cxnSpMk id="43" creationId="{7EF41AAB-D23D-D8ED-5FD8-B6E89769AF22}"/>
           </ac:cxnSpMkLst>
         </pc:cxnChg>
-        <pc:cxnChg chg="del">
-          <ac:chgData name="Jonathan Mah" userId="5261b2f2f3e51194" providerId="LiveId" clId="{DB9BCF8B-E91B-491C-8171-92D39BBC1534}" dt="2026-02-18T16:42:17.285" v="633" actId="478"/>
-          <ac:cxnSpMkLst>
-            <pc:docMk/>
-            <pc:sldMk cId="1175831132" sldId="520"/>
-            <ac:cxnSpMk id="44" creationId="{E6DAD652-6849-7E5D-F538-FDBA0A926C83}"/>
-          </ac:cxnSpMkLst>
-        </pc:cxnChg>
         <pc:cxnChg chg="mod">
           <ac:chgData name="Jonathan Mah" userId="5261b2f2f3e51194" providerId="LiveId" clId="{DB9BCF8B-E91B-491C-8171-92D39BBC1534}" dt="2026-02-18T16:42:44.407" v="694" actId="14100"/>
           <ac:cxnSpMkLst>
             <pc:docMk/>
             <pc:sldMk cId="1175831132" sldId="520"/>
             <ac:cxnSpMk id="54" creationId="{6662EE24-0966-4A15-9ABA-76F9F32A6687}"/>
-          </ac:cxnSpMkLst>
-        </pc:cxnChg>
-        <pc:cxnChg chg="del">
-          <ac:chgData name="Jonathan Mah" userId="5261b2f2f3e51194" providerId="LiveId" clId="{DB9BCF8B-E91B-491C-8171-92D39BBC1534}" dt="2026-02-18T16:42:41.407" v="692" actId="478"/>
-          <ac:cxnSpMkLst>
-            <pc:docMk/>
-            <pc:sldMk cId="1175831132" sldId="520"/>
-            <ac:cxnSpMk id="559" creationId="{A355DD90-4748-9B7A-635E-8FC8503E3709}"/>
-          </ac:cxnSpMkLst>
-        </pc:cxnChg>
-        <pc:cxnChg chg="del">
-          <ac:chgData name="Jonathan Mah" userId="5261b2f2f3e51194" providerId="LiveId" clId="{DB9BCF8B-E91B-491C-8171-92D39BBC1534}" dt="2026-02-18T16:42:40.543" v="691" actId="478"/>
-          <ac:cxnSpMkLst>
-            <pc:docMk/>
-            <pc:sldMk cId="1175831132" sldId="520"/>
-            <ac:cxnSpMk id="560" creationId="{99F3A277-4648-34A3-558B-A4FA7B12C24E}"/>
-          </ac:cxnSpMkLst>
-        </pc:cxnChg>
-        <pc:cxnChg chg="del">
-          <ac:chgData name="Jonathan Mah" userId="5261b2f2f3e51194" providerId="LiveId" clId="{DB9BCF8B-E91B-491C-8171-92D39BBC1534}" dt="2026-02-18T16:42:41.759" v="693" actId="478"/>
-          <ac:cxnSpMkLst>
-            <pc:docMk/>
-            <pc:sldMk cId="1175831132" sldId="520"/>
-            <ac:cxnSpMk id="562" creationId="{3CA975A0-456C-CE5B-275C-A96FB8226406}"/>
           </ac:cxnSpMkLst>
         </pc:cxnChg>
         <pc:cxnChg chg="mod">
@@ -1697,22 +1061,6 @@
           <pc:docMk/>
           <pc:sldMk cId="2504765150" sldId="521"/>
         </pc:sldMkLst>
-        <pc:spChg chg="del">
-          <ac:chgData name="Jonathan Mah" userId="5261b2f2f3e51194" providerId="LiveId" clId="{DB9BCF8B-E91B-491C-8171-92D39BBC1534}" dt="2026-02-18T20:30:48.263" v="1031" actId="478"/>
-          <ac:spMkLst>
-            <pc:docMk/>
-            <pc:sldMk cId="2504765150" sldId="521"/>
-            <ac:spMk id="2" creationId="{FE740FEC-8171-B794-97E4-E85B58A7F458}"/>
-          </ac:spMkLst>
-        </pc:spChg>
-        <pc:spChg chg="del">
-          <ac:chgData name="Jonathan Mah" userId="5261b2f2f3e51194" providerId="LiveId" clId="{DB9BCF8B-E91B-491C-8171-92D39BBC1534}" dt="2026-02-18T20:30:48.263" v="1031" actId="478"/>
-          <ac:spMkLst>
-            <pc:docMk/>
-            <pc:sldMk cId="2504765150" sldId="521"/>
-            <ac:spMk id="3" creationId="{0F4725B9-1C9D-404B-6F34-D856E1F1FE18}"/>
-          </ac:spMkLst>
-        </pc:spChg>
         <pc:spChg chg="add mod">
           <ac:chgData name="Jonathan Mah" userId="5261b2f2f3e51194" providerId="LiveId" clId="{DB9BCF8B-E91B-491C-8171-92D39BBC1534}" dt="2026-02-18T20:30:54.951" v="1034"/>
           <ac:spMkLst>
@@ -1763,29 +1111,13 @@
         </pc:picChg>
       </pc:sldChg>
       <pc:sldChg chg="addSp delSp modSp new mod">
-        <pc:chgData name="Jonathan Mah" userId="5261b2f2f3e51194" providerId="LiveId" clId="{DB9BCF8B-E91B-491C-8171-92D39BBC1534}" dt="2026-02-18T20:33:11.663" v="1105" actId="1036"/>
+        <pc:chgData name="Jonathan Mah" userId="5261b2f2f3e51194" providerId="LiveId" clId="{DB9BCF8B-E91B-491C-8171-92D39BBC1534}" dt="2026-03-06T15:36:09.862" v="1228" actId="1038"/>
         <pc:sldMkLst>
           <pc:docMk/>
           <pc:sldMk cId="2894852093" sldId="522"/>
         </pc:sldMkLst>
-        <pc:spChg chg="del">
-          <ac:chgData name="Jonathan Mah" userId="5261b2f2f3e51194" providerId="LiveId" clId="{DB9BCF8B-E91B-491C-8171-92D39BBC1534}" dt="2026-02-18T20:30:51.155" v="1032" actId="478"/>
-          <ac:spMkLst>
-            <pc:docMk/>
-            <pc:sldMk cId="2894852093" sldId="522"/>
-            <ac:spMk id="2" creationId="{CA230864-D7EF-047C-636E-E1CC06C3A79D}"/>
-          </ac:spMkLst>
-        </pc:spChg>
-        <pc:spChg chg="del">
-          <ac:chgData name="Jonathan Mah" userId="5261b2f2f3e51194" providerId="LiveId" clId="{DB9BCF8B-E91B-491C-8171-92D39BBC1534}" dt="2026-02-18T20:30:51.155" v="1032" actId="478"/>
-          <ac:spMkLst>
-            <pc:docMk/>
-            <pc:sldMk cId="2894852093" sldId="522"/>
-            <ac:spMk id="3" creationId="{3B14D8B4-0312-09FF-1C0B-15DC6F339BE3}"/>
-          </ac:spMkLst>
-        </pc:spChg>
         <pc:spChg chg="add mod">
-          <ac:chgData name="Jonathan Mah" userId="5261b2f2f3e51194" providerId="LiveId" clId="{DB9BCF8B-E91B-491C-8171-92D39BBC1534}" dt="2026-02-18T20:31:57.003" v="1067" actId="1076"/>
+          <ac:chgData name="Jonathan Mah" userId="5261b2f2f3e51194" providerId="LiveId" clId="{DB9BCF8B-E91B-491C-8171-92D39BBC1534}" dt="2026-02-25T00:32:24.136" v="1205" actId="1076"/>
           <ac:spMkLst>
             <pc:docMk/>
             <pc:sldMk cId="2894852093" sldId="522"/>
@@ -1793,7 +1125,7 @@
           </ac:spMkLst>
         </pc:spChg>
         <pc:spChg chg="add mod">
-          <ac:chgData name="Jonathan Mah" userId="5261b2f2f3e51194" providerId="LiveId" clId="{DB9BCF8B-E91B-491C-8171-92D39BBC1534}" dt="2026-02-18T20:32:50.117" v="1087" actId="20577"/>
+          <ac:chgData name="Jonathan Mah" userId="5261b2f2f3e51194" providerId="LiveId" clId="{DB9BCF8B-E91B-491C-8171-92D39BBC1534}" dt="2026-03-06T15:36:09.862" v="1228" actId="1038"/>
           <ac:spMkLst>
             <pc:docMk/>
             <pc:sldMk cId="2894852093" sldId="522"/>
@@ -1801,7 +1133,7 @@
           </ac:spMkLst>
         </pc:spChg>
         <pc:spChg chg="add mod">
-          <ac:chgData name="Jonathan Mah" userId="5261b2f2f3e51194" providerId="LiveId" clId="{DB9BCF8B-E91B-491C-8171-92D39BBC1534}" dt="2026-02-18T20:32:33.951" v="1081" actId="20577"/>
+          <ac:chgData name="Jonathan Mah" userId="5261b2f2f3e51194" providerId="LiveId" clId="{DB9BCF8B-E91B-491C-8171-92D39BBC1534}" dt="2026-02-25T00:32:24.136" v="1205" actId="1076"/>
           <ac:spMkLst>
             <pc:docMk/>
             <pc:sldMk cId="2894852093" sldId="522"/>
@@ -1809,7 +1141,7 @@
           </ac:spMkLst>
         </pc:spChg>
         <pc:spChg chg="add mod">
-          <ac:chgData name="Jonathan Mah" userId="5261b2f2f3e51194" providerId="LiveId" clId="{DB9BCF8B-E91B-491C-8171-92D39BBC1534}" dt="2026-02-18T20:32:52.089" v="1089" actId="20577"/>
+          <ac:chgData name="Jonathan Mah" userId="5261b2f2f3e51194" providerId="LiveId" clId="{DB9BCF8B-E91B-491C-8171-92D39BBC1534}" dt="2026-03-06T15:36:09.862" v="1228" actId="1038"/>
           <ac:spMkLst>
             <pc:docMk/>
             <pc:sldMk cId="2894852093" sldId="522"/>
@@ -1817,7 +1149,7 @@
           </ac:spMkLst>
         </pc:spChg>
         <pc:spChg chg="add mod">
-          <ac:chgData name="Jonathan Mah" userId="5261b2f2f3e51194" providerId="LiveId" clId="{DB9BCF8B-E91B-491C-8171-92D39BBC1534}" dt="2026-02-18T20:32:43.347" v="1083" actId="20577"/>
+          <ac:chgData name="Jonathan Mah" userId="5261b2f2f3e51194" providerId="LiveId" clId="{DB9BCF8B-E91B-491C-8171-92D39BBC1534}" dt="2026-02-25T00:32:24.136" v="1205" actId="1076"/>
           <ac:spMkLst>
             <pc:docMk/>
             <pc:sldMk cId="2894852093" sldId="522"/>
@@ -1825,7 +1157,7 @@
           </ac:spMkLst>
         </pc:spChg>
         <pc:spChg chg="add mod">
-          <ac:chgData name="Jonathan Mah" userId="5261b2f2f3e51194" providerId="LiveId" clId="{DB9BCF8B-E91B-491C-8171-92D39BBC1534}" dt="2026-02-18T20:32:54.756" v="1091" actId="20577"/>
+          <ac:chgData name="Jonathan Mah" userId="5261b2f2f3e51194" providerId="LiveId" clId="{DB9BCF8B-E91B-491C-8171-92D39BBC1534}" dt="2026-03-06T15:36:09.862" v="1228" actId="1038"/>
           <ac:spMkLst>
             <pc:docMk/>
             <pc:sldMk cId="2894852093" sldId="522"/>
@@ -1833,7 +1165,7 @@
           </ac:spMkLst>
         </pc:spChg>
         <pc:spChg chg="add mod">
-          <ac:chgData name="Jonathan Mah" userId="5261b2f2f3e51194" providerId="LiveId" clId="{DB9BCF8B-E91B-491C-8171-92D39BBC1534}" dt="2026-02-18T20:33:11.663" v="1105" actId="1036"/>
+          <ac:chgData name="Jonathan Mah" userId="5261b2f2f3e51194" providerId="LiveId" clId="{DB9BCF8B-E91B-491C-8171-92D39BBC1534}" dt="2026-02-25T00:32:24.136" v="1205" actId="1076"/>
           <ac:spMkLst>
             <pc:docMk/>
             <pc:sldMk cId="2894852093" sldId="522"/>
@@ -1841,19 +1173,35 @@
           </ac:spMkLst>
         </pc:spChg>
         <pc:spChg chg="add mod">
-          <ac:chgData name="Jonathan Mah" userId="5261b2f2f3e51194" providerId="LiveId" clId="{DB9BCF8B-E91B-491C-8171-92D39BBC1534}" dt="2026-02-18T20:33:11.663" v="1105" actId="1036"/>
+          <ac:chgData name="Jonathan Mah" userId="5261b2f2f3e51194" providerId="LiveId" clId="{DB9BCF8B-E91B-491C-8171-92D39BBC1534}" dt="2026-03-06T15:36:09.862" v="1228" actId="1038"/>
           <ac:spMkLst>
             <pc:docMk/>
             <pc:sldMk cId="2894852093" sldId="522"/>
             <ac:spMk id="13" creationId="{AF476960-00D8-93A1-C8B3-0CD3383A89BA}"/>
           </ac:spMkLst>
         </pc:spChg>
-        <pc:picChg chg="add mod">
-          <ac:chgData name="Jonathan Mah" userId="5261b2f2f3e51194" providerId="LiveId" clId="{DB9BCF8B-E91B-491C-8171-92D39BBC1534}" dt="2026-02-18T20:32:05.648" v="1072" actId="1076"/>
+        <pc:picChg chg="add del mod">
+          <ac:chgData name="Jonathan Mah" userId="5261b2f2f3e51194" providerId="LiveId" clId="{DB9BCF8B-E91B-491C-8171-92D39BBC1534}" dt="2026-03-06T15:35:39.055" v="1208" actId="478"/>
           <ac:picMkLst>
             <pc:docMk/>
             <pc:sldMk cId="2894852093" sldId="522"/>
-            <ac:picMk id="5" creationId="{E3B42699-5452-3B8E-2E31-DE2F809ED7CC}"/>
+            <ac:picMk id="3" creationId="{4C56842A-5FE0-33A3-C121-6A10B41C1824}"/>
+          </ac:picMkLst>
+        </pc:picChg>
+        <pc:picChg chg="add mod ord">
+          <ac:chgData name="Jonathan Mah" userId="5261b2f2f3e51194" providerId="LiveId" clId="{DB9BCF8B-E91B-491C-8171-92D39BBC1534}" dt="2026-03-06T15:36:01.479" v="1217" actId="1038"/>
+          <ac:picMkLst>
+            <pc:docMk/>
+            <pc:sldMk cId="2894852093" sldId="522"/>
+            <ac:picMk id="5" creationId="{B020E19B-B2ED-0C45-6282-30F29B0603EA}"/>
+          </ac:picMkLst>
+        </pc:picChg>
+        <pc:picChg chg="add del mod ord">
+          <ac:chgData name="Jonathan Mah" userId="5261b2f2f3e51194" providerId="LiveId" clId="{DB9BCF8B-E91B-491C-8171-92D39BBC1534}" dt="2026-03-06T15:34:51.558" v="1206" actId="478"/>
+          <ac:picMkLst>
+            <pc:docMk/>
+            <pc:sldMk cId="2894852093" sldId="522"/>
+            <ac:picMk id="14" creationId="{3E927412-E770-CD52-33DD-79D70D303334}"/>
           </ac:picMkLst>
         </pc:picChg>
       </pc:sldChg>
@@ -1863,22 +1211,6 @@
           <pc:docMk/>
           <pc:sldMk cId="3642263179" sldId="523"/>
         </pc:sldMkLst>
-        <pc:spChg chg="del">
-          <ac:chgData name="Jonathan Mah" userId="5261b2f2f3e51194" providerId="LiveId" clId="{DB9BCF8B-E91B-491C-8171-92D39BBC1534}" dt="2026-02-18T20:30:53.139" v="1033" actId="478"/>
-          <ac:spMkLst>
-            <pc:docMk/>
-            <pc:sldMk cId="3642263179" sldId="523"/>
-            <ac:spMk id="2" creationId="{C14690CD-3ADC-BFF1-BC02-56BC918A40F2}"/>
-          </ac:spMkLst>
-        </pc:spChg>
-        <pc:spChg chg="del">
-          <ac:chgData name="Jonathan Mah" userId="5261b2f2f3e51194" providerId="LiveId" clId="{DB9BCF8B-E91B-491C-8171-92D39BBC1534}" dt="2026-02-18T20:30:53.139" v="1033" actId="478"/>
-          <ac:spMkLst>
-            <pc:docMk/>
-            <pc:sldMk cId="3642263179" sldId="523"/>
-            <ac:spMk id="3" creationId="{583F66E2-C2BF-BAF5-F96F-8547E788C88A}"/>
-          </ac:spMkLst>
-        </pc:spChg>
         <pc:spChg chg="add mod">
           <ac:chgData name="Jonathan Mah" userId="5261b2f2f3e51194" providerId="LiveId" clId="{DB9BCF8B-E91B-491C-8171-92D39BBC1534}" dt="2026-02-18T20:34:11.820" v="1109" actId="1076"/>
           <ac:spMkLst>
@@ -1903,6 +1235,44 @@
             <ac:picMk id="5" creationId="{7D691359-37D7-F22A-13EA-E21EA4B30071}"/>
           </ac:picMkLst>
         </pc:picChg>
+      </pc:sldChg>
+      <pc:sldChg chg="addSp delSp modSp add mod">
+        <pc:chgData name="Jonathan Mah" userId="5261b2f2f3e51194" providerId="LiveId" clId="{DB9BCF8B-E91B-491C-8171-92D39BBC1534}" dt="2026-02-24T22:09:53.425" v="1164" actId="1037"/>
+        <pc:sldMkLst>
+          <pc:docMk/>
+          <pc:sldMk cId="2395142973" sldId="524"/>
+        </pc:sldMkLst>
+        <pc:spChg chg="mod">
+          <ac:chgData name="Jonathan Mah" userId="5261b2f2f3e51194" providerId="LiveId" clId="{DB9BCF8B-E91B-491C-8171-92D39BBC1534}" dt="2026-02-24T22:09:53.425" v="1164" actId="1037"/>
+          <ac:spMkLst>
+            <pc:docMk/>
+            <pc:sldMk cId="2395142973" sldId="524"/>
+            <ac:spMk id="6" creationId="{45E305CE-1B59-24B2-E3D4-B3920E782962}"/>
+          </ac:spMkLst>
+        </pc:spChg>
+        <pc:spChg chg="mod">
+          <ac:chgData name="Jonathan Mah" userId="5261b2f2f3e51194" providerId="LiveId" clId="{DB9BCF8B-E91B-491C-8171-92D39BBC1534}" dt="2026-02-24T22:09:53.425" v="1164" actId="1037"/>
+          <ac:spMkLst>
+            <pc:docMk/>
+            <pc:sldMk cId="2395142973" sldId="524"/>
+            <ac:spMk id="7" creationId="{18C62F0C-13AC-2C9E-036E-A7135C79F6B5}"/>
+          </ac:spMkLst>
+        </pc:spChg>
+        <pc:picChg chg="add mod ord">
+          <ac:chgData name="Jonathan Mah" userId="5261b2f2f3e51194" providerId="LiveId" clId="{DB9BCF8B-E91B-491C-8171-92D39BBC1534}" dt="2026-02-24T22:08:58.709" v="1121" actId="1076"/>
+          <ac:picMkLst>
+            <pc:docMk/>
+            <pc:sldMk cId="2395142973" sldId="524"/>
+            <ac:picMk id="3" creationId="{E86A2C6A-29CE-EF0D-9597-1C489B2903CC}"/>
+          </ac:picMkLst>
+        </pc:picChg>
+      </pc:sldChg>
+      <pc:sldChg chg="add">
+        <pc:chgData name="Jonathan Mah" userId="5261b2f2f3e51194" providerId="LiveId" clId="{DB9BCF8B-E91B-491C-8171-92D39BBC1534}" dt="2026-02-24T22:08:22.064" v="1115"/>
+        <pc:sldMkLst>
+          <pc:docMk/>
+          <pc:sldMk cId="2873991124" sldId="525"/>
+        </pc:sldMkLst>
       </pc:sldChg>
     </pc:docChg>
   </pc:docChgLst>
@@ -1991,7 +1361,7 @@
           <a:p>
             <a:fld id="{224F4B04-6A50-4A51-B675-D86EC6563060}" type="datetimeFigureOut">
               <a:rPr lang="en-US" smtClean="0"/>
-              <a:t>2/18/2026</a:t>
+              <a:t>3/6/2026</a:t>
             </a:fld>
             <a:endParaRPr lang="en-US"/>
           </a:p>
@@ -2501,7 +1871,7 @@
           <a:p>
             <a:fld id="{54E435BD-4569-4C00-96FD-DE6EEAA430DA}" type="datetimeFigureOut">
               <a:rPr lang="en-US" smtClean="0"/>
-              <a:t>2/18/2026</a:t>
+              <a:t>3/6/2026</a:t>
             </a:fld>
             <a:endParaRPr lang="en-US"/>
           </a:p>
@@ -2671,7 +2041,7 @@
           <a:p>
             <a:fld id="{54E435BD-4569-4C00-96FD-DE6EEAA430DA}" type="datetimeFigureOut">
               <a:rPr lang="en-US" smtClean="0"/>
-              <a:t>2/18/2026</a:t>
+              <a:t>3/6/2026</a:t>
             </a:fld>
             <a:endParaRPr lang="en-US"/>
           </a:p>
@@ -2851,7 +2221,7 @@
           <a:p>
             <a:fld id="{54E435BD-4569-4C00-96FD-DE6EEAA430DA}" type="datetimeFigureOut">
               <a:rPr lang="en-US" smtClean="0"/>
-              <a:t>2/18/2026</a:t>
+              <a:t>3/6/2026</a:t>
             </a:fld>
             <a:endParaRPr lang="en-US"/>
           </a:p>
@@ -3021,7 +2391,7 @@
           <a:p>
             <a:fld id="{54E435BD-4569-4C00-96FD-DE6EEAA430DA}" type="datetimeFigureOut">
               <a:rPr lang="en-US" smtClean="0"/>
-              <a:t>2/18/2026</a:t>
+              <a:t>3/6/2026</a:t>
             </a:fld>
             <a:endParaRPr lang="en-US"/>
           </a:p>
@@ -3265,7 +2635,7 @@
           <a:p>
             <a:fld id="{54E435BD-4569-4C00-96FD-DE6EEAA430DA}" type="datetimeFigureOut">
               <a:rPr lang="en-US" smtClean="0"/>
-              <a:t>2/18/2026</a:t>
+              <a:t>3/6/2026</a:t>
             </a:fld>
             <a:endParaRPr lang="en-US"/>
           </a:p>
@@ -3497,7 +2867,7 @@
           <a:p>
             <a:fld id="{54E435BD-4569-4C00-96FD-DE6EEAA430DA}" type="datetimeFigureOut">
               <a:rPr lang="en-US" smtClean="0"/>
-              <a:t>2/18/2026</a:t>
+              <a:t>3/6/2026</a:t>
             </a:fld>
             <a:endParaRPr lang="en-US"/>
           </a:p>
@@ -3864,7 +3234,7 @@
           <a:p>
             <a:fld id="{54E435BD-4569-4C00-96FD-DE6EEAA430DA}" type="datetimeFigureOut">
               <a:rPr lang="en-US" smtClean="0"/>
-              <a:t>2/18/2026</a:t>
+              <a:t>3/6/2026</a:t>
             </a:fld>
             <a:endParaRPr lang="en-US"/>
           </a:p>
@@ -3982,7 +3352,7 @@
           <a:p>
             <a:fld id="{54E435BD-4569-4C00-96FD-DE6EEAA430DA}" type="datetimeFigureOut">
               <a:rPr lang="en-US" smtClean="0"/>
-              <a:t>2/18/2026</a:t>
+              <a:t>3/6/2026</a:t>
             </a:fld>
             <a:endParaRPr lang="en-US"/>
           </a:p>
@@ -4077,7 +3447,7 @@
           <a:p>
             <a:fld id="{54E435BD-4569-4C00-96FD-DE6EEAA430DA}" type="datetimeFigureOut">
               <a:rPr lang="en-US" smtClean="0"/>
-              <a:t>2/18/2026</a:t>
+              <a:t>3/6/2026</a:t>
             </a:fld>
             <a:endParaRPr lang="en-US"/>
           </a:p>
@@ -4354,7 +3724,7 @@
           <a:p>
             <a:fld id="{54E435BD-4569-4C00-96FD-DE6EEAA430DA}" type="datetimeFigureOut">
               <a:rPr lang="en-US" smtClean="0"/>
-              <a:t>2/18/2026</a:t>
+              <a:t>3/6/2026</a:t>
             </a:fld>
             <a:endParaRPr lang="en-US"/>
           </a:p>
@@ -4611,7 +3981,7 @@
           <a:p>
             <a:fld id="{54E435BD-4569-4C00-96FD-DE6EEAA430DA}" type="datetimeFigureOut">
               <a:rPr lang="en-US" smtClean="0"/>
-              <a:t>2/18/2026</a:t>
+              <a:t>3/6/2026</a:t>
             </a:fld>
             <a:endParaRPr lang="en-US"/>
           </a:p>
@@ -4824,7 +4194,7 @@
           <a:p>
             <a:fld id="{54E435BD-4569-4C00-96FD-DE6EEAA430DA}" type="datetimeFigureOut">
               <a:rPr lang="en-US" smtClean="0"/>
-              <a:t>2/18/2026</a:t>
+              <a:t>3/6/2026</a:t>
             </a:fld>
             <a:endParaRPr lang="en-US"/>
           </a:p>
@@ -8187,6 +7557,984 @@
   <p:cSld>
     <p:spTree>
       <p:nvGrpSpPr>
+        <p:cNvPr id="1" name="">
+          <a:extLst>
+            <a:ext uri="{FF2B5EF4-FFF2-40B4-BE49-F238E27FC236}">
+              <a16:creationId xmlns:a16="http://schemas.microsoft.com/office/drawing/2014/main" id="{77027A25-41EF-331A-CB9A-9D186678C647}"/>
+            </a:ext>
+          </a:extLst>
+        </p:cNvPr>
+        <p:cNvGrpSpPr/>
+        <p:nvPr/>
+      </p:nvGrpSpPr>
+      <p:grpSpPr>
+        <a:xfrm>
+          <a:off x="0" y="0"/>
+          <a:ext cx="0" cy="0"/>
+          <a:chOff x="0" y="0"/>
+          <a:chExt cx="0" cy="0"/>
+        </a:xfrm>
+      </p:grpSpPr>
+      <p:pic>
+        <p:nvPicPr>
+          <p:cNvPr id="3" name="Picture 2">
+            <a:extLst>
+              <a:ext uri="{FF2B5EF4-FFF2-40B4-BE49-F238E27FC236}">
+                <a16:creationId xmlns:a16="http://schemas.microsoft.com/office/drawing/2014/main" id="{E86A2C6A-29CE-EF0D-9597-1C489B2903CC}"/>
+              </a:ext>
+            </a:extLst>
+          </p:cNvPr>
+          <p:cNvPicPr>
+            <a:picLocks noChangeAspect="1"/>
+          </p:cNvPicPr>
+          <p:nvPr/>
+        </p:nvPicPr>
+        <p:blipFill>
+          <a:blip r:embed="rId2">
+            <a:extLst>
+              <a:ext uri="{28A0092B-C50C-407E-A947-70E740481C1C}">
+                <a14:useLocalDpi xmlns:a14="http://schemas.microsoft.com/office/drawing/2010/main" val="0"/>
+              </a:ext>
+            </a:extLst>
+          </a:blip>
+          <a:stretch>
+            <a:fillRect/>
+          </a:stretch>
+        </p:blipFill>
+        <p:spPr>
+          <a:xfrm>
+            <a:off x="3472117" y="2345720"/>
+            <a:ext cx="6668431" cy="5715798"/>
+          </a:xfrm>
+          <a:prstGeom prst="rect">
+            <a:avLst/>
+          </a:prstGeom>
+        </p:spPr>
+      </p:pic>
+      <p:sp>
+        <p:nvSpPr>
+          <p:cNvPr id="6" name="TextBox 5">
+            <a:extLst>
+              <a:ext uri="{FF2B5EF4-FFF2-40B4-BE49-F238E27FC236}">
+                <a16:creationId xmlns:a16="http://schemas.microsoft.com/office/drawing/2014/main" id="{45E305CE-1B59-24B2-E3D4-B3920E782962}"/>
+              </a:ext>
+            </a:extLst>
+          </p:cNvPr>
+          <p:cNvSpPr txBox="1"/>
+          <p:nvPr/>
+        </p:nvSpPr>
+        <p:spPr>
+          <a:xfrm>
+            <a:off x="3385032" y="2142521"/>
+            <a:ext cx="1090166" cy="584775"/>
+          </a:xfrm>
+          <a:prstGeom prst="rect">
+            <a:avLst/>
+          </a:prstGeom>
+          <a:noFill/>
+        </p:spPr>
+        <p:txBody>
+          <a:bodyPr wrap="square" rtlCol="0">
+            <a:spAutoFit/>
+          </a:bodyPr>
+          <a:lstStyle>
+            <a:defPPr>
+              <a:defRPr lang="en-US"/>
+            </a:defPPr>
+            <a:lvl1pPr marL="0" algn="l" defTabSz="457200" rtl="0" eaLnBrk="1" latinLnBrk="0" hangingPunct="1">
+              <a:defRPr sz="1800" kern="1200">
+                <a:solidFill>
+                  <a:schemeClr val="tx1"/>
+                </a:solidFill>
+                <a:latin typeface="+mn-lt"/>
+                <a:ea typeface="+mn-ea"/>
+                <a:cs typeface="+mn-cs"/>
+              </a:defRPr>
+            </a:lvl1pPr>
+            <a:lvl2pPr marL="457200" algn="l" defTabSz="457200" rtl="0" eaLnBrk="1" latinLnBrk="0" hangingPunct="1">
+              <a:defRPr sz="1800" kern="1200">
+                <a:solidFill>
+                  <a:schemeClr val="tx1"/>
+                </a:solidFill>
+                <a:latin typeface="+mn-lt"/>
+                <a:ea typeface="+mn-ea"/>
+                <a:cs typeface="+mn-cs"/>
+              </a:defRPr>
+            </a:lvl2pPr>
+            <a:lvl3pPr marL="914400" algn="l" defTabSz="457200" rtl="0" eaLnBrk="1" latinLnBrk="0" hangingPunct="1">
+              <a:defRPr sz="1800" kern="1200">
+                <a:solidFill>
+                  <a:schemeClr val="tx1"/>
+                </a:solidFill>
+                <a:latin typeface="+mn-lt"/>
+                <a:ea typeface="+mn-ea"/>
+                <a:cs typeface="+mn-cs"/>
+              </a:defRPr>
+            </a:lvl3pPr>
+            <a:lvl4pPr marL="1371600" algn="l" defTabSz="457200" rtl="0" eaLnBrk="1" latinLnBrk="0" hangingPunct="1">
+              <a:defRPr sz="1800" kern="1200">
+                <a:solidFill>
+                  <a:schemeClr val="tx1"/>
+                </a:solidFill>
+                <a:latin typeface="+mn-lt"/>
+                <a:ea typeface="+mn-ea"/>
+                <a:cs typeface="+mn-cs"/>
+              </a:defRPr>
+            </a:lvl4pPr>
+            <a:lvl5pPr marL="1828800" algn="l" defTabSz="457200" rtl="0" eaLnBrk="1" latinLnBrk="0" hangingPunct="1">
+              <a:defRPr sz="1800" kern="1200">
+                <a:solidFill>
+                  <a:schemeClr val="tx1"/>
+                </a:solidFill>
+                <a:latin typeface="+mn-lt"/>
+                <a:ea typeface="+mn-ea"/>
+                <a:cs typeface="+mn-cs"/>
+              </a:defRPr>
+            </a:lvl5pPr>
+            <a:lvl6pPr marL="2286000" algn="l" defTabSz="457200" rtl="0" eaLnBrk="1" latinLnBrk="0" hangingPunct="1">
+              <a:defRPr sz="1800" kern="1200">
+                <a:solidFill>
+                  <a:schemeClr val="tx1"/>
+                </a:solidFill>
+                <a:latin typeface="+mn-lt"/>
+                <a:ea typeface="+mn-ea"/>
+                <a:cs typeface="+mn-cs"/>
+              </a:defRPr>
+            </a:lvl6pPr>
+            <a:lvl7pPr marL="2743200" algn="l" defTabSz="457200" rtl="0" eaLnBrk="1" latinLnBrk="0" hangingPunct="1">
+              <a:defRPr sz="1800" kern="1200">
+                <a:solidFill>
+                  <a:schemeClr val="tx1"/>
+                </a:solidFill>
+                <a:latin typeface="+mn-lt"/>
+                <a:ea typeface="+mn-ea"/>
+                <a:cs typeface="+mn-cs"/>
+              </a:defRPr>
+            </a:lvl7pPr>
+            <a:lvl8pPr marL="3200400" algn="l" defTabSz="457200" rtl="0" eaLnBrk="1" latinLnBrk="0" hangingPunct="1">
+              <a:defRPr sz="1800" kern="1200">
+                <a:solidFill>
+                  <a:schemeClr val="tx1"/>
+                </a:solidFill>
+                <a:latin typeface="+mn-lt"/>
+                <a:ea typeface="+mn-ea"/>
+                <a:cs typeface="+mn-cs"/>
+              </a:defRPr>
+            </a:lvl8pPr>
+            <a:lvl9pPr marL="3657600" algn="l" defTabSz="457200" rtl="0" eaLnBrk="1" latinLnBrk="0" hangingPunct="1">
+              <a:defRPr sz="1800" kern="1200">
+                <a:solidFill>
+                  <a:schemeClr val="tx1"/>
+                </a:solidFill>
+                <a:latin typeface="+mn-lt"/>
+                <a:ea typeface="+mn-ea"/>
+                <a:cs typeface="+mn-cs"/>
+              </a:defRPr>
+            </a:lvl9pPr>
+          </a:lstStyle>
+          <a:p>
+            <a:r>
+              <a:rPr lang="en-US" sz="3200" b="1" dirty="0">
+                <a:latin typeface="Arial" panose="020B0604020202020204" pitchFamily="34" charset="0"/>
+                <a:ea typeface="Yu Gothic" panose="020B0400000000000000" pitchFamily="34" charset="-128"/>
+                <a:cs typeface="Arial" panose="020B0604020202020204" pitchFamily="34" charset="0"/>
+              </a:rPr>
+              <a:t>(a)</a:t>
+            </a:r>
+          </a:p>
+        </p:txBody>
+      </p:sp>
+      <p:sp>
+        <p:nvSpPr>
+          <p:cNvPr id="7" name="TextBox 6">
+            <a:extLst>
+              <a:ext uri="{FF2B5EF4-FFF2-40B4-BE49-F238E27FC236}">
+                <a16:creationId xmlns:a16="http://schemas.microsoft.com/office/drawing/2014/main" id="{18C62F0C-13AC-2C9E-036E-A7135C79F6B5}"/>
+              </a:ext>
+            </a:extLst>
+          </p:cNvPr>
+          <p:cNvSpPr txBox="1"/>
+          <p:nvPr/>
+        </p:nvSpPr>
+        <p:spPr>
+          <a:xfrm>
+            <a:off x="3385032" y="4933263"/>
+            <a:ext cx="1090166" cy="584775"/>
+          </a:xfrm>
+          <a:prstGeom prst="rect">
+            <a:avLst/>
+          </a:prstGeom>
+          <a:noFill/>
+        </p:spPr>
+        <p:txBody>
+          <a:bodyPr wrap="square" rtlCol="0">
+            <a:spAutoFit/>
+          </a:bodyPr>
+          <a:lstStyle>
+            <a:defPPr>
+              <a:defRPr lang="en-US"/>
+            </a:defPPr>
+            <a:lvl1pPr marL="0" algn="l" defTabSz="457200" rtl="0" eaLnBrk="1" latinLnBrk="0" hangingPunct="1">
+              <a:defRPr sz="1800" kern="1200">
+                <a:solidFill>
+                  <a:schemeClr val="tx1"/>
+                </a:solidFill>
+                <a:latin typeface="+mn-lt"/>
+                <a:ea typeface="+mn-ea"/>
+                <a:cs typeface="+mn-cs"/>
+              </a:defRPr>
+            </a:lvl1pPr>
+            <a:lvl2pPr marL="457200" algn="l" defTabSz="457200" rtl="0" eaLnBrk="1" latinLnBrk="0" hangingPunct="1">
+              <a:defRPr sz="1800" kern="1200">
+                <a:solidFill>
+                  <a:schemeClr val="tx1"/>
+                </a:solidFill>
+                <a:latin typeface="+mn-lt"/>
+                <a:ea typeface="+mn-ea"/>
+                <a:cs typeface="+mn-cs"/>
+              </a:defRPr>
+            </a:lvl2pPr>
+            <a:lvl3pPr marL="914400" algn="l" defTabSz="457200" rtl="0" eaLnBrk="1" latinLnBrk="0" hangingPunct="1">
+              <a:defRPr sz="1800" kern="1200">
+                <a:solidFill>
+                  <a:schemeClr val="tx1"/>
+                </a:solidFill>
+                <a:latin typeface="+mn-lt"/>
+                <a:ea typeface="+mn-ea"/>
+                <a:cs typeface="+mn-cs"/>
+              </a:defRPr>
+            </a:lvl3pPr>
+            <a:lvl4pPr marL="1371600" algn="l" defTabSz="457200" rtl="0" eaLnBrk="1" latinLnBrk="0" hangingPunct="1">
+              <a:defRPr sz="1800" kern="1200">
+                <a:solidFill>
+                  <a:schemeClr val="tx1"/>
+                </a:solidFill>
+                <a:latin typeface="+mn-lt"/>
+                <a:ea typeface="+mn-ea"/>
+                <a:cs typeface="+mn-cs"/>
+              </a:defRPr>
+            </a:lvl4pPr>
+            <a:lvl5pPr marL="1828800" algn="l" defTabSz="457200" rtl="0" eaLnBrk="1" latinLnBrk="0" hangingPunct="1">
+              <a:defRPr sz="1800" kern="1200">
+                <a:solidFill>
+                  <a:schemeClr val="tx1"/>
+                </a:solidFill>
+                <a:latin typeface="+mn-lt"/>
+                <a:ea typeface="+mn-ea"/>
+                <a:cs typeface="+mn-cs"/>
+              </a:defRPr>
+            </a:lvl5pPr>
+            <a:lvl6pPr marL="2286000" algn="l" defTabSz="457200" rtl="0" eaLnBrk="1" latinLnBrk="0" hangingPunct="1">
+              <a:defRPr sz="1800" kern="1200">
+                <a:solidFill>
+                  <a:schemeClr val="tx1"/>
+                </a:solidFill>
+                <a:latin typeface="+mn-lt"/>
+                <a:ea typeface="+mn-ea"/>
+                <a:cs typeface="+mn-cs"/>
+              </a:defRPr>
+            </a:lvl6pPr>
+            <a:lvl7pPr marL="2743200" algn="l" defTabSz="457200" rtl="0" eaLnBrk="1" latinLnBrk="0" hangingPunct="1">
+              <a:defRPr sz="1800" kern="1200">
+                <a:solidFill>
+                  <a:schemeClr val="tx1"/>
+                </a:solidFill>
+                <a:latin typeface="+mn-lt"/>
+                <a:ea typeface="+mn-ea"/>
+                <a:cs typeface="+mn-cs"/>
+              </a:defRPr>
+            </a:lvl7pPr>
+            <a:lvl8pPr marL="3200400" algn="l" defTabSz="457200" rtl="0" eaLnBrk="1" latinLnBrk="0" hangingPunct="1">
+              <a:defRPr sz="1800" kern="1200">
+                <a:solidFill>
+                  <a:schemeClr val="tx1"/>
+                </a:solidFill>
+                <a:latin typeface="+mn-lt"/>
+                <a:ea typeface="+mn-ea"/>
+                <a:cs typeface="+mn-cs"/>
+              </a:defRPr>
+            </a:lvl8pPr>
+            <a:lvl9pPr marL="3657600" algn="l" defTabSz="457200" rtl="0" eaLnBrk="1" latinLnBrk="0" hangingPunct="1">
+              <a:defRPr sz="1800" kern="1200">
+                <a:solidFill>
+                  <a:schemeClr val="tx1"/>
+                </a:solidFill>
+                <a:latin typeface="+mn-lt"/>
+                <a:ea typeface="+mn-ea"/>
+                <a:cs typeface="+mn-cs"/>
+              </a:defRPr>
+            </a:lvl9pPr>
+          </a:lstStyle>
+          <a:p>
+            <a:r>
+              <a:rPr lang="en-US" sz="3200" b="1" dirty="0">
+                <a:latin typeface="Arial" panose="020B0604020202020204" pitchFamily="34" charset="0"/>
+                <a:ea typeface="Yu Gothic" panose="020B0400000000000000" pitchFamily="34" charset="-128"/>
+                <a:cs typeface="Arial" panose="020B0604020202020204" pitchFamily="34" charset="0"/>
+              </a:rPr>
+              <a:t>(b)</a:t>
+            </a:r>
+          </a:p>
+        </p:txBody>
+      </p:sp>
+    </p:spTree>
+    <p:extLst>
+      <p:ext uri="{BB962C8B-B14F-4D97-AF65-F5344CB8AC3E}">
+        <p14:creationId xmlns:p14="http://schemas.microsoft.com/office/powerpoint/2010/main" val="2395142973"/>
+      </p:ext>
+    </p:extLst>
+  </p:cSld>
+  <p:clrMapOvr>
+    <a:masterClrMapping/>
+  </p:clrMapOvr>
+</p:sld>
+</file>
+
+<file path=ppt/slides/slide11.xml><?xml version="1.0" encoding="utf-8"?>
+<p:sld xmlns:a="http://schemas.openxmlformats.org/drawingml/2006/main" xmlns:r="http://schemas.openxmlformats.org/officeDocument/2006/relationships" xmlns:p="http://schemas.openxmlformats.org/presentationml/2006/main">
+  <p:cSld>
+    <p:spTree>
+      <p:nvGrpSpPr>
+        <p:cNvPr id="1" name="">
+          <a:extLst>
+            <a:ext uri="{FF2B5EF4-FFF2-40B4-BE49-F238E27FC236}">
+              <a16:creationId xmlns:a16="http://schemas.microsoft.com/office/drawing/2014/main" id="{2EB7CA82-E32C-D33B-9B78-6FA2239FBE32}"/>
+            </a:ext>
+          </a:extLst>
+        </p:cNvPr>
+        <p:cNvGrpSpPr/>
+        <p:nvPr/>
+      </p:nvGrpSpPr>
+      <p:grpSpPr>
+        <a:xfrm>
+          <a:off x="0" y="0"/>
+          <a:ext cx="0" cy="0"/>
+          <a:chOff x="0" y="0"/>
+          <a:chExt cx="0" cy="0"/>
+        </a:xfrm>
+      </p:grpSpPr>
+      <p:pic>
+        <p:nvPicPr>
+          <p:cNvPr id="5" name="Picture 4">
+            <a:extLst>
+              <a:ext uri="{FF2B5EF4-FFF2-40B4-BE49-F238E27FC236}">
+                <a16:creationId xmlns:a16="http://schemas.microsoft.com/office/drawing/2014/main" id="{D219EFA3-03B0-ADC8-A4B8-A0A86D32A952}"/>
+              </a:ext>
+            </a:extLst>
+          </p:cNvPr>
+          <p:cNvPicPr>
+            <a:picLocks noChangeAspect="1"/>
+          </p:cNvPicPr>
+          <p:nvPr/>
+        </p:nvPicPr>
+        <p:blipFill>
+          <a:blip r:embed="rId2">
+            <a:extLst>
+              <a:ext uri="{28A0092B-C50C-407E-A947-70E740481C1C}">
+                <a14:useLocalDpi xmlns:a14="http://schemas.microsoft.com/office/drawing/2010/main" val="0"/>
+              </a:ext>
+            </a:extLst>
+          </a:blip>
+          <a:stretch>
+            <a:fillRect/>
+          </a:stretch>
+        </p:blipFill>
+        <p:spPr>
+          <a:xfrm>
+            <a:off x="3485684" y="2666600"/>
+            <a:ext cx="9223841" cy="7906149"/>
+          </a:xfrm>
+          <a:prstGeom prst="rect">
+            <a:avLst/>
+          </a:prstGeom>
+        </p:spPr>
+      </p:pic>
+      <p:sp>
+        <p:nvSpPr>
+          <p:cNvPr id="6" name="TextBox 5">
+            <a:extLst>
+              <a:ext uri="{FF2B5EF4-FFF2-40B4-BE49-F238E27FC236}">
+                <a16:creationId xmlns:a16="http://schemas.microsoft.com/office/drawing/2014/main" id="{B655027D-E95F-00CC-2B21-D93C1D6EE3A0}"/>
+              </a:ext>
+            </a:extLst>
+          </p:cNvPr>
+          <p:cNvSpPr txBox="1"/>
+          <p:nvPr/>
+        </p:nvSpPr>
+        <p:spPr>
+          <a:xfrm>
+            <a:off x="3225374" y="2157035"/>
+            <a:ext cx="1090166" cy="830997"/>
+          </a:xfrm>
+          <a:prstGeom prst="rect">
+            <a:avLst/>
+          </a:prstGeom>
+          <a:noFill/>
+        </p:spPr>
+        <p:txBody>
+          <a:bodyPr wrap="square" rtlCol="0">
+            <a:spAutoFit/>
+          </a:bodyPr>
+          <a:lstStyle>
+            <a:defPPr>
+              <a:defRPr lang="en-US"/>
+            </a:defPPr>
+            <a:lvl1pPr marL="0" algn="l" defTabSz="457200" rtl="0" eaLnBrk="1" latinLnBrk="0" hangingPunct="1">
+              <a:defRPr sz="1800" kern="1200">
+                <a:solidFill>
+                  <a:schemeClr val="tx1"/>
+                </a:solidFill>
+                <a:latin typeface="+mn-lt"/>
+                <a:ea typeface="+mn-ea"/>
+                <a:cs typeface="+mn-cs"/>
+              </a:defRPr>
+            </a:lvl1pPr>
+            <a:lvl2pPr marL="457200" algn="l" defTabSz="457200" rtl="0" eaLnBrk="1" latinLnBrk="0" hangingPunct="1">
+              <a:defRPr sz="1800" kern="1200">
+                <a:solidFill>
+                  <a:schemeClr val="tx1"/>
+                </a:solidFill>
+                <a:latin typeface="+mn-lt"/>
+                <a:ea typeface="+mn-ea"/>
+                <a:cs typeface="+mn-cs"/>
+              </a:defRPr>
+            </a:lvl2pPr>
+            <a:lvl3pPr marL="914400" algn="l" defTabSz="457200" rtl="0" eaLnBrk="1" latinLnBrk="0" hangingPunct="1">
+              <a:defRPr sz="1800" kern="1200">
+                <a:solidFill>
+                  <a:schemeClr val="tx1"/>
+                </a:solidFill>
+                <a:latin typeface="+mn-lt"/>
+                <a:ea typeface="+mn-ea"/>
+                <a:cs typeface="+mn-cs"/>
+              </a:defRPr>
+            </a:lvl3pPr>
+            <a:lvl4pPr marL="1371600" algn="l" defTabSz="457200" rtl="0" eaLnBrk="1" latinLnBrk="0" hangingPunct="1">
+              <a:defRPr sz="1800" kern="1200">
+                <a:solidFill>
+                  <a:schemeClr val="tx1"/>
+                </a:solidFill>
+                <a:latin typeface="+mn-lt"/>
+                <a:ea typeface="+mn-ea"/>
+                <a:cs typeface="+mn-cs"/>
+              </a:defRPr>
+            </a:lvl4pPr>
+            <a:lvl5pPr marL="1828800" algn="l" defTabSz="457200" rtl="0" eaLnBrk="1" latinLnBrk="0" hangingPunct="1">
+              <a:defRPr sz="1800" kern="1200">
+                <a:solidFill>
+                  <a:schemeClr val="tx1"/>
+                </a:solidFill>
+                <a:latin typeface="+mn-lt"/>
+                <a:ea typeface="+mn-ea"/>
+                <a:cs typeface="+mn-cs"/>
+              </a:defRPr>
+            </a:lvl5pPr>
+            <a:lvl6pPr marL="2286000" algn="l" defTabSz="457200" rtl="0" eaLnBrk="1" latinLnBrk="0" hangingPunct="1">
+              <a:defRPr sz="1800" kern="1200">
+                <a:solidFill>
+                  <a:schemeClr val="tx1"/>
+                </a:solidFill>
+                <a:latin typeface="+mn-lt"/>
+                <a:ea typeface="+mn-ea"/>
+                <a:cs typeface="+mn-cs"/>
+              </a:defRPr>
+            </a:lvl6pPr>
+            <a:lvl7pPr marL="2743200" algn="l" defTabSz="457200" rtl="0" eaLnBrk="1" latinLnBrk="0" hangingPunct="1">
+              <a:defRPr sz="1800" kern="1200">
+                <a:solidFill>
+                  <a:schemeClr val="tx1"/>
+                </a:solidFill>
+                <a:latin typeface="+mn-lt"/>
+                <a:ea typeface="+mn-ea"/>
+                <a:cs typeface="+mn-cs"/>
+              </a:defRPr>
+            </a:lvl7pPr>
+            <a:lvl8pPr marL="3200400" algn="l" defTabSz="457200" rtl="0" eaLnBrk="1" latinLnBrk="0" hangingPunct="1">
+              <a:defRPr sz="1800" kern="1200">
+                <a:solidFill>
+                  <a:schemeClr val="tx1"/>
+                </a:solidFill>
+                <a:latin typeface="+mn-lt"/>
+                <a:ea typeface="+mn-ea"/>
+                <a:cs typeface="+mn-cs"/>
+              </a:defRPr>
+            </a:lvl8pPr>
+            <a:lvl9pPr marL="3657600" algn="l" defTabSz="457200" rtl="0" eaLnBrk="1" latinLnBrk="0" hangingPunct="1">
+              <a:defRPr sz="1800" kern="1200">
+                <a:solidFill>
+                  <a:schemeClr val="tx1"/>
+                </a:solidFill>
+                <a:latin typeface="+mn-lt"/>
+                <a:ea typeface="+mn-ea"/>
+                <a:cs typeface="+mn-cs"/>
+              </a:defRPr>
+            </a:lvl9pPr>
+          </a:lstStyle>
+          <a:p>
+            <a:r>
+              <a:rPr lang="en-US" sz="4800" b="1" dirty="0">
+                <a:latin typeface="Arial" panose="020B0604020202020204" pitchFamily="34" charset="0"/>
+                <a:ea typeface="Yu Gothic" panose="020B0400000000000000" pitchFamily="34" charset="-128"/>
+                <a:cs typeface="Arial" panose="020B0604020202020204" pitchFamily="34" charset="0"/>
+              </a:rPr>
+              <a:t>(a)</a:t>
+            </a:r>
+          </a:p>
+        </p:txBody>
+      </p:sp>
+      <p:sp>
+        <p:nvSpPr>
+          <p:cNvPr id="7" name="TextBox 6">
+            <a:extLst>
+              <a:ext uri="{FF2B5EF4-FFF2-40B4-BE49-F238E27FC236}">
+                <a16:creationId xmlns:a16="http://schemas.microsoft.com/office/drawing/2014/main" id="{3FF38334-3357-2D86-69A6-806F4B0E43CA}"/>
+              </a:ext>
+            </a:extLst>
+          </p:cNvPr>
+          <p:cNvSpPr txBox="1"/>
+          <p:nvPr/>
+        </p:nvSpPr>
+        <p:spPr>
+          <a:xfrm>
+            <a:off x="3225374" y="6080551"/>
+            <a:ext cx="1090166" cy="830997"/>
+          </a:xfrm>
+          <a:prstGeom prst="rect">
+            <a:avLst/>
+          </a:prstGeom>
+          <a:noFill/>
+        </p:spPr>
+        <p:txBody>
+          <a:bodyPr wrap="square" rtlCol="0">
+            <a:spAutoFit/>
+          </a:bodyPr>
+          <a:lstStyle>
+            <a:defPPr>
+              <a:defRPr lang="en-US"/>
+            </a:defPPr>
+            <a:lvl1pPr marL="0" algn="l" defTabSz="457200" rtl="0" eaLnBrk="1" latinLnBrk="0" hangingPunct="1">
+              <a:defRPr sz="1800" kern="1200">
+                <a:solidFill>
+                  <a:schemeClr val="tx1"/>
+                </a:solidFill>
+                <a:latin typeface="+mn-lt"/>
+                <a:ea typeface="+mn-ea"/>
+                <a:cs typeface="+mn-cs"/>
+              </a:defRPr>
+            </a:lvl1pPr>
+            <a:lvl2pPr marL="457200" algn="l" defTabSz="457200" rtl="0" eaLnBrk="1" latinLnBrk="0" hangingPunct="1">
+              <a:defRPr sz="1800" kern="1200">
+                <a:solidFill>
+                  <a:schemeClr val="tx1"/>
+                </a:solidFill>
+                <a:latin typeface="+mn-lt"/>
+                <a:ea typeface="+mn-ea"/>
+                <a:cs typeface="+mn-cs"/>
+              </a:defRPr>
+            </a:lvl2pPr>
+            <a:lvl3pPr marL="914400" algn="l" defTabSz="457200" rtl="0" eaLnBrk="1" latinLnBrk="0" hangingPunct="1">
+              <a:defRPr sz="1800" kern="1200">
+                <a:solidFill>
+                  <a:schemeClr val="tx1"/>
+                </a:solidFill>
+                <a:latin typeface="+mn-lt"/>
+                <a:ea typeface="+mn-ea"/>
+                <a:cs typeface="+mn-cs"/>
+              </a:defRPr>
+            </a:lvl3pPr>
+            <a:lvl4pPr marL="1371600" algn="l" defTabSz="457200" rtl="0" eaLnBrk="1" latinLnBrk="0" hangingPunct="1">
+              <a:defRPr sz="1800" kern="1200">
+                <a:solidFill>
+                  <a:schemeClr val="tx1"/>
+                </a:solidFill>
+                <a:latin typeface="+mn-lt"/>
+                <a:ea typeface="+mn-ea"/>
+                <a:cs typeface="+mn-cs"/>
+              </a:defRPr>
+            </a:lvl4pPr>
+            <a:lvl5pPr marL="1828800" algn="l" defTabSz="457200" rtl="0" eaLnBrk="1" latinLnBrk="0" hangingPunct="1">
+              <a:defRPr sz="1800" kern="1200">
+                <a:solidFill>
+                  <a:schemeClr val="tx1"/>
+                </a:solidFill>
+                <a:latin typeface="+mn-lt"/>
+                <a:ea typeface="+mn-ea"/>
+                <a:cs typeface="+mn-cs"/>
+              </a:defRPr>
+            </a:lvl5pPr>
+            <a:lvl6pPr marL="2286000" algn="l" defTabSz="457200" rtl="0" eaLnBrk="1" latinLnBrk="0" hangingPunct="1">
+              <a:defRPr sz="1800" kern="1200">
+                <a:solidFill>
+                  <a:schemeClr val="tx1"/>
+                </a:solidFill>
+                <a:latin typeface="+mn-lt"/>
+                <a:ea typeface="+mn-ea"/>
+                <a:cs typeface="+mn-cs"/>
+              </a:defRPr>
+            </a:lvl6pPr>
+            <a:lvl7pPr marL="2743200" algn="l" defTabSz="457200" rtl="0" eaLnBrk="1" latinLnBrk="0" hangingPunct="1">
+              <a:defRPr sz="1800" kern="1200">
+                <a:solidFill>
+                  <a:schemeClr val="tx1"/>
+                </a:solidFill>
+                <a:latin typeface="+mn-lt"/>
+                <a:ea typeface="+mn-ea"/>
+                <a:cs typeface="+mn-cs"/>
+              </a:defRPr>
+            </a:lvl7pPr>
+            <a:lvl8pPr marL="3200400" algn="l" defTabSz="457200" rtl="0" eaLnBrk="1" latinLnBrk="0" hangingPunct="1">
+              <a:defRPr sz="1800" kern="1200">
+                <a:solidFill>
+                  <a:schemeClr val="tx1"/>
+                </a:solidFill>
+                <a:latin typeface="+mn-lt"/>
+                <a:ea typeface="+mn-ea"/>
+                <a:cs typeface="+mn-cs"/>
+              </a:defRPr>
+            </a:lvl8pPr>
+            <a:lvl9pPr marL="3657600" algn="l" defTabSz="457200" rtl="0" eaLnBrk="1" latinLnBrk="0" hangingPunct="1">
+              <a:defRPr sz="1800" kern="1200">
+                <a:solidFill>
+                  <a:schemeClr val="tx1"/>
+                </a:solidFill>
+                <a:latin typeface="+mn-lt"/>
+                <a:ea typeface="+mn-ea"/>
+                <a:cs typeface="+mn-cs"/>
+              </a:defRPr>
+            </a:lvl9pPr>
+          </a:lstStyle>
+          <a:p>
+            <a:r>
+              <a:rPr lang="en-US" sz="4800" b="1" dirty="0">
+                <a:latin typeface="Arial" panose="020B0604020202020204" pitchFamily="34" charset="0"/>
+                <a:ea typeface="Yu Gothic" panose="020B0400000000000000" pitchFamily="34" charset="-128"/>
+                <a:cs typeface="Arial" panose="020B0604020202020204" pitchFamily="34" charset="0"/>
+              </a:rPr>
+              <a:t>(b)</a:t>
+            </a:r>
+          </a:p>
+        </p:txBody>
+      </p:sp>
+      <p:pic>
+        <p:nvPicPr>
+          <p:cNvPr id="9" name="Picture 8">
+            <a:extLst>
+              <a:ext uri="{FF2B5EF4-FFF2-40B4-BE49-F238E27FC236}">
+                <a16:creationId xmlns:a16="http://schemas.microsoft.com/office/drawing/2014/main" id="{FB5033C6-3EA2-85B4-E287-77FC0C822A71}"/>
+              </a:ext>
+            </a:extLst>
+          </p:cNvPr>
+          <p:cNvPicPr>
+            <a:picLocks noChangeAspect="1"/>
+          </p:cNvPicPr>
+          <p:nvPr/>
+        </p:nvPicPr>
+        <p:blipFill>
+          <a:blip r:embed="rId3">
+            <a:extLst>
+              <a:ext uri="{28A0092B-C50C-407E-A947-70E740481C1C}">
+                <a14:useLocalDpi xmlns:a14="http://schemas.microsoft.com/office/drawing/2010/main" val="0"/>
+              </a:ext>
+            </a:extLst>
+          </a:blip>
+          <a:stretch>
+            <a:fillRect/>
+          </a:stretch>
+        </p:blipFill>
+        <p:spPr>
+          <a:xfrm>
+            <a:off x="6349468" y="12287252"/>
+            <a:ext cx="7621064" cy="7621064"/>
+          </a:xfrm>
+          <a:prstGeom prst="rect">
+            <a:avLst/>
+          </a:prstGeom>
+        </p:spPr>
+      </p:pic>
+      <p:sp>
+        <p:nvSpPr>
+          <p:cNvPr id="12" name="TextBox 11">
+            <a:extLst>
+              <a:ext uri="{FF2B5EF4-FFF2-40B4-BE49-F238E27FC236}">
+                <a16:creationId xmlns:a16="http://schemas.microsoft.com/office/drawing/2014/main" id="{B416D01E-21C8-4D28-E248-06FBABAF1028}"/>
+              </a:ext>
+            </a:extLst>
+          </p:cNvPr>
+          <p:cNvSpPr txBox="1"/>
+          <p:nvPr/>
+        </p:nvSpPr>
+        <p:spPr>
+          <a:xfrm>
+            <a:off x="6247586" y="11777899"/>
+            <a:ext cx="1090166" cy="830997"/>
+          </a:xfrm>
+          <a:prstGeom prst="rect">
+            <a:avLst/>
+          </a:prstGeom>
+          <a:noFill/>
+        </p:spPr>
+        <p:txBody>
+          <a:bodyPr wrap="square" rtlCol="0">
+            <a:spAutoFit/>
+          </a:bodyPr>
+          <a:lstStyle>
+            <a:defPPr>
+              <a:defRPr lang="en-US"/>
+            </a:defPPr>
+            <a:lvl1pPr marL="0" algn="l" defTabSz="457200" rtl="0" eaLnBrk="1" latinLnBrk="0" hangingPunct="1">
+              <a:defRPr sz="1800" kern="1200">
+                <a:solidFill>
+                  <a:schemeClr val="tx1"/>
+                </a:solidFill>
+                <a:latin typeface="+mn-lt"/>
+                <a:ea typeface="+mn-ea"/>
+                <a:cs typeface="+mn-cs"/>
+              </a:defRPr>
+            </a:lvl1pPr>
+            <a:lvl2pPr marL="457200" algn="l" defTabSz="457200" rtl="0" eaLnBrk="1" latinLnBrk="0" hangingPunct="1">
+              <a:defRPr sz="1800" kern="1200">
+                <a:solidFill>
+                  <a:schemeClr val="tx1"/>
+                </a:solidFill>
+                <a:latin typeface="+mn-lt"/>
+                <a:ea typeface="+mn-ea"/>
+                <a:cs typeface="+mn-cs"/>
+              </a:defRPr>
+            </a:lvl2pPr>
+            <a:lvl3pPr marL="914400" algn="l" defTabSz="457200" rtl="0" eaLnBrk="1" latinLnBrk="0" hangingPunct="1">
+              <a:defRPr sz="1800" kern="1200">
+                <a:solidFill>
+                  <a:schemeClr val="tx1"/>
+                </a:solidFill>
+                <a:latin typeface="+mn-lt"/>
+                <a:ea typeface="+mn-ea"/>
+                <a:cs typeface="+mn-cs"/>
+              </a:defRPr>
+            </a:lvl3pPr>
+            <a:lvl4pPr marL="1371600" algn="l" defTabSz="457200" rtl="0" eaLnBrk="1" latinLnBrk="0" hangingPunct="1">
+              <a:defRPr sz="1800" kern="1200">
+                <a:solidFill>
+                  <a:schemeClr val="tx1"/>
+                </a:solidFill>
+                <a:latin typeface="+mn-lt"/>
+                <a:ea typeface="+mn-ea"/>
+                <a:cs typeface="+mn-cs"/>
+              </a:defRPr>
+            </a:lvl4pPr>
+            <a:lvl5pPr marL="1828800" algn="l" defTabSz="457200" rtl="0" eaLnBrk="1" latinLnBrk="0" hangingPunct="1">
+              <a:defRPr sz="1800" kern="1200">
+                <a:solidFill>
+                  <a:schemeClr val="tx1"/>
+                </a:solidFill>
+                <a:latin typeface="+mn-lt"/>
+                <a:ea typeface="+mn-ea"/>
+                <a:cs typeface="+mn-cs"/>
+              </a:defRPr>
+            </a:lvl5pPr>
+            <a:lvl6pPr marL="2286000" algn="l" defTabSz="457200" rtl="0" eaLnBrk="1" latinLnBrk="0" hangingPunct="1">
+              <a:defRPr sz="1800" kern="1200">
+                <a:solidFill>
+                  <a:schemeClr val="tx1"/>
+                </a:solidFill>
+                <a:latin typeface="+mn-lt"/>
+                <a:ea typeface="+mn-ea"/>
+                <a:cs typeface="+mn-cs"/>
+              </a:defRPr>
+            </a:lvl6pPr>
+            <a:lvl7pPr marL="2743200" algn="l" defTabSz="457200" rtl="0" eaLnBrk="1" latinLnBrk="0" hangingPunct="1">
+              <a:defRPr sz="1800" kern="1200">
+                <a:solidFill>
+                  <a:schemeClr val="tx1"/>
+                </a:solidFill>
+                <a:latin typeface="+mn-lt"/>
+                <a:ea typeface="+mn-ea"/>
+                <a:cs typeface="+mn-cs"/>
+              </a:defRPr>
+            </a:lvl7pPr>
+            <a:lvl8pPr marL="3200400" algn="l" defTabSz="457200" rtl="0" eaLnBrk="1" latinLnBrk="0" hangingPunct="1">
+              <a:defRPr sz="1800" kern="1200">
+                <a:solidFill>
+                  <a:schemeClr val="tx1"/>
+                </a:solidFill>
+                <a:latin typeface="+mn-lt"/>
+                <a:ea typeface="+mn-ea"/>
+                <a:cs typeface="+mn-cs"/>
+              </a:defRPr>
+            </a:lvl8pPr>
+            <a:lvl9pPr marL="3657600" algn="l" defTabSz="457200" rtl="0" eaLnBrk="1" latinLnBrk="0" hangingPunct="1">
+              <a:defRPr sz="1800" kern="1200">
+                <a:solidFill>
+                  <a:schemeClr val="tx1"/>
+                </a:solidFill>
+                <a:latin typeface="+mn-lt"/>
+                <a:ea typeface="+mn-ea"/>
+                <a:cs typeface="+mn-cs"/>
+              </a:defRPr>
+            </a:lvl9pPr>
+          </a:lstStyle>
+          <a:p>
+            <a:r>
+              <a:rPr lang="en-US" sz="4800" b="1" dirty="0">
+                <a:latin typeface="Arial" panose="020B0604020202020204" pitchFamily="34" charset="0"/>
+                <a:ea typeface="Yu Gothic" panose="020B0400000000000000" pitchFamily="34" charset="-128"/>
+                <a:cs typeface="Arial" panose="020B0604020202020204" pitchFamily="34" charset="0"/>
+              </a:rPr>
+              <a:t>(a)</a:t>
+            </a:r>
+          </a:p>
+        </p:txBody>
+      </p:sp>
+      <p:sp>
+        <p:nvSpPr>
+          <p:cNvPr id="13" name="TextBox 12">
+            <a:extLst>
+              <a:ext uri="{FF2B5EF4-FFF2-40B4-BE49-F238E27FC236}">
+                <a16:creationId xmlns:a16="http://schemas.microsoft.com/office/drawing/2014/main" id="{79FB1EBF-972C-AE5C-EA37-D23CEB7F2D54}"/>
+              </a:ext>
+            </a:extLst>
+          </p:cNvPr>
+          <p:cNvSpPr txBox="1"/>
+          <p:nvPr/>
+        </p:nvSpPr>
+        <p:spPr>
+          <a:xfrm>
+            <a:off x="6247586" y="15701415"/>
+            <a:ext cx="1090166" cy="830997"/>
+          </a:xfrm>
+          <a:prstGeom prst="rect">
+            <a:avLst/>
+          </a:prstGeom>
+          <a:noFill/>
+        </p:spPr>
+        <p:txBody>
+          <a:bodyPr wrap="square" rtlCol="0">
+            <a:spAutoFit/>
+          </a:bodyPr>
+          <a:lstStyle>
+            <a:defPPr>
+              <a:defRPr lang="en-US"/>
+            </a:defPPr>
+            <a:lvl1pPr marL="0" algn="l" defTabSz="457200" rtl="0" eaLnBrk="1" latinLnBrk="0" hangingPunct="1">
+              <a:defRPr sz="1800" kern="1200">
+                <a:solidFill>
+                  <a:schemeClr val="tx1"/>
+                </a:solidFill>
+                <a:latin typeface="+mn-lt"/>
+                <a:ea typeface="+mn-ea"/>
+                <a:cs typeface="+mn-cs"/>
+              </a:defRPr>
+            </a:lvl1pPr>
+            <a:lvl2pPr marL="457200" algn="l" defTabSz="457200" rtl="0" eaLnBrk="1" latinLnBrk="0" hangingPunct="1">
+              <a:defRPr sz="1800" kern="1200">
+                <a:solidFill>
+                  <a:schemeClr val="tx1"/>
+                </a:solidFill>
+                <a:latin typeface="+mn-lt"/>
+                <a:ea typeface="+mn-ea"/>
+                <a:cs typeface="+mn-cs"/>
+              </a:defRPr>
+            </a:lvl2pPr>
+            <a:lvl3pPr marL="914400" algn="l" defTabSz="457200" rtl="0" eaLnBrk="1" latinLnBrk="0" hangingPunct="1">
+              <a:defRPr sz="1800" kern="1200">
+                <a:solidFill>
+                  <a:schemeClr val="tx1"/>
+                </a:solidFill>
+                <a:latin typeface="+mn-lt"/>
+                <a:ea typeface="+mn-ea"/>
+                <a:cs typeface="+mn-cs"/>
+              </a:defRPr>
+            </a:lvl3pPr>
+            <a:lvl4pPr marL="1371600" algn="l" defTabSz="457200" rtl="0" eaLnBrk="1" latinLnBrk="0" hangingPunct="1">
+              <a:defRPr sz="1800" kern="1200">
+                <a:solidFill>
+                  <a:schemeClr val="tx1"/>
+                </a:solidFill>
+                <a:latin typeface="+mn-lt"/>
+                <a:ea typeface="+mn-ea"/>
+                <a:cs typeface="+mn-cs"/>
+              </a:defRPr>
+            </a:lvl4pPr>
+            <a:lvl5pPr marL="1828800" algn="l" defTabSz="457200" rtl="0" eaLnBrk="1" latinLnBrk="0" hangingPunct="1">
+              <a:defRPr sz="1800" kern="1200">
+                <a:solidFill>
+                  <a:schemeClr val="tx1"/>
+                </a:solidFill>
+                <a:latin typeface="+mn-lt"/>
+                <a:ea typeface="+mn-ea"/>
+                <a:cs typeface="+mn-cs"/>
+              </a:defRPr>
+            </a:lvl5pPr>
+            <a:lvl6pPr marL="2286000" algn="l" defTabSz="457200" rtl="0" eaLnBrk="1" latinLnBrk="0" hangingPunct="1">
+              <a:defRPr sz="1800" kern="1200">
+                <a:solidFill>
+                  <a:schemeClr val="tx1"/>
+                </a:solidFill>
+                <a:latin typeface="+mn-lt"/>
+                <a:ea typeface="+mn-ea"/>
+                <a:cs typeface="+mn-cs"/>
+              </a:defRPr>
+            </a:lvl6pPr>
+            <a:lvl7pPr marL="2743200" algn="l" defTabSz="457200" rtl="0" eaLnBrk="1" latinLnBrk="0" hangingPunct="1">
+              <a:defRPr sz="1800" kern="1200">
+                <a:solidFill>
+                  <a:schemeClr val="tx1"/>
+                </a:solidFill>
+                <a:latin typeface="+mn-lt"/>
+                <a:ea typeface="+mn-ea"/>
+                <a:cs typeface="+mn-cs"/>
+              </a:defRPr>
+            </a:lvl7pPr>
+            <a:lvl8pPr marL="3200400" algn="l" defTabSz="457200" rtl="0" eaLnBrk="1" latinLnBrk="0" hangingPunct="1">
+              <a:defRPr sz="1800" kern="1200">
+                <a:solidFill>
+                  <a:schemeClr val="tx1"/>
+                </a:solidFill>
+                <a:latin typeface="+mn-lt"/>
+                <a:ea typeface="+mn-ea"/>
+                <a:cs typeface="+mn-cs"/>
+              </a:defRPr>
+            </a:lvl8pPr>
+            <a:lvl9pPr marL="3657600" algn="l" defTabSz="457200" rtl="0" eaLnBrk="1" latinLnBrk="0" hangingPunct="1">
+              <a:defRPr sz="1800" kern="1200">
+                <a:solidFill>
+                  <a:schemeClr val="tx1"/>
+                </a:solidFill>
+                <a:latin typeface="+mn-lt"/>
+                <a:ea typeface="+mn-ea"/>
+                <a:cs typeface="+mn-cs"/>
+              </a:defRPr>
+            </a:lvl9pPr>
+          </a:lstStyle>
+          <a:p>
+            <a:r>
+              <a:rPr lang="en-US" sz="4800" b="1" dirty="0">
+                <a:latin typeface="Arial" panose="020B0604020202020204" pitchFamily="34" charset="0"/>
+                <a:ea typeface="Yu Gothic" panose="020B0400000000000000" pitchFamily="34" charset="-128"/>
+                <a:cs typeface="Arial" panose="020B0604020202020204" pitchFamily="34" charset="0"/>
+              </a:rPr>
+              <a:t>(b)</a:t>
+            </a:r>
+          </a:p>
+        </p:txBody>
+      </p:sp>
+    </p:spTree>
+    <p:extLst>
+      <p:ext uri="{BB962C8B-B14F-4D97-AF65-F5344CB8AC3E}">
+        <p14:creationId xmlns:p14="http://schemas.microsoft.com/office/powerpoint/2010/main" val="2873991124"/>
+      </p:ext>
+    </p:extLst>
+  </p:cSld>
+  <p:clrMapOvr>
+    <a:masterClrMapping/>
+  </p:clrMapOvr>
+</p:sld>
+</file>
+
+<file path=ppt/slides/slide12.xml><?xml version="1.0" encoding="utf-8"?>
+<p:sld xmlns:a="http://schemas.openxmlformats.org/drawingml/2006/main" xmlns:r="http://schemas.openxmlformats.org/officeDocument/2006/relationships" xmlns:p="http://schemas.openxmlformats.org/presentationml/2006/main">
+  <p:cSld>
+    <p:spTree>
+      <p:nvGrpSpPr>
         <p:cNvPr id="1" name=""/>
         <p:cNvGrpSpPr/>
         <p:nvPr/>
@@ -9614,7 +9962,7 @@
 </p:sld>
 </file>
 
-<file path=ppt/slides/slide11.xml><?xml version="1.0" encoding="utf-8"?>
+<file path=ppt/slides/slide13.xml><?xml version="1.0" encoding="utf-8"?>
 <p:sld xmlns:a="http://schemas.openxmlformats.org/drawingml/2006/main" xmlns:r="http://schemas.openxmlformats.org/officeDocument/2006/relationships" xmlns:p="http://schemas.openxmlformats.org/presentationml/2006/main">
   <p:cSld>
     <p:spTree>
@@ -14083,7 +14431,7 @@
 </p:sld>
 </file>
 
-<file path=ppt/slides/slide12.xml><?xml version="1.0" encoding="utf-8"?>
+<file path=ppt/slides/slide14.xml><?xml version="1.0" encoding="utf-8"?>
 <p:sld xmlns:a="http://schemas.openxmlformats.org/drawingml/2006/main" xmlns:r="http://schemas.openxmlformats.org/officeDocument/2006/relationships" xmlns:p="http://schemas.openxmlformats.org/presentationml/2006/main">
   <p:cSld>
     <p:spTree>
@@ -16903,7 +17251,7 @@
 </p:sld>
 </file>
 
-<file path=ppt/slides/slide13.xml><?xml version="1.0" encoding="utf-8"?>
+<file path=ppt/slides/slide15.xml><?xml version="1.0" encoding="utf-8"?>
 <p:sld xmlns:a="http://schemas.openxmlformats.org/drawingml/2006/main" xmlns:r="http://schemas.openxmlformats.org/officeDocument/2006/relationships" xmlns:p="http://schemas.openxmlformats.org/presentationml/2006/main">
   <p:cSld>
     <p:spTree>
@@ -17634,7 +17982,7 @@
 </p:sld>
 </file>
 
-<file path=ppt/slides/slide14.xml><?xml version="1.0" encoding="utf-8"?>
+<file path=ppt/slides/slide16.xml><?xml version="1.0" encoding="utf-8"?>
 <p:sld xmlns:a="http://schemas.openxmlformats.org/drawingml/2006/main" xmlns:r="http://schemas.openxmlformats.org/officeDocument/2006/relationships" xmlns:p="http://schemas.openxmlformats.org/presentationml/2006/main">
   <p:cSld>
     <p:spTree>
@@ -17656,7 +18004,7 @@
           <p:cNvPr id="5" name="Picture 4">
             <a:extLst>
               <a:ext uri="{FF2B5EF4-FFF2-40B4-BE49-F238E27FC236}">
-                <a16:creationId xmlns:a16="http://schemas.microsoft.com/office/drawing/2014/main" id="{E3B42699-5452-3B8E-2E31-DE2F809ED7CC}"/>
+                <a16:creationId xmlns:a16="http://schemas.microsoft.com/office/drawing/2014/main" id="{B020E19B-B2ED-0C45-6282-30F29B0603EA}"/>
               </a:ext>
             </a:extLst>
           </p:cNvPr>
@@ -17679,7 +18027,7 @@
         </p:blipFill>
         <p:spPr>
           <a:xfrm>
-            <a:off x="3808936" y="1893050"/>
+            <a:off x="3197306" y="1440930"/>
             <a:ext cx="15242127" cy="15242127"/>
           </a:xfrm>
           <a:prstGeom prst="rect">
@@ -17701,7 +18049,7 @@
         </p:nvSpPr>
         <p:spPr>
           <a:xfrm>
-            <a:off x="3603501" y="1569884"/>
+            <a:off x="3102056" y="1156929"/>
             <a:ext cx="1090166" cy="646331"/>
           </a:xfrm>
           <a:prstGeom prst="rect">
@@ -17834,7 +18182,7 @@
         </p:nvSpPr>
         <p:spPr>
           <a:xfrm>
-            <a:off x="10225433" y="1569884"/>
+            <a:off x="9653934" y="1156929"/>
             <a:ext cx="1090166" cy="646331"/>
           </a:xfrm>
           <a:prstGeom prst="rect">
@@ -17967,7 +18315,7 @@
         </p:nvSpPr>
         <p:spPr>
           <a:xfrm>
-            <a:off x="3603501" y="5360834"/>
+            <a:off x="3102056" y="4947879"/>
             <a:ext cx="1090166" cy="646331"/>
           </a:xfrm>
           <a:prstGeom prst="rect">
@@ -18100,7 +18448,7 @@
         </p:nvSpPr>
         <p:spPr>
           <a:xfrm>
-            <a:off x="10225433" y="5360834"/>
+            <a:off x="9653934" y="4947879"/>
             <a:ext cx="1090166" cy="646331"/>
           </a:xfrm>
           <a:prstGeom prst="rect">
@@ -18233,7 +18581,7 @@
         </p:nvSpPr>
         <p:spPr>
           <a:xfrm>
-            <a:off x="3603501" y="9151784"/>
+            <a:off x="3102056" y="8738829"/>
             <a:ext cx="1090166" cy="646331"/>
           </a:xfrm>
           <a:prstGeom prst="rect">
@@ -18366,7 +18714,7 @@
         </p:nvSpPr>
         <p:spPr>
           <a:xfrm>
-            <a:off x="10225433" y="9151784"/>
+            <a:off x="9653934" y="8738829"/>
             <a:ext cx="1090166" cy="646331"/>
           </a:xfrm>
           <a:prstGeom prst="rect">
@@ -18499,7 +18847,7 @@
         </p:nvSpPr>
         <p:spPr>
           <a:xfrm>
-            <a:off x="3603501" y="12819630"/>
+            <a:off x="3102056" y="12406675"/>
             <a:ext cx="1090166" cy="646331"/>
           </a:xfrm>
           <a:prstGeom prst="rect">
@@ -18632,7 +18980,7 @@
         </p:nvSpPr>
         <p:spPr>
           <a:xfrm>
-            <a:off x="10225433" y="12819630"/>
+            <a:off x="9653934" y="12406675"/>
             <a:ext cx="1090166" cy="646331"/>
           </a:xfrm>
           <a:prstGeom prst="rect">
@@ -18764,7 +19112,7 @@
 </p:sld>
 </file>
 
-<file path=ppt/slides/slide15.xml><?xml version="1.0" encoding="utf-8"?>
+<file path=ppt/slides/slide17.xml><?xml version="1.0" encoding="utf-8"?>
 <p:sld xmlns:a="http://schemas.openxmlformats.org/drawingml/2006/main" xmlns:r="http://schemas.openxmlformats.org/officeDocument/2006/relationships" xmlns:p="http://schemas.openxmlformats.org/presentationml/2006/main">
   <p:cSld>
     <p:spTree>
@@ -45484,10 +45832,10 @@
       </p:grpSpPr>
       <p:pic>
         <p:nvPicPr>
-          <p:cNvPr id="5" name="Picture 4">
-            <a:extLst>
-              <a:ext uri="{FF2B5EF4-FFF2-40B4-BE49-F238E27FC236}">
-                <a16:creationId xmlns:a16="http://schemas.microsoft.com/office/drawing/2014/main" id="{D28E183A-4C31-52B0-0727-47F9DC3F9356}"/>
+          <p:cNvPr id="3" name="Picture 2">
+            <a:extLst>
+              <a:ext uri="{FF2B5EF4-FFF2-40B4-BE49-F238E27FC236}">
+                <a16:creationId xmlns:a16="http://schemas.microsoft.com/office/drawing/2014/main" id="{2C5A7DC2-EC6A-664E-08EB-A4697CF4145D}"/>
               </a:ext>
             </a:extLst>
           </p:cNvPr>
@@ -45510,8 +45858,8 @@
         </p:blipFill>
         <p:spPr>
           <a:xfrm>
-            <a:off x="3485684" y="2666600"/>
-            <a:ext cx="9223841" cy="7906149"/>
+            <a:off x="3375279" y="2832100"/>
+            <a:ext cx="8278316" cy="7095699"/>
           </a:xfrm>
           <a:prstGeom prst="rect">
             <a:avLst/>
@@ -45532,8 +45880,8 @@
         </p:nvSpPr>
         <p:spPr>
           <a:xfrm>
-            <a:off x="3225374" y="2157035"/>
-            <a:ext cx="1090166" cy="830997"/>
+            <a:off x="3466674" y="2398335"/>
+            <a:ext cx="1090166" cy="584775"/>
           </a:xfrm>
           <a:prstGeom prst="rect">
             <a:avLst/>
@@ -45641,7 +45989,7 @@
           </a:lstStyle>
           <a:p>
             <a:r>
-              <a:rPr lang="en-US" sz="4800" b="1" dirty="0">
+              <a:rPr lang="en-US" sz="3200" b="1" dirty="0">
                 <a:latin typeface="Arial" panose="020B0604020202020204" pitchFamily="34" charset="0"/>
                 <a:ea typeface="Yu Gothic" panose="020B0400000000000000" pitchFamily="34" charset="-128"/>
                 <a:cs typeface="Arial" panose="020B0604020202020204" pitchFamily="34" charset="0"/>
@@ -45665,8 +46013,8 @@
         </p:nvSpPr>
         <p:spPr>
           <a:xfrm>
-            <a:off x="3225374" y="6080551"/>
-            <a:ext cx="1090166" cy="830997"/>
+            <a:off x="3466674" y="6321851"/>
+            <a:ext cx="1090166" cy="584775"/>
           </a:xfrm>
           <a:prstGeom prst="rect">
             <a:avLst/>
@@ -45774,7 +46122,7 @@
           </a:lstStyle>
           <a:p>
             <a:r>
-              <a:rPr lang="en-US" sz="4800" b="1" dirty="0">
+              <a:rPr lang="en-US" sz="3200" b="1" dirty="0">
                 <a:latin typeface="Arial" panose="020B0604020202020204" pitchFamily="34" charset="0"/>
                 <a:ea typeface="Yu Gothic" panose="020B0400000000000000" pitchFamily="34" charset="-128"/>
                 <a:cs typeface="Arial" panose="020B0604020202020204" pitchFamily="34" charset="0"/>

--- a/Summary/figures.pptx
+++ b/Summary/figures.pptx
@@ -5,7 +5,7 @@
     <p:sldMasterId id="2147483672" r:id="rId1"/>
   </p:sldMasterIdLst>
   <p:notesMasterIdLst>
-    <p:notesMasterId r:id="rId19"/>
+    <p:notesMasterId r:id="rId18"/>
   </p:notesMasterIdLst>
   <p:sldIdLst>
     <p:sldId id="422" r:id="rId2"/>
@@ -20,11 +20,10 @@
     <p:sldId id="524" r:id="rId11"/>
     <p:sldId id="525" r:id="rId12"/>
     <p:sldId id="518" r:id="rId13"/>
-    <p:sldId id="513" r:id="rId14"/>
-    <p:sldId id="519" r:id="rId15"/>
-    <p:sldId id="521" r:id="rId16"/>
-    <p:sldId id="522" r:id="rId17"/>
-    <p:sldId id="523" r:id="rId18"/>
+    <p:sldId id="519" r:id="rId14"/>
+    <p:sldId id="521" r:id="rId15"/>
+    <p:sldId id="522" r:id="rId16"/>
+    <p:sldId id="523" r:id="rId17"/>
   </p:sldIdLst>
   <p:sldSz cx="22860000" cy="22860000"/>
   <p:notesSz cx="6858000" cy="9144000"/>
@@ -140,7 +139,6 @@
             <p14:sldId id="524"/>
             <p14:sldId id="525"/>
             <p14:sldId id="518"/>
-            <p14:sldId id="513"/>
             <p14:sldId id="519"/>
             <p14:sldId id="521"/>
             <p14:sldId id="522"/>
@@ -154,6 +152,14 @@
     </p:ext>
   </p:extLst>
 </p:presentation>
+</file>
+
+<file path=ppt/revisionInfo.xml><?xml version="1.0" encoding="utf-8"?>
+<p1510:revInfo xmlns:a="http://schemas.openxmlformats.org/drawingml/2006/main" xmlns:r="http://schemas.openxmlformats.org/officeDocument/2006/relationships" xmlns:p1510="http://schemas.microsoft.com/office/powerpoint/2015/10/main">
+  <p1510:revLst>
+    <p1510:client id="{AF93BDFE-E7B1-48C6-AB80-E9611D4B0775}" v="4" dt="2026-03-25T22:45:32.638"/>
+  </p1510:revLst>
+</p1510:revInfo>
 </file>
 
 <file path=ppt/changesInfos/changesInfo1.xml><?xml version="1.0" encoding="utf-8"?>
@@ -195,572 +201,158 @@
             <ac:picMk id="3" creationId="{2C5A7DC2-EC6A-664E-08EB-A4697CF4145D}"/>
           </ac:picMkLst>
         </pc:picChg>
-        <pc:picChg chg="del">
-          <ac:chgData name="Jonathan Mah" userId="5261b2f2f3e51194" providerId="LiveId" clId="{A5D66373-2F43-49C1-972D-0BE2B77E544E}" dt="2026-03-06T11:36:47.296" v="0" actId="478"/>
-          <ac:picMkLst>
-            <pc:docMk/>
-            <pc:sldMk cId="2756291988" sldId="517"/>
-            <ac:picMk id="5" creationId="{D28E183A-4C31-52B0-0727-47F9DC3F9356}"/>
-          </ac:picMkLst>
-        </pc:picChg>
       </pc:sldChg>
     </pc:docChg>
   </pc:docChgLst>
   <pc:docChgLst>
     <pc:chgData name="Jonathan Mah" userId="5261b2f2f3e51194" providerId="LiveId" clId="{DB9BCF8B-E91B-491C-8171-92D39BBC1534}"/>
-    <pc:docChg chg="undo redo custSel addSld modSld sldOrd modSection">
-      <pc:chgData name="Jonathan Mah" userId="5261b2f2f3e51194" providerId="LiveId" clId="{DB9BCF8B-E91B-491C-8171-92D39BBC1534}" dt="2026-03-06T15:36:09.862" v="1228" actId="1038"/>
+    <pc:docChg chg="undo redo custSel addSld delSld modSld sldOrd modSection">
+      <pc:chgData name="Jonathan Mah" userId="5261b2f2f3e51194" providerId="LiveId" clId="{DB9BCF8B-E91B-491C-8171-92D39BBC1534}" dt="2026-03-25T23:37:21.726" v="1455" actId="1076"/>
       <pc:docMkLst>
         <pc:docMk/>
       </pc:docMkLst>
-      <pc:sldChg chg="addSp modSp mod">
-        <pc:chgData name="Jonathan Mah" userId="5261b2f2f3e51194" providerId="LiveId" clId="{DB9BCF8B-E91B-491C-8171-92D39BBC1534}" dt="2026-02-07T09:40:32.378" v="18" actId="14100"/>
-        <pc:sldMkLst>
-          <pc:docMk/>
-          <pc:sldMk cId="1601061642" sldId="512"/>
-        </pc:sldMkLst>
-        <pc:spChg chg="mod">
-          <ac:chgData name="Jonathan Mah" userId="5261b2f2f3e51194" providerId="LiveId" clId="{DB9BCF8B-E91B-491C-8171-92D39BBC1534}" dt="2026-02-07T09:40:32.378" v="18" actId="14100"/>
-          <ac:spMkLst>
-            <pc:docMk/>
-            <pc:sldMk cId="1601061642" sldId="512"/>
-            <ac:spMk id="11" creationId="{2D320388-1D65-6692-A4B2-EE9163C7B475}"/>
-          </ac:spMkLst>
-        </pc:spChg>
-        <pc:spChg chg="mod">
-          <ac:chgData name="Jonathan Mah" userId="5261b2f2f3e51194" providerId="LiveId" clId="{DB9BCF8B-E91B-491C-8171-92D39BBC1534}" dt="2026-02-07T09:40:29.820" v="17" actId="14100"/>
-          <ac:spMkLst>
-            <pc:docMk/>
-            <pc:sldMk cId="1601061642" sldId="512"/>
-            <ac:spMk id="12" creationId="{E924E80D-ED2B-72E9-A108-EA9118C67D64}"/>
-          </ac:spMkLst>
-        </pc:spChg>
-        <pc:spChg chg="add mod">
-          <ac:chgData name="Jonathan Mah" userId="5261b2f2f3e51194" providerId="LiveId" clId="{DB9BCF8B-E91B-491C-8171-92D39BBC1534}" dt="2026-02-07T09:07:35.897" v="12" actId="14100"/>
-          <ac:spMkLst>
-            <pc:docMk/>
-            <pc:sldMk cId="1601061642" sldId="512"/>
-            <ac:spMk id="14" creationId="{B49E3BD8-47F9-9CFE-D129-00772C3D2154}"/>
-          </ac:spMkLst>
-        </pc:spChg>
-        <pc:spChg chg="mod">
-          <ac:chgData name="Jonathan Mah" userId="5261b2f2f3e51194" providerId="LiveId" clId="{DB9BCF8B-E91B-491C-8171-92D39BBC1534}" dt="2026-02-07T09:07:50.982" v="16" actId="1038"/>
-          <ac:spMkLst>
-            <pc:docMk/>
-            <pc:sldMk cId="1601061642" sldId="512"/>
-            <ac:spMk id="15" creationId="{A47FAB82-5C7F-868E-D96A-59F79C9F82E3}"/>
-          </ac:spMkLst>
-        </pc:spChg>
-        <pc:spChg chg="mod">
-          <ac:chgData name="Jonathan Mah" userId="5261b2f2f3e51194" providerId="LiveId" clId="{DB9BCF8B-E91B-491C-8171-92D39BBC1534}" dt="2026-02-07T09:07:50.982" v="16" actId="1038"/>
-          <ac:spMkLst>
-            <pc:docMk/>
-            <pc:sldMk cId="1601061642" sldId="512"/>
-            <ac:spMk id="17" creationId="{65A0B147-7A62-6C7D-0F90-055F2D36001A}"/>
-          </ac:spMkLst>
-        </pc:spChg>
-        <pc:spChg chg="mod">
-          <ac:chgData name="Jonathan Mah" userId="5261b2f2f3e51194" providerId="LiveId" clId="{DB9BCF8B-E91B-491C-8171-92D39BBC1534}" dt="2026-02-07T09:07:50.982" v="16" actId="1038"/>
-          <ac:spMkLst>
-            <pc:docMk/>
-            <pc:sldMk cId="1601061642" sldId="512"/>
-            <ac:spMk id="21" creationId="{E4E7989C-1CF6-28FB-4967-C8FA080C3C9D}"/>
-          </ac:spMkLst>
-        </pc:spChg>
-        <pc:spChg chg="mod">
-          <ac:chgData name="Jonathan Mah" userId="5261b2f2f3e51194" providerId="LiveId" clId="{DB9BCF8B-E91B-491C-8171-92D39BBC1534}" dt="2026-02-07T09:07:50.982" v="16" actId="1038"/>
-          <ac:spMkLst>
-            <pc:docMk/>
-            <pc:sldMk cId="1601061642" sldId="512"/>
-            <ac:spMk id="24" creationId="{ACB078C8-4156-AC31-CFB4-4A88C1B62115}"/>
-          </ac:spMkLst>
-        </pc:spChg>
-        <pc:spChg chg="mod">
-          <ac:chgData name="Jonathan Mah" userId="5261b2f2f3e51194" providerId="LiveId" clId="{DB9BCF8B-E91B-491C-8171-92D39BBC1534}" dt="2026-02-07T09:07:50.982" v="16" actId="1038"/>
-          <ac:spMkLst>
-            <pc:docMk/>
-            <pc:sldMk cId="1601061642" sldId="512"/>
-            <ac:spMk id="26" creationId="{9DD70F72-77C1-8EA5-551A-235221EC6AD1}"/>
-          </ac:spMkLst>
-        </pc:spChg>
-        <pc:spChg chg="mod">
-          <ac:chgData name="Jonathan Mah" userId="5261b2f2f3e51194" providerId="LiveId" clId="{DB9BCF8B-E91B-491C-8171-92D39BBC1534}" dt="2026-02-07T09:07:50.982" v="16" actId="1038"/>
-          <ac:spMkLst>
-            <pc:docMk/>
-            <pc:sldMk cId="1601061642" sldId="512"/>
-            <ac:spMk id="29" creationId="{614BC83A-B477-6D06-899E-F7C4E8AF95F0}"/>
-          </ac:spMkLst>
-        </pc:spChg>
-        <pc:spChg chg="mod">
-          <ac:chgData name="Jonathan Mah" userId="5261b2f2f3e51194" providerId="LiveId" clId="{DB9BCF8B-E91B-491C-8171-92D39BBC1534}" dt="2026-02-07T09:07:50.982" v="16" actId="1038"/>
-          <ac:spMkLst>
-            <pc:docMk/>
-            <pc:sldMk cId="1601061642" sldId="512"/>
-            <ac:spMk id="30" creationId="{FC1A50AB-9A7A-68FF-2DA1-3CC4AC4B2C10}"/>
-          </ac:spMkLst>
-        </pc:spChg>
-        <pc:spChg chg="mod">
-          <ac:chgData name="Jonathan Mah" userId="5261b2f2f3e51194" providerId="LiveId" clId="{DB9BCF8B-E91B-491C-8171-92D39BBC1534}" dt="2026-02-07T09:07:50.982" v="16" actId="1038"/>
-          <ac:spMkLst>
-            <pc:docMk/>
-            <pc:sldMk cId="1601061642" sldId="512"/>
-            <ac:spMk id="32" creationId="{CC1498EC-B75D-AB9B-E34F-27C8DCF3AA8B}"/>
-          </ac:spMkLst>
-        </pc:spChg>
-        <pc:spChg chg="mod">
-          <ac:chgData name="Jonathan Mah" userId="5261b2f2f3e51194" providerId="LiveId" clId="{DB9BCF8B-E91B-491C-8171-92D39BBC1534}" dt="2026-02-07T09:07:50.982" v="16" actId="1038"/>
-          <ac:spMkLst>
-            <pc:docMk/>
-            <pc:sldMk cId="1601061642" sldId="512"/>
-            <ac:spMk id="34" creationId="{C88BE0C8-A8C9-57F6-6D7A-DC0D805FC6F9}"/>
-          </ac:spMkLst>
-        </pc:spChg>
-        <pc:spChg chg="mod">
-          <ac:chgData name="Jonathan Mah" userId="5261b2f2f3e51194" providerId="LiveId" clId="{DB9BCF8B-E91B-491C-8171-92D39BBC1534}" dt="2026-02-07T09:07:50.982" v="16" actId="1038"/>
-          <ac:spMkLst>
-            <pc:docMk/>
-            <pc:sldMk cId="1601061642" sldId="512"/>
-            <ac:spMk id="37" creationId="{FD72681F-F124-DEDC-B8D1-0989DA413C51}"/>
-          </ac:spMkLst>
-        </pc:spChg>
-      </pc:sldChg>
-      <pc:sldChg chg="addSp delSp modSp mod ord">
-        <pc:chgData name="Jonathan Mah" userId="5261b2f2f3e51194" providerId="LiveId" clId="{DB9BCF8B-E91B-491C-8171-92D39BBC1534}" dt="2026-02-18T16:32:11.251" v="462" actId="1038"/>
+      <pc:sldChg chg="del">
+        <pc:chgData name="Jonathan Mah" userId="5261b2f2f3e51194" providerId="LiveId" clId="{DB9BCF8B-E91B-491C-8171-92D39BBC1534}" dt="2026-03-25T22:41:59.304" v="1249" actId="47"/>
         <pc:sldMkLst>
           <pc:docMk/>
           <pc:sldMk cId="1663706368" sldId="513"/>
         </pc:sldMkLst>
-        <pc:spChg chg="mod">
-          <ac:chgData name="Jonathan Mah" userId="5261b2f2f3e51194" providerId="LiveId" clId="{DB9BCF8B-E91B-491C-8171-92D39BBC1534}" dt="2026-02-18T16:31:32.476" v="252" actId="1038"/>
-          <ac:spMkLst>
-            <pc:docMk/>
-            <pc:sldMk cId="1663706368" sldId="513"/>
-            <ac:spMk id="5" creationId="{4E1540C7-14CA-40F0-5CA8-92853EDA5393}"/>
-          </ac:spMkLst>
-        </pc:spChg>
-        <pc:spChg chg="mod">
-          <ac:chgData name="Jonathan Mah" userId="5261b2f2f3e51194" providerId="LiveId" clId="{DB9BCF8B-E91B-491C-8171-92D39BBC1534}" dt="2026-02-18T16:32:11.251" v="462" actId="1038"/>
-          <ac:spMkLst>
-            <pc:docMk/>
-            <pc:sldMk cId="1663706368" sldId="513"/>
-            <ac:spMk id="6" creationId="{9160EB17-883E-0B7B-2B81-484C6D598F42}"/>
-          </ac:spMkLst>
-        </pc:spChg>
-        <pc:spChg chg="add mod">
-          <ac:chgData name="Jonathan Mah" userId="5261b2f2f3e51194" providerId="LiveId" clId="{DB9BCF8B-E91B-491C-8171-92D39BBC1534}" dt="2026-02-18T16:28:23.714" v="214" actId="1076"/>
-          <ac:spMkLst>
-            <pc:docMk/>
-            <pc:sldMk cId="1663706368" sldId="513"/>
-            <ac:spMk id="19" creationId="{4F3CF3B3-25BC-33DB-C891-F584E2566307}"/>
-          </ac:spMkLst>
-        </pc:spChg>
-        <pc:spChg chg="add mod">
-          <ac:chgData name="Jonathan Mah" userId="5261b2f2f3e51194" providerId="LiveId" clId="{DB9BCF8B-E91B-491C-8171-92D39BBC1534}" dt="2026-02-18T16:29:02.948" v="227" actId="20577"/>
-          <ac:spMkLst>
-            <pc:docMk/>
-            <pc:sldMk cId="1663706368" sldId="513"/>
-            <ac:spMk id="20" creationId="{E8CF6B0E-911C-599A-EAF8-949FD3151EE7}"/>
-          </ac:spMkLst>
-        </pc:spChg>
-        <pc:spChg chg="mod">
-          <ac:chgData name="Jonathan Mah" userId="5261b2f2f3e51194" providerId="LiveId" clId="{DB9BCF8B-E91B-491C-8171-92D39BBC1534}" dt="2026-02-18T16:32:11.251" v="462" actId="1038"/>
-          <ac:spMkLst>
-            <pc:docMk/>
-            <pc:sldMk cId="1663706368" sldId="513"/>
-            <ac:spMk id="24" creationId="{84993CD9-337D-ADA4-91F3-2DFE8B8865A9}"/>
-          </ac:spMkLst>
-        </pc:spChg>
-        <pc:spChg chg="mod">
-          <ac:chgData name="Jonathan Mah" userId="5261b2f2f3e51194" providerId="LiveId" clId="{DB9BCF8B-E91B-491C-8171-92D39BBC1534}" dt="2026-02-18T16:31:32.476" v="252" actId="1038"/>
-          <ac:spMkLst>
-            <pc:docMk/>
-            <pc:sldMk cId="1663706368" sldId="513"/>
-            <ac:spMk id="25" creationId="{F465BAA8-681A-D5C6-C32D-4E34EFC3096B}"/>
-          </ac:spMkLst>
-        </pc:spChg>
-        <pc:spChg chg="mod">
-          <ac:chgData name="Jonathan Mah" userId="5261b2f2f3e51194" providerId="LiveId" clId="{DB9BCF8B-E91B-491C-8171-92D39BBC1534}" dt="2026-02-18T16:32:11.251" v="462" actId="1038"/>
-          <ac:spMkLst>
-            <pc:docMk/>
-            <pc:sldMk cId="1663706368" sldId="513"/>
-            <ac:spMk id="26" creationId="{F7AE871F-00DB-AAEE-90F9-99616EEAE020}"/>
-          </ac:spMkLst>
-        </pc:spChg>
-        <pc:spChg chg="mod">
-          <ac:chgData name="Jonathan Mah" userId="5261b2f2f3e51194" providerId="LiveId" clId="{DB9BCF8B-E91B-491C-8171-92D39BBC1534}" dt="2026-02-18T16:32:11.251" v="462" actId="1038"/>
-          <ac:spMkLst>
-            <pc:docMk/>
-            <pc:sldMk cId="1663706368" sldId="513"/>
-            <ac:spMk id="35" creationId="{8DED98B2-9791-8335-20DF-EACF4A4DFD3B}"/>
-          </ac:spMkLst>
-        </pc:spChg>
-        <pc:spChg chg="mod">
-          <ac:chgData name="Jonathan Mah" userId="5261b2f2f3e51194" providerId="LiveId" clId="{DB9BCF8B-E91B-491C-8171-92D39BBC1534}" dt="2026-02-18T16:32:03.729" v="411" actId="1037"/>
-          <ac:spMkLst>
-            <pc:docMk/>
-            <pc:sldMk cId="1663706368" sldId="513"/>
-            <ac:spMk id="38" creationId="{F8A67FEB-D131-C70E-38AC-81199569CBCB}"/>
-          </ac:spMkLst>
-        </pc:spChg>
-        <pc:spChg chg="mod">
-          <ac:chgData name="Jonathan Mah" userId="5261b2f2f3e51194" providerId="LiveId" clId="{DB9BCF8B-E91B-491C-8171-92D39BBC1534}" dt="2026-02-18T16:32:03.729" v="411" actId="1037"/>
-          <ac:spMkLst>
-            <pc:docMk/>
-            <pc:sldMk cId="1663706368" sldId="513"/>
-            <ac:spMk id="39" creationId="{75181FFF-4A0B-C576-74C0-3EC0FC1BBCF3}"/>
-          </ac:spMkLst>
-        </pc:spChg>
-        <pc:spChg chg="mod">
-          <ac:chgData name="Jonathan Mah" userId="5261b2f2f3e51194" providerId="LiveId" clId="{DB9BCF8B-E91B-491C-8171-92D39BBC1534}" dt="2026-02-18T16:32:11.251" v="462" actId="1038"/>
-          <ac:spMkLst>
-            <pc:docMk/>
-            <pc:sldMk cId="1663706368" sldId="513"/>
-            <ac:spMk id="549" creationId="{0D0F3972-67EB-D5F8-FB48-ABE1642E691D}"/>
-          </ac:spMkLst>
-        </pc:spChg>
-        <pc:spChg chg="mod">
-          <ac:chgData name="Jonathan Mah" userId="5261b2f2f3e51194" providerId="LiveId" clId="{DB9BCF8B-E91B-491C-8171-92D39BBC1534}" dt="2026-02-18T16:32:11.251" v="462" actId="1038"/>
-          <ac:spMkLst>
-            <pc:docMk/>
-            <pc:sldMk cId="1663706368" sldId="513"/>
-            <ac:spMk id="550" creationId="{AA2181C5-EFDD-C2F3-7168-C6356D1B66DF}"/>
-          </ac:spMkLst>
-        </pc:spChg>
-        <pc:spChg chg="mod">
-          <ac:chgData name="Jonathan Mah" userId="5261b2f2f3e51194" providerId="LiveId" clId="{DB9BCF8B-E91B-491C-8171-92D39BBC1534}" dt="2026-02-18T16:32:11.251" v="462" actId="1038"/>
-          <ac:spMkLst>
-            <pc:docMk/>
-            <pc:sldMk cId="1663706368" sldId="513"/>
-            <ac:spMk id="553" creationId="{68CF7246-BBE2-E326-411D-4267B73A82B3}"/>
-          </ac:spMkLst>
-        </pc:spChg>
-        <pc:spChg chg="mod">
-          <ac:chgData name="Jonathan Mah" userId="5261b2f2f3e51194" providerId="LiveId" clId="{DB9BCF8B-E91B-491C-8171-92D39BBC1534}" dt="2026-02-18T16:32:11.251" v="462" actId="1038"/>
-          <ac:spMkLst>
-            <pc:docMk/>
-            <pc:sldMk cId="1663706368" sldId="513"/>
-            <ac:spMk id="555" creationId="{20DFA889-14F4-AE23-80BC-7C6C7AF62347}"/>
-          </ac:spMkLst>
-        </pc:spChg>
-        <pc:spChg chg="mod">
-          <ac:chgData name="Jonathan Mah" userId="5261b2f2f3e51194" providerId="LiveId" clId="{DB9BCF8B-E91B-491C-8171-92D39BBC1534}" dt="2026-02-18T16:32:11.251" v="462" actId="1038"/>
-          <ac:spMkLst>
-            <pc:docMk/>
-            <pc:sldMk cId="1663706368" sldId="513"/>
-            <ac:spMk id="607" creationId="{699ADAEC-A47E-DBDF-C35F-1E56C289782A}"/>
-          </ac:spMkLst>
-        </pc:spChg>
-        <pc:spChg chg="mod">
-          <ac:chgData name="Jonathan Mah" userId="5261b2f2f3e51194" providerId="LiveId" clId="{DB9BCF8B-E91B-491C-8171-92D39BBC1534}" dt="2026-02-18T16:31:32.476" v="252" actId="1038"/>
-          <ac:spMkLst>
-            <pc:docMk/>
-            <pc:sldMk cId="1663706368" sldId="513"/>
-            <ac:spMk id="608" creationId="{54E1AFF0-1B4E-9352-2401-CCA98F2E5134}"/>
-          </ac:spMkLst>
-        </pc:spChg>
-        <pc:spChg chg="mod">
-          <ac:chgData name="Jonathan Mah" userId="5261b2f2f3e51194" providerId="LiveId" clId="{DB9BCF8B-E91B-491C-8171-92D39BBC1534}" dt="2026-02-18T16:32:11.251" v="462" actId="1038"/>
-          <ac:spMkLst>
-            <pc:docMk/>
-            <pc:sldMk cId="1663706368" sldId="513"/>
-            <ac:spMk id="609" creationId="{C11E6C42-96FD-12BA-6421-2DA0BF9EF21A}"/>
-          </ac:spMkLst>
-        </pc:spChg>
-        <pc:spChg chg="mod">
-          <ac:chgData name="Jonathan Mah" userId="5261b2f2f3e51194" providerId="LiveId" clId="{DB9BCF8B-E91B-491C-8171-92D39BBC1534}" dt="2026-02-18T16:31:32.476" v="252" actId="1038"/>
-          <ac:spMkLst>
-            <pc:docMk/>
-            <pc:sldMk cId="1663706368" sldId="513"/>
-            <ac:spMk id="610" creationId="{11865559-E351-B484-FB2D-0405E5E1652C}"/>
-          </ac:spMkLst>
-        </pc:spChg>
-        <pc:cxnChg chg="mod">
-          <ac:chgData name="Jonathan Mah" userId="5261b2f2f3e51194" providerId="LiveId" clId="{DB9BCF8B-E91B-491C-8171-92D39BBC1534}" dt="2026-02-18T16:31:55.584" v="376" actId="1037"/>
-          <ac:cxnSpMkLst>
-            <pc:docMk/>
-            <pc:sldMk cId="1663706368" sldId="513"/>
-            <ac:cxnSpMk id="21" creationId="{182D8AB6-C14D-E017-B126-EC80F544ED56}"/>
-          </ac:cxnSpMkLst>
-        </pc:cxnChg>
-        <pc:cxnChg chg="mod">
-          <ac:chgData name="Jonathan Mah" userId="5261b2f2f3e51194" providerId="LiveId" clId="{DB9BCF8B-E91B-491C-8171-92D39BBC1534}" dt="2026-02-18T16:31:55.584" v="376" actId="1037"/>
-          <ac:cxnSpMkLst>
-            <pc:docMk/>
-            <pc:sldMk cId="1663706368" sldId="513"/>
-            <ac:cxnSpMk id="22" creationId="{4714411E-9E15-C044-FD20-FDD95B3CD81F}"/>
-          </ac:cxnSpMkLst>
-        </pc:cxnChg>
-        <pc:cxnChg chg="mod">
-          <ac:chgData name="Jonathan Mah" userId="5261b2f2f3e51194" providerId="LiveId" clId="{DB9BCF8B-E91B-491C-8171-92D39BBC1534}" dt="2026-02-18T16:26:44.115" v="156" actId="14100"/>
-          <ac:cxnSpMkLst>
-            <pc:docMk/>
-            <pc:sldMk cId="1663706368" sldId="513"/>
-            <ac:cxnSpMk id="54" creationId="{E5EA91F2-176D-298A-EAFF-7550A8200703}"/>
-          </ac:cxnSpMkLst>
-        </pc:cxnChg>
-        <pc:cxnChg chg="mod">
-          <ac:chgData name="Jonathan Mah" userId="5261b2f2f3e51194" providerId="LiveId" clId="{DB9BCF8B-E91B-491C-8171-92D39BBC1534}" dt="2026-02-18T16:27:19.793" v="175" actId="1035"/>
-          <ac:cxnSpMkLst>
-            <pc:docMk/>
-            <pc:sldMk cId="1663706368" sldId="513"/>
-            <ac:cxnSpMk id="563" creationId="{20F222D5-9752-5E7E-9A52-739900DA19F6}"/>
-          </ac:cxnSpMkLst>
-        </pc:cxnChg>
-        <pc:cxnChg chg="mod">
-          <ac:chgData name="Jonathan Mah" userId="5261b2f2f3e51194" providerId="LiveId" clId="{DB9BCF8B-E91B-491C-8171-92D39BBC1534}" dt="2026-02-18T16:27:26.063" v="179" actId="14100"/>
-          <ac:cxnSpMkLst>
-            <pc:docMk/>
-            <pc:sldMk cId="1663706368" sldId="513"/>
-            <ac:cxnSpMk id="564" creationId="{9FB62C51-2790-B690-650A-B143CE5F4095}"/>
-          </ac:cxnSpMkLst>
-        </pc:cxnChg>
-        <pc:cxnChg chg="mod">
-          <ac:chgData name="Jonathan Mah" userId="5261b2f2f3e51194" providerId="LiveId" clId="{DB9BCF8B-E91B-491C-8171-92D39BBC1534}" dt="2026-02-18T16:27:27.969" v="180" actId="14100"/>
-          <ac:cxnSpMkLst>
-            <pc:docMk/>
-            <pc:sldMk cId="1663706368" sldId="513"/>
-            <ac:cxnSpMk id="565" creationId="{9BDB81DF-E3C8-8441-EBD5-6FB7720377F9}"/>
-          </ac:cxnSpMkLst>
-        </pc:cxnChg>
-        <pc:cxnChg chg="mod">
-          <ac:chgData name="Jonathan Mah" userId="5261b2f2f3e51194" providerId="LiveId" clId="{DB9BCF8B-E91B-491C-8171-92D39BBC1534}" dt="2026-02-18T16:31:55.584" v="376" actId="1037"/>
-          <ac:cxnSpMkLst>
-            <pc:docMk/>
-            <pc:sldMk cId="1663706368" sldId="513"/>
-            <ac:cxnSpMk id="570" creationId="{0EDCD4B7-8670-7730-79C3-3C47661FC309}"/>
-          </ac:cxnSpMkLst>
-        </pc:cxnChg>
-        <pc:cxnChg chg="mod">
-          <ac:chgData name="Jonathan Mah" userId="5261b2f2f3e51194" providerId="LiveId" clId="{DB9BCF8B-E91B-491C-8171-92D39BBC1534}" dt="2026-02-18T16:31:55.584" v="376" actId="1037"/>
-          <ac:cxnSpMkLst>
-            <pc:docMk/>
-            <pc:sldMk cId="1663706368" sldId="513"/>
-            <ac:cxnSpMk id="571" creationId="{5AC7219F-555D-3B5A-F8DB-45AB55019A25}"/>
-          </ac:cxnSpMkLst>
-        </pc:cxnChg>
-        <pc:cxnChg chg="mod">
-          <ac:chgData name="Jonathan Mah" userId="5261b2f2f3e51194" providerId="LiveId" clId="{DB9BCF8B-E91B-491C-8171-92D39BBC1534}" dt="2026-02-18T16:31:55.584" v="376" actId="1037"/>
-          <ac:cxnSpMkLst>
-            <pc:docMk/>
-            <pc:sldMk cId="1663706368" sldId="513"/>
-            <ac:cxnSpMk id="572" creationId="{8F5BB56F-0992-196D-DD5D-B3E9C2E88702}"/>
-          </ac:cxnSpMkLst>
-        </pc:cxnChg>
-        <pc:cxnChg chg="mod">
-          <ac:chgData name="Jonathan Mah" userId="5261b2f2f3e51194" providerId="LiveId" clId="{DB9BCF8B-E91B-491C-8171-92D39BBC1534}" dt="2026-02-18T16:31:55.584" v="376" actId="1037"/>
-          <ac:cxnSpMkLst>
-            <pc:docMk/>
-            <pc:sldMk cId="1663706368" sldId="513"/>
-            <ac:cxnSpMk id="574" creationId="{26DB2F09-18C3-A96E-3539-2165FC1394D0}"/>
-          </ac:cxnSpMkLst>
-        </pc:cxnChg>
-        <pc:cxnChg chg="mod">
-          <ac:chgData name="Jonathan Mah" userId="5261b2f2f3e51194" providerId="LiveId" clId="{DB9BCF8B-E91B-491C-8171-92D39BBC1534}" dt="2026-02-18T16:31:55.584" v="376" actId="1037"/>
-          <ac:cxnSpMkLst>
-            <pc:docMk/>
-            <pc:sldMk cId="1663706368" sldId="513"/>
-            <ac:cxnSpMk id="575" creationId="{3E892C6B-AA7F-B1F0-CDD8-EEAAC360894D}"/>
-          </ac:cxnSpMkLst>
-        </pc:cxnChg>
-        <pc:cxnChg chg="mod">
-          <ac:chgData name="Jonathan Mah" userId="5261b2f2f3e51194" providerId="LiveId" clId="{DB9BCF8B-E91B-491C-8171-92D39BBC1534}" dt="2026-02-18T16:31:55.584" v="376" actId="1037"/>
-          <ac:cxnSpMkLst>
-            <pc:docMk/>
-            <pc:sldMk cId="1663706368" sldId="513"/>
-            <ac:cxnSpMk id="577" creationId="{CA8E42D5-03A2-1786-AC06-B3FCE1CF58E4}"/>
-          </ac:cxnSpMkLst>
-        </pc:cxnChg>
-        <pc:cxnChg chg="mod">
-          <ac:chgData name="Jonathan Mah" userId="5261b2f2f3e51194" providerId="LiveId" clId="{DB9BCF8B-E91B-491C-8171-92D39BBC1534}" dt="2026-02-18T16:31:55.584" v="376" actId="1037"/>
-          <ac:cxnSpMkLst>
-            <pc:docMk/>
-            <pc:sldMk cId="1663706368" sldId="513"/>
-            <ac:cxnSpMk id="595" creationId="{E338373A-0901-6E9A-295D-C9E42A4A909E}"/>
-          </ac:cxnSpMkLst>
-        </pc:cxnChg>
-        <pc:cxnChg chg="mod">
-          <ac:chgData name="Jonathan Mah" userId="5261b2f2f3e51194" providerId="LiveId" clId="{DB9BCF8B-E91B-491C-8171-92D39BBC1534}" dt="2026-02-18T16:31:55.584" v="376" actId="1037"/>
-          <ac:cxnSpMkLst>
-            <pc:docMk/>
-            <pc:sldMk cId="1663706368" sldId="513"/>
-            <ac:cxnSpMk id="601" creationId="{011358C1-7000-F30F-78B1-D43856F98EE6}"/>
-          </ac:cxnSpMkLst>
-        </pc:cxnChg>
       </pc:sldChg>
       <pc:sldChg chg="addSp delSp modSp new mod">
-        <pc:chgData name="Jonathan Mah" userId="5261b2f2f3e51194" providerId="LiveId" clId="{DB9BCF8B-E91B-491C-8171-92D39BBC1534}" dt="2026-02-07T10:12:02.908" v="68" actId="1038"/>
-        <pc:sldMkLst>
-          <pc:docMk/>
-          <pc:sldMk cId="2756291988" sldId="517"/>
-        </pc:sldMkLst>
-        <pc:spChg chg="add mod">
-          <ac:chgData name="Jonathan Mah" userId="5261b2f2f3e51194" providerId="LiveId" clId="{DB9BCF8B-E91B-491C-8171-92D39BBC1534}" dt="2026-02-07T10:07:30.654" v="49" actId="1038"/>
-          <ac:spMkLst>
-            <pc:docMk/>
-            <pc:sldMk cId="2756291988" sldId="517"/>
-            <ac:spMk id="6" creationId="{BBD625A1-63C5-F220-8C4F-1BA0CA7ED464}"/>
-          </ac:spMkLst>
-        </pc:spChg>
-        <pc:spChg chg="add mod">
-          <ac:chgData name="Jonathan Mah" userId="5261b2f2f3e51194" providerId="LiveId" clId="{DB9BCF8B-E91B-491C-8171-92D39BBC1534}" dt="2026-02-07T10:07:30.654" v="49" actId="1038"/>
-          <ac:spMkLst>
-            <pc:docMk/>
-            <pc:sldMk cId="2756291988" sldId="517"/>
-            <ac:spMk id="7" creationId="{42EB3CC8-DA01-9759-CCD5-B16E85F984DD}"/>
-          </ac:spMkLst>
-        </pc:spChg>
-        <pc:spChg chg="add mod">
-          <ac:chgData name="Jonathan Mah" userId="5261b2f2f3e51194" providerId="LiveId" clId="{DB9BCF8B-E91B-491C-8171-92D39BBC1534}" dt="2026-02-07T10:12:02.908" v="68" actId="1038"/>
-          <ac:spMkLst>
-            <pc:docMk/>
-            <pc:sldMk cId="2756291988" sldId="517"/>
-            <ac:spMk id="12" creationId="{0FFD421C-D1E8-8F90-7ED3-85F22A785B99}"/>
-          </ac:spMkLst>
-        </pc:spChg>
-        <pc:spChg chg="add mod">
-          <ac:chgData name="Jonathan Mah" userId="5261b2f2f3e51194" providerId="LiveId" clId="{DB9BCF8B-E91B-491C-8171-92D39BBC1534}" dt="2026-02-07T10:12:02.908" v="68" actId="1038"/>
-          <ac:spMkLst>
-            <pc:docMk/>
-            <pc:sldMk cId="2756291988" sldId="517"/>
-            <ac:spMk id="13" creationId="{D9495A65-3C63-A456-11A8-F67AABA29678}"/>
-          </ac:spMkLst>
-        </pc:spChg>
-        <pc:picChg chg="add mod">
-          <ac:chgData name="Jonathan Mah" userId="5261b2f2f3e51194" providerId="LiveId" clId="{DB9BCF8B-E91B-491C-8171-92D39BBC1534}" dt="2026-02-07T10:11:28.661" v="51" actId="1076"/>
-          <ac:picMkLst>
-            <pc:docMk/>
-            <pc:sldMk cId="2756291988" sldId="517"/>
-            <ac:picMk id="9" creationId="{6FFE4216-2D14-64CF-9F23-AA06B883F175}"/>
-          </ac:picMkLst>
-        </pc:picChg>
-      </pc:sldChg>
-      <pc:sldChg chg="addSp delSp modSp new mod">
-        <pc:chgData name="Jonathan Mah" userId="5261b2f2f3e51194" providerId="LiveId" clId="{DB9BCF8B-E91B-491C-8171-92D39BBC1534}" dt="2026-02-07T16:49:27.034" v="135" actId="1037"/>
+        <pc:chgData name="Jonathan Mah" userId="5261b2f2f3e51194" providerId="LiveId" clId="{DB9BCF8B-E91B-491C-8171-92D39BBC1534}" dt="2026-03-25T23:37:21.726" v="1455" actId="1076"/>
         <pc:sldMkLst>
           <pc:docMk/>
           <pc:sldMk cId="3447533911" sldId="518"/>
         </pc:sldMkLst>
-        <pc:spChg chg="add mod">
-          <ac:chgData name="Jonathan Mah" userId="5261b2f2f3e51194" providerId="LiveId" clId="{DB9BCF8B-E91B-491C-8171-92D39BBC1534}" dt="2026-02-07T16:37:31.306" v="112" actId="1076"/>
-          <ac:spMkLst>
-            <pc:docMk/>
-            <pc:sldMk cId="3447533911" sldId="518"/>
-            <ac:spMk id="6" creationId="{7DCFED7E-AE25-0684-919A-91F9CA94736B}"/>
-          </ac:spMkLst>
-        </pc:spChg>
-        <pc:spChg chg="add mod">
-          <ac:chgData name="Jonathan Mah" userId="5261b2f2f3e51194" providerId="LiveId" clId="{DB9BCF8B-E91B-491C-8171-92D39BBC1534}" dt="2026-02-07T16:37:31.306" v="112" actId="1076"/>
-          <ac:spMkLst>
-            <pc:docMk/>
-            <pc:sldMk cId="3447533911" sldId="518"/>
-            <ac:spMk id="7" creationId="{CC49BF9A-8664-D775-C73A-A297EAF95E5C}"/>
-          </ac:spMkLst>
-        </pc:spChg>
-        <pc:spChg chg="add mod">
-          <ac:chgData name="Jonathan Mah" userId="5261b2f2f3e51194" providerId="LiveId" clId="{DB9BCF8B-E91B-491C-8171-92D39BBC1534}" dt="2026-02-07T16:37:31.306" v="112" actId="1076"/>
-          <ac:spMkLst>
-            <pc:docMk/>
-            <pc:sldMk cId="3447533911" sldId="518"/>
-            <ac:spMk id="8" creationId="{ABDA08F7-8D43-187D-C0F4-74BB164B302E}"/>
-          </ac:spMkLst>
-        </pc:spChg>
-        <pc:spChg chg="add mod">
-          <ac:chgData name="Jonathan Mah" userId="5261b2f2f3e51194" providerId="LiveId" clId="{DB9BCF8B-E91B-491C-8171-92D39BBC1534}" dt="2026-02-07T16:37:31.306" v="112" actId="1076"/>
-          <ac:spMkLst>
-            <pc:docMk/>
-            <pc:sldMk cId="3447533911" sldId="518"/>
-            <ac:spMk id="9" creationId="{13636D3B-3F7E-43BF-5255-F890864D76C8}"/>
-          </ac:spMkLst>
-        </pc:spChg>
-        <pc:spChg chg="add mod">
-          <ac:chgData name="Jonathan Mah" userId="5261b2f2f3e51194" providerId="LiveId" clId="{DB9BCF8B-E91B-491C-8171-92D39BBC1534}" dt="2026-02-07T16:37:31.306" v="112" actId="1076"/>
-          <ac:spMkLst>
-            <pc:docMk/>
-            <pc:sldMk cId="3447533911" sldId="518"/>
-            <ac:spMk id="10" creationId="{527BFA4B-4F6D-011A-B88B-DD5AE48380C7}"/>
-          </ac:spMkLst>
-        </pc:spChg>
-        <pc:spChg chg="add mod">
-          <ac:chgData name="Jonathan Mah" userId="5261b2f2f3e51194" providerId="LiveId" clId="{DB9BCF8B-E91B-491C-8171-92D39BBC1534}" dt="2026-02-07T16:49:27.034" v="135" actId="1037"/>
-          <ac:spMkLst>
-            <pc:docMk/>
-            <pc:sldMk cId="3447533911" sldId="518"/>
-            <ac:spMk id="11" creationId="{A0E0BEFD-6D21-AC98-8ABE-124EABA2663D}"/>
-          </ac:spMkLst>
-        </pc:spChg>
-        <pc:spChg chg="add mod">
-          <ac:chgData name="Jonathan Mah" userId="5261b2f2f3e51194" providerId="LiveId" clId="{DB9BCF8B-E91B-491C-8171-92D39BBC1534}" dt="2026-02-07T16:49:27.034" v="135" actId="1037"/>
+        <pc:spChg chg="mod">
+          <ac:chgData name="Jonathan Mah" userId="5261b2f2f3e51194" providerId="LiveId" clId="{DB9BCF8B-E91B-491C-8171-92D39BBC1534}" dt="2026-03-25T21:53:47.927" v="1239" actId="1076"/>
           <ac:spMkLst>
             <pc:docMk/>
             <pc:sldMk cId="3447533911" sldId="518"/>
             <ac:spMk id="13" creationId="{BA3CE13A-4BC0-6F8A-E8D7-F89223C4B80C}"/>
           </ac:spMkLst>
         </pc:spChg>
-        <pc:spChg chg="add mod">
-          <ac:chgData name="Jonathan Mah" userId="5261b2f2f3e51194" providerId="LiveId" clId="{DB9BCF8B-E91B-491C-8171-92D39BBC1534}" dt="2026-02-07T16:49:27.034" v="135" actId="1037"/>
+        <pc:spChg chg="mod">
+          <ac:chgData name="Jonathan Mah" userId="5261b2f2f3e51194" providerId="LiveId" clId="{DB9BCF8B-E91B-491C-8171-92D39BBC1534}" dt="2026-03-25T21:53:47.927" v="1239" actId="1076"/>
           <ac:spMkLst>
             <pc:docMk/>
             <pc:sldMk cId="3447533911" sldId="518"/>
             <ac:spMk id="14" creationId="{BA5C2273-0936-0A08-0DD7-0D874F81A86A}"/>
           </ac:spMkLst>
         </pc:spChg>
-        <pc:spChg chg="add mod">
-          <ac:chgData name="Jonathan Mah" userId="5261b2f2f3e51194" providerId="LiveId" clId="{DB9BCF8B-E91B-491C-8171-92D39BBC1534}" dt="2026-02-07T16:49:27.034" v="135" actId="1037"/>
-          <ac:spMkLst>
+        <pc:picChg chg="add del mod ord">
+          <ac:chgData name="Jonathan Mah" userId="5261b2f2f3e51194" providerId="LiveId" clId="{DB9BCF8B-E91B-491C-8171-92D39BBC1534}" dt="2026-03-25T21:54:02.965" v="1240" actId="478"/>
+          <ac:picMkLst>
             <pc:docMk/>
             <pc:sldMk cId="3447533911" sldId="518"/>
-            <ac:spMk id="15" creationId="{2AEE357E-0E04-7CA9-79B2-516492109805}"/>
-          </ac:spMkLst>
-        </pc:spChg>
-        <pc:spChg chg="add mod">
-          <ac:chgData name="Jonathan Mah" userId="5261b2f2f3e51194" providerId="LiveId" clId="{DB9BCF8B-E91B-491C-8171-92D39BBC1534}" dt="2026-02-07T16:49:27.034" v="135" actId="1037"/>
-          <ac:spMkLst>
-            <pc:docMk/>
-            <pc:sldMk cId="3447533911" sldId="518"/>
-            <ac:spMk id="16" creationId="{95605F93-FD62-B530-BD1E-48BDE9FF44B1}"/>
-          </ac:spMkLst>
-        </pc:spChg>
-        <pc:picChg chg="add mod">
-          <ac:chgData name="Jonathan Mah" userId="5261b2f2f3e51194" providerId="LiveId" clId="{DB9BCF8B-E91B-491C-8171-92D39BBC1534}" dt="2026-02-07T16:49:08.946" v="116" actId="1076"/>
+            <ac:picMk id="3" creationId="{98C9F226-9388-3300-C487-C83134EAEA67}"/>
+          </ac:picMkLst>
+        </pc:picChg>
+        <pc:picChg chg="add del mod">
+          <ac:chgData name="Jonathan Mah" userId="5261b2f2f3e51194" providerId="LiveId" clId="{DB9BCF8B-E91B-491C-8171-92D39BBC1534}" dt="2026-03-25T21:53:09.947" v="1229" actId="478"/>
           <ac:picMkLst>
             <pc:docMk/>
             <pc:sldMk cId="3447533911" sldId="518"/>
             <ac:picMk id="5" creationId="{76A7918C-F868-1FD2-ED7B-F36107A25E09}"/>
           </ac:picMkLst>
         </pc:picChg>
-        <pc:picChg chg="add mod ord">
-          <ac:chgData name="Jonathan Mah" userId="5261b2f2f3e51194" providerId="LiveId" clId="{DB9BCF8B-E91B-491C-8171-92D39BBC1534}" dt="2026-02-07T16:37:31.306" v="112" actId="1076"/>
+        <pc:picChg chg="del">
+          <ac:chgData name="Jonathan Mah" userId="5261b2f2f3e51194" providerId="LiveId" clId="{DB9BCF8B-E91B-491C-8171-92D39BBC1534}" dt="2026-03-25T23:36:57.923" v="1444" actId="478"/>
           <ac:picMkLst>
             <pc:docMk/>
             <pc:sldMk cId="3447533911" sldId="518"/>
             <ac:picMk id="12" creationId="{7EA3F937-6B5B-B028-8F85-4C27A4F64848}"/>
           </ac:picMkLst>
         </pc:picChg>
+        <pc:picChg chg="add del mod">
+          <ac:chgData name="Jonathan Mah" userId="5261b2f2f3e51194" providerId="LiveId" clId="{DB9BCF8B-E91B-491C-8171-92D39BBC1534}" dt="2026-03-25T21:54:14.361" v="1244" actId="478"/>
+          <ac:picMkLst>
+            <pc:docMk/>
+            <pc:sldMk cId="3447533911" sldId="518"/>
+            <ac:picMk id="17" creationId="{7922C24E-4DC7-47C0-4FF3-934F799C0688}"/>
+          </ac:picMkLst>
+        </pc:picChg>
+        <pc:picChg chg="add mod ord">
+          <ac:chgData name="Jonathan Mah" userId="5261b2f2f3e51194" providerId="LiveId" clId="{DB9BCF8B-E91B-491C-8171-92D39BBC1534}" dt="2026-03-25T21:56:14.011" v="1248" actId="1076"/>
+          <ac:picMkLst>
+            <pc:docMk/>
+            <pc:sldMk cId="3447533911" sldId="518"/>
+            <ac:picMk id="19" creationId="{DF550CA2-A406-342A-BFDD-9B5A868241B4}"/>
+          </ac:picMkLst>
+        </pc:picChg>
+        <pc:picChg chg="add mod ord">
+          <ac:chgData name="Jonathan Mah" userId="5261b2f2f3e51194" providerId="LiveId" clId="{DB9BCF8B-E91B-491C-8171-92D39BBC1534}" dt="2026-03-25T23:37:21.726" v="1455" actId="1076"/>
+          <ac:picMkLst>
+            <pc:docMk/>
+            <pc:sldMk cId="3447533911" sldId="518"/>
+            <ac:picMk id="21" creationId="{8A0FAE3F-C4F4-F3C9-B535-34E1FB9A9CD5}"/>
+          </ac:picMkLst>
+        </pc:picChg>
       </pc:sldChg>
-      <pc:sldChg chg="addSp delSp modSp add mod">
-        <pc:chgData name="Jonathan Mah" userId="5261b2f2f3e51194" providerId="LiveId" clId="{DB9BCF8B-E91B-491C-8171-92D39BBC1534}" dt="2026-02-18T16:59:04.859" v="1027" actId="14100"/>
+      <pc:sldChg chg="addSp modSp mod">
+        <pc:chgData name="Jonathan Mah" userId="5261b2f2f3e51194" providerId="LiveId" clId="{DB9BCF8B-E91B-491C-8171-92D39BBC1534}" dt="2026-03-25T22:46:06.253" v="1437" actId="1076"/>
         <pc:sldMkLst>
           <pc:docMk/>
           <pc:sldMk cId="2539197924" sldId="519"/>
         </pc:sldMkLst>
         <pc:spChg chg="add mod">
-          <ac:chgData name="Jonathan Mah" userId="5261b2f2f3e51194" providerId="LiveId" clId="{DB9BCF8B-E91B-491C-8171-92D39BBC1534}" dt="2026-02-18T16:58:11.132" v="1017" actId="207"/>
+          <ac:chgData name="Jonathan Mah" userId="5261b2f2f3e51194" providerId="LiveId" clId="{DB9BCF8B-E91B-491C-8171-92D39BBC1534}" dt="2026-03-25T22:43:07.713" v="1319" actId="1076"/>
+          <ac:spMkLst>
+            <pc:docMk/>
+            <pc:sldMk cId="2539197924" sldId="519"/>
+            <ac:spMk id="4" creationId="{45BE83D9-0901-790F-C335-67392430DBF5}"/>
+          </ac:spMkLst>
+        </pc:spChg>
+        <pc:spChg chg="add mod">
+          <ac:chgData name="Jonathan Mah" userId="5261b2f2f3e51194" providerId="LiveId" clId="{DB9BCF8B-E91B-491C-8171-92D39BBC1534}" dt="2026-03-25T22:43:07.713" v="1319" actId="1076"/>
+          <ac:spMkLst>
+            <pc:docMk/>
+            <pc:sldMk cId="2539197924" sldId="519"/>
+            <ac:spMk id="5" creationId="{7CE18130-3E01-6536-9924-05E96FBCAD96}"/>
+          </ac:spMkLst>
+        </pc:spChg>
+        <pc:spChg chg="add mod">
+          <ac:chgData name="Jonathan Mah" userId="5261b2f2f3e51194" providerId="LiveId" clId="{DB9BCF8B-E91B-491C-8171-92D39BBC1534}" dt="2026-03-25T22:44:47.523" v="1361" actId="20577"/>
+          <ac:spMkLst>
+            <pc:docMk/>
+            <pc:sldMk cId="2539197924" sldId="519"/>
+            <ac:spMk id="6" creationId="{345385C6-425D-3B2A-EAE2-2DF85A727844}"/>
+          </ac:spMkLst>
+        </pc:spChg>
+        <pc:spChg chg="add mod">
+          <ac:chgData name="Jonathan Mah" userId="5261b2f2f3e51194" providerId="LiveId" clId="{DB9BCF8B-E91B-491C-8171-92D39BBC1534}" dt="2026-03-25T22:44:52.288" v="1366" actId="20577"/>
+          <ac:spMkLst>
+            <pc:docMk/>
+            <pc:sldMk cId="2539197924" sldId="519"/>
+            <ac:spMk id="7" creationId="{702FB91F-3125-88C6-67FF-FA234FD9A05C}"/>
+          </ac:spMkLst>
+        </pc:spChg>
+        <pc:spChg chg="add mod">
+          <ac:chgData name="Jonathan Mah" userId="5261b2f2f3e51194" providerId="LiveId" clId="{DB9BCF8B-E91B-491C-8171-92D39BBC1534}" dt="2026-03-25T22:46:03.847" v="1436" actId="1076"/>
+          <ac:spMkLst>
+            <pc:docMk/>
+            <pc:sldMk cId="2539197924" sldId="519"/>
+            <ac:spMk id="8" creationId="{4F2B3C38-B5A3-CACD-639F-C1E95A53A5C4}"/>
+          </ac:spMkLst>
+        </pc:spChg>
+        <pc:spChg chg="mod">
+          <ac:chgData name="Jonathan Mah" userId="5261b2f2f3e51194" providerId="LiveId" clId="{DB9BCF8B-E91B-491C-8171-92D39BBC1534}" dt="2026-03-25T22:43:38.432" v="1334" actId="1035"/>
           <ac:spMkLst>
             <pc:docMk/>
             <pc:sldMk cId="2539197924" sldId="519"/>
             <ac:spMk id="11" creationId="{4673E64F-6E77-00CD-6CF2-D15E853CA723}"/>
           </ac:spMkLst>
         </pc:spChg>
-        <pc:spChg chg="add mod">
-          <ac:chgData name="Jonathan Mah" userId="5261b2f2f3e51194" providerId="LiveId" clId="{DB9BCF8B-E91B-491C-8171-92D39BBC1534}" dt="2026-02-18T16:58:45.595" v="1022" actId="1076"/>
+        <pc:spChg chg="mod">
+          <ac:chgData name="Jonathan Mah" userId="5261b2f2f3e51194" providerId="LiveId" clId="{DB9BCF8B-E91B-491C-8171-92D39BBC1534}" dt="2026-03-25T22:43:38.432" v="1334" actId="1035"/>
           <ac:spMkLst>
             <pc:docMk/>
             <pc:sldMk cId="2539197924" sldId="519"/>
             <ac:spMk id="12" creationId="{3E6FEDB1-C7FA-D7F4-E59E-663953FD7115}"/>
           </ac:spMkLst>
         </pc:spChg>
-        <pc:spChg chg="add mod">
-          <ac:chgData name="Jonathan Mah" userId="5261b2f2f3e51194" providerId="LiveId" clId="{DB9BCF8B-E91B-491C-8171-92D39BBC1534}" dt="2026-02-18T16:58:31.683" v="1019" actId="207"/>
+        <pc:spChg chg="mod">
+          <ac:chgData name="Jonathan Mah" userId="5261b2f2f3e51194" providerId="LiveId" clId="{DB9BCF8B-E91B-491C-8171-92D39BBC1534}" dt="2026-03-25T22:43:38.432" v="1334" actId="1035"/>
           <ac:spMkLst>
             <pc:docMk/>
             <pc:sldMk cId="2539197924" sldId="519"/>
@@ -768,7 +360,7 @@
           </ac:spMkLst>
         </pc:spChg>
         <pc:spChg chg="mod">
-          <ac:chgData name="Jonathan Mah" userId="5261b2f2f3e51194" providerId="LiveId" clId="{DB9BCF8B-E91B-491C-8171-92D39BBC1534}" dt="2026-02-18T16:57:23.745" v="1014" actId="1038"/>
+          <ac:chgData name="Jonathan Mah" userId="5261b2f2f3e51194" providerId="LiveId" clId="{DB9BCF8B-E91B-491C-8171-92D39BBC1534}" dt="2026-03-25T22:42:41.608" v="1314" actId="1037"/>
           <ac:spMkLst>
             <pc:docMk/>
             <pc:sldMk cId="2539197924" sldId="519"/>
@@ -776,183 +368,135 @@
           </ac:spMkLst>
         </pc:spChg>
         <pc:spChg chg="mod">
-          <ac:chgData name="Jonathan Mah" userId="5261b2f2f3e51194" providerId="LiveId" clId="{DB9BCF8B-E91B-491C-8171-92D39BBC1534}" dt="2026-02-18T16:57:23.745" v="1014" actId="1038"/>
-          <ac:spMkLst>
-            <pc:docMk/>
-            <pc:sldMk cId="2539197924" sldId="519"/>
-            <ac:spMk id="20" creationId="{26EFA0CB-5B59-78A1-E21F-3C4BBC60629C}"/>
-          </ac:spMkLst>
-        </pc:spChg>
-        <pc:spChg chg="add del mod">
-          <ac:chgData name="Jonathan Mah" userId="5261b2f2f3e51194" providerId="LiveId" clId="{DB9BCF8B-E91B-491C-8171-92D39BBC1534}" dt="2026-02-18T16:59:00.667" v="1024" actId="14100"/>
+          <ac:chgData name="Jonathan Mah" userId="5261b2f2f3e51194" providerId="LiveId" clId="{DB9BCF8B-E91B-491C-8171-92D39BBC1534}" dt="2026-03-25T22:43:38.432" v="1334" actId="1035"/>
           <ac:spMkLst>
             <pc:docMk/>
             <pc:sldMk cId="2539197924" sldId="519"/>
             <ac:spMk id="29" creationId="{D9C4A69C-2F5A-C74D-E288-127EB93B7013}"/>
           </ac:spMkLst>
         </pc:spChg>
-        <pc:spChg chg="add mod">
-          <ac:chgData name="Jonathan Mah" userId="5261b2f2f3e51194" providerId="LiveId" clId="{DB9BCF8B-E91B-491C-8171-92D39BBC1534}" dt="2026-02-18T16:59:04.859" v="1027" actId="14100"/>
+        <pc:spChg chg="mod">
+          <ac:chgData name="Jonathan Mah" userId="5261b2f2f3e51194" providerId="LiveId" clId="{DB9BCF8B-E91B-491C-8171-92D39BBC1534}" dt="2026-03-25T22:43:38.432" v="1334" actId="1035"/>
           <ac:spMkLst>
             <pc:docMk/>
             <pc:sldMk cId="2539197924" sldId="519"/>
             <ac:spMk id="31" creationId="{DF1FBC5B-CB60-D10F-0B0C-044C75AB1B17}"/>
           </ac:spMkLst>
         </pc:spChg>
-        <pc:spChg chg="add mod">
-          <ac:chgData name="Jonathan Mah" userId="5261b2f2f3e51194" providerId="LiveId" clId="{DB9BCF8B-E91B-491C-8171-92D39BBC1534}" dt="2026-02-18T16:41:13.107" v="620" actId="1076"/>
+        <pc:spChg chg="mod">
+          <ac:chgData name="Jonathan Mah" userId="5261b2f2f3e51194" providerId="LiveId" clId="{DB9BCF8B-E91B-491C-8171-92D39BBC1534}" dt="2026-03-25T22:43:38.432" v="1334" actId="1035"/>
           <ac:spMkLst>
             <pc:docMk/>
             <pc:sldMk cId="2539197924" sldId="519"/>
             <ac:spMk id="33" creationId="{BC5CFE60-7CDC-A5CC-4580-7260E2DEFE2C}"/>
           </ac:spMkLst>
         </pc:spChg>
-        <pc:spChg chg="add mod">
-          <ac:chgData name="Jonathan Mah" userId="5261b2f2f3e51194" providerId="LiveId" clId="{DB9BCF8B-E91B-491C-8171-92D39BBC1534}" dt="2026-02-18T16:58:09.003" v="1016" actId="207"/>
-          <ac:spMkLst>
-            <pc:docMk/>
-            <pc:sldMk cId="2539197924" sldId="519"/>
-            <ac:spMk id="45" creationId="{2961B189-D038-2246-C4D3-4699108FD165}"/>
-          </ac:spMkLst>
-        </pc:spChg>
-        <pc:spChg chg="add mod">
-          <ac:chgData name="Jonathan Mah" userId="5261b2f2f3e51194" providerId="LiveId" clId="{DB9BCF8B-E91B-491C-8171-92D39BBC1534}" dt="2026-02-18T16:58:45.951" v="1023" actId="1076"/>
+        <pc:spChg chg="mod">
+          <ac:chgData name="Jonathan Mah" userId="5261b2f2f3e51194" providerId="LiveId" clId="{DB9BCF8B-E91B-491C-8171-92D39BBC1534}" dt="2026-03-25T22:42:41.608" v="1314" actId="1037"/>
           <ac:spMkLst>
             <pc:docMk/>
             <pc:sldMk cId="2539197924" sldId="519"/>
             <ac:spMk id="46" creationId="{8E3229D3-5E02-4035-E9F2-A07AF7596170}"/>
           </ac:spMkLst>
         </pc:spChg>
-        <pc:spChg chg="add mod">
-          <ac:chgData name="Jonathan Mah" userId="5261b2f2f3e51194" providerId="LiveId" clId="{DB9BCF8B-E91B-491C-8171-92D39BBC1534}" dt="2026-02-18T16:58:31.683" v="1019" actId="207"/>
+        <pc:spChg chg="mod">
+          <ac:chgData name="Jonathan Mah" userId="5261b2f2f3e51194" providerId="LiveId" clId="{DB9BCF8B-E91B-491C-8171-92D39BBC1534}" dt="2026-03-25T22:42:16.169" v="1286" actId="1038"/>
           <ac:spMkLst>
             <pc:docMk/>
             <pc:sldMk cId="2539197924" sldId="519"/>
-            <ac:spMk id="47" creationId="{9ECAD82C-1410-AB64-39D3-34D9D6FB8684}"/>
+            <ac:spMk id="55" creationId="{2B858FCE-A8F0-CF7F-ED57-A96D0C27F71E}"/>
           </ac:spMkLst>
         </pc:spChg>
-        <pc:spChg chg="add mod">
-          <ac:chgData name="Jonathan Mah" userId="5261b2f2f3e51194" providerId="LiveId" clId="{DB9BCF8B-E91B-491C-8171-92D39BBC1534}" dt="2026-02-18T16:46:48.486" v="830" actId="1076"/>
+        <pc:spChg chg="mod">
+          <ac:chgData name="Jonathan Mah" userId="5261b2f2f3e51194" providerId="LiveId" clId="{DB9BCF8B-E91B-491C-8171-92D39BBC1534}" dt="2026-03-25T22:42:41.608" v="1314" actId="1037"/>
           <ac:spMkLst>
             <pc:docMk/>
             <pc:sldMk cId="2539197924" sldId="519"/>
             <ac:spMk id="56" creationId="{6E8DA381-AB04-D3D3-2737-05E252105667}"/>
           </ac:spMkLst>
         </pc:spChg>
-        <pc:spChg chg="add mod">
-          <ac:chgData name="Jonathan Mah" userId="5261b2f2f3e51194" providerId="LiveId" clId="{DB9BCF8B-E91B-491C-8171-92D39BBC1534}" dt="2026-02-18T16:49:43.236" v="861" actId="14100"/>
+        <pc:spChg chg="mod">
+          <ac:chgData name="Jonathan Mah" userId="5261b2f2f3e51194" providerId="LiveId" clId="{DB9BCF8B-E91B-491C-8171-92D39BBC1534}" dt="2026-03-25T22:42:41.608" v="1314" actId="1037"/>
           <ac:spMkLst>
             <pc:docMk/>
             <pc:sldMk cId="2539197924" sldId="519"/>
             <ac:spMk id="57" creationId="{CA52712B-45A6-FF99-137F-63692735A9AB}"/>
           </ac:spMkLst>
         </pc:spChg>
-        <pc:spChg chg="add mod">
-          <ac:chgData name="Jonathan Mah" userId="5261b2f2f3e51194" providerId="LiveId" clId="{DB9BCF8B-E91B-491C-8171-92D39BBC1534}" dt="2026-02-18T16:49:41.092" v="860" actId="14100"/>
+        <pc:spChg chg="mod">
+          <ac:chgData name="Jonathan Mah" userId="5261b2f2f3e51194" providerId="LiveId" clId="{DB9BCF8B-E91B-491C-8171-92D39BBC1534}" dt="2026-03-25T22:42:41.608" v="1314" actId="1037"/>
           <ac:spMkLst>
             <pc:docMk/>
             <pc:sldMk cId="2539197924" sldId="519"/>
             <ac:spMk id="58" creationId="{1F46A9F2-E49A-5698-4473-3CE1CCCECFC4}"/>
           </ac:spMkLst>
         </pc:spChg>
-        <pc:spChg chg="add mod">
-          <ac:chgData name="Jonathan Mah" userId="5261b2f2f3e51194" providerId="LiveId" clId="{DB9BCF8B-E91B-491C-8171-92D39BBC1534}" dt="2026-02-18T16:49:51.876" v="863" actId="14100"/>
-          <ac:spMkLst>
-            <pc:docMk/>
-            <pc:sldMk cId="2539197924" sldId="519"/>
-            <ac:spMk id="59" creationId="{393AD8A0-108F-1D89-361F-454C0CD405B5}"/>
-          </ac:spMkLst>
-        </pc:spChg>
-        <pc:spChg chg="add mod">
-          <ac:chgData name="Jonathan Mah" userId="5261b2f2f3e51194" providerId="LiveId" clId="{DB9BCF8B-E91B-491C-8171-92D39BBC1534}" dt="2026-02-18T16:49:47.741" v="862" actId="14100"/>
-          <ac:spMkLst>
-            <pc:docMk/>
-            <pc:sldMk cId="2539197924" sldId="519"/>
-            <ac:spMk id="60" creationId="{D5751036-A26A-E8C8-EE49-D6B8DAD9EAE4}"/>
-          </ac:spMkLst>
-        </pc:spChg>
-        <pc:spChg chg="add mod">
-          <ac:chgData name="Jonathan Mah" userId="5261b2f2f3e51194" providerId="LiveId" clId="{DB9BCF8B-E91B-491C-8171-92D39BBC1534}" dt="2026-02-18T16:46:48.486" v="830" actId="1076"/>
+        <pc:spChg chg="mod">
+          <ac:chgData name="Jonathan Mah" userId="5261b2f2f3e51194" providerId="LiveId" clId="{DB9BCF8B-E91B-491C-8171-92D39BBC1534}" dt="2026-03-25T22:42:41.608" v="1314" actId="1037"/>
           <ac:spMkLst>
             <pc:docMk/>
             <pc:sldMk cId="2539197924" sldId="519"/>
             <ac:spMk id="61" creationId="{8ABCBADA-2C1F-4F1D-3094-5DB30251B97A}"/>
           </ac:spMkLst>
         </pc:spChg>
-        <pc:spChg chg="add mod">
-          <ac:chgData name="Jonathan Mah" userId="5261b2f2f3e51194" providerId="LiveId" clId="{DB9BCF8B-E91B-491C-8171-92D39BBC1534}" dt="2026-02-18T16:48:58.317" v="852" actId="14100"/>
+        <pc:spChg chg="mod">
+          <ac:chgData name="Jonathan Mah" userId="5261b2f2f3e51194" providerId="LiveId" clId="{DB9BCF8B-E91B-491C-8171-92D39BBC1534}" dt="2026-03-25T22:42:16.169" v="1286" actId="1038"/>
           <ac:spMkLst>
             <pc:docMk/>
             <pc:sldMk cId="2539197924" sldId="519"/>
             <ac:spMk id="62" creationId="{C838240F-AF01-0D98-F725-3FF931D2CDDB}"/>
           </ac:spMkLst>
         </pc:spChg>
-        <pc:spChg chg="add mod">
-          <ac:chgData name="Jonathan Mah" userId="5261b2f2f3e51194" providerId="LiveId" clId="{DB9BCF8B-E91B-491C-8171-92D39BBC1534}" dt="2026-02-18T16:48:59.940" v="853" actId="14100"/>
+        <pc:spChg chg="mod">
+          <ac:chgData name="Jonathan Mah" userId="5261b2f2f3e51194" providerId="LiveId" clId="{DB9BCF8B-E91B-491C-8171-92D39BBC1534}" dt="2026-03-25T22:42:16.169" v="1286" actId="1038"/>
           <ac:spMkLst>
             <pc:docMk/>
             <pc:sldMk cId="2539197924" sldId="519"/>
             <ac:spMk id="63" creationId="{04D3E363-5EE1-5C72-6DF2-5CC225CC20F0}"/>
           </ac:spMkLst>
         </pc:spChg>
-        <pc:spChg chg="add mod">
-          <ac:chgData name="Jonathan Mah" userId="5261b2f2f3e51194" providerId="LiveId" clId="{DB9BCF8B-E91B-491C-8171-92D39BBC1534}" dt="2026-02-18T16:50:14.958" v="873" actId="1035"/>
-          <ac:spMkLst>
-            <pc:docMk/>
-            <pc:sldMk cId="2539197924" sldId="519"/>
-            <ac:spMk id="64" creationId="{39756112-0A0C-D342-6D48-907BE65B3731}"/>
-          </ac:spMkLst>
-        </pc:spChg>
-        <pc:spChg chg="add mod">
-          <ac:chgData name="Jonathan Mah" userId="5261b2f2f3e51194" providerId="LiveId" clId="{DB9BCF8B-E91B-491C-8171-92D39BBC1534}" dt="2026-02-18T16:50:14.958" v="873" actId="1035"/>
+        <pc:spChg chg="mod">
+          <ac:chgData name="Jonathan Mah" userId="5261b2f2f3e51194" providerId="LiveId" clId="{DB9BCF8B-E91B-491C-8171-92D39BBC1534}" dt="2026-03-25T22:43:38.432" v="1334" actId="1035"/>
           <ac:spMkLst>
             <pc:docMk/>
             <pc:sldMk cId="2539197924" sldId="519"/>
             <ac:spMk id="65" creationId="{521B8B53-F0CA-545A-F1C5-C1794DB4311A}"/>
           </ac:spMkLst>
         </pc:spChg>
-        <pc:spChg chg="add mod">
-          <ac:chgData name="Jonathan Mah" userId="5261b2f2f3e51194" providerId="LiveId" clId="{DB9BCF8B-E91B-491C-8171-92D39BBC1534}" dt="2026-02-18T16:50:14.958" v="873" actId="1035"/>
+        <pc:spChg chg="mod">
+          <ac:chgData name="Jonathan Mah" userId="5261b2f2f3e51194" providerId="LiveId" clId="{DB9BCF8B-E91B-491C-8171-92D39BBC1534}" dt="2026-03-25T22:43:38.432" v="1334" actId="1035"/>
           <ac:spMkLst>
             <pc:docMk/>
             <pc:sldMk cId="2539197924" sldId="519"/>
             <ac:spMk id="66" creationId="{59B8791C-37F7-36D8-9553-CC0BDD123CFA}"/>
           </ac:spMkLst>
         </pc:spChg>
-        <pc:spChg chg="add mod">
-          <ac:chgData name="Jonathan Mah" userId="5261b2f2f3e51194" providerId="LiveId" clId="{DB9BCF8B-E91B-491C-8171-92D39BBC1534}" dt="2026-02-18T16:50:14.958" v="873" actId="1035"/>
+        <pc:spChg chg="mod">
+          <ac:chgData name="Jonathan Mah" userId="5261b2f2f3e51194" providerId="LiveId" clId="{DB9BCF8B-E91B-491C-8171-92D39BBC1534}" dt="2026-03-25T22:43:38.432" v="1334" actId="1035"/>
           <ac:spMkLst>
             <pc:docMk/>
             <pc:sldMk cId="2539197924" sldId="519"/>
             <ac:spMk id="67" creationId="{EA152CB6-9056-75BB-3306-5F726704FDF4}"/>
           </ac:spMkLst>
         </pc:spChg>
-        <pc:spChg chg="add mod">
-          <ac:chgData name="Jonathan Mah" userId="5261b2f2f3e51194" providerId="LiveId" clId="{DB9BCF8B-E91B-491C-8171-92D39BBC1534}" dt="2026-02-18T16:50:14.958" v="873" actId="1035"/>
+        <pc:spChg chg="mod">
+          <ac:chgData name="Jonathan Mah" userId="5261b2f2f3e51194" providerId="LiveId" clId="{DB9BCF8B-E91B-491C-8171-92D39BBC1534}" dt="2026-03-25T22:43:38.432" v="1334" actId="1035"/>
           <ac:spMkLst>
             <pc:docMk/>
             <pc:sldMk cId="2539197924" sldId="519"/>
             <ac:spMk id="68" creationId="{D6DE076F-EC41-C275-4B07-0F268067F411}"/>
           </ac:spMkLst>
         </pc:spChg>
-        <pc:spChg chg="add mod">
-          <ac:chgData name="Jonathan Mah" userId="5261b2f2f3e51194" providerId="LiveId" clId="{DB9BCF8B-E91B-491C-8171-92D39BBC1534}" dt="2026-02-18T16:50:14.958" v="873" actId="1035"/>
-          <ac:spMkLst>
-            <pc:docMk/>
-            <pc:sldMk cId="2539197924" sldId="519"/>
-            <ac:spMk id="69" creationId="{72997DC6-3392-DE66-A1E5-B9009BA60C11}"/>
-          </ac:spMkLst>
-        </pc:spChg>
-        <pc:spChg chg="add mod">
-          <ac:chgData name="Jonathan Mah" userId="5261b2f2f3e51194" providerId="LiveId" clId="{DB9BCF8B-E91B-491C-8171-92D39BBC1534}" dt="2026-02-18T16:54:01.532" v="977" actId="1076"/>
+        <pc:spChg chg="mod">
+          <ac:chgData name="Jonathan Mah" userId="5261b2f2f3e51194" providerId="LiveId" clId="{DB9BCF8B-E91B-491C-8171-92D39BBC1534}" dt="2026-03-25T22:42:41.608" v="1314" actId="1037"/>
           <ac:spMkLst>
             <pc:docMk/>
             <pc:sldMk cId="2539197924" sldId="519"/>
             <ac:spMk id="70" creationId="{C6CF11AB-C4F8-3CF3-A928-1C191951A134}"/>
           </ac:spMkLst>
         </pc:spChg>
-        <pc:spChg chg="add mod">
-          <ac:chgData name="Jonathan Mah" userId="5261b2f2f3e51194" providerId="LiveId" clId="{DB9BCF8B-E91B-491C-8171-92D39BBC1534}" dt="2026-02-18T16:54:09.043" v="979" actId="1076"/>
+        <pc:spChg chg="mod">
+          <ac:chgData name="Jonathan Mah" userId="5261b2f2f3e51194" providerId="LiveId" clId="{DB9BCF8B-E91B-491C-8171-92D39BBC1534}" dt="2026-03-25T22:46:06.253" v="1437" actId="1076"/>
           <ac:spMkLst>
             <pc:docMk/>
             <pc:sldMk cId="2539197924" sldId="519"/>
@@ -960,149 +504,30 @@
           </ac:spMkLst>
         </pc:spChg>
         <pc:picChg chg="add mod">
-          <ac:chgData name="Jonathan Mah" userId="5261b2f2f3e51194" providerId="LiveId" clId="{DB9BCF8B-E91B-491C-8171-92D39BBC1534}" dt="2026-02-18T16:56:43.533" v="995" actId="14100"/>
+          <ac:chgData name="Jonathan Mah" userId="5261b2f2f3e51194" providerId="LiveId" clId="{DB9BCF8B-E91B-491C-8171-92D39BBC1534}" dt="2026-03-25T22:44:59.296" v="1367" actId="14100"/>
           <ac:picMkLst>
             <pc:docMk/>
             <pc:sldMk cId="2539197924" sldId="519"/>
-            <ac:picMk id="74" creationId="{01A60BC2-2D6B-20B8-1FD4-CC8CA8816303}"/>
-          </ac:picMkLst>
-        </pc:picChg>
-        <pc:picChg chg="add mod">
-          <ac:chgData name="Jonathan Mah" userId="5261b2f2f3e51194" providerId="LiveId" clId="{DB9BCF8B-E91B-491C-8171-92D39BBC1534}" dt="2026-02-18T16:56:53.780" v="996" actId="14100"/>
-          <ac:picMkLst>
-            <pc:docMk/>
-            <pc:sldMk cId="2539197924" sldId="519"/>
-            <ac:picMk id="76" creationId="{5C29D671-5071-657F-992E-138B9DD1869D}"/>
+            <ac:picMk id="3" creationId="{597EFDAB-6DB5-D669-E95C-64C5ACF1B48E}"/>
           </ac:picMkLst>
         </pc:picChg>
       </pc:sldChg>
-      <pc:sldChg chg="delSp modSp add mod">
-        <pc:chgData name="Jonathan Mah" userId="5261b2f2f3e51194" providerId="LiveId" clId="{DB9BCF8B-E91B-491C-8171-92D39BBC1534}" dt="2026-02-18T16:43:54.101" v="724" actId="1035"/>
-        <pc:sldMkLst>
-          <pc:docMk/>
-          <pc:sldMk cId="1175831132" sldId="520"/>
-        </pc:sldMkLst>
-        <pc:spChg chg="mod">
-          <ac:chgData name="Jonathan Mah" userId="5261b2f2f3e51194" providerId="LiveId" clId="{DB9BCF8B-E91B-491C-8171-92D39BBC1534}" dt="2026-02-18T16:43:54.101" v="724" actId="1035"/>
-          <ac:spMkLst>
-            <pc:docMk/>
-            <pc:sldMk cId="1175831132" sldId="520"/>
-            <ac:spMk id="538" creationId="{746EBC25-B703-1140-5D8C-63FE70657B4B}"/>
-          </ac:spMkLst>
-        </pc:spChg>
-        <pc:spChg chg="mod">
-          <ac:chgData name="Jonathan Mah" userId="5261b2f2f3e51194" providerId="LiveId" clId="{DB9BCF8B-E91B-491C-8171-92D39BBC1534}" dt="2026-02-18T16:43:54.101" v="724" actId="1035"/>
-          <ac:spMkLst>
-            <pc:docMk/>
-            <pc:sldMk cId="1175831132" sldId="520"/>
-            <ac:spMk id="539" creationId="{CC191566-D824-BF34-3DD4-7CDF5A6A1946}"/>
-          </ac:spMkLst>
-        </pc:spChg>
-        <pc:spChg chg="mod">
-          <ac:chgData name="Jonathan Mah" userId="5261b2f2f3e51194" providerId="LiveId" clId="{DB9BCF8B-E91B-491C-8171-92D39BBC1534}" dt="2026-02-18T16:43:54.101" v="724" actId="1035"/>
-          <ac:spMkLst>
-            <pc:docMk/>
-            <pc:sldMk cId="1175831132" sldId="520"/>
-            <ac:spMk id="540" creationId="{8F7549B5-C855-375E-5695-875B8385BDAD}"/>
-          </ac:spMkLst>
-        </pc:spChg>
-        <pc:cxnChg chg="mod">
-          <ac:chgData name="Jonathan Mah" userId="5261b2f2f3e51194" providerId="LiveId" clId="{DB9BCF8B-E91B-491C-8171-92D39BBC1534}" dt="2026-02-18T16:42:38.704" v="690" actId="14100"/>
-          <ac:cxnSpMkLst>
-            <pc:docMk/>
-            <pc:sldMk cId="1175831132" sldId="520"/>
-            <ac:cxnSpMk id="21" creationId="{E4775840-1379-B73C-277F-308C1E998407}"/>
-          </ac:cxnSpMkLst>
-        </pc:cxnChg>
-        <pc:cxnChg chg="mod">
-          <ac:chgData name="Jonathan Mah" userId="5261b2f2f3e51194" providerId="LiveId" clId="{DB9BCF8B-E91B-491C-8171-92D39BBC1534}" dt="2026-02-18T16:42:23.067" v="677" actId="1036"/>
-          <ac:cxnSpMkLst>
-            <pc:docMk/>
-            <pc:sldMk cId="1175831132" sldId="520"/>
-            <ac:cxnSpMk id="43" creationId="{7EF41AAB-D23D-D8ED-5FD8-B6E89769AF22}"/>
-          </ac:cxnSpMkLst>
-        </pc:cxnChg>
-        <pc:cxnChg chg="mod">
-          <ac:chgData name="Jonathan Mah" userId="5261b2f2f3e51194" providerId="LiveId" clId="{DB9BCF8B-E91B-491C-8171-92D39BBC1534}" dt="2026-02-18T16:42:44.407" v="694" actId="14100"/>
-          <ac:cxnSpMkLst>
-            <pc:docMk/>
-            <pc:sldMk cId="1175831132" sldId="520"/>
-            <ac:cxnSpMk id="54" creationId="{6662EE24-0966-4A15-9ABA-76F9F32A6687}"/>
-          </ac:cxnSpMkLst>
-        </pc:cxnChg>
-        <pc:cxnChg chg="mod">
-          <ac:chgData name="Jonathan Mah" userId="5261b2f2f3e51194" providerId="LiveId" clId="{DB9BCF8B-E91B-491C-8171-92D39BBC1534}" dt="2026-02-18T16:43:14.551" v="702" actId="14100"/>
-          <ac:cxnSpMkLst>
-            <pc:docMk/>
-            <pc:sldMk cId="1175831132" sldId="520"/>
-            <ac:cxnSpMk id="563" creationId="{63C8FDA3-3D40-8C03-5A78-CA5584CAF2B8}"/>
-          </ac:cxnSpMkLst>
-        </pc:cxnChg>
-        <pc:cxnChg chg="mod">
-          <ac:chgData name="Jonathan Mah" userId="5261b2f2f3e51194" providerId="LiveId" clId="{DB9BCF8B-E91B-491C-8171-92D39BBC1534}" dt="2026-02-18T16:42:33.784" v="689" actId="14100"/>
-          <ac:cxnSpMkLst>
-            <pc:docMk/>
-            <pc:sldMk cId="1175831132" sldId="520"/>
-            <ac:cxnSpMk id="564" creationId="{72A17520-9A96-D491-217A-A04EC424A641}"/>
-          </ac:cxnSpMkLst>
-        </pc:cxnChg>
-        <pc:cxnChg chg="mod">
-          <ac:chgData name="Jonathan Mah" userId="5261b2f2f3e51194" providerId="LiveId" clId="{DB9BCF8B-E91B-491C-8171-92D39BBC1534}" dt="2026-02-18T16:42:33.784" v="689" actId="14100"/>
-          <ac:cxnSpMkLst>
-            <pc:docMk/>
-            <pc:sldMk cId="1175831132" sldId="520"/>
-            <ac:cxnSpMk id="565" creationId="{F3063353-C777-BA39-C005-2A466E4F78E0}"/>
-          </ac:cxnSpMkLst>
-        </pc:cxnChg>
-      </pc:sldChg>
-      <pc:sldChg chg="addSp delSp modSp new mod">
-        <pc:chgData name="Jonathan Mah" userId="5261b2f2f3e51194" providerId="LiveId" clId="{DB9BCF8B-E91B-491C-8171-92D39BBC1534}" dt="2026-02-18T20:31:21.875" v="1063" actId="1037"/>
+      <pc:sldChg chg="addSp delSp modSp mod">
+        <pc:chgData name="Jonathan Mah" userId="5261b2f2f3e51194" providerId="LiveId" clId="{DB9BCF8B-E91B-491C-8171-92D39BBC1534}" dt="2026-03-25T23:35:07.845" v="1443" actId="478"/>
         <pc:sldMkLst>
           <pc:docMk/>
           <pc:sldMk cId="2504765150" sldId="521"/>
         </pc:sldMkLst>
-        <pc:spChg chg="add mod">
-          <ac:chgData name="Jonathan Mah" userId="5261b2f2f3e51194" providerId="LiveId" clId="{DB9BCF8B-E91B-491C-8171-92D39BBC1534}" dt="2026-02-18T20:30:54.951" v="1034"/>
-          <ac:spMkLst>
+        <pc:picChg chg="add del mod">
+          <ac:chgData name="Jonathan Mah" userId="5261b2f2f3e51194" providerId="LiveId" clId="{DB9BCF8B-E91B-491C-8171-92D39BBC1534}" dt="2026-03-25T23:35:07.273" v="1442" actId="931"/>
+          <ac:picMkLst>
             <pc:docMk/>
             <pc:sldMk cId="2504765150" sldId="521"/>
-            <ac:spMk id="4" creationId="{938C211B-7F27-04D0-AEF3-A99829D8F0B0}"/>
-          </ac:spMkLst>
-        </pc:spChg>
-        <pc:spChg chg="add mod">
-          <ac:chgData name="Jonathan Mah" userId="5261b2f2f3e51194" providerId="LiveId" clId="{DB9BCF8B-E91B-491C-8171-92D39BBC1534}" dt="2026-02-18T20:30:54.951" v="1034"/>
-          <ac:spMkLst>
-            <pc:docMk/>
-            <pc:sldMk cId="2504765150" sldId="521"/>
-            <ac:spMk id="5" creationId="{9344E134-DB25-1435-1F80-AE9EC97A1CAD}"/>
-          </ac:spMkLst>
-        </pc:spChg>
-        <pc:spChg chg="add mod">
-          <ac:chgData name="Jonathan Mah" userId="5261b2f2f3e51194" providerId="LiveId" clId="{DB9BCF8B-E91B-491C-8171-92D39BBC1534}" dt="2026-02-18T20:30:54.951" v="1034"/>
-          <ac:spMkLst>
-            <pc:docMk/>
-            <pc:sldMk cId="2504765150" sldId="521"/>
-            <ac:spMk id="6" creationId="{D100421F-DBCB-1115-3C97-63A846250854}"/>
-          </ac:spMkLst>
-        </pc:spChg>
-        <pc:spChg chg="add mod">
-          <ac:chgData name="Jonathan Mah" userId="5261b2f2f3e51194" providerId="LiveId" clId="{DB9BCF8B-E91B-491C-8171-92D39BBC1534}" dt="2026-02-18T20:30:54.951" v="1034"/>
-          <ac:spMkLst>
-            <pc:docMk/>
-            <pc:sldMk cId="2504765150" sldId="521"/>
-            <ac:spMk id="7" creationId="{5DC75018-13AE-91AF-ADF2-52005CAF8B08}"/>
-          </ac:spMkLst>
-        </pc:spChg>
-        <pc:spChg chg="add mod">
-          <ac:chgData name="Jonathan Mah" userId="5261b2f2f3e51194" providerId="LiveId" clId="{DB9BCF8B-E91B-491C-8171-92D39BBC1534}" dt="2026-02-18T20:30:54.951" v="1034"/>
-          <ac:spMkLst>
-            <pc:docMk/>
-            <pc:sldMk cId="2504765150" sldId="521"/>
-            <ac:spMk id="8" creationId="{F4F296B7-A555-E66D-5A23-03DE708F05A4}"/>
-          </ac:spMkLst>
-        </pc:spChg>
-        <pc:picChg chg="add mod ord">
-          <ac:chgData name="Jonathan Mah" userId="5261b2f2f3e51194" providerId="LiveId" clId="{DB9BCF8B-E91B-491C-8171-92D39BBC1534}" dt="2026-02-18T20:31:21.875" v="1063" actId="1037"/>
+            <ac:picMk id="3" creationId="{D663E820-768A-05EE-8FBF-FFB4F17919C0}"/>
+          </ac:picMkLst>
+        </pc:picChg>
+        <pc:picChg chg="add del">
+          <ac:chgData name="Jonathan Mah" userId="5261b2f2f3e51194" providerId="LiveId" clId="{DB9BCF8B-E91B-491C-8171-92D39BBC1534}" dt="2026-03-25T23:35:07.845" v="1443" actId="478"/>
           <ac:picMkLst>
             <pc:docMk/>
             <pc:sldMk cId="2504765150" sldId="521"/>
@@ -1180,59 +605,12 @@
             <ac:spMk id="13" creationId="{AF476960-00D8-93A1-C8B3-0CD3383A89BA}"/>
           </ac:spMkLst>
         </pc:spChg>
-        <pc:picChg chg="add del mod">
-          <ac:chgData name="Jonathan Mah" userId="5261b2f2f3e51194" providerId="LiveId" clId="{DB9BCF8B-E91B-491C-8171-92D39BBC1534}" dt="2026-03-06T15:35:39.055" v="1208" actId="478"/>
-          <ac:picMkLst>
-            <pc:docMk/>
-            <pc:sldMk cId="2894852093" sldId="522"/>
-            <ac:picMk id="3" creationId="{4C56842A-5FE0-33A3-C121-6A10B41C1824}"/>
-          </ac:picMkLst>
-        </pc:picChg>
         <pc:picChg chg="add mod ord">
           <ac:chgData name="Jonathan Mah" userId="5261b2f2f3e51194" providerId="LiveId" clId="{DB9BCF8B-E91B-491C-8171-92D39BBC1534}" dt="2026-03-06T15:36:01.479" v="1217" actId="1038"/>
           <ac:picMkLst>
             <pc:docMk/>
             <pc:sldMk cId="2894852093" sldId="522"/>
             <ac:picMk id="5" creationId="{B020E19B-B2ED-0C45-6282-30F29B0603EA}"/>
-          </ac:picMkLst>
-        </pc:picChg>
-        <pc:picChg chg="add del mod ord">
-          <ac:chgData name="Jonathan Mah" userId="5261b2f2f3e51194" providerId="LiveId" clId="{DB9BCF8B-E91B-491C-8171-92D39BBC1534}" dt="2026-03-06T15:34:51.558" v="1206" actId="478"/>
-          <ac:picMkLst>
-            <pc:docMk/>
-            <pc:sldMk cId="2894852093" sldId="522"/>
-            <ac:picMk id="14" creationId="{3E927412-E770-CD52-33DD-79D70D303334}"/>
-          </ac:picMkLst>
-        </pc:picChg>
-      </pc:sldChg>
-      <pc:sldChg chg="addSp delSp modSp new mod">
-        <pc:chgData name="Jonathan Mah" userId="5261b2f2f3e51194" providerId="LiveId" clId="{DB9BCF8B-E91B-491C-8171-92D39BBC1534}" dt="2026-02-18T20:34:24.213" v="1113" actId="20577"/>
-        <pc:sldMkLst>
-          <pc:docMk/>
-          <pc:sldMk cId="3642263179" sldId="523"/>
-        </pc:sldMkLst>
-        <pc:spChg chg="add mod">
-          <ac:chgData name="Jonathan Mah" userId="5261b2f2f3e51194" providerId="LiveId" clId="{DB9BCF8B-E91B-491C-8171-92D39BBC1534}" dt="2026-02-18T20:34:11.820" v="1109" actId="1076"/>
-          <ac:spMkLst>
-            <pc:docMk/>
-            <pc:sldMk cId="3642263179" sldId="523"/>
-            <ac:spMk id="6" creationId="{11BE9840-55BF-98DB-FAAD-64983898E0D7}"/>
-          </ac:spMkLst>
-        </pc:spChg>
-        <pc:spChg chg="add mod">
-          <ac:chgData name="Jonathan Mah" userId="5261b2f2f3e51194" providerId="LiveId" clId="{DB9BCF8B-E91B-491C-8171-92D39BBC1534}" dt="2026-02-18T20:34:24.213" v="1113" actId="20577"/>
-          <ac:spMkLst>
-            <pc:docMk/>
-            <pc:sldMk cId="3642263179" sldId="523"/>
-            <ac:spMk id="7" creationId="{0488E419-EC36-1325-1D4E-BAE2FCF27872}"/>
-          </ac:spMkLst>
-        </pc:spChg>
-        <pc:picChg chg="add mod">
-          <ac:chgData name="Jonathan Mah" userId="5261b2f2f3e51194" providerId="LiveId" clId="{DB9BCF8B-E91B-491C-8171-92D39BBC1534}" dt="2026-02-18T20:34:05.406" v="1107" actId="1076"/>
-          <ac:picMkLst>
-            <pc:docMk/>
-            <pc:sldMk cId="3642263179" sldId="523"/>
-            <ac:picMk id="5" creationId="{7D691359-37D7-F22A-13EA-E21EA4B30071}"/>
           </ac:picMkLst>
         </pc:picChg>
       </pc:sldChg>
@@ -1361,7 +739,7 @@
           <a:p>
             <a:fld id="{224F4B04-6A50-4A51-B675-D86EC6563060}" type="datetimeFigureOut">
               <a:rPr lang="en-US" smtClean="0"/>
-              <a:t>3/6/2026</a:t>
+              <a:t>3/25/2026</a:t>
             </a:fld>
             <a:endParaRPr lang="en-US"/>
           </a:p>
@@ -1871,7 +1249,7 @@
           <a:p>
             <a:fld id="{54E435BD-4569-4C00-96FD-DE6EEAA430DA}" type="datetimeFigureOut">
               <a:rPr lang="en-US" smtClean="0"/>
-              <a:t>3/6/2026</a:t>
+              <a:t>3/25/2026</a:t>
             </a:fld>
             <a:endParaRPr lang="en-US"/>
           </a:p>
@@ -2041,7 +1419,7 @@
           <a:p>
             <a:fld id="{54E435BD-4569-4C00-96FD-DE6EEAA430DA}" type="datetimeFigureOut">
               <a:rPr lang="en-US" smtClean="0"/>
-              <a:t>3/6/2026</a:t>
+              <a:t>3/25/2026</a:t>
             </a:fld>
             <a:endParaRPr lang="en-US"/>
           </a:p>
@@ -2221,7 +1599,7 @@
           <a:p>
             <a:fld id="{54E435BD-4569-4C00-96FD-DE6EEAA430DA}" type="datetimeFigureOut">
               <a:rPr lang="en-US" smtClean="0"/>
-              <a:t>3/6/2026</a:t>
+              <a:t>3/25/2026</a:t>
             </a:fld>
             <a:endParaRPr lang="en-US"/>
           </a:p>
@@ -2391,7 +1769,7 @@
           <a:p>
             <a:fld id="{54E435BD-4569-4C00-96FD-DE6EEAA430DA}" type="datetimeFigureOut">
               <a:rPr lang="en-US" smtClean="0"/>
-              <a:t>3/6/2026</a:t>
+              <a:t>3/25/2026</a:t>
             </a:fld>
             <a:endParaRPr lang="en-US"/>
           </a:p>
@@ -2635,7 +2013,7 @@
           <a:p>
             <a:fld id="{54E435BD-4569-4C00-96FD-DE6EEAA430DA}" type="datetimeFigureOut">
               <a:rPr lang="en-US" smtClean="0"/>
-              <a:t>3/6/2026</a:t>
+              <a:t>3/25/2026</a:t>
             </a:fld>
             <a:endParaRPr lang="en-US"/>
           </a:p>
@@ -2867,7 +2245,7 @@
           <a:p>
             <a:fld id="{54E435BD-4569-4C00-96FD-DE6EEAA430DA}" type="datetimeFigureOut">
               <a:rPr lang="en-US" smtClean="0"/>
-              <a:t>3/6/2026</a:t>
+              <a:t>3/25/2026</a:t>
             </a:fld>
             <a:endParaRPr lang="en-US"/>
           </a:p>
@@ -3234,7 +2612,7 @@
           <a:p>
             <a:fld id="{54E435BD-4569-4C00-96FD-DE6EEAA430DA}" type="datetimeFigureOut">
               <a:rPr lang="en-US" smtClean="0"/>
-              <a:t>3/6/2026</a:t>
+              <a:t>3/25/2026</a:t>
             </a:fld>
             <a:endParaRPr lang="en-US"/>
           </a:p>
@@ -3352,7 +2730,7 @@
           <a:p>
             <a:fld id="{54E435BD-4569-4C00-96FD-DE6EEAA430DA}" type="datetimeFigureOut">
               <a:rPr lang="en-US" smtClean="0"/>
-              <a:t>3/6/2026</a:t>
+              <a:t>3/25/2026</a:t>
             </a:fld>
             <a:endParaRPr lang="en-US"/>
           </a:p>
@@ -3447,7 +2825,7 @@
           <a:p>
             <a:fld id="{54E435BD-4569-4C00-96FD-DE6EEAA430DA}" type="datetimeFigureOut">
               <a:rPr lang="en-US" smtClean="0"/>
-              <a:t>3/6/2026</a:t>
+              <a:t>3/25/2026</a:t>
             </a:fld>
             <a:endParaRPr lang="en-US"/>
           </a:p>
@@ -3724,7 +3102,7 @@
           <a:p>
             <a:fld id="{54E435BD-4569-4C00-96FD-DE6EEAA430DA}" type="datetimeFigureOut">
               <a:rPr lang="en-US" smtClean="0"/>
-              <a:t>3/6/2026</a:t>
+              <a:t>3/25/2026</a:t>
             </a:fld>
             <a:endParaRPr lang="en-US"/>
           </a:p>
@@ -3981,7 +3359,7 @@
           <a:p>
             <a:fld id="{54E435BD-4569-4C00-96FD-DE6EEAA430DA}" type="datetimeFigureOut">
               <a:rPr lang="en-US" smtClean="0"/>
-              <a:t>3/6/2026</a:t>
+              <a:t>3/25/2026</a:t>
             </a:fld>
             <a:endParaRPr lang="en-US"/>
           </a:p>
@@ -4194,7 +3572,7 @@
           <a:p>
             <a:fld id="{54E435BD-4569-4C00-96FD-DE6EEAA430DA}" type="datetimeFigureOut">
               <a:rPr lang="en-US" smtClean="0"/>
-              <a:t>3/6/2026</a:t>
+              <a:t>3/25/2026</a:t>
             </a:fld>
             <a:endParaRPr lang="en-US"/>
           </a:p>
@@ -8549,10 +7927,10 @@
       </p:grpSpPr>
       <p:pic>
         <p:nvPicPr>
-          <p:cNvPr id="12" name="Picture 11">
-            <a:extLst>
-              <a:ext uri="{FF2B5EF4-FFF2-40B4-BE49-F238E27FC236}">
-                <a16:creationId xmlns:a16="http://schemas.microsoft.com/office/drawing/2014/main" id="{7EA3F937-6B5B-B028-8F85-4C27A4F64848}"/>
+          <p:cNvPr id="21" name="Graphic 20">
+            <a:extLst>
+              <a:ext uri="{FF2B5EF4-FFF2-40B4-BE49-F238E27FC236}">
+                <a16:creationId xmlns:a16="http://schemas.microsoft.com/office/drawing/2014/main" id="{8A0FAE3F-C4F4-F3C9-B535-34E1FB9A9CD5}"/>
               </a:ext>
             </a:extLst>
           </p:cNvPr>
@@ -8562,10 +7940,10 @@
           <p:nvPr/>
         </p:nvPicPr>
         <p:blipFill>
-          <a:blip r:embed="rId2">
-            <a:extLst>
-              <a:ext uri="{28A0092B-C50C-407E-A947-70E740481C1C}">
-                <a14:useLocalDpi xmlns:a14="http://schemas.microsoft.com/office/drawing/2010/main" val="0"/>
+          <a:blip>
+            <a:extLst>
+              <a:ext uri="{96DAC541-7B7A-43D3-8B79-37D633B846F1}">
+                <asvg:svgBlip xmlns:asvg="http://schemas.microsoft.com/office/drawing/2016/SVG/main" r:embed="rId2"/>
               </a:ext>
             </a:extLst>
           </a:blip>
@@ -8575,8 +7953,44 @@
         </p:blipFill>
         <p:spPr>
           <a:xfrm>
-            <a:off x="5714202" y="13079250"/>
-            <a:ext cx="11431595" cy="7621064"/>
+            <a:off x="5943600" y="13079250"/>
+            <a:ext cx="10972800" cy="7315200"/>
+          </a:xfrm>
+          <a:prstGeom prst="rect">
+            <a:avLst/>
+          </a:prstGeom>
+        </p:spPr>
+      </p:pic>
+      <p:pic>
+        <p:nvPicPr>
+          <p:cNvPr id="19" name="Graphic 18">
+            <a:extLst>
+              <a:ext uri="{FF2B5EF4-FFF2-40B4-BE49-F238E27FC236}">
+                <a16:creationId xmlns:a16="http://schemas.microsoft.com/office/drawing/2014/main" id="{DF550CA2-A406-342A-BFDD-9B5A868241B4}"/>
+              </a:ext>
+            </a:extLst>
+          </p:cNvPr>
+          <p:cNvPicPr>
+            <a:picLocks noChangeAspect="1"/>
+          </p:cNvPicPr>
+          <p:nvPr/>
+        </p:nvPicPr>
+        <p:blipFill>
+          <a:blip>
+            <a:extLst>
+              <a:ext uri="{96DAC541-7B7A-43D3-8B79-37D633B846F1}">
+                <asvg:svgBlip xmlns:asvg="http://schemas.microsoft.com/office/drawing/2016/SVG/main" r:embed="rId3"/>
+              </a:ext>
+            </a:extLst>
+          </a:blip>
+          <a:stretch>
+            <a:fillRect/>
+          </a:stretch>
+        </p:blipFill>
+        <p:spPr>
+          <a:xfrm>
+            <a:off x="5855717" y="2465550"/>
+            <a:ext cx="10972800" cy="7315200"/>
           </a:xfrm>
           <a:prstGeom prst="rect">
             <a:avLst/>
@@ -9248,42 +8662,6 @@
           </a:p>
         </p:txBody>
       </p:sp>
-      <p:pic>
-        <p:nvPicPr>
-          <p:cNvPr id="5" name="Picture 4">
-            <a:extLst>
-              <a:ext uri="{FF2B5EF4-FFF2-40B4-BE49-F238E27FC236}">
-                <a16:creationId xmlns:a16="http://schemas.microsoft.com/office/drawing/2014/main" id="{76A7918C-F868-1FD2-ED7B-F36107A25E09}"/>
-              </a:ext>
-            </a:extLst>
-          </p:cNvPr>
-          <p:cNvPicPr>
-            <a:picLocks noChangeAspect="1"/>
-          </p:cNvPicPr>
-          <p:nvPr/>
-        </p:nvPicPr>
-        <p:blipFill>
-          <a:blip r:embed="rId3">
-            <a:extLst>
-              <a:ext uri="{28A0092B-C50C-407E-A947-70E740481C1C}">
-                <a14:useLocalDpi xmlns:a14="http://schemas.microsoft.com/office/drawing/2010/main" val="0"/>
-              </a:ext>
-            </a:extLst>
-          </a:blip>
-          <a:stretch>
-            <a:fillRect/>
-          </a:stretch>
-        </p:blipFill>
-        <p:spPr>
-          <a:xfrm>
-            <a:off x="5626319" y="2482850"/>
-            <a:ext cx="11431595" cy="7621064"/>
-          </a:xfrm>
-          <a:prstGeom prst="rect">
-            <a:avLst/>
-          </a:prstGeom>
-        </p:spPr>
-      </p:pic>
       <p:sp>
         <p:nvSpPr>
           <p:cNvPr id="11" name="TextBox 10">
@@ -9963,4475 +9341,6 @@
 </file>
 
 <file path=ppt/slides/slide13.xml><?xml version="1.0" encoding="utf-8"?>
-<p:sld xmlns:a="http://schemas.openxmlformats.org/drawingml/2006/main" xmlns:r="http://schemas.openxmlformats.org/officeDocument/2006/relationships" xmlns:p="http://schemas.openxmlformats.org/presentationml/2006/main">
-  <p:cSld>
-    <p:spTree>
-      <p:nvGrpSpPr>
-        <p:cNvPr id="1" name="">
-          <a:extLst>
-            <a:ext uri="{FF2B5EF4-FFF2-40B4-BE49-F238E27FC236}">
-              <a16:creationId xmlns:a16="http://schemas.microsoft.com/office/drawing/2014/main" id="{8EDABA38-C7D3-585D-CE42-25A1FCE1A177}"/>
-            </a:ext>
-          </a:extLst>
-        </p:cNvPr>
-        <p:cNvGrpSpPr/>
-        <p:nvPr/>
-      </p:nvGrpSpPr>
-      <p:grpSpPr>
-        <a:xfrm>
-          <a:off x="0" y="0"/>
-          <a:ext cx="0" cy="0"/>
-          <a:chOff x="0" y="0"/>
-          <a:chExt cx="0" cy="0"/>
-        </a:xfrm>
-      </p:grpSpPr>
-      <p:sp>
-        <p:nvSpPr>
-          <p:cNvPr id="5" name="TextBox 4">
-            <a:extLst>
-              <a:ext uri="{FF2B5EF4-FFF2-40B4-BE49-F238E27FC236}">
-                <a16:creationId xmlns:a16="http://schemas.microsoft.com/office/drawing/2014/main" id="{4E1540C7-14CA-40F0-5CA8-92853EDA5393}"/>
-              </a:ext>
-            </a:extLst>
-          </p:cNvPr>
-          <p:cNvSpPr txBox="1"/>
-          <p:nvPr/>
-        </p:nvSpPr>
-        <p:spPr>
-          <a:xfrm>
-            <a:off x="10718237" y="1796421"/>
-            <a:ext cx="1665932" cy="338554"/>
-          </a:xfrm>
-          <a:prstGeom prst="rect">
-            <a:avLst/>
-          </a:prstGeom>
-          <a:noFill/>
-        </p:spPr>
-        <p:txBody>
-          <a:bodyPr wrap="square" rtlCol="0">
-            <a:spAutoFit/>
-          </a:bodyPr>
-          <a:lstStyle>
-            <a:defPPr>
-              <a:defRPr lang="en-US"/>
-            </a:defPPr>
-            <a:lvl1pPr marL="0" algn="l" defTabSz="457200" rtl="0" eaLnBrk="1" latinLnBrk="0" hangingPunct="1">
-              <a:defRPr sz="1800" kern="1200">
-                <a:solidFill>
-                  <a:schemeClr val="tx1"/>
-                </a:solidFill>
-                <a:latin typeface="+mn-lt"/>
-                <a:ea typeface="+mn-ea"/>
-                <a:cs typeface="+mn-cs"/>
-              </a:defRPr>
-            </a:lvl1pPr>
-            <a:lvl2pPr marL="457200" algn="l" defTabSz="457200" rtl="0" eaLnBrk="1" latinLnBrk="0" hangingPunct="1">
-              <a:defRPr sz="1800" kern="1200">
-                <a:solidFill>
-                  <a:schemeClr val="tx1"/>
-                </a:solidFill>
-                <a:latin typeface="+mn-lt"/>
-                <a:ea typeface="+mn-ea"/>
-                <a:cs typeface="+mn-cs"/>
-              </a:defRPr>
-            </a:lvl2pPr>
-            <a:lvl3pPr marL="914400" algn="l" defTabSz="457200" rtl="0" eaLnBrk="1" latinLnBrk="0" hangingPunct="1">
-              <a:defRPr sz="1800" kern="1200">
-                <a:solidFill>
-                  <a:schemeClr val="tx1"/>
-                </a:solidFill>
-                <a:latin typeface="+mn-lt"/>
-                <a:ea typeface="+mn-ea"/>
-                <a:cs typeface="+mn-cs"/>
-              </a:defRPr>
-            </a:lvl3pPr>
-            <a:lvl4pPr marL="1371600" algn="l" defTabSz="457200" rtl="0" eaLnBrk="1" latinLnBrk="0" hangingPunct="1">
-              <a:defRPr sz="1800" kern="1200">
-                <a:solidFill>
-                  <a:schemeClr val="tx1"/>
-                </a:solidFill>
-                <a:latin typeface="+mn-lt"/>
-                <a:ea typeface="+mn-ea"/>
-                <a:cs typeface="+mn-cs"/>
-              </a:defRPr>
-            </a:lvl4pPr>
-            <a:lvl5pPr marL="1828800" algn="l" defTabSz="457200" rtl="0" eaLnBrk="1" latinLnBrk="0" hangingPunct="1">
-              <a:defRPr sz="1800" kern="1200">
-                <a:solidFill>
-                  <a:schemeClr val="tx1"/>
-                </a:solidFill>
-                <a:latin typeface="+mn-lt"/>
-                <a:ea typeface="+mn-ea"/>
-                <a:cs typeface="+mn-cs"/>
-              </a:defRPr>
-            </a:lvl5pPr>
-            <a:lvl6pPr marL="2286000" algn="l" defTabSz="457200" rtl="0" eaLnBrk="1" latinLnBrk="0" hangingPunct="1">
-              <a:defRPr sz="1800" kern="1200">
-                <a:solidFill>
-                  <a:schemeClr val="tx1"/>
-                </a:solidFill>
-                <a:latin typeface="+mn-lt"/>
-                <a:ea typeface="+mn-ea"/>
-                <a:cs typeface="+mn-cs"/>
-              </a:defRPr>
-            </a:lvl6pPr>
-            <a:lvl7pPr marL="2743200" algn="l" defTabSz="457200" rtl="0" eaLnBrk="1" latinLnBrk="0" hangingPunct="1">
-              <a:defRPr sz="1800" kern="1200">
-                <a:solidFill>
-                  <a:schemeClr val="tx1"/>
-                </a:solidFill>
-                <a:latin typeface="+mn-lt"/>
-                <a:ea typeface="+mn-ea"/>
-                <a:cs typeface="+mn-cs"/>
-              </a:defRPr>
-            </a:lvl7pPr>
-            <a:lvl8pPr marL="3200400" algn="l" defTabSz="457200" rtl="0" eaLnBrk="1" latinLnBrk="0" hangingPunct="1">
-              <a:defRPr sz="1800" kern="1200">
-                <a:solidFill>
-                  <a:schemeClr val="tx1"/>
-                </a:solidFill>
-                <a:latin typeface="+mn-lt"/>
-                <a:ea typeface="+mn-ea"/>
-                <a:cs typeface="+mn-cs"/>
-              </a:defRPr>
-            </a:lvl8pPr>
-            <a:lvl9pPr marL="3657600" algn="l" defTabSz="457200" rtl="0" eaLnBrk="1" latinLnBrk="0" hangingPunct="1">
-              <a:defRPr sz="1800" kern="1200">
-                <a:solidFill>
-                  <a:schemeClr val="tx1"/>
-                </a:solidFill>
-                <a:latin typeface="+mn-lt"/>
-                <a:ea typeface="+mn-ea"/>
-                <a:cs typeface="+mn-cs"/>
-              </a:defRPr>
-            </a:lvl9pPr>
-          </a:lstStyle>
-          <a:p>
-            <a:r>
-              <a:rPr lang="en-US" sz="1600" b="1" dirty="0">
-                <a:latin typeface="Arial" panose="020B0604020202020204" pitchFamily="34" charset="0"/>
-                <a:ea typeface="Yu Gothic" panose="020B0400000000000000" pitchFamily="34" charset="-128"/>
-                <a:cs typeface="Arial" panose="020B0604020202020204" pitchFamily="34" charset="0"/>
-              </a:rPr>
-              <a:t>Three-epoch</a:t>
-            </a:r>
-          </a:p>
-        </p:txBody>
-      </p:sp>
-      <p:sp>
-        <p:nvSpPr>
-          <p:cNvPr id="6" name="TextBox 5">
-            <a:extLst>
-              <a:ext uri="{FF2B5EF4-FFF2-40B4-BE49-F238E27FC236}">
-                <a16:creationId xmlns:a16="http://schemas.microsoft.com/office/drawing/2014/main" id="{9160EB17-883E-0B7B-2B81-484C6D598F42}"/>
-              </a:ext>
-            </a:extLst>
-          </p:cNvPr>
-          <p:cNvSpPr txBox="1"/>
-          <p:nvPr/>
-        </p:nvSpPr>
-        <p:spPr>
-          <a:xfrm>
-            <a:off x="10593390" y="9331423"/>
-            <a:ext cx="1768277" cy="584775"/>
-          </a:xfrm>
-          <a:prstGeom prst="rect">
-            <a:avLst/>
-          </a:prstGeom>
-          <a:noFill/>
-        </p:spPr>
-        <p:txBody>
-          <a:bodyPr wrap="square">
-            <a:spAutoFit/>
-          </a:bodyPr>
-          <a:lstStyle>
-            <a:defPPr>
-              <a:defRPr lang="en-US"/>
-            </a:defPPr>
-            <a:lvl1pPr marL="0" algn="l" defTabSz="457200" rtl="0" eaLnBrk="1" latinLnBrk="0" hangingPunct="1">
-              <a:defRPr sz="1800" kern="1200">
-                <a:solidFill>
-                  <a:schemeClr val="tx1"/>
-                </a:solidFill>
-                <a:latin typeface="+mn-lt"/>
-                <a:ea typeface="+mn-ea"/>
-                <a:cs typeface="+mn-cs"/>
-              </a:defRPr>
-            </a:lvl1pPr>
-            <a:lvl2pPr marL="457200" algn="l" defTabSz="457200" rtl="0" eaLnBrk="1" latinLnBrk="0" hangingPunct="1">
-              <a:defRPr sz="1800" kern="1200">
-                <a:solidFill>
-                  <a:schemeClr val="tx1"/>
-                </a:solidFill>
-                <a:latin typeface="+mn-lt"/>
-                <a:ea typeface="+mn-ea"/>
-                <a:cs typeface="+mn-cs"/>
-              </a:defRPr>
-            </a:lvl2pPr>
-            <a:lvl3pPr marL="914400" algn="l" defTabSz="457200" rtl="0" eaLnBrk="1" latinLnBrk="0" hangingPunct="1">
-              <a:defRPr sz="1800" kern="1200">
-                <a:solidFill>
-                  <a:schemeClr val="tx1"/>
-                </a:solidFill>
-                <a:latin typeface="+mn-lt"/>
-                <a:ea typeface="+mn-ea"/>
-                <a:cs typeface="+mn-cs"/>
-              </a:defRPr>
-            </a:lvl3pPr>
-            <a:lvl4pPr marL="1371600" algn="l" defTabSz="457200" rtl="0" eaLnBrk="1" latinLnBrk="0" hangingPunct="1">
-              <a:defRPr sz="1800" kern="1200">
-                <a:solidFill>
-                  <a:schemeClr val="tx1"/>
-                </a:solidFill>
-                <a:latin typeface="+mn-lt"/>
-                <a:ea typeface="+mn-ea"/>
-                <a:cs typeface="+mn-cs"/>
-              </a:defRPr>
-            </a:lvl4pPr>
-            <a:lvl5pPr marL="1828800" algn="l" defTabSz="457200" rtl="0" eaLnBrk="1" latinLnBrk="0" hangingPunct="1">
-              <a:defRPr sz="1800" kern="1200">
-                <a:solidFill>
-                  <a:schemeClr val="tx1"/>
-                </a:solidFill>
-                <a:latin typeface="+mn-lt"/>
-                <a:ea typeface="+mn-ea"/>
-                <a:cs typeface="+mn-cs"/>
-              </a:defRPr>
-            </a:lvl5pPr>
-            <a:lvl6pPr marL="2286000" algn="l" defTabSz="457200" rtl="0" eaLnBrk="1" latinLnBrk="0" hangingPunct="1">
-              <a:defRPr sz="1800" kern="1200">
-                <a:solidFill>
-                  <a:schemeClr val="tx1"/>
-                </a:solidFill>
-                <a:latin typeface="+mn-lt"/>
-                <a:ea typeface="+mn-ea"/>
-                <a:cs typeface="+mn-cs"/>
-              </a:defRPr>
-            </a:lvl6pPr>
-            <a:lvl7pPr marL="2743200" algn="l" defTabSz="457200" rtl="0" eaLnBrk="1" latinLnBrk="0" hangingPunct="1">
-              <a:defRPr sz="1800" kern="1200">
-                <a:solidFill>
-                  <a:schemeClr val="tx1"/>
-                </a:solidFill>
-                <a:latin typeface="+mn-lt"/>
-                <a:ea typeface="+mn-ea"/>
-                <a:cs typeface="+mn-cs"/>
-              </a:defRPr>
-            </a:lvl7pPr>
-            <a:lvl8pPr marL="3200400" algn="l" defTabSz="457200" rtl="0" eaLnBrk="1" latinLnBrk="0" hangingPunct="1">
-              <a:defRPr sz="1800" kern="1200">
-                <a:solidFill>
-                  <a:schemeClr val="tx1"/>
-                </a:solidFill>
-                <a:latin typeface="+mn-lt"/>
-                <a:ea typeface="+mn-ea"/>
-                <a:cs typeface="+mn-cs"/>
-              </a:defRPr>
-            </a:lvl8pPr>
-            <a:lvl9pPr marL="3657600" algn="l" defTabSz="457200" rtl="0" eaLnBrk="1" latinLnBrk="0" hangingPunct="1">
-              <a:defRPr sz="1800" kern="1200">
-                <a:solidFill>
-                  <a:schemeClr val="tx1"/>
-                </a:solidFill>
-                <a:latin typeface="+mn-lt"/>
-                <a:ea typeface="+mn-ea"/>
-                <a:cs typeface="+mn-cs"/>
-              </a:defRPr>
-            </a:lvl9pPr>
-          </a:lstStyle>
-          <a:p>
-            <a:pPr algn="ctr"/>
-            <a:r>
-              <a:rPr lang="en-US" sz="1600" b="1" dirty="0">
-                <a:latin typeface="Arial" panose="020B0604020202020204" pitchFamily="34" charset="0"/>
-                <a:ea typeface="Yu Gothic" panose="020B0400000000000000" pitchFamily="34" charset="-128"/>
-                <a:cs typeface="Arial" panose="020B0604020202020204" pitchFamily="34" charset="0"/>
-              </a:rPr>
-              <a:t>Two size </a:t>
-            </a:r>
-          </a:p>
-          <a:p>
-            <a:pPr algn="ctr"/>
-            <a:r>
-              <a:rPr lang="en-US" sz="1600" b="1" dirty="0">
-                <a:latin typeface="Arial" panose="020B0604020202020204" pitchFamily="34" charset="0"/>
-                <a:ea typeface="Yu Gothic" panose="020B0400000000000000" pitchFamily="34" charset="-128"/>
-                <a:cs typeface="Arial" panose="020B0604020202020204" pitchFamily="34" charset="0"/>
-              </a:rPr>
-              <a:t>changes</a:t>
-            </a:r>
-          </a:p>
-        </p:txBody>
-      </p:sp>
-      <p:sp>
-        <p:nvSpPr>
-          <p:cNvPr id="24" name="Rectangle 23">
-            <a:extLst>
-              <a:ext uri="{FF2B5EF4-FFF2-40B4-BE49-F238E27FC236}">
-                <a16:creationId xmlns:a16="http://schemas.microsoft.com/office/drawing/2014/main" id="{84993CD9-337D-ADA4-91F3-2DFE8B8865A9}"/>
-              </a:ext>
-            </a:extLst>
-          </p:cNvPr>
-          <p:cNvSpPr/>
-          <p:nvPr/>
-        </p:nvSpPr>
-        <p:spPr>
-          <a:xfrm>
-            <a:off x="11088864" y="2738578"/>
-            <a:ext cx="876045" cy="1019041"/>
-          </a:xfrm>
-          <a:prstGeom prst="rect">
-            <a:avLst/>
-          </a:prstGeom>
-          <a:solidFill>
-            <a:schemeClr val="accent1">
-              <a:lumMod val="40000"/>
-              <a:lumOff val="60000"/>
-            </a:schemeClr>
-          </a:solidFill>
-          <a:ln>
-            <a:noFill/>
-          </a:ln>
-        </p:spPr>
-        <p:style>
-          <a:lnRef idx="2">
-            <a:schemeClr val="accent1">
-              <a:shade val="15000"/>
-            </a:schemeClr>
-          </a:lnRef>
-          <a:fillRef idx="1">
-            <a:schemeClr val="accent1"/>
-          </a:fillRef>
-          <a:effectRef idx="0">
-            <a:schemeClr val="accent1"/>
-          </a:effectRef>
-          <a:fontRef idx="minor">
-            <a:schemeClr val="lt1"/>
-          </a:fontRef>
-        </p:style>
-        <p:txBody>
-          <a:bodyPr rtlCol="0" anchor="ctr"/>
-          <a:lstStyle>
-            <a:defPPr>
-              <a:defRPr lang="en-US"/>
-            </a:defPPr>
-            <a:lvl1pPr marL="0" algn="l" defTabSz="457200" rtl="0" eaLnBrk="1" latinLnBrk="0" hangingPunct="1">
-              <a:defRPr sz="1800" kern="1200">
-                <a:solidFill>
-                  <a:schemeClr val="lt1"/>
-                </a:solidFill>
-                <a:latin typeface="+mn-lt"/>
-                <a:ea typeface="+mn-ea"/>
-                <a:cs typeface="+mn-cs"/>
-              </a:defRPr>
-            </a:lvl1pPr>
-            <a:lvl2pPr marL="457200" algn="l" defTabSz="457200" rtl="0" eaLnBrk="1" latinLnBrk="0" hangingPunct="1">
-              <a:defRPr sz="1800" kern="1200">
-                <a:solidFill>
-                  <a:schemeClr val="lt1"/>
-                </a:solidFill>
-                <a:latin typeface="+mn-lt"/>
-                <a:ea typeface="+mn-ea"/>
-                <a:cs typeface="+mn-cs"/>
-              </a:defRPr>
-            </a:lvl2pPr>
-            <a:lvl3pPr marL="914400" algn="l" defTabSz="457200" rtl="0" eaLnBrk="1" latinLnBrk="0" hangingPunct="1">
-              <a:defRPr sz="1800" kern="1200">
-                <a:solidFill>
-                  <a:schemeClr val="lt1"/>
-                </a:solidFill>
-                <a:latin typeface="+mn-lt"/>
-                <a:ea typeface="+mn-ea"/>
-                <a:cs typeface="+mn-cs"/>
-              </a:defRPr>
-            </a:lvl3pPr>
-            <a:lvl4pPr marL="1371600" algn="l" defTabSz="457200" rtl="0" eaLnBrk="1" latinLnBrk="0" hangingPunct="1">
-              <a:defRPr sz="1800" kern="1200">
-                <a:solidFill>
-                  <a:schemeClr val="lt1"/>
-                </a:solidFill>
-                <a:latin typeface="+mn-lt"/>
-                <a:ea typeface="+mn-ea"/>
-                <a:cs typeface="+mn-cs"/>
-              </a:defRPr>
-            </a:lvl4pPr>
-            <a:lvl5pPr marL="1828800" algn="l" defTabSz="457200" rtl="0" eaLnBrk="1" latinLnBrk="0" hangingPunct="1">
-              <a:defRPr sz="1800" kern="1200">
-                <a:solidFill>
-                  <a:schemeClr val="lt1"/>
-                </a:solidFill>
-                <a:latin typeface="+mn-lt"/>
-                <a:ea typeface="+mn-ea"/>
-                <a:cs typeface="+mn-cs"/>
-              </a:defRPr>
-            </a:lvl5pPr>
-            <a:lvl6pPr marL="2286000" algn="l" defTabSz="457200" rtl="0" eaLnBrk="1" latinLnBrk="0" hangingPunct="1">
-              <a:defRPr sz="1800" kern="1200">
-                <a:solidFill>
-                  <a:schemeClr val="lt1"/>
-                </a:solidFill>
-                <a:latin typeface="+mn-lt"/>
-                <a:ea typeface="+mn-ea"/>
-                <a:cs typeface="+mn-cs"/>
-              </a:defRPr>
-            </a:lvl6pPr>
-            <a:lvl7pPr marL="2743200" algn="l" defTabSz="457200" rtl="0" eaLnBrk="1" latinLnBrk="0" hangingPunct="1">
-              <a:defRPr sz="1800" kern="1200">
-                <a:solidFill>
-                  <a:schemeClr val="lt1"/>
-                </a:solidFill>
-                <a:latin typeface="+mn-lt"/>
-                <a:ea typeface="+mn-ea"/>
-                <a:cs typeface="+mn-cs"/>
-              </a:defRPr>
-            </a:lvl7pPr>
-            <a:lvl8pPr marL="3200400" algn="l" defTabSz="457200" rtl="0" eaLnBrk="1" latinLnBrk="0" hangingPunct="1">
-              <a:defRPr sz="1800" kern="1200">
-                <a:solidFill>
-                  <a:schemeClr val="lt1"/>
-                </a:solidFill>
-                <a:latin typeface="+mn-lt"/>
-                <a:ea typeface="+mn-ea"/>
-                <a:cs typeface="+mn-cs"/>
-              </a:defRPr>
-            </a:lvl8pPr>
-            <a:lvl9pPr marL="3657600" algn="l" defTabSz="457200" rtl="0" eaLnBrk="1" latinLnBrk="0" hangingPunct="1">
-              <a:defRPr sz="1800" kern="1200">
-                <a:solidFill>
-                  <a:schemeClr val="lt1"/>
-                </a:solidFill>
-                <a:latin typeface="+mn-lt"/>
-                <a:ea typeface="+mn-ea"/>
-                <a:cs typeface="+mn-cs"/>
-              </a:defRPr>
-            </a:lvl9pPr>
-          </a:lstStyle>
-          <a:p>
-            <a:pPr algn="ctr"/>
-            <a:endParaRPr lang="en-US" sz="1600" dirty="0">
-              <a:latin typeface="Arial" panose="020B0604020202020204" pitchFamily="34" charset="0"/>
-              <a:cs typeface="Arial" panose="020B0604020202020204" pitchFamily="34" charset="0"/>
-            </a:endParaRPr>
-          </a:p>
-        </p:txBody>
-      </p:sp>
-      <p:sp>
-        <p:nvSpPr>
-          <p:cNvPr id="25" name="Rectangle 24">
-            <a:extLst>
-              <a:ext uri="{FF2B5EF4-FFF2-40B4-BE49-F238E27FC236}">
-                <a16:creationId xmlns:a16="http://schemas.microsoft.com/office/drawing/2014/main" id="{F465BAA8-681A-D5C6-C32D-4E34EFC3096B}"/>
-              </a:ext>
-            </a:extLst>
-          </p:cNvPr>
-          <p:cNvSpPr/>
-          <p:nvPr/>
-        </p:nvSpPr>
-        <p:spPr>
-          <a:xfrm>
-            <a:off x="10863254" y="5078196"/>
-            <a:ext cx="1331605" cy="280246"/>
-          </a:xfrm>
-          <a:prstGeom prst="rect">
-            <a:avLst/>
-          </a:prstGeom>
-          <a:solidFill>
-            <a:schemeClr val="accent1">
-              <a:lumMod val="40000"/>
-              <a:lumOff val="60000"/>
-            </a:schemeClr>
-          </a:solidFill>
-          <a:ln>
-            <a:noFill/>
-          </a:ln>
-        </p:spPr>
-        <p:style>
-          <a:lnRef idx="2">
-            <a:schemeClr val="accent1">
-              <a:shade val="15000"/>
-            </a:schemeClr>
-          </a:lnRef>
-          <a:fillRef idx="1">
-            <a:schemeClr val="accent1"/>
-          </a:fillRef>
-          <a:effectRef idx="0">
-            <a:schemeClr val="accent1"/>
-          </a:effectRef>
-          <a:fontRef idx="minor">
-            <a:schemeClr val="lt1"/>
-          </a:fontRef>
-        </p:style>
-        <p:txBody>
-          <a:bodyPr rtlCol="0" anchor="ctr"/>
-          <a:lstStyle>
-            <a:defPPr>
-              <a:defRPr lang="en-US"/>
-            </a:defPPr>
-            <a:lvl1pPr marL="0" algn="l" defTabSz="457200" rtl="0" eaLnBrk="1" latinLnBrk="0" hangingPunct="1">
-              <a:defRPr sz="1800" kern="1200">
-                <a:solidFill>
-                  <a:schemeClr val="lt1"/>
-                </a:solidFill>
-                <a:latin typeface="+mn-lt"/>
-                <a:ea typeface="+mn-ea"/>
-                <a:cs typeface="+mn-cs"/>
-              </a:defRPr>
-            </a:lvl1pPr>
-            <a:lvl2pPr marL="457200" algn="l" defTabSz="457200" rtl="0" eaLnBrk="1" latinLnBrk="0" hangingPunct="1">
-              <a:defRPr sz="1800" kern="1200">
-                <a:solidFill>
-                  <a:schemeClr val="lt1"/>
-                </a:solidFill>
-                <a:latin typeface="+mn-lt"/>
-                <a:ea typeface="+mn-ea"/>
-                <a:cs typeface="+mn-cs"/>
-              </a:defRPr>
-            </a:lvl2pPr>
-            <a:lvl3pPr marL="914400" algn="l" defTabSz="457200" rtl="0" eaLnBrk="1" latinLnBrk="0" hangingPunct="1">
-              <a:defRPr sz="1800" kern="1200">
-                <a:solidFill>
-                  <a:schemeClr val="lt1"/>
-                </a:solidFill>
-                <a:latin typeface="+mn-lt"/>
-                <a:ea typeface="+mn-ea"/>
-                <a:cs typeface="+mn-cs"/>
-              </a:defRPr>
-            </a:lvl3pPr>
-            <a:lvl4pPr marL="1371600" algn="l" defTabSz="457200" rtl="0" eaLnBrk="1" latinLnBrk="0" hangingPunct="1">
-              <a:defRPr sz="1800" kern="1200">
-                <a:solidFill>
-                  <a:schemeClr val="lt1"/>
-                </a:solidFill>
-                <a:latin typeface="+mn-lt"/>
-                <a:ea typeface="+mn-ea"/>
-                <a:cs typeface="+mn-cs"/>
-              </a:defRPr>
-            </a:lvl4pPr>
-            <a:lvl5pPr marL="1828800" algn="l" defTabSz="457200" rtl="0" eaLnBrk="1" latinLnBrk="0" hangingPunct="1">
-              <a:defRPr sz="1800" kern="1200">
-                <a:solidFill>
-                  <a:schemeClr val="lt1"/>
-                </a:solidFill>
-                <a:latin typeface="+mn-lt"/>
-                <a:ea typeface="+mn-ea"/>
-                <a:cs typeface="+mn-cs"/>
-              </a:defRPr>
-            </a:lvl5pPr>
-            <a:lvl6pPr marL="2286000" algn="l" defTabSz="457200" rtl="0" eaLnBrk="1" latinLnBrk="0" hangingPunct="1">
-              <a:defRPr sz="1800" kern="1200">
-                <a:solidFill>
-                  <a:schemeClr val="lt1"/>
-                </a:solidFill>
-                <a:latin typeface="+mn-lt"/>
-                <a:ea typeface="+mn-ea"/>
-                <a:cs typeface="+mn-cs"/>
-              </a:defRPr>
-            </a:lvl6pPr>
-            <a:lvl7pPr marL="2743200" algn="l" defTabSz="457200" rtl="0" eaLnBrk="1" latinLnBrk="0" hangingPunct="1">
-              <a:defRPr sz="1800" kern="1200">
-                <a:solidFill>
-                  <a:schemeClr val="lt1"/>
-                </a:solidFill>
-                <a:latin typeface="+mn-lt"/>
-                <a:ea typeface="+mn-ea"/>
-                <a:cs typeface="+mn-cs"/>
-              </a:defRPr>
-            </a:lvl7pPr>
-            <a:lvl8pPr marL="3200400" algn="l" defTabSz="457200" rtl="0" eaLnBrk="1" latinLnBrk="0" hangingPunct="1">
-              <a:defRPr sz="1800" kern="1200">
-                <a:solidFill>
-                  <a:schemeClr val="lt1"/>
-                </a:solidFill>
-                <a:latin typeface="+mn-lt"/>
-                <a:ea typeface="+mn-ea"/>
-                <a:cs typeface="+mn-cs"/>
-              </a:defRPr>
-            </a:lvl8pPr>
-            <a:lvl9pPr marL="3657600" algn="l" defTabSz="457200" rtl="0" eaLnBrk="1" latinLnBrk="0" hangingPunct="1">
-              <a:defRPr sz="1800" kern="1200">
-                <a:solidFill>
-                  <a:schemeClr val="lt1"/>
-                </a:solidFill>
-                <a:latin typeface="+mn-lt"/>
-                <a:ea typeface="+mn-ea"/>
-                <a:cs typeface="+mn-cs"/>
-              </a:defRPr>
-            </a:lvl9pPr>
-          </a:lstStyle>
-          <a:p>
-            <a:pPr algn="ctr"/>
-            <a:endParaRPr lang="en-US" sz="1600" dirty="0">
-              <a:latin typeface="Arial" panose="020B0604020202020204" pitchFamily="34" charset="0"/>
-              <a:cs typeface="Arial" panose="020B0604020202020204" pitchFamily="34" charset="0"/>
-            </a:endParaRPr>
-          </a:p>
-        </p:txBody>
-      </p:sp>
-      <p:sp>
-        <p:nvSpPr>
-          <p:cNvPr id="26" name="Rectangle 25">
-            <a:extLst>
-              <a:ext uri="{FF2B5EF4-FFF2-40B4-BE49-F238E27FC236}">
-                <a16:creationId xmlns:a16="http://schemas.microsoft.com/office/drawing/2014/main" id="{F7AE871F-00DB-AAEE-90F9-99616EEAE020}"/>
-              </a:ext>
-            </a:extLst>
-          </p:cNvPr>
-          <p:cNvSpPr/>
-          <p:nvPr/>
-        </p:nvSpPr>
-        <p:spPr>
-          <a:xfrm>
-            <a:off x="11289064" y="3710009"/>
-            <a:ext cx="479985" cy="1368186"/>
-          </a:xfrm>
-          <a:prstGeom prst="rect">
-            <a:avLst/>
-          </a:prstGeom>
-          <a:solidFill>
-            <a:schemeClr val="accent1">
-              <a:lumMod val="40000"/>
-              <a:lumOff val="60000"/>
-            </a:schemeClr>
-          </a:solidFill>
-          <a:ln>
-            <a:noFill/>
-          </a:ln>
-        </p:spPr>
-        <p:style>
-          <a:lnRef idx="2">
-            <a:schemeClr val="accent1">
-              <a:shade val="15000"/>
-            </a:schemeClr>
-          </a:lnRef>
-          <a:fillRef idx="1">
-            <a:schemeClr val="accent1"/>
-          </a:fillRef>
-          <a:effectRef idx="0">
-            <a:schemeClr val="accent1"/>
-          </a:effectRef>
-          <a:fontRef idx="minor">
-            <a:schemeClr val="lt1"/>
-          </a:fontRef>
-        </p:style>
-        <p:txBody>
-          <a:bodyPr rtlCol="0" anchor="ctr"/>
-          <a:lstStyle>
-            <a:defPPr>
-              <a:defRPr lang="en-US"/>
-            </a:defPPr>
-            <a:lvl1pPr marL="0" algn="l" defTabSz="457200" rtl="0" eaLnBrk="1" latinLnBrk="0" hangingPunct="1">
-              <a:defRPr sz="1800" kern="1200">
-                <a:solidFill>
-                  <a:schemeClr val="lt1"/>
-                </a:solidFill>
-                <a:latin typeface="+mn-lt"/>
-                <a:ea typeface="+mn-ea"/>
-                <a:cs typeface="+mn-cs"/>
-              </a:defRPr>
-            </a:lvl1pPr>
-            <a:lvl2pPr marL="457200" algn="l" defTabSz="457200" rtl="0" eaLnBrk="1" latinLnBrk="0" hangingPunct="1">
-              <a:defRPr sz="1800" kern="1200">
-                <a:solidFill>
-                  <a:schemeClr val="lt1"/>
-                </a:solidFill>
-                <a:latin typeface="+mn-lt"/>
-                <a:ea typeface="+mn-ea"/>
-                <a:cs typeface="+mn-cs"/>
-              </a:defRPr>
-            </a:lvl2pPr>
-            <a:lvl3pPr marL="914400" algn="l" defTabSz="457200" rtl="0" eaLnBrk="1" latinLnBrk="0" hangingPunct="1">
-              <a:defRPr sz="1800" kern="1200">
-                <a:solidFill>
-                  <a:schemeClr val="lt1"/>
-                </a:solidFill>
-                <a:latin typeface="+mn-lt"/>
-                <a:ea typeface="+mn-ea"/>
-                <a:cs typeface="+mn-cs"/>
-              </a:defRPr>
-            </a:lvl3pPr>
-            <a:lvl4pPr marL="1371600" algn="l" defTabSz="457200" rtl="0" eaLnBrk="1" latinLnBrk="0" hangingPunct="1">
-              <a:defRPr sz="1800" kern="1200">
-                <a:solidFill>
-                  <a:schemeClr val="lt1"/>
-                </a:solidFill>
-                <a:latin typeface="+mn-lt"/>
-                <a:ea typeface="+mn-ea"/>
-                <a:cs typeface="+mn-cs"/>
-              </a:defRPr>
-            </a:lvl4pPr>
-            <a:lvl5pPr marL="1828800" algn="l" defTabSz="457200" rtl="0" eaLnBrk="1" latinLnBrk="0" hangingPunct="1">
-              <a:defRPr sz="1800" kern="1200">
-                <a:solidFill>
-                  <a:schemeClr val="lt1"/>
-                </a:solidFill>
-                <a:latin typeface="+mn-lt"/>
-                <a:ea typeface="+mn-ea"/>
-                <a:cs typeface="+mn-cs"/>
-              </a:defRPr>
-            </a:lvl5pPr>
-            <a:lvl6pPr marL="2286000" algn="l" defTabSz="457200" rtl="0" eaLnBrk="1" latinLnBrk="0" hangingPunct="1">
-              <a:defRPr sz="1800" kern="1200">
-                <a:solidFill>
-                  <a:schemeClr val="lt1"/>
-                </a:solidFill>
-                <a:latin typeface="+mn-lt"/>
-                <a:ea typeface="+mn-ea"/>
-                <a:cs typeface="+mn-cs"/>
-              </a:defRPr>
-            </a:lvl6pPr>
-            <a:lvl7pPr marL="2743200" algn="l" defTabSz="457200" rtl="0" eaLnBrk="1" latinLnBrk="0" hangingPunct="1">
-              <a:defRPr sz="1800" kern="1200">
-                <a:solidFill>
-                  <a:schemeClr val="lt1"/>
-                </a:solidFill>
-                <a:latin typeface="+mn-lt"/>
-                <a:ea typeface="+mn-ea"/>
-                <a:cs typeface="+mn-cs"/>
-              </a:defRPr>
-            </a:lvl7pPr>
-            <a:lvl8pPr marL="3200400" algn="l" defTabSz="457200" rtl="0" eaLnBrk="1" latinLnBrk="0" hangingPunct="1">
-              <a:defRPr sz="1800" kern="1200">
-                <a:solidFill>
-                  <a:schemeClr val="lt1"/>
-                </a:solidFill>
-                <a:latin typeface="+mn-lt"/>
-                <a:ea typeface="+mn-ea"/>
-                <a:cs typeface="+mn-cs"/>
-              </a:defRPr>
-            </a:lvl8pPr>
-            <a:lvl9pPr marL="3657600" algn="l" defTabSz="457200" rtl="0" eaLnBrk="1" latinLnBrk="0" hangingPunct="1">
-              <a:defRPr sz="1800" kern="1200">
-                <a:solidFill>
-                  <a:schemeClr val="lt1"/>
-                </a:solidFill>
-                <a:latin typeface="+mn-lt"/>
-                <a:ea typeface="+mn-ea"/>
-                <a:cs typeface="+mn-cs"/>
-              </a:defRPr>
-            </a:lvl9pPr>
-          </a:lstStyle>
-          <a:p>
-            <a:pPr algn="ctr"/>
-            <a:endParaRPr lang="en-US" sz="1600" dirty="0">
-              <a:latin typeface="Arial" panose="020B0604020202020204" pitchFamily="34" charset="0"/>
-              <a:cs typeface="Arial" panose="020B0604020202020204" pitchFamily="34" charset="0"/>
-            </a:endParaRPr>
-          </a:p>
-        </p:txBody>
-      </p:sp>
-      <p:cxnSp>
-        <p:nvCxnSpPr>
-          <p:cNvPr id="34" name="Straight Arrow Connector 33">
-            <a:extLst>
-              <a:ext uri="{FF2B5EF4-FFF2-40B4-BE49-F238E27FC236}">
-                <a16:creationId xmlns:a16="http://schemas.microsoft.com/office/drawing/2014/main" id="{D0BA5B5F-5DBA-5FBE-5FB7-C51C11AA6505}"/>
-              </a:ext>
-            </a:extLst>
-          </p:cNvPr>
-          <p:cNvCxnSpPr>
-            <a:cxnSpLocks/>
-          </p:cNvCxnSpPr>
-          <p:nvPr/>
-        </p:nvCxnSpPr>
-        <p:spPr>
-          <a:xfrm>
-            <a:off x="10659869" y="2826263"/>
-            <a:ext cx="0" cy="2688388"/>
-          </a:xfrm>
-          <a:prstGeom prst="straightConnector1">
-            <a:avLst/>
-          </a:prstGeom>
-          <a:ln w="76200">
-            <a:tailEnd type="triangle"/>
-          </a:ln>
-        </p:spPr>
-        <p:style>
-          <a:lnRef idx="1">
-            <a:schemeClr val="dk1"/>
-          </a:lnRef>
-          <a:fillRef idx="0">
-            <a:schemeClr val="dk1"/>
-          </a:fillRef>
-          <a:effectRef idx="0">
-            <a:schemeClr val="dk1"/>
-          </a:effectRef>
-          <a:fontRef idx="minor">
-            <a:schemeClr val="tx1"/>
-          </a:fontRef>
-        </p:style>
-      </p:cxnSp>
-      <p:sp>
-        <p:nvSpPr>
-          <p:cNvPr id="35" name="TextBox 34">
-            <a:extLst>
-              <a:ext uri="{FF2B5EF4-FFF2-40B4-BE49-F238E27FC236}">
-                <a16:creationId xmlns:a16="http://schemas.microsoft.com/office/drawing/2014/main" id="{8DED98B2-9791-8335-20DF-EACF4A4DFD3B}"/>
-              </a:ext>
-            </a:extLst>
-          </p:cNvPr>
-          <p:cNvSpPr txBox="1"/>
-          <p:nvPr/>
-        </p:nvSpPr>
-        <p:spPr>
-          <a:xfrm rot="16200000">
-            <a:off x="9856222" y="3652846"/>
-            <a:ext cx="1071763" cy="338554"/>
-          </a:xfrm>
-          <a:prstGeom prst="rect">
-            <a:avLst/>
-          </a:prstGeom>
-          <a:noFill/>
-        </p:spPr>
-        <p:txBody>
-          <a:bodyPr wrap="square" rtlCol="0">
-            <a:spAutoFit/>
-          </a:bodyPr>
-          <a:lstStyle>
-            <a:defPPr>
-              <a:defRPr lang="en-US"/>
-            </a:defPPr>
-            <a:lvl1pPr marL="0" algn="l" defTabSz="457200" rtl="0" eaLnBrk="1" latinLnBrk="0" hangingPunct="1">
-              <a:defRPr sz="1800" kern="1200">
-                <a:solidFill>
-                  <a:schemeClr val="tx1"/>
-                </a:solidFill>
-                <a:latin typeface="+mn-lt"/>
-                <a:ea typeface="+mn-ea"/>
-                <a:cs typeface="+mn-cs"/>
-              </a:defRPr>
-            </a:lvl1pPr>
-            <a:lvl2pPr marL="457200" algn="l" defTabSz="457200" rtl="0" eaLnBrk="1" latinLnBrk="0" hangingPunct="1">
-              <a:defRPr sz="1800" kern="1200">
-                <a:solidFill>
-                  <a:schemeClr val="tx1"/>
-                </a:solidFill>
-                <a:latin typeface="+mn-lt"/>
-                <a:ea typeface="+mn-ea"/>
-                <a:cs typeface="+mn-cs"/>
-              </a:defRPr>
-            </a:lvl2pPr>
-            <a:lvl3pPr marL="914400" algn="l" defTabSz="457200" rtl="0" eaLnBrk="1" latinLnBrk="0" hangingPunct="1">
-              <a:defRPr sz="1800" kern="1200">
-                <a:solidFill>
-                  <a:schemeClr val="tx1"/>
-                </a:solidFill>
-                <a:latin typeface="+mn-lt"/>
-                <a:ea typeface="+mn-ea"/>
-                <a:cs typeface="+mn-cs"/>
-              </a:defRPr>
-            </a:lvl3pPr>
-            <a:lvl4pPr marL="1371600" algn="l" defTabSz="457200" rtl="0" eaLnBrk="1" latinLnBrk="0" hangingPunct="1">
-              <a:defRPr sz="1800" kern="1200">
-                <a:solidFill>
-                  <a:schemeClr val="tx1"/>
-                </a:solidFill>
-                <a:latin typeface="+mn-lt"/>
-                <a:ea typeface="+mn-ea"/>
-                <a:cs typeface="+mn-cs"/>
-              </a:defRPr>
-            </a:lvl4pPr>
-            <a:lvl5pPr marL="1828800" algn="l" defTabSz="457200" rtl="0" eaLnBrk="1" latinLnBrk="0" hangingPunct="1">
-              <a:defRPr sz="1800" kern="1200">
-                <a:solidFill>
-                  <a:schemeClr val="tx1"/>
-                </a:solidFill>
-                <a:latin typeface="+mn-lt"/>
-                <a:ea typeface="+mn-ea"/>
-                <a:cs typeface="+mn-cs"/>
-              </a:defRPr>
-            </a:lvl5pPr>
-            <a:lvl6pPr marL="2286000" algn="l" defTabSz="457200" rtl="0" eaLnBrk="1" latinLnBrk="0" hangingPunct="1">
-              <a:defRPr sz="1800" kern="1200">
-                <a:solidFill>
-                  <a:schemeClr val="tx1"/>
-                </a:solidFill>
-                <a:latin typeface="+mn-lt"/>
-                <a:ea typeface="+mn-ea"/>
-                <a:cs typeface="+mn-cs"/>
-              </a:defRPr>
-            </a:lvl6pPr>
-            <a:lvl7pPr marL="2743200" algn="l" defTabSz="457200" rtl="0" eaLnBrk="1" latinLnBrk="0" hangingPunct="1">
-              <a:defRPr sz="1800" kern="1200">
-                <a:solidFill>
-                  <a:schemeClr val="tx1"/>
-                </a:solidFill>
-                <a:latin typeface="+mn-lt"/>
-                <a:ea typeface="+mn-ea"/>
-                <a:cs typeface="+mn-cs"/>
-              </a:defRPr>
-            </a:lvl7pPr>
-            <a:lvl8pPr marL="3200400" algn="l" defTabSz="457200" rtl="0" eaLnBrk="1" latinLnBrk="0" hangingPunct="1">
-              <a:defRPr sz="1800" kern="1200">
-                <a:solidFill>
-                  <a:schemeClr val="tx1"/>
-                </a:solidFill>
-                <a:latin typeface="+mn-lt"/>
-                <a:ea typeface="+mn-ea"/>
-                <a:cs typeface="+mn-cs"/>
-              </a:defRPr>
-            </a:lvl8pPr>
-            <a:lvl9pPr marL="3657600" algn="l" defTabSz="457200" rtl="0" eaLnBrk="1" latinLnBrk="0" hangingPunct="1">
-              <a:defRPr sz="1800" kern="1200">
-                <a:solidFill>
-                  <a:schemeClr val="tx1"/>
-                </a:solidFill>
-                <a:latin typeface="+mn-lt"/>
-                <a:ea typeface="+mn-ea"/>
-                <a:cs typeface="+mn-cs"/>
-              </a:defRPr>
-            </a:lvl9pPr>
-          </a:lstStyle>
-          <a:p>
-            <a:r>
-              <a:rPr lang="en-US" sz="1600" b="1" dirty="0">
-                <a:latin typeface="Arial" panose="020B0604020202020204" pitchFamily="34" charset="0"/>
-                <a:ea typeface="Yu Gothic" panose="020B0400000000000000" pitchFamily="34" charset="-128"/>
-                <a:cs typeface="Arial" panose="020B0604020202020204" pitchFamily="34" charset="0"/>
-              </a:rPr>
-              <a:t>Time</a:t>
-            </a:r>
-          </a:p>
-        </p:txBody>
-      </p:sp>
-      <p:sp>
-        <p:nvSpPr>
-          <p:cNvPr id="36" name="TextBox 35">
-            <a:extLst>
-              <a:ext uri="{FF2B5EF4-FFF2-40B4-BE49-F238E27FC236}">
-                <a16:creationId xmlns:a16="http://schemas.microsoft.com/office/drawing/2014/main" id="{7B45B846-7AB3-9C79-E068-227AD53D4FD6}"/>
-              </a:ext>
-            </a:extLst>
-          </p:cNvPr>
-          <p:cNvSpPr txBox="1"/>
-          <p:nvPr/>
-        </p:nvSpPr>
-        <p:spPr>
-          <a:xfrm>
-            <a:off x="9231123" y="2674548"/>
-            <a:ext cx="1570321" cy="338554"/>
-          </a:xfrm>
-          <a:prstGeom prst="rect">
-            <a:avLst/>
-          </a:prstGeom>
-          <a:noFill/>
-        </p:spPr>
-        <p:txBody>
-          <a:bodyPr wrap="square" rtlCol="0">
-            <a:spAutoFit/>
-          </a:bodyPr>
-          <a:lstStyle>
-            <a:defPPr>
-              <a:defRPr lang="en-US"/>
-            </a:defPPr>
-            <a:lvl1pPr marL="0" algn="l" defTabSz="457200" rtl="0" eaLnBrk="1" latinLnBrk="0" hangingPunct="1">
-              <a:defRPr sz="1800" kern="1200">
-                <a:solidFill>
-                  <a:schemeClr val="tx1"/>
-                </a:solidFill>
-                <a:latin typeface="+mn-lt"/>
-                <a:ea typeface="+mn-ea"/>
-                <a:cs typeface="+mn-cs"/>
-              </a:defRPr>
-            </a:lvl1pPr>
-            <a:lvl2pPr marL="457200" algn="l" defTabSz="457200" rtl="0" eaLnBrk="1" latinLnBrk="0" hangingPunct="1">
-              <a:defRPr sz="1800" kern="1200">
-                <a:solidFill>
-                  <a:schemeClr val="tx1"/>
-                </a:solidFill>
-                <a:latin typeface="+mn-lt"/>
-                <a:ea typeface="+mn-ea"/>
-                <a:cs typeface="+mn-cs"/>
-              </a:defRPr>
-            </a:lvl2pPr>
-            <a:lvl3pPr marL="914400" algn="l" defTabSz="457200" rtl="0" eaLnBrk="1" latinLnBrk="0" hangingPunct="1">
-              <a:defRPr sz="1800" kern="1200">
-                <a:solidFill>
-                  <a:schemeClr val="tx1"/>
-                </a:solidFill>
-                <a:latin typeface="+mn-lt"/>
-                <a:ea typeface="+mn-ea"/>
-                <a:cs typeface="+mn-cs"/>
-              </a:defRPr>
-            </a:lvl3pPr>
-            <a:lvl4pPr marL="1371600" algn="l" defTabSz="457200" rtl="0" eaLnBrk="1" latinLnBrk="0" hangingPunct="1">
-              <a:defRPr sz="1800" kern="1200">
-                <a:solidFill>
-                  <a:schemeClr val="tx1"/>
-                </a:solidFill>
-                <a:latin typeface="+mn-lt"/>
-                <a:ea typeface="+mn-ea"/>
-                <a:cs typeface="+mn-cs"/>
-              </a:defRPr>
-            </a:lvl4pPr>
-            <a:lvl5pPr marL="1828800" algn="l" defTabSz="457200" rtl="0" eaLnBrk="1" latinLnBrk="0" hangingPunct="1">
-              <a:defRPr sz="1800" kern="1200">
-                <a:solidFill>
-                  <a:schemeClr val="tx1"/>
-                </a:solidFill>
-                <a:latin typeface="+mn-lt"/>
-                <a:ea typeface="+mn-ea"/>
-                <a:cs typeface="+mn-cs"/>
-              </a:defRPr>
-            </a:lvl5pPr>
-            <a:lvl6pPr marL="2286000" algn="l" defTabSz="457200" rtl="0" eaLnBrk="1" latinLnBrk="0" hangingPunct="1">
-              <a:defRPr sz="1800" kern="1200">
-                <a:solidFill>
-                  <a:schemeClr val="tx1"/>
-                </a:solidFill>
-                <a:latin typeface="+mn-lt"/>
-                <a:ea typeface="+mn-ea"/>
-                <a:cs typeface="+mn-cs"/>
-              </a:defRPr>
-            </a:lvl6pPr>
-            <a:lvl7pPr marL="2743200" algn="l" defTabSz="457200" rtl="0" eaLnBrk="1" latinLnBrk="0" hangingPunct="1">
-              <a:defRPr sz="1800" kern="1200">
-                <a:solidFill>
-                  <a:schemeClr val="tx1"/>
-                </a:solidFill>
-                <a:latin typeface="+mn-lt"/>
-                <a:ea typeface="+mn-ea"/>
-                <a:cs typeface="+mn-cs"/>
-              </a:defRPr>
-            </a:lvl7pPr>
-            <a:lvl8pPr marL="3200400" algn="l" defTabSz="457200" rtl="0" eaLnBrk="1" latinLnBrk="0" hangingPunct="1">
-              <a:defRPr sz="1800" kern="1200">
-                <a:solidFill>
-                  <a:schemeClr val="tx1"/>
-                </a:solidFill>
-                <a:latin typeface="+mn-lt"/>
-                <a:ea typeface="+mn-ea"/>
-                <a:cs typeface="+mn-cs"/>
-              </a:defRPr>
-            </a:lvl8pPr>
-            <a:lvl9pPr marL="3657600" algn="l" defTabSz="457200" rtl="0" eaLnBrk="1" latinLnBrk="0" hangingPunct="1">
-              <a:defRPr sz="1800" kern="1200">
-                <a:solidFill>
-                  <a:schemeClr val="tx1"/>
-                </a:solidFill>
-                <a:latin typeface="+mn-lt"/>
-                <a:ea typeface="+mn-ea"/>
-                <a:cs typeface="+mn-cs"/>
-              </a:defRPr>
-            </a:lvl9pPr>
-          </a:lstStyle>
-          <a:p>
-            <a:r>
-              <a:rPr lang="en-US" sz="1600" b="1" dirty="0">
-                <a:latin typeface="Arial" panose="020B0604020202020204" pitchFamily="34" charset="0"/>
-                <a:ea typeface="Yu Gothic" panose="020B0400000000000000" pitchFamily="34" charset="-128"/>
-                <a:cs typeface="Arial" panose="020B0604020202020204" pitchFamily="34" charset="0"/>
-              </a:rPr>
-              <a:t>Ancestral</a:t>
-            </a:r>
-          </a:p>
-        </p:txBody>
-      </p:sp>
-      <p:sp>
-        <p:nvSpPr>
-          <p:cNvPr id="37" name="TextBox 36">
-            <a:extLst>
-              <a:ext uri="{FF2B5EF4-FFF2-40B4-BE49-F238E27FC236}">
-                <a16:creationId xmlns:a16="http://schemas.microsoft.com/office/drawing/2014/main" id="{637402CA-94A2-7A6D-AC4F-433FB2DD8C14}"/>
-              </a:ext>
-            </a:extLst>
-          </p:cNvPr>
-          <p:cNvSpPr txBox="1"/>
-          <p:nvPr/>
-        </p:nvSpPr>
-        <p:spPr>
-          <a:xfrm>
-            <a:off x="9379927" y="4909004"/>
-            <a:ext cx="1125903" cy="338554"/>
-          </a:xfrm>
-          <a:prstGeom prst="rect">
-            <a:avLst/>
-          </a:prstGeom>
-          <a:noFill/>
-        </p:spPr>
-        <p:txBody>
-          <a:bodyPr wrap="square" rtlCol="0">
-            <a:spAutoFit/>
-          </a:bodyPr>
-          <a:lstStyle>
-            <a:defPPr>
-              <a:defRPr lang="en-US"/>
-            </a:defPPr>
-            <a:lvl1pPr marL="0" algn="l" defTabSz="457200" rtl="0" eaLnBrk="1" latinLnBrk="0" hangingPunct="1">
-              <a:defRPr sz="1800" kern="1200">
-                <a:solidFill>
-                  <a:schemeClr val="tx1"/>
-                </a:solidFill>
-                <a:latin typeface="+mn-lt"/>
-                <a:ea typeface="+mn-ea"/>
-                <a:cs typeface="+mn-cs"/>
-              </a:defRPr>
-            </a:lvl1pPr>
-            <a:lvl2pPr marL="457200" algn="l" defTabSz="457200" rtl="0" eaLnBrk="1" latinLnBrk="0" hangingPunct="1">
-              <a:defRPr sz="1800" kern="1200">
-                <a:solidFill>
-                  <a:schemeClr val="tx1"/>
-                </a:solidFill>
-                <a:latin typeface="+mn-lt"/>
-                <a:ea typeface="+mn-ea"/>
-                <a:cs typeface="+mn-cs"/>
-              </a:defRPr>
-            </a:lvl2pPr>
-            <a:lvl3pPr marL="914400" algn="l" defTabSz="457200" rtl="0" eaLnBrk="1" latinLnBrk="0" hangingPunct="1">
-              <a:defRPr sz="1800" kern="1200">
-                <a:solidFill>
-                  <a:schemeClr val="tx1"/>
-                </a:solidFill>
-                <a:latin typeface="+mn-lt"/>
-                <a:ea typeface="+mn-ea"/>
-                <a:cs typeface="+mn-cs"/>
-              </a:defRPr>
-            </a:lvl3pPr>
-            <a:lvl4pPr marL="1371600" algn="l" defTabSz="457200" rtl="0" eaLnBrk="1" latinLnBrk="0" hangingPunct="1">
-              <a:defRPr sz="1800" kern="1200">
-                <a:solidFill>
-                  <a:schemeClr val="tx1"/>
-                </a:solidFill>
-                <a:latin typeface="+mn-lt"/>
-                <a:ea typeface="+mn-ea"/>
-                <a:cs typeface="+mn-cs"/>
-              </a:defRPr>
-            </a:lvl4pPr>
-            <a:lvl5pPr marL="1828800" algn="l" defTabSz="457200" rtl="0" eaLnBrk="1" latinLnBrk="0" hangingPunct="1">
-              <a:defRPr sz="1800" kern="1200">
-                <a:solidFill>
-                  <a:schemeClr val="tx1"/>
-                </a:solidFill>
-                <a:latin typeface="+mn-lt"/>
-                <a:ea typeface="+mn-ea"/>
-                <a:cs typeface="+mn-cs"/>
-              </a:defRPr>
-            </a:lvl5pPr>
-            <a:lvl6pPr marL="2286000" algn="l" defTabSz="457200" rtl="0" eaLnBrk="1" latinLnBrk="0" hangingPunct="1">
-              <a:defRPr sz="1800" kern="1200">
-                <a:solidFill>
-                  <a:schemeClr val="tx1"/>
-                </a:solidFill>
-                <a:latin typeface="+mn-lt"/>
-                <a:ea typeface="+mn-ea"/>
-                <a:cs typeface="+mn-cs"/>
-              </a:defRPr>
-            </a:lvl6pPr>
-            <a:lvl7pPr marL="2743200" algn="l" defTabSz="457200" rtl="0" eaLnBrk="1" latinLnBrk="0" hangingPunct="1">
-              <a:defRPr sz="1800" kern="1200">
-                <a:solidFill>
-                  <a:schemeClr val="tx1"/>
-                </a:solidFill>
-                <a:latin typeface="+mn-lt"/>
-                <a:ea typeface="+mn-ea"/>
-                <a:cs typeface="+mn-cs"/>
-              </a:defRPr>
-            </a:lvl7pPr>
-            <a:lvl8pPr marL="3200400" algn="l" defTabSz="457200" rtl="0" eaLnBrk="1" latinLnBrk="0" hangingPunct="1">
-              <a:defRPr sz="1800" kern="1200">
-                <a:solidFill>
-                  <a:schemeClr val="tx1"/>
-                </a:solidFill>
-                <a:latin typeface="+mn-lt"/>
-                <a:ea typeface="+mn-ea"/>
-                <a:cs typeface="+mn-cs"/>
-              </a:defRPr>
-            </a:lvl8pPr>
-            <a:lvl9pPr marL="3657600" algn="l" defTabSz="457200" rtl="0" eaLnBrk="1" latinLnBrk="0" hangingPunct="1">
-              <a:defRPr sz="1800" kern="1200">
-                <a:solidFill>
-                  <a:schemeClr val="tx1"/>
-                </a:solidFill>
-                <a:latin typeface="+mn-lt"/>
-                <a:ea typeface="+mn-ea"/>
-                <a:cs typeface="+mn-cs"/>
-              </a:defRPr>
-            </a:lvl9pPr>
-          </a:lstStyle>
-          <a:p>
-            <a:r>
-              <a:rPr lang="en-US" sz="1600" b="1" dirty="0">
-                <a:latin typeface="Arial" panose="020B0604020202020204" pitchFamily="34" charset="0"/>
-                <a:ea typeface="Yu Gothic" panose="020B0400000000000000" pitchFamily="34" charset="-128"/>
-                <a:cs typeface="Arial" panose="020B0604020202020204" pitchFamily="34" charset="0"/>
-              </a:rPr>
-              <a:t>Current</a:t>
-            </a:r>
-          </a:p>
-        </p:txBody>
-      </p:sp>
-      <p:sp>
-        <p:nvSpPr>
-          <p:cNvPr id="38" name="Right Brace 37">
-            <a:extLst>
-              <a:ext uri="{FF2B5EF4-FFF2-40B4-BE49-F238E27FC236}">
-                <a16:creationId xmlns:a16="http://schemas.microsoft.com/office/drawing/2014/main" id="{F8A67FEB-D131-C70E-38AC-81199569CBCB}"/>
-              </a:ext>
-            </a:extLst>
-          </p:cNvPr>
-          <p:cNvSpPr/>
-          <p:nvPr/>
-        </p:nvSpPr>
-        <p:spPr>
-          <a:xfrm>
-            <a:off x="8778751" y="2150749"/>
-            <a:ext cx="479983" cy="3575844"/>
-          </a:xfrm>
-          <a:prstGeom prst="rightBrace">
-            <a:avLst/>
-          </a:prstGeom>
-          <a:ln w="76200"/>
-        </p:spPr>
-        <p:style>
-          <a:lnRef idx="1">
-            <a:schemeClr val="dk1"/>
-          </a:lnRef>
-          <a:fillRef idx="0">
-            <a:schemeClr val="dk1"/>
-          </a:fillRef>
-          <a:effectRef idx="0">
-            <a:schemeClr val="dk1"/>
-          </a:effectRef>
-          <a:fontRef idx="minor">
-            <a:schemeClr val="tx1"/>
-          </a:fontRef>
-        </p:style>
-        <p:txBody>
-          <a:bodyPr rtlCol="0" anchor="ctr"/>
-          <a:lstStyle/>
-          <a:p>
-            <a:pPr algn="ctr"/>
-            <a:endParaRPr lang="en-US"/>
-          </a:p>
-        </p:txBody>
-      </p:sp>
-      <p:sp>
-        <p:nvSpPr>
-          <p:cNvPr id="39" name="Right Brace 38">
-            <a:extLst>
-              <a:ext uri="{FF2B5EF4-FFF2-40B4-BE49-F238E27FC236}">
-                <a16:creationId xmlns:a16="http://schemas.microsoft.com/office/drawing/2014/main" id="{75181FFF-4A0B-C576-74C0-3EC0FC1BBCF3}"/>
-              </a:ext>
-            </a:extLst>
-          </p:cNvPr>
-          <p:cNvSpPr/>
-          <p:nvPr/>
-        </p:nvSpPr>
-        <p:spPr>
-          <a:xfrm>
-            <a:off x="8778751" y="6278163"/>
-            <a:ext cx="479983" cy="3575844"/>
-          </a:xfrm>
-          <a:prstGeom prst="rightBrace">
-            <a:avLst/>
-          </a:prstGeom>
-          <a:ln w="76200"/>
-        </p:spPr>
-        <p:style>
-          <a:lnRef idx="1">
-            <a:schemeClr val="dk1"/>
-          </a:lnRef>
-          <a:fillRef idx="0">
-            <a:schemeClr val="dk1"/>
-          </a:fillRef>
-          <a:effectRef idx="0">
-            <a:schemeClr val="dk1"/>
-          </a:effectRef>
-          <a:fontRef idx="minor">
-            <a:schemeClr val="tx1"/>
-          </a:fontRef>
-        </p:style>
-        <p:txBody>
-          <a:bodyPr rtlCol="0" anchor="ctr"/>
-          <a:lstStyle/>
-          <a:p>
-            <a:pPr algn="ctr"/>
-            <a:endParaRPr lang="en-US"/>
-          </a:p>
-        </p:txBody>
-      </p:sp>
-      <p:cxnSp>
-        <p:nvCxnSpPr>
-          <p:cNvPr id="17" name="Straight Connector 16">
-            <a:extLst>
-              <a:ext uri="{FF2B5EF4-FFF2-40B4-BE49-F238E27FC236}">
-                <a16:creationId xmlns:a16="http://schemas.microsoft.com/office/drawing/2014/main" id="{AF3CF3DA-12F7-E7E8-D214-AC6EE0B7887F}"/>
-              </a:ext>
-            </a:extLst>
-          </p:cNvPr>
-          <p:cNvCxnSpPr/>
-          <p:nvPr/>
-        </p:nvCxnSpPr>
-        <p:spPr>
-          <a:xfrm>
-            <a:off x="7472362" y="1903906"/>
-            <a:ext cx="0" cy="267579"/>
-          </a:xfrm>
-          <a:prstGeom prst="line">
-            <a:avLst/>
-          </a:prstGeom>
-          <a:ln w="28575"/>
-        </p:spPr>
-        <p:style>
-          <a:lnRef idx="1">
-            <a:schemeClr val="dk1"/>
-          </a:lnRef>
-          <a:fillRef idx="0">
-            <a:schemeClr val="dk1"/>
-          </a:fillRef>
-          <a:effectRef idx="0">
-            <a:schemeClr val="dk1"/>
-          </a:effectRef>
-          <a:fontRef idx="minor">
-            <a:schemeClr val="tx1"/>
-          </a:fontRef>
-        </p:style>
-      </p:cxnSp>
-      <p:cxnSp>
-        <p:nvCxnSpPr>
-          <p:cNvPr id="18" name="Straight Connector 17">
-            <a:extLst>
-              <a:ext uri="{FF2B5EF4-FFF2-40B4-BE49-F238E27FC236}">
-                <a16:creationId xmlns:a16="http://schemas.microsoft.com/office/drawing/2014/main" id="{42F8AF2A-7B8F-A175-39B1-888A145D274B}"/>
-              </a:ext>
-            </a:extLst>
-          </p:cNvPr>
-          <p:cNvCxnSpPr>
-            <a:cxnSpLocks/>
-          </p:cNvCxnSpPr>
-          <p:nvPr/>
-        </p:nvCxnSpPr>
-        <p:spPr>
-          <a:xfrm>
-            <a:off x="6838950" y="2172353"/>
-            <a:ext cx="0" cy="1687092"/>
-          </a:xfrm>
-          <a:prstGeom prst="line">
-            <a:avLst/>
-          </a:prstGeom>
-          <a:ln w="28575"/>
-        </p:spPr>
-        <p:style>
-          <a:lnRef idx="1">
-            <a:schemeClr val="dk1"/>
-          </a:lnRef>
-          <a:fillRef idx="0">
-            <a:schemeClr val="dk1"/>
-          </a:fillRef>
-          <a:effectRef idx="0">
-            <a:schemeClr val="dk1"/>
-          </a:effectRef>
-          <a:fontRef idx="minor">
-            <a:schemeClr val="tx1"/>
-          </a:fontRef>
-        </p:style>
-      </p:cxnSp>
-      <p:cxnSp>
-        <p:nvCxnSpPr>
-          <p:cNvPr id="21" name="Straight Connector 20">
-            <a:extLst>
-              <a:ext uri="{FF2B5EF4-FFF2-40B4-BE49-F238E27FC236}">
-                <a16:creationId xmlns:a16="http://schemas.microsoft.com/office/drawing/2014/main" id="{182D8AB6-C14D-E017-B126-EC80F544ED56}"/>
-              </a:ext>
-            </a:extLst>
-          </p:cNvPr>
-          <p:cNvCxnSpPr>
-            <a:cxnSpLocks/>
-          </p:cNvCxnSpPr>
-          <p:nvPr/>
-        </p:nvCxnSpPr>
-        <p:spPr>
-          <a:xfrm>
-            <a:off x="8105774" y="2169104"/>
-            <a:ext cx="0" cy="2739900"/>
-          </a:xfrm>
-          <a:prstGeom prst="line">
-            <a:avLst/>
-          </a:prstGeom>
-          <a:ln w="28575"/>
-        </p:spPr>
-        <p:style>
-          <a:lnRef idx="1">
-            <a:schemeClr val="dk1"/>
-          </a:lnRef>
-          <a:fillRef idx="0">
-            <a:schemeClr val="dk1"/>
-          </a:fillRef>
-          <a:effectRef idx="0">
-            <a:schemeClr val="dk1"/>
-          </a:effectRef>
-          <a:fontRef idx="minor">
-            <a:schemeClr val="tx1"/>
-          </a:fontRef>
-        </p:style>
-      </p:cxnSp>
-      <p:cxnSp>
-        <p:nvCxnSpPr>
-          <p:cNvPr id="22" name="Straight Connector 21">
-            <a:extLst>
-              <a:ext uri="{FF2B5EF4-FFF2-40B4-BE49-F238E27FC236}">
-                <a16:creationId xmlns:a16="http://schemas.microsoft.com/office/drawing/2014/main" id="{4714411E-9E15-C044-FD20-FDD95B3CD81F}"/>
-              </a:ext>
-            </a:extLst>
-          </p:cNvPr>
-          <p:cNvCxnSpPr>
-            <a:cxnSpLocks/>
-          </p:cNvCxnSpPr>
-          <p:nvPr/>
-        </p:nvCxnSpPr>
-        <p:spPr>
-          <a:xfrm flipH="1">
-            <a:off x="6838950" y="2171485"/>
-            <a:ext cx="1266824" cy="0"/>
-          </a:xfrm>
-          <a:prstGeom prst="line">
-            <a:avLst/>
-          </a:prstGeom>
-          <a:ln w="28575"/>
-        </p:spPr>
-        <p:style>
-          <a:lnRef idx="1">
-            <a:schemeClr val="dk1"/>
-          </a:lnRef>
-          <a:fillRef idx="0">
-            <a:schemeClr val="dk1"/>
-          </a:fillRef>
-          <a:effectRef idx="0">
-            <a:schemeClr val="dk1"/>
-          </a:effectRef>
-          <a:fontRef idx="minor">
-            <a:schemeClr val="tx1"/>
-          </a:fontRef>
-        </p:style>
-      </p:cxnSp>
-      <p:cxnSp>
-        <p:nvCxnSpPr>
-          <p:cNvPr id="48" name="Straight Connector 47">
-            <a:extLst>
-              <a:ext uri="{FF2B5EF4-FFF2-40B4-BE49-F238E27FC236}">
-                <a16:creationId xmlns:a16="http://schemas.microsoft.com/office/drawing/2014/main" id="{9B6738AE-FF7E-EEDD-EE75-0F62D938570C}"/>
-              </a:ext>
-            </a:extLst>
-          </p:cNvPr>
-          <p:cNvCxnSpPr/>
-          <p:nvPr/>
-        </p:nvCxnSpPr>
-        <p:spPr>
-          <a:xfrm>
-            <a:off x="6480095" y="3859445"/>
-            <a:ext cx="717709" cy="0"/>
-          </a:xfrm>
-          <a:prstGeom prst="line">
-            <a:avLst/>
-          </a:prstGeom>
-          <a:ln w="28575"/>
-        </p:spPr>
-        <p:style>
-          <a:lnRef idx="1">
-            <a:schemeClr val="dk1"/>
-          </a:lnRef>
-          <a:fillRef idx="0">
-            <a:schemeClr val="dk1"/>
-          </a:fillRef>
-          <a:effectRef idx="0">
-            <a:schemeClr val="dk1"/>
-          </a:effectRef>
-          <a:fontRef idx="minor">
-            <a:schemeClr val="tx1"/>
-          </a:fontRef>
-        </p:style>
-      </p:cxnSp>
-      <p:cxnSp>
-        <p:nvCxnSpPr>
-          <p:cNvPr id="54" name="Straight Connector 53">
-            <a:extLst>
-              <a:ext uri="{FF2B5EF4-FFF2-40B4-BE49-F238E27FC236}">
-                <a16:creationId xmlns:a16="http://schemas.microsoft.com/office/drawing/2014/main" id="{E5EA91F2-176D-298A-EAFF-7550A8200703}"/>
-              </a:ext>
-            </a:extLst>
-          </p:cNvPr>
-          <p:cNvCxnSpPr>
-            <a:cxnSpLocks/>
-          </p:cNvCxnSpPr>
-          <p:nvPr/>
-        </p:nvCxnSpPr>
-        <p:spPr>
-          <a:xfrm flipH="1">
-            <a:off x="7189191" y="3859445"/>
-            <a:ext cx="8613" cy="1666212"/>
-          </a:xfrm>
-          <a:prstGeom prst="line">
-            <a:avLst/>
-          </a:prstGeom>
-          <a:ln w="28575"/>
-        </p:spPr>
-        <p:style>
-          <a:lnRef idx="1">
-            <a:schemeClr val="dk1"/>
-          </a:lnRef>
-          <a:fillRef idx="0">
-            <a:schemeClr val="dk1"/>
-          </a:fillRef>
-          <a:effectRef idx="0">
-            <a:schemeClr val="dk1"/>
-          </a:effectRef>
-          <a:fontRef idx="minor">
-            <a:schemeClr val="tx1"/>
-          </a:fontRef>
-        </p:style>
-      </p:cxnSp>
-      <p:cxnSp>
-        <p:nvCxnSpPr>
-          <p:cNvPr id="72" name="Straight Connector 71">
-            <a:extLst>
-              <a:ext uri="{FF2B5EF4-FFF2-40B4-BE49-F238E27FC236}">
-                <a16:creationId xmlns:a16="http://schemas.microsoft.com/office/drawing/2014/main" id="{EBE1E538-3CB1-8174-CD37-3BCC678EF595}"/>
-              </a:ext>
-            </a:extLst>
-          </p:cNvPr>
-          <p:cNvCxnSpPr>
-            <a:cxnSpLocks/>
-          </p:cNvCxnSpPr>
-          <p:nvPr/>
-        </p:nvCxnSpPr>
-        <p:spPr>
-          <a:xfrm>
-            <a:off x="6480095" y="3851825"/>
-            <a:ext cx="0" cy="1673832"/>
-          </a:xfrm>
-          <a:prstGeom prst="line">
-            <a:avLst/>
-          </a:prstGeom>
-          <a:ln w="28575"/>
-        </p:spPr>
-        <p:style>
-          <a:lnRef idx="1">
-            <a:schemeClr val="dk1"/>
-          </a:lnRef>
-          <a:fillRef idx="0">
-            <a:schemeClr val="dk1"/>
-          </a:fillRef>
-          <a:effectRef idx="0">
-            <a:schemeClr val="dk1"/>
-          </a:effectRef>
-          <a:fontRef idx="minor">
-            <a:schemeClr val="tx1"/>
-          </a:fontRef>
-        </p:style>
-      </p:cxnSp>
-      <p:sp>
-        <p:nvSpPr>
-          <p:cNvPr id="548" name="Rectangle 547">
-            <a:extLst>
-              <a:ext uri="{FF2B5EF4-FFF2-40B4-BE49-F238E27FC236}">
-                <a16:creationId xmlns:a16="http://schemas.microsoft.com/office/drawing/2014/main" id="{E0CEC3CF-CFEC-4C06-35AB-C8137FF4567C}"/>
-              </a:ext>
-            </a:extLst>
-          </p:cNvPr>
-          <p:cNvSpPr/>
-          <p:nvPr/>
-        </p:nvSpPr>
-        <p:spPr>
-          <a:xfrm>
-            <a:off x="11072172" y="6676843"/>
-            <a:ext cx="876045" cy="1019041"/>
-          </a:xfrm>
-          <a:prstGeom prst="rect">
-            <a:avLst/>
-          </a:prstGeom>
-          <a:solidFill>
-            <a:schemeClr val="accent1">
-              <a:lumMod val="40000"/>
-              <a:lumOff val="60000"/>
-            </a:schemeClr>
-          </a:solidFill>
-          <a:ln>
-            <a:noFill/>
-          </a:ln>
-        </p:spPr>
-        <p:style>
-          <a:lnRef idx="2">
-            <a:schemeClr val="accent1">
-              <a:shade val="15000"/>
-            </a:schemeClr>
-          </a:lnRef>
-          <a:fillRef idx="1">
-            <a:schemeClr val="accent1"/>
-          </a:fillRef>
-          <a:effectRef idx="0">
-            <a:schemeClr val="accent1"/>
-          </a:effectRef>
-          <a:fontRef idx="minor">
-            <a:schemeClr val="lt1"/>
-          </a:fontRef>
-        </p:style>
-        <p:txBody>
-          <a:bodyPr rtlCol="0" anchor="ctr"/>
-          <a:lstStyle>
-            <a:defPPr>
-              <a:defRPr lang="en-US"/>
-            </a:defPPr>
-            <a:lvl1pPr marL="0" algn="l" defTabSz="457200" rtl="0" eaLnBrk="1" latinLnBrk="0" hangingPunct="1">
-              <a:defRPr sz="1800" kern="1200">
-                <a:solidFill>
-                  <a:schemeClr val="lt1"/>
-                </a:solidFill>
-                <a:latin typeface="+mn-lt"/>
-                <a:ea typeface="+mn-ea"/>
-                <a:cs typeface="+mn-cs"/>
-              </a:defRPr>
-            </a:lvl1pPr>
-            <a:lvl2pPr marL="457200" algn="l" defTabSz="457200" rtl="0" eaLnBrk="1" latinLnBrk="0" hangingPunct="1">
-              <a:defRPr sz="1800" kern="1200">
-                <a:solidFill>
-                  <a:schemeClr val="lt1"/>
-                </a:solidFill>
-                <a:latin typeface="+mn-lt"/>
-                <a:ea typeface="+mn-ea"/>
-                <a:cs typeface="+mn-cs"/>
-              </a:defRPr>
-            </a:lvl2pPr>
-            <a:lvl3pPr marL="914400" algn="l" defTabSz="457200" rtl="0" eaLnBrk="1" latinLnBrk="0" hangingPunct="1">
-              <a:defRPr sz="1800" kern="1200">
-                <a:solidFill>
-                  <a:schemeClr val="lt1"/>
-                </a:solidFill>
-                <a:latin typeface="+mn-lt"/>
-                <a:ea typeface="+mn-ea"/>
-                <a:cs typeface="+mn-cs"/>
-              </a:defRPr>
-            </a:lvl3pPr>
-            <a:lvl4pPr marL="1371600" algn="l" defTabSz="457200" rtl="0" eaLnBrk="1" latinLnBrk="0" hangingPunct="1">
-              <a:defRPr sz="1800" kern="1200">
-                <a:solidFill>
-                  <a:schemeClr val="lt1"/>
-                </a:solidFill>
-                <a:latin typeface="+mn-lt"/>
-                <a:ea typeface="+mn-ea"/>
-                <a:cs typeface="+mn-cs"/>
-              </a:defRPr>
-            </a:lvl4pPr>
-            <a:lvl5pPr marL="1828800" algn="l" defTabSz="457200" rtl="0" eaLnBrk="1" latinLnBrk="0" hangingPunct="1">
-              <a:defRPr sz="1800" kern="1200">
-                <a:solidFill>
-                  <a:schemeClr val="lt1"/>
-                </a:solidFill>
-                <a:latin typeface="+mn-lt"/>
-                <a:ea typeface="+mn-ea"/>
-                <a:cs typeface="+mn-cs"/>
-              </a:defRPr>
-            </a:lvl5pPr>
-            <a:lvl6pPr marL="2286000" algn="l" defTabSz="457200" rtl="0" eaLnBrk="1" latinLnBrk="0" hangingPunct="1">
-              <a:defRPr sz="1800" kern="1200">
-                <a:solidFill>
-                  <a:schemeClr val="lt1"/>
-                </a:solidFill>
-                <a:latin typeface="+mn-lt"/>
-                <a:ea typeface="+mn-ea"/>
-                <a:cs typeface="+mn-cs"/>
-              </a:defRPr>
-            </a:lvl6pPr>
-            <a:lvl7pPr marL="2743200" algn="l" defTabSz="457200" rtl="0" eaLnBrk="1" latinLnBrk="0" hangingPunct="1">
-              <a:defRPr sz="1800" kern="1200">
-                <a:solidFill>
-                  <a:schemeClr val="lt1"/>
-                </a:solidFill>
-                <a:latin typeface="+mn-lt"/>
-                <a:ea typeface="+mn-ea"/>
-                <a:cs typeface="+mn-cs"/>
-              </a:defRPr>
-            </a:lvl7pPr>
-            <a:lvl8pPr marL="3200400" algn="l" defTabSz="457200" rtl="0" eaLnBrk="1" latinLnBrk="0" hangingPunct="1">
-              <a:defRPr sz="1800" kern="1200">
-                <a:solidFill>
-                  <a:schemeClr val="lt1"/>
-                </a:solidFill>
-                <a:latin typeface="+mn-lt"/>
-                <a:ea typeface="+mn-ea"/>
-                <a:cs typeface="+mn-cs"/>
-              </a:defRPr>
-            </a:lvl8pPr>
-            <a:lvl9pPr marL="3657600" algn="l" defTabSz="457200" rtl="0" eaLnBrk="1" latinLnBrk="0" hangingPunct="1">
-              <a:defRPr sz="1800" kern="1200">
-                <a:solidFill>
-                  <a:schemeClr val="lt1"/>
-                </a:solidFill>
-                <a:latin typeface="+mn-lt"/>
-                <a:ea typeface="+mn-ea"/>
-                <a:cs typeface="+mn-cs"/>
-              </a:defRPr>
-            </a:lvl9pPr>
-          </a:lstStyle>
-          <a:p>
-            <a:pPr algn="ctr"/>
-            <a:endParaRPr lang="en-US" sz="1600" dirty="0">
-              <a:latin typeface="Arial" panose="020B0604020202020204" pitchFamily="34" charset="0"/>
-              <a:cs typeface="Arial" panose="020B0604020202020204" pitchFamily="34" charset="0"/>
-            </a:endParaRPr>
-          </a:p>
-        </p:txBody>
-      </p:sp>
-      <p:sp>
-        <p:nvSpPr>
-          <p:cNvPr id="549" name="Rectangle 548">
-            <a:extLst>
-              <a:ext uri="{FF2B5EF4-FFF2-40B4-BE49-F238E27FC236}">
-                <a16:creationId xmlns:a16="http://schemas.microsoft.com/office/drawing/2014/main" id="{0D0F3972-67EB-D5F8-FB48-ABE1642E691D}"/>
-              </a:ext>
-            </a:extLst>
-          </p:cNvPr>
-          <p:cNvSpPr/>
-          <p:nvPr/>
-        </p:nvSpPr>
-        <p:spPr>
-          <a:xfrm>
-            <a:off x="10846562" y="9016461"/>
-            <a:ext cx="1331605" cy="280246"/>
-          </a:xfrm>
-          <a:prstGeom prst="rect">
-            <a:avLst/>
-          </a:prstGeom>
-          <a:solidFill>
-            <a:schemeClr val="accent1">
-              <a:lumMod val="40000"/>
-              <a:lumOff val="60000"/>
-            </a:schemeClr>
-          </a:solidFill>
-          <a:ln>
-            <a:noFill/>
-          </a:ln>
-        </p:spPr>
-        <p:style>
-          <a:lnRef idx="2">
-            <a:schemeClr val="accent1">
-              <a:shade val="15000"/>
-            </a:schemeClr>
-          </a:lnRef>
-          <a:fillRef idx="1">
-            <a:schemeClr val="accent1"/>
-          </a:fillRef>
-          <a:effectRef idx="0">
-            <a:schemeClr val="accent1"/>
-          </a:effectRef>
-          <a:fontRef idx="minor">
-            <a:schemeClr val="lt1"/>
-          </a:fontRef>
-        </p:style>
-        <p:txBody>
-          <a:bodyPr rtlCol="0" anchor="ctr"/>
-          <a:lstStyle>
-            <a:defPPr>
-              <a:defRPr lang="en-US"/>
-            </a:defPPr>
-            <a:lvl1pPr marL="0" algn="l" defTabSz="457200" rtl="0" eaLnBrk="1" latinLnBrk="0" hangingPunct="1">
-              <a:defRPr sz="1800" kern="1200">
-                <a:solidFill>
-                  <a:schemeClr val="lt1"/>
-                </a:solidFill>
-                <a:latin typeface="+mn-lt"/>
-                <a:ea typeface="+mn-ea"/>
-                <a:cs typeface="+mn-cs"/>
-              </a:defRPr>
-            </a:lvl1pPr>
-            <a:lvl2pPr marL="457200" algn="l" defTabSz="457200" rtl="0" eaLnBrk="1" latinLnBrk="0" hangingPunct="1">
-              <a:defRPr sz="1800" kern="1200">
-                <a:solidFill>
-                  <a:schemeClr val="lt1"/>
-                </a:solidFill>
-                <a:latin typeface="+mn-lt"/>
-                <a:ea typeface="+mn-ea"/>
-                <a:cs typeface="+mn-cs"/>
-              </a:defRPr>
-            </a:lvl2pPr>
-            <a:lvl3pPr marL="914400" algn="l" defTabSz="457200" rtl="0" eaLnBrk="1" latinLnBrk="0" hangingPunct="1">
-              <a:defRPr sz="1800" kern="1200">
-                <a:solidFill>
-                  <a:schemeClr val="lt1"/>
-                </a:solidFill>
-                <a:latin typeface="+mn-lt"/>
-                <a:ea typeface="+mn-ea"/>
-                <a:cs typeface="+mn-cs"/>
-              </a:defRPr>
-            </a:lvl3pPr>
-            <a:lvl4pPr marL="1371600" algn="l" defTabSz="457200" rtl="0" eaLnBrk="1" latinLnBrk="0" hangingPunct="1">
-              <a:defRPr sz="1800" kern="1200">
-                <a:solidFill>
-                  <a:schemeClr val="lt1"/>
-                </a:solidFill>
-                <a:latin typeface="+mn-lt"/>
-                <a:ea typeface="+mn-ea"/>
-                <a:cs typeface="+mn-cs"/>
-              </a:defRPr>
-            </a:lvl4pPr>
-            <a:lvl5pPr marL="1828800" algn="l" defTabSz="457200" rtl="0" eaLnBrk="1" latinLnBrk="0" hangingPunct="1">
-              <a:defRPr sz="1800" kern="1200">
-                <a:solidFill>
-                  <a:schemeClr val="lt1"/>
-                </a:solidFill>
-                <a:latin typeface="+mn-lt"/>
-                <a:ea typeface="+mn-ea"/>
-                <a:cs typeface="+mn-cs"/>
-              </a:defRPr>
-            </a:lvl5pPr>
-            <a:lvl6pPr marL="2286000" algn="l" defTabSz="457200" rtl="0" eaLnBrk="1" latinLnBrk="0" hangingPunct="1">
-              <a:defRPr sz="1800" kern="1200">
-                <a:solidFill>
-                  <a:schemeClr val="lt1"/>
-                </a:solidFill>
-                <a:latin typeface="+mn-lt"/>
-                <a:ea typeface="+mn-ea"/>
-                <a:cs typeface="+mn-cs"/>
-              </a:defRPr>
-            </a:lvl6pPr>
-            <a:lvl7pPr marL="2743200" algn="l" defTabSz="457200" rtl="0" eaLnBrk="1" latinLnBrk="0" hangingPunct="1">
-              <a:defRPr sz="1800" kern="1200">
-                <a:solidFill>
-                  <a:schemeClr val="lt1"/>
-                </a:solidFill>
-                <a:latin typeface="+mn-lt"/>
-                <a:ea typeface="+mn-ea"/>
-                <a:cs typeface="+mn-cs"/>
-              </a:defRPr>
-            </a:lvl7pPr>
-            <a:lvl8pPr marL="3200400" algn="l" defTabSz="457200" rtl="0" eaLnBrk="1" latinLnBrk="0" hangingPunct="1">
-              <a:defRPr sz="1800" kern="1200">
-                <a:solidFill>
-                  <a:schemeClr val="lt1"/>
-                </a:solidFill>
-                <a:latin typeface="+mn-lt"/>
-                <a:ea typeface="+mn-ea"/>
-                <a:cs typeface="+mn-cs"/>
-              </a:defRPr>
-            </a:lvl8pPr>
-            <a:lvl9pPr marL="3657600" algn="l" defTabSz="457200" rtl="0" eaLnBrk="1" latinLnBrk="0" hangingPunct="1">
-              <a:defRPr sz="1800" kern="1200">
-                <a:solidFill>
-                  <a:schemeClr val="lt1"/>
-                </a:solidFill>
-                <a:latin typeface="+mn-lt"/>
-                <a:ea typeface="+mn-ea"/>
-                <a:cs typeface="+mn-cs"/>
-              </a:defRPr>
-            </a:lvl9pPr>
-          </a:lstStyle>
-          <a:p>
-            <a:pPr algn="ctr"/>
-            <a:endParaRPr lang="en-US" sz="1600" dirty="0">
-              <a:latin typeface="Arial" panose="020B0604020202020204" pitchFamily="34" charset="0"/>
-              <a:cs typeface="Arial" panose="020B0604020202020204" pitchFamily="34" charset="0"/>
-            </a:endParaRPr>
-          </a:p>
-        </p:txBody>
-      </p:sp>
-      <p:sp>
-        <p:nvSpPr>
-          <p:cNvPr id="550" name="Rectangle 549">
-            <a:extLst>
-              <a:ext uri="{FF2B5EF4-FFF2-40B4-BE49-F238E27FC236}">
-                <a16:creationId xmlns:a16="http://schemas.microsoft.com/office/drawing/2014/main" id="{AA2181C5-EFDD-C2F3-7168-C6356D1B66DF}"/>
-              </a:ext>
-            </a:extLst>
-          </p:cNvPr>
-          <p:cNvSpPr/>
-          <p:nvPr/>
-        </p:nvSpPr>
-        <p:spPr>
-          <a:xfrm>
-            <a:off x="11272372" y="7617680"/>
-            <a:ext cx="479985" cy="1398779"/>
-          </a:xfrm>
-          <a:prstGeom prst="rect">
-            <a:avLst/>
-          </a:prstGeom>
-          <a:solidFill>
-            <a:schemeClr val="accent1">
-              <a:lumMod val="40000"/>
-              <a:lumOff val="60000"/>
-            </a:schemeClr>
-          </a:solidFill>
-          <a:ln>
-            <a:noFill/>
-          </a:ln>
-        </p:spPr>
-        <p:style>
-          <a:lnRef idx="2">
-            <a:schemeClr val="accent1">
-              <a:shade val="15000"/>
-            </a:schemeClr>
-          </a:lnRef>
-          <a:fillRef idx="1">
-            <a:schemeClr val="accent1"/>
-          </a:fillRef>
-          <a:effectRef idx="0">
-            <a:schemeClr val="accent1"/>
-          </a:effectRef>
-          <a:fontRef idx="minor">
-            <a:schemeClr val="lt1"/>
-          </a:fontRef>
-        </p:style>
-        <p:txBody>
-          <a:bodyPr rtlCol="0" anchor="ctr"/>
-          <a:lstStyle>
-            <a:defPPr>
-              <a:defRPr lang="en-US"/>
-            </a:defPPr>
-            <a:lvl1pPr marL="0" algn="l" defTabSz="457200" rtl="0" eaLnBrk="1" latinLnBrk="0" hangingPunct="1">
-              <a:defRPr sz="1800" kern="1200">
-                <a:solidFill>
-                  <a:schemeClr val="lt1"/>
-                </a:solidFill>
-                <a:latin typeface="+mn-lt"/>
-                <a:ea typeface="+mn-ea"/>
-                <a:cs typeface="+mn-cs"/>
-              </a:defRPr>
-            </a:lvl1pPr>
-            <a:lvl2pPr marL="457200" algn="l" defTabSz="457200" rtl="0" eaLnBrk="1" latinLnBrk="0" hangingPunct="1">
-              <a:defRPr sz="1800" kern="1200">
-                <a:solidFill>
-                  <a:schemeClr val="lt1"/>
-                </a:solidFill>
-                <a:latin typeface="+mn-lt"/>
-                <a:ea typeface="+mn-ea"/>
-                <a:cs typeface="+mn-cs"/>
-              </a:defRPr>
-            </a:lvl2pPr>
-            <a:lvl3pPr marL="914400" algn="l" defTabSz="457200" rtl="0" eaLnBrk="1" latinLnBrk="0" hangingPunct="1">
-              <a:defRPr sz="1800" kern="1200">
-                <a:solidFill>
-                  <a:schemeClr val="lt1"/>
-                </a:solidFill>
-                <a:latin typeface="+mn-lt"/>
-                <a:ea typeface="+mn-ea"/>
-                <a:cs typeface="+mn-cs"/>
-              </a:defRPr>
-            </a:lvl3pPr>
-            <a:lvl4pPr marL="1371600" algn="l" defTabSz="457200" rtl="0" eaLnBrk="1" latinLnBrk="0" hangingPunct="1">
-              <a:defRPr sz="1800" kern="1200">
-                <a:solidFill>
-                  <a:schemeClr val="lt1"/>
-                </a:solidFill>
-                <a:latin typeface="+mn-lt"/>
-                <a:ea typeface="+mn-ea"/>
-                <a:cs typeface="+mn-cs"/>
-              </a:defRPr>
-            </a:lvl4pPr>
-            <a:lvl5pPr marL="1828800" algn="l" defTabSz="457200" rtl="0" eaLnBrk="1" latinLnBrk="0" hangingPunct="1">
-              <a:defRPr sz="1800" kern="1200">
-                <a:solidFill>
-                  <a:schemeClr val="lt1"/>
-                </a:solidFill>
-                <a:latin typeface="+mn-lt"/>
-                <a:ea typeface="+mn-ea"/>
-                <a:cs typeface="+mn-cs"/>
-              </a:defRPr>
-            </a:lvl5pPr>
-            <a:lvl6pPr marL="2286000" algn="l" defTabSz="457200" rtl="0" eaLnBrk="1" latinLnBrk="0" hangingPunct="1">
-              <a:defRPr sz="1800" kern="1200">
-                <a:solidFill>
-                  <a:schemeClr val="lt1"/>
-                </a:solidFill>
-                <a:latin typeface="+mn-lt"/>
-                <a:ea typeface="+mn-ea"/>
-                <a:cs typeface="+mn-cs"/>
-              </a:defRPr>
-            </a:lvl6pPr>
-            <a:lvl7pPr marL="2743200" algn="l" defTabSz="457200" rtl="0" eaLnBrk="1" latinLnBrk="0" hangingPunct="1">
-              <a:defRPr sz="1800" kern="1200">
-                <a:solidFill>
-                  <a:schemeClr val="lt1"/>
-                </a:solidFill>
-                <a:latin typeface="+mn-lt"/>
-                <a:ea typeface="+mn-ea"/>
-                <a:cs typeface="+mn-cs"/>
-              </a:defRPr>
-            </a:lvl7pPr>
-            <a:lvl8pPr marL="3200400" algn="l" defTabSz="457200" rtl="0" eaLnBrk="1" latinLnBrk="0" hangingPunct="1">
-              <a:defRPr sz="1800" kern="1200">
-                <a:solidFill>
-                  <a:schemeClr val="lt1"/>
-                </a:solidFill>
-                <a:latin typeface="+mn-lt"/>
-                <a:ea typeface="+mn-ea"/>
-                <a:cs typeface="+mn-cs"/>
-              </a:defRPr>
-            </a:lvl8pPr>
-            <a:lvl9pPr marL="3657600" algn="l" defTabSz="457200" rtl="0" eaLnBrk="1" latinLnBrk="0" hangingPunct="1">
-              <a:defRPr sz="1800" kern="1200">
-                <a:solidFill>
-                  <a:schemeClr val="lt1"/>
-                </a:solidFill>
-                <a:latin typeface="+mn-lt"/>
-                <a:ea typeface="+mn-ea"/>
-                <a:cs typeface="+mn-cs"/>
-              </a:defRPr>
-            </a:lvl9pPr>
-          </a:lstStyle>
-          <a:p>
-            <a:pPr algn="ctr"/>
-            <a:endParaRPr lang="en-US" sz="1600" dirty="0">
-              <a:latin typeface="Arial" panose="020B0604020202020204" pitchFamily="34" charset="0"/>
-              <a:cs typeface="Arial" panose="020B0604020202020204" pitchFamily="34" charset="0"/>
-            </a:endParaRPr>
-          </a:p>
-        </p:txBody>
-      </p:sp>
-      <p:cxnSp>
-        <p:nvCxnSpPr>
-          <p:cNvPr id="552" name="Straight Arrow Connector 551">
-            <a:extLst>
-              <a:ext uri="{FF2B5EF4-FFF2-40B4-BE49-F238E27FC236}">
-                <a16:creationId xmlns:a16="http://schemas.microsoft.com/office/drawing/2014/main" id="{1A15B325-1724-F456-3A8A-78C1884924D0}"/>
-              </a:ext>
-            </a:extLst>
-          </p:cNvPr>
-          <p:cNvCxnSpPr>
-            <a:cxnSpLocks/>
-          </p:cNvCxnSpPr>
-          <p:nvPr/>
-        </p:nvCxnSpPr>
-        <p:spPr>
-          <a:xfrm>
-            <a:off x="10659869" y="6662107"/>
-            <a:ext cx="0" cy="2688388"/>
-          </a:xfrm>
-          <a:prstGeom prst="straightConnector1">
-            <a:avLst/>
-          </a:prstGeom>
-          <a:ln w="76200">
-            <a:tailEnd type="triangle"/>
-          </a:ln>
-        </p:spPr>
-        <p:style>
-          <a:lnRef idx="1">
-            <a:schemeClr val="dk1"/>
-          </a:lnRef>
-          <a:fillRef idx="0">
-            <a:schemeClr val="dk1"/>
-          </a:fillRef>
-          <a:effectRef idx="0">
-            <a:schemeClr val="dk1"/>
-          </a:effectRef>
-          <a:fontRef idx="minor">
-            <a:schemeClr val="tx1"/>
-          </a:fontRef>
-        </p:style>
-      </p:cxnSp>
-      <p:sp>
-        <p:nvSpPr>
-          <p:cNvPr id="553" name="TextBox 552">
-            <a:extLst>
-              <a:ext uri="{FF2B5EF4-FFF2-40B4-BE49-F238E27FC236}">
-                <a16:creationId xmlns:a16="http://schemas.microsoft.com/office/drawing/2014/main" id="{68CF7246-BBE2-E326-411D-4267B73A82B3}"/>
-              </a:ext>
-            </a:extLst>
-          </p:cNvPr>
-          <p:cNvSpPr txBox="1"/>
-          <p:nvPr/>
-        </p:nvSpPr>
-        <p:spPr>
-          <a:xfrm rot="16200000">
-            <a:off x="9856222" y="7488690"/>
-            <a:ext cx="1071763" cy="338554"/>
-          </a:xfrm>
-          <a:prstGeom prst="rect">
-            <a:avLst/>
-          </a:prstGeom>
-          <a:noFill/>
-        </p:spPr>
-        <p:txBody>
-          <a:bodyPr wrap="square" rtlCol="0">
-            <a:spAutoFit/>
-          </a:bodyPr>
-          <a:lstStyle>
-            <a:defPPr>
-              <a:defRPr lang="en-US"/>
-            </a:defPPr>
-            <a:lvl1pPr marL="0" algn="l" defTabSz="457200" rtl="0" eaLnBrk="1" latinLnBrk="0" hangingPunct="1">
-              <a:defRPr sz="1800" kern="1200">
-                <a:solidFill>
-                  <a:schemeClr val="tx1"/>
-                </a:solidFill>
-                <a:latin typeface="+mn-lt"/>
-                <a:ea typeface="+mn-ea"/>
-                <a:cs typeface="+mn-cs"/>
-              </a:defRPr>
-            </a:lvl1pPr>
-            <a:lvl2pPr marL="457200" algn="l" defTabSz="457200" rtl="0" eaLnBrk="1" latinLnBrk="0" hangingPunct="1">
-              <a:defRPr sz="1800" kern="1200">
-                <a:solidFill>
-                  <a:schemeClr val="tx1"/>
-                </a:solidFill>
-                <a:latin typeface="+mn-lt"/>
-                <a:ea typeface="+mn-ea"/>
-                <a:cs typeface="+mn-cs"/>
-              </a:defRPr>
-            </a:lvl2pPr>
-            <a:lvl3pPr marL="914400" algn="l" defTabSz="457200" rtl="0" eaLnBrk="1" latinLnBrk="0" hangingPunct="1">
-              <a:defRPr sz="1800" kern="1200">
-                <a:solidFill>
-                  <a:schemeClr val="tx1"/>
-                </a:solidFill>
-                <a:latin typeface="+mn-lt"/>
-                <a:ea typeface="+mn-ea"/>
-                <a:cs typeface="+mn-cs"/>
-              </a:defRPr>
-            </a:lvl3pPr>
-            <a:lvl4pPr marL="1371600" algn="l" defTabSz="457200" rtl="0" eaLnBrk="1" latinLnBrk="0" hangingPunct="1">
-              <a:defRPr sz="1800" kern="1200">
-                <a:solidFill>
-                  <a:schemeClr val="tx1"/>
-                </a:solidFill>
-                <a:latin typeface="+mn-lt"/>
-                <a:ea typeface="+mn-ea"/>
-                <a:cs typeface="+mn-cs"/>
-              </a:defRPr>
-            </a:lvl4pPr>
-            <a:lvl5pPr marL="1828800" algn="l" defTabSz="457200" rtl="0" eaLnBrk="1" latinLnBrk="0" hangingPunct="1">
-              <a:defRPr sz="1800" kern="1200">
-                <a:solidFill>
-                  <a:schemeClr val="tx1"/>
-                </a:solidFill>
-                <a:latin typeface="+mn-lt"/>
-                <a:ea typeface="+mn-ea"/>
-                <a:cs typeface="+mn-cs"/>
-              </a:defRPr>
-            </a:lvl5pPr>
-            <a:lvl6pPr marL="2286000" algn="l" defTabSz="457200" rtl="0" eaLnBrk="1" latinLnBrk="0" hangingPunct="1">
-              <a:defRPr sz="1800" kern="1200">
-                <a:solidFill>
-                  <a:schemeClr val="tx1"/>
-                </a:solidFill>
-                <a:latin typeface="+mn-lt"/>
-                <a:ea typeface="+mn-ea"/>
-                <a:cs typeface="+mn-cs"/>
-              </a:defRPr>
-            </a:lvl6pPr>
-            <a:lvl7pPr marL="2743200" algn="l" defTabSz="457200" rtl="0" eaLnBrk="1" latinLnBrk="0" hangingPunct="1">
-              <a:defRPr sz="1800" kern="1200">
-                <a:solidFill>
-                  <a:schemeClr val="tx1"/>
-                </a:solidFill>
-                <a:latin typeface="+mn-lt"/>
-                <a:ea typeface="+mn-ea"/>
-                <a:cs typeface="+mn-cs"/>
-              </a:defRPr>
-            </a:lvl7pPr>
-            <a:lvl8pPr marL="3200400" algn="l" defTabSz="457200" rtl="0" eaLnBrk="1" latinLnBrk="0" hangingPunct="1">
-              <a:defRPr sz="1800" kern="1200">
-                <a:solidFill>
-                  <a:schemeClr val="tx1"/>
-                </a:solidFill>
-                <a:latin typeface="+mn-lt"/>
-                <a:ea typeface="+mn-ea"/>
-                <a:cs typeface="+mn-cs"/>
-              </a:defRPr>
-            </a:lvl8pPr>
-            <a:lvl9pPr marL="3657600" algn="l" defTabSz="457200" rtl="0" eaLnBrk="1" latinLnBrk="0" hangingPunct="1">
-              <a:defRPr sz="1800" kern="1200">
-                <a:solidFill>
-                  <a:schemeClr val="tx1"/>
-                </a:solidFill>
-                <a:latin typeface="+mn-lt"/>
-                <a:ea typeface="+mn-ea"/>
-                <a:cs typeface="+mn-cs"/>
-              </a:defRPr>
-            </a:lvl9pPr>
-          </a:lstStyle>
-          <a:p>
-            <a:r>
-              <a:rPr lang="en-US" sz="1600" b="1" dirty="0">
-                <a:latin typeface="Arial" panose="020B0604020202020204" pitchFamily="34" charset="0"/>
-                <a:ea typeface="Yu Gothic" panose="020B0400000000000000" pitchFamily="34" charset="-128"/>
-                <a:cs typeface="Arial" panose="020B0604020202020204" pitchFamily="34" charset="0"/>
-              </a:rPr>
-              <a:t>Time</a:t>
-            </a:r>
-          </a:p>
-        </p:txBody>
-      </p:sp>
-      <p:sp>
-        <p:nvSpPr>
-          <p:cNvPr id="554" name="TextBox 553">
-            <a:extLst>
-              <a:ext uri="{FF2B5EF4-FFF2-40B4-BE49-F238E27FC236}">
-                <a16:creationId xmlns:a16="http://schemas.microsoft.com/office/drawing/2014/main" id="{3C3EC8A2-6780-01EC-11DC-2639F99B7407}"/>
-              </a:ext>
-            </a:extLst>
-          </p:cNvPr>
-          <p:cNvSpPr txBox="1"/>
-          <p:nvPr/>
-        </p:nvSpPr>
-        <p:spPr>
-          <a:xfrm>
-            <a:off x="9231123" y="6510392"/>
-            <a:ext cx="1570321" cy="338554"/>
-          </a:xfrm>
-          <a:prstGeom prst="rect">
-            <a:avLst/>
-          </a:prstGeom>
-          <a:noFill/>
-        </p:spPr>
-        <p:txBody>
-          <a:bodyPr wrap="square" rtlCol="0">
-            <a:spAutoFit/>
-          </a:bodyPr>
-          <a:lstStyle>
-            <a:defPPr>
-              <a:defRPr lang="en-US"/>
-            </a:defPPr>
-            <a:lvl1pPr marL="0" algn="l" defTabSz="457200" rtl="0" eaLnBrk="1" latinLnBrk="0" hangingPunct="1">
-              <a:defRPr sz="1800" kern="1200">
-                <a:solidFill>
-                  <a:schemeClr val="tx1"/>
-                </a:solidFill>
-                <a:latin typeface="+mn-lt"/>
-                <a:ea typeface="+mn-ea"/>
-                <a:cs typeface="+mn-cs"/>
-              </a:defRPr>
-            </a:lvl1pPr>
-            <a:lvl2pPr marL="457200" algn="l" defTabSz="457200" rtl="0" eaLnBrk="1" latinLnBrk="0" hangingPunct="1">
-              <a:defRPr sz="1800" kern="1200">
-                <a:solidFill>
-                  <a:schemeClr val="tx1"/>
-                </a:solidFill>
-                <a:latin typeface="+mn-lt"/>
-                <a:ea typeface="+mn-ea"/>
-                <a:cs typeface="+mn-cs"/>
-              </a:defRPr>
-            </a:lvl2pPr>
-            <a:lvl3pPr marL="914400" algn="l" defTabSz="457200" rtl="0" eaLnBrk="1" latinLnBrk="0" hangingPunct="1">
-              <a:defRPr sz="1800" kern="1200">
-                <a:solidFill>
-                  <a:schemeClr val="tx1"/>
-                </a:solidFill>
-                <a:latin typeface="+mn-lt"/>
-                <a:ea typeface="+mn-ea"/>
-                <a:cs typeface="+mn-cs"/>
-              </a:defRPr>
-            </a:lvl3pPr>
-            <a:lvl4pPr marL="1371600" algn="l" defTabSz="457200" rtl="0" eaLnBrk="1" latinLnBrk="0" hangingPunct="1">
-              <a:defRPr sz="1800" kern="1200">
-                <a:solidFill>
-                  <a:schemeClr val="tx1"/>
-                </a:solidFill>
-                <a:latin typeface="+mn-lt"/>
-                <a:ea typeface="+mn-ea"/>
-                <a:cs typeface="+mn-cs"/>
-              </a:defRPr>
-            </a:lvl4pPr>
-            <a:lvl5pPr marL="1828800" algn="l" defTabSz="457200" rtl="0" eaLnBrk="1" latinLnBrk="0" hangingPunct="1">
-              <a:defRPr sz="1800" kern="1200">
-                <a:solidFill>
-                  <a:schemeClr val="tx1"/>
-                </a:solidFill>
-                <a:latin typeface="+mn-lt"/>
-                <a:ea typeface="+mn-ea"/>
-                <a:cs typeface="+mn-cs"/>
-              </a:defRPr>
-            </a:lvl5pPr>
-            <a:lvl6pPr marL="2286000" algn="l" defTabSz="457200" rtl="0" eaLnBrk="1" latinLnBrk="0" hangingPunct="1">
-              <a:defRPr sz="1800" kern="1200">
-                <a:solidFill>
-                  <a:schemeClr val="tx1"/>
-                </a:solidFill>
-                <a:latin typeface="+mn-lt"/>
-                <a:ea typeface="+mn-ea"/>
-                <a:cs typeface="+mn-cs"/>
-              </a:defRPr>
-            </a:lvl6pPr>
-            <a:lvl7pPr marL="2743200" algn="l" defTabSz="457200" rtl="0" eaLnBrk="1" latinLnBrk="0" hangingPunct="1">
-              <a:defRPr sz="1800" kern="1200">
-                <a:solidFill>
-                  <a:schemeClr val="tx1"/>
-                </a:solidFill>
-                <a:latin typeface="+mn-lt"/>
-                <a:ea typeface="+mn-ea"/>
-                <a:cs typeface="+mn-cs"/>
-              </a:defRPr>
-            </a:lvl7pPr>
-            <a:lvl8pPr marL="3200400" algn="l" defTabSz="457200" rtl="0" eaLnBrk="1" latinLnBrk="0" hangingPunct="1">
-              <a:defRPr sz="1800" kern="1200">
-                <a:solidFill>
-                  <a:schemeClr val="tx1"/>
-                </a:solidFill>
-                <a:latin typeface="+mn-lt"/>
-                <a:ea typeface="+mn-ea"/>
-                <a:cs typeface="+mn-cs"/>
-              </a:defRPr>
-            </a:lvl8pPr>
-            <a:lvl9pPr marL="3657600" algn="l" defTabSz="457200" rtl="0" eaLnBrk="1" latinLnBrk="0" hangingPunct="1">
-              <a:defRPr sz="1800" kern="1200">
-                <a:solidFill>
-                  <a:schemeClr val="tx1"/>
-                </a:solidFill>
-                <a:latin typeface="+mn-lt"/>
-                <a:ea typeface="+mn-ea"/>
-                <a:cs typeface="+mn-cs"/>
-              </a:defRPr>
-            </a:lvl9pPr>
-          </a:lstStyle>
-          <a:p>
-            <a:r>
-              <a:rPr lang="en-US" sz="1600" b="1" dirty="0">
-                <a:latin typeface="Arial" panose="020B0604020202020204" pitchFamily="34" charset="0"/>
-                <a:ea typeface="Yu Gothic" panose="020B0400000000000000" pitchFamily="34" charset="-128"/>
-                <a:cs typeface="Arial" panose="020B0604020202020204" pitchFamily="34" charset="0"/>
-              </a:rPr>
-              <a:t>Ancestral</a:t>
-            </a:r>
-          </a:p>
-        </p:txBody>
-      </p:sp>
-      <p:sp>
-        <p:nvSpPr>
-          <p:cNvPr id="555" name="TextBox 554">
-            <a:extLst>
-              <a:ext uri="{FF2B5EF4-FFF2-40B4-BE49-F238E27FC236}">
-                <a16:creationId xmlns:a16="http://schemas.microsoft.com/office/drawing/2014/main" id="{20DFA889-14F4-AE23-80BC-7C6C7AF62347}"/>
-              </a:ext>
-            </a:extLst>
-          </p:cNvPr>
-          <p:cNvSpPr txBox="1"/>
-          <p:nvPr/>
-        </p:nvSpPr>
-        <p:spPr>
-          <a:xfrm>
-            <a:off x="9379927" y="8744848"/>
-            <a:ext cx="1125903" cy="338554"/>
-          </a:xfrm>
-          <a:prstGeom prst="rect">
-            <a:avLst/>
-          </a:prstGeom>
-          <a:noFill/>
-        </p:spPr>
-        <p:txBody>
-          <a:bodyPr wrap="square" rtlCol="0">
-            <a:spAutoFit/>
-          </a:bodyPr>
-          <a:lstStyle>
-            <a:defPPr>
-              <a:defRPr lang="en-US"/>
-            </a:defPPr>
-            <a:lvl1pPr marL="0" algn="l" defTabSz="457200" rtl="0" eaLnBrk="1" latinLnBrk="0" hangingPunct="1">
-              <a:defRPr sz="1800" kern="1200">
-                <a:solidFill>
-                  <a:schemeClr val="tx1"/>
-                </a:solidFill>
-                <a:latin typeface="+mn-lt"/>
-                <a:ea typeface="+mn-ea"/>
-                <a:cs typeface="+mn-cs"/>
-              </a:defRPr>
-            </a:lvl1pPr>
-            <a:lvl2pPr marL="457200" algn="l" defTabSz="457200" rtl="0" eaLnBrk="1" latinLnBrk="0" hangingPunct="1">
-              <a:defRPr sz="1800" kern="1200">
-                <a:solidFill>
-                  <a:schemeClr val="tx1"/>
-                </a:solidFill>
-                <a:latin typeface="+mn-lt"/>
-                <a:ea typeface="+mn-ea"/>
-                <a:cs typeface="+mn-cs"/>
-              </a:defRPr>
-            </a:lvl2pPr>
-            <a:lvl3pPr marL="914400" algn="l" defTabSz="457200" rtl="0" eaLnBrk="1" latinLnBrk="0" hangingPunct="1">
-              <a:defRPr sz="1800" kern="1200">
-                <a:solidFill>
-                  <a:schemeClr val="tx1"/>
-                </a:solidFill>
-                <a:latin typeface="+mn-lt"/>
-                <a:ea typeface="+mn-ea"/>
-                <a:cs typeface="+mn-cs"/>
-              </a:defRPr>
-            </a:lvl3pPr>
-            <a:lvl4pPr marL="1371600" algn="l" defTabSz="457200" rtl="0" eaLnBrk="1" latinLnBrk="0" hangingPunct="1">
-              <a:defRPr sz="1800" kern="1200">
-                <a:solidFill>
-                  <a:schemeClr val="tx1"/>
-                </a:solidFill>
-                <a:latin typeface="+mn-lt"/>
-                <a:ea typeface="+mn-ea"/>
-                <a:cs typeface="+mn-cs"/>
-              </a:defRPr>
-            </a:lvl4pPr>
-            <a:lvl5pPr marL="1828800" algn="l" defTabSz="457200" rtl="0" eaLnBrk="1" latinLnBrk="0" hangingPunct="1">
-              <a:defRPr sz="1800" kern="1200">
-                <a:solidFill>
-                  <a:schemeClr val="tx1"/>
-                </a:solidFill>
-                <a:latin typeface="+mn-lt"/>
-                <a:ea typeface="+mn-ea"/>
-                <a:cs typeface="+mn-cs"/>
-              </a:defRPr>
-            </a:lvl5pPr>
-            <a:lvl6pPr marL="2286000" algn="l" defTabSz="457200" rtl="0" eaLnBrk="1" latinLnBrk="0" hangingPunct="1">
-              <a:defRPr sz="1800" kern="1200">
-                <a:solidFill>
-                  <a:schemeClr val="tx1"/>
-                </a:solidFill>
-                <a:latin typeface="+mn-lt"/>
-                <a:ea typeface="+mn-ea"/>
-                <a:cs typeface="+mn-cs"/>
-              </a:defRPr>
-            </a:lvl6pPr>
-            <a:lvl7pPr marL="2743200" algn="l" defTabSz="457200" rtl="0" eaLnBrk="1" latinLnBrk="0" hangingPunct="1">
-              <a:defRPr sz="1800" kern="1200">
-                <a:solidFill>
-                  <a:schemeClr val="tx1"/>
-                </a:solidFill>
-                <a:latin typeface="+mn-lt"/>
-                <a:ea typeface="+mn-ea"/>
-                <a:cs typeface="+mn-cs"/>
-              </a:defRPr>
-            </a:lvl7pPr>
-            <a:lvl8pPr marL="3200400" algn="l" defTabSz="457200" rtl="0" eaLnBrk="1" latinLnBrk="0" hangingPunct="1">
-              <a:defRPr sz="1800" kern="1200">
-                <a:solidFill>
-                  <a:schemeClr val="tx1"/>
-                </a:solidFill>
-                <a:latin typeface="+mn-lt"/>
-                <a:ea typeface="+mn-ea"/>
-                <a:cs typeface="+mn-cs"/>
-              </a:defRPr>
-            </a:lvl8pPr>
-            <a:lvl9pPr marL="3657600" algn="l" defTabSz="457200" rtl="0" eaLnBrk="1" latinLnBrk="0" hangingPunct="1">
-              <a:defRPr sz="1800" kern="1200">
-                <a:solidFill>
-                  <a:schemeClr val="tx1"/>
-                </a:solidFill>
-                <a:latin typeface="+mn-lt"/>
-                <a:ea typeface="+mn-ea"/>
-                <a:cs typeface="+mn-cs"/>
-              </a:defRPr>
-            </a:lvl9pPr>
-          </a:lstStyle>
-          <a:p>
-            <a:r>
-              <a:rPr lang="en-US" sz="1600" b="1" dirty="0">
-                <a:latin typeface="Arial" panose="020B0604020202020204" pitchFamily="34" charset="0"/>
-                <a:ea typeface="Yu Gothic" panose="020B0400000000000000" pitchFamily="34" charset="-128"/>
-                <a:cs typeface="Arial" panose="020B0604020202020204" pitchFamily="34" charset="0"/>
-              </a:rPr>
-              <a:t>Current</a:t>
-            </a:r>
-          </a:p>
-        </p:txBody>
-      </p:sp>
-      <p:cxnSp>
-        <p:nvCxnSpPr>
-          <p:cNvPr id="563" name="Straight Connector 562">
-            <a:extLst>
-              <a:ext uri="{FF2B5EF4-FFF2-40B4-BE49-F238E27FC236}">
-                <a16:creationId xmlns:a16="http://schemas.microsoft.com/office/drawing/2014/main" id="{20F222D5-9752-5E7E-9A52-739900DA19F6}"/>
-              </a:ext>
-            </a:extLst>
-          </p:cNvPr>
-          <p:cNvCxnSpPr/>
-          <p:nvPr/>
-        </p:nvCxnSpPr>
-        <p:spPr>
-          <a:xfrm>
-            <a:off x="7844153" y="4918650"/>
-            <a:ext cx="548640" cy="0"/>
-          </a:xfrm>
-          <a:prstGeom prst="line">
-            <a:avLst/>
-          </a:prstGeom>
-          <a:ln w="28575"/>
-        </p:spPr>
-        <p:style>
-          <a:lnRef idx="1">
-            <a:schemeClr val="dk1"/>
-          </a:lnRef>
-          <a:fillRef idx="0">
-            <a:schemeClr val="dk1"/>
-          </a:fillRef>
-          <a:effectRef idx="0">
-            <a:schemeClr val="dk1"/>
-          </a:effectRef>
-          <a:fontRef idx="minor">
-            <a:schemeClr val="tx1"/>
-          </a:fontRef>
-        </p:style>
-      </p:cxnSp>
-      <p:cxnSp>
-        <p:nvCxnSpPr>
-          <p:cNvPr id="564" name="Straight Connector 563">
-            <a:extLst>
-              <a:ext uri="{FF2B5EF4-FFF2-40B4-BE49-F238E27FC236}">
-                <a16:creationId xmlns:a16="http://schemas.microsoft.com/office/drawing/2014/main" id="{9FB62C51-2790-B690-650A-B143CE5F4095}"/>
-              </a:ext>
-            </a:extLst>
-          </p:cNvPr>
-          <p:cNvCxnSpPr>
-            <a:cxnSpLocks/>
-          </p:cNvCxnSpPr>
-          <p:nvPr/>
-        </p:nvCxnSpPr>
-        <p:spPr>
-          <a:xfrm flipH="1">
-            <a:off x="7844153" y="4906335"/>
-            <a:ext cx="715" cy="608316"/>
-          </a:xfrm>
-          <a:prstGeom prst="line">
-            <a:avLst/>
-          </a:prstGeom>
-          <a:ln w="28575"/>
-        </p:spPr>
-        <p:style>
-          <a:lnRef idx="1">
-            <a:schemeClr val="dk1"/>
-          </a:lnRef>
-          <a:fillRef idx="0">
-            <a:schemeClr val="dk1"/>
-          </a:fillRef>
-          <a:effectRef idx="0">
-            <a:schemeClr val="dk1"/>
-          </a:effectRef>
-          <a:fontRef idx="minor">
-            <a:schemeClr val="tx1"/>
-          </a:fontRef>
-        </p:style>
-      </p:cxnSp>
-      <p:cxnSp>
-        <p:nvCxnSpPr>
-          <p:cNvPr id="565" name="Straight Connector 564">
-            <a:extLst>
-              <a:ext uri="{FF2B5EF4-FFF2-40B4-BE49-F238E27FC236}">
-                <a16:creationId xmlns:a16="http://schemas.microsoft.com/office/drawing/2014/main" id="{9BDB81DF-E3C8-8441-EBD5-6FB7720377F9}"/>
-              </a:ext>
-            </a:extLst>
-          </p:cNvPr>
-          <p:cNvCxnSpPr>
-            <a:cxnSpLocks/>
-          </p:cNvCxnSpPr>
-          <p:nvPr/>
-        </p:nvCxnSpPr>
-        <p:spPr>
-          <a:xfrm>
-            <a:off x="8380172" y="4911574"/>
-            <a:ext cx="0" cy="603077"/>
-          </a:xfrm>
-          <a:prstGeom prst="line">
-            <a:avLst/>
-          </a:prstGeom>
-          <a:ln w="28575"/>
-        </p:spPr>
-        <p:style>
-          <a:lnRef idx="1">
-            <a:schemeClr val="dk1"/>
-          </a:lnRef>
-          <a:fillRef idx="0">
-            <a:schemeClr val="dk1"/>
-          </a:fillRef>
-          <a:effectRef idx="0">
-            <a:schemeClr val="dk1"/>
-          </a:effectRef>
-          <a:fontRef idx="minor">
-            <a:schemeClr val="tx1"/>
-          </a:fontRef>
-        </p:style>
-      </p:cxnSp>
-      <p:cxnSp>
-        <p:nvCxnSpPr>
-          <p:cNvPr id="569" name="Straight Connector 568">
-            <a:extLst>
-              <a:ext uri="{FF2B5EF4-FFF2-40B4-BE49-F238E27FC236}">
-                <a16:creationId xmlns:a16="http://schemas.microsoft.com/office/drawing/2014/main" id="{F9D00522-688F-B292-BBED-4009D19E2390}"/>
-              </a:ext>
-            </a:extLst>
-          </p:cNvPr>
-          <p:cNvCxnSpPr/>
-          <p:nvPr/>
-        </p:nvCxnSpPr>
-        <p:spPr>
-          <a:xfrm>
-            <a:off x="7472362" y="6012866"/>
-            <a:ext cx="0" cy="267579"/>
-          </a:xfrm>
-          <a:prstGeom prst="line">
-            <a:avLst/>
-          </a:prstGeom>
-          <a:ln w="28575"/>
-        </p:spPr>
-        <p:style>
-          <a:lnRef idx="1">
-            <a:schemeClr val="dk1"/>
-          </a:lnRef>
-          <a:fillRef idx="0">
-            <a:schemeClr val="dk1"/>
-          </a:fillRef>
-          <a:effectRef idx="0">
-            <a:schemeClr val="dk1"/>
-          </a:effectRef>
-          <a:fontRef idx="minor">
-            <a:schemeClr val="tx1"/>
-          </a:fontRef>
-        </p:style>
-      </p:cxnSp>
-      <p:cxnSp>
-        <p:nvCxnSpPr>
-          <p:cNvPr id="570" name="Straight Connector 569">
-            <a:extLst>
-              <a:ext uri="{FF2B5EF4-FFF2-40B4-BE49-F238E27FC236}">
-                <a16:creationId xmlns:a16="http://schemas.microsoft.com/office/drawing/2014/main" id="{0EDCD4B7-8670-7730-79C3-3C47661FC309}"/>
-              </a:ext>
-            </a:extLst>
-          </p:cNvPr>
-          <p:cNvCxnSpPr>
-            <a:cxnSpLocks/>
-          </p:cNvCxnSpPr>
-          <p:nvPr/>
-        </p:nvCxnSpPr>
-        <p:spPr>
-          <a:xfrm>
-            <a:off x="6838950" y="6281313"/>
-            <a:ext cx="0" cy="1687092"/>
-          </a:xfrm>
-          <a:prstGeom prst="line">
-            <a:avLst/>
-          </a:prstGeom>
-          <a:ln w="28575"/>
-        </p:spPr>
-        <p:style>
-          <a:lnRef idx="1">
-            <a:schemeClr val="dk1"/>
-          </a:lnRef>
-          <a:fillRef idx="0">
-            <a:schemeClr val="dk1"/>
-          </a:fillRef>
-          <a:effectRef idx="0">
-            <a:schemeClr val="dk1"/>
-          </a:effectRef>
-          <a:fontRef idx="minor">
-            <a:schemeClr val="tx1"/>
-          </a:fontRef>
-        </p:style>
-      </p:cxnSp>
-      <p:cxnSp>
-        <p:nvCxnSpPr>
-          <p:cNvPr id="571" name="Straight Connector 570">
-            <a:extLst>
-              <a:ext uri="{FF2B5EF4-FFF2-40B4-BE49-F238E27FC236}">
-                <a16:creationId xmlns:a16="http://schemas.microsoft.com/office/drawing/2014/main" id="{5AC7219F-555D-3B5A-F8DB-45AB55019A25}"/>
-              </a:ext>
-            </a:extLst>
-          </p:cNvPr>
-          <p:cNvCxnSpPr>
-            <a:cxnSpLocks/>
-          </p:cNvCxnSpPr>
-          <p:nvPr/>
-        </p:nvCxnSpPr>
-        <p:spPr>
-          <a:xfrm>
-            <a:off x="8105774" y="6278064"/>
-            <a:ext cx="0" cy="2913436"/>
-          </a:xfrm>
-          <a:prstGeom prst="line">
-            <a:avLst/>
-          </a:prstGeom>
-          <a:ln w="28575"/>
-        </p:spPr>
-        <p:style>
-          <a:lnRef idx="1">
-            <a:schemeClr val="dk1"/>
-          </a:lnRef>
-          <a:fillRef idx="0">
-            <a:schemeClr val="dk1"/>
-          </a:fillRef>
-          <a:effectRef idx="0">
-            <a:schemeClr val="dk1"/>
-          </a:effectRef>
-          <a:fontRef idx="minor">
-            <a:schemeClr val="tx1"/>
-          </a:fontRef>
-        </p:style>
-      </p:cxnSp>
-      <p:cxnSp>
-        <p:nvCxnSpPr>
-          <p:cNvPr id="572" name="Straight Connector 571">
-            <a:extLst>
-              <a:ext uri="{FF2B5EF4-FFF2-40B4-BE49-F238E27FC236}">
-                <a16:creationId xmlns:a16="http://schemas.microsoft.com/office/drawing/2014/main" id="{8F5BB56F-0992-196D-DD5D-B3E9C2E88702}"/>
-              </a:ext>
-            </a:extLst>
-          </p:cNvPr>
-          <p:cNvCxnSpPr>
-            <a:cxnSpLocks/>
-          </p:cNvCxnSpPr>
-          <p:nvPr/>
-        </p:nvCxnSpPr>
-        <p:spPr>
-          <a:xfrm flipH="1">
-            <a:off x="6838950" y="6280445"/>
-            <a:ext cx="1266824" cy="0"/>
-          </a:xfrm>
-          <a:prstGeom prst="line">
-            <a:avLst/>
-          </a:prstGeom>
-          <a:ln w="28575"/>
-        </p:spPr>
-        <p:style>
-          <a:lnRef idx="1">
-            <a:schemeClr val="dk1"/>
-          </a:lnRef>
-          <a:fillRef idx="0">
-            <a:schemeClr val="dk1"/>
-          </a:fillRef>
-          <a:effectRef idx="0">
-            <a:schemeClr val="dk1"/>
-          </a:effectRef>
-          <a:fontRef idx="minor">
-            <a:schemeClr val="tx1"/>
-          </a:fontRef>
-        </p:style>
-      </p:cxnSp>
-      <p:cxnSp>
-        <p:nvCxnSpPr>
-          <p:cNvPr id="573" name="Straight Connector 572">
-            <a:extLst>
-              <a:ext uri="{FF2B5EF4-FFF2-40B4-BE49-F238E27FC236}">
-                <a16:creationId xmlns:a16="http://schemas.microsoft.com/office/drawing/2014/main" id="{ACDAF4E8-6457-CFD4-AFDB-8BAFE7EA8259}"/>
-              </a:ext>
-            </a:extLst>
-          </p:cNvPr>
-          <p:cNvCxnSpPr/>
-          <p:nvPr/>
-        </p:nvCxnSpPr>
-        <p:spPr>
-          <a:xfrm>
-            <a:off x="6480095" y="7968405"/>
-            <a:ext cx="717709" cy="0"/>
-          </a:xfrm>
-          <a:prstGeom prst="line">
-            <a:avLst/>
-          </a:prstGeom>
-          <a:ln w="28575"/>
-        </p:spPr>
-        <p:style>
-          <a:lnRef idx="1">
-            <a:schemeClr val="dk1"/>
-          </a:lnRef>
-          <a:fillRef idx="0">
-            <a:schemeClr val="dk1"/>
-          </a:fillRef>
-          <a:effectRef idx="0">
-            <a:schemeClr val="dk1"/>
-          </a:effectRef>
-          <a:fontRef idx="minor">
-            <a:schemeClr val="tx1"/>
-          </a:fontRef>
-        </p:style>
-      </p:cxnSp>
-      <p:cxnSp>
-        <p:nvCxnSpPr>
-          <p:cNvPr id="574" name="Straight Connector 573">
-            <a:extLst>
-              <a:ext uri="{FF2B5EF4-FFF2-40B4-BE49-F238E27FC236}">
-                <a16:creationId xmlns:a16="http://schemas.microsoft.com/office/drawing/2014/main" id="{26DB2F09-18C3-A96E-3539-2165FC1394D0}"/>
-              </a:ext>
-            </a:extLst>
-          </p:cNvPr>
-          <p:cNvCxnSpPr>
-            <a:cxnSpLocks/>
-          </p:cNvCxnSpPr>
-          <p:nvPr/>
-        </p:nvCxnSpPr>
-        <p:spPr>
-          <a:xfrm>
-            <a:off x="7197804" y="7968405"/>
-            <a:ext cx="0" cy="835586"/>
-          </a:xfrm>
-          <a:prstGeom prst="line">
-            <a:avLst/>
-          </a:prstGeom>
-          <a:ln w="28575"/>
-        </p:spPr>
-        <p:style>
-          <a:lnRef idx="1">
-            <a:schemeClr val="dk1"/>
-          </a:lnRef>
-          <a:fillRef idx="0">
-            <a:schemeClr val="dk1"/>
-          </a:fillRef>
-          <a:effectRef idx="0">
-            <a:schemeClr val="dk1"/>
-          </a:effectRef>
-          <a:fontRef idx="minor">
-            <a:schemeClr val="tx1"/>
-          </a:fontRef>
-        </p:style>
-      </p:cxnSp>
-      <p:cxnSp>
-        <p:nvCxnSpPr>
-          <p:cNvPr id="575" name="Straight Connector 574">
-            <a:extLst>
-              <a:ext uri="{FF2B5EF4-FFF2-40B4-BE49-F238E27FC236}">
-                <a16:creationId xmlns:a16="http://schemas.microsoft.com/office/drawing/2014/main" id="{3E892C6B-AA7F-B1F0-CDD8-EEAAC360894D}"/>
-              </a:ext>
-            </a:extLst>
-          </p:cNvPr>
-          <p:cNvCxnSpPr>
-            <a:cxnSpLocks/>
-          </p:cNvCxnSpPr>
-          <p:nvPr/>
-        </p:nvCxnSpPr>
-        <p:spPr>
-          <a:xfrm>
-            <a:off x="6480095" y="7960785"/>
-            <a:ext cx="0" cy="491729"/>
-          </a:xfrm>
-          <a:prstGeom prst="line">
-            <a:avLst/>
-          </a:prstGeom>
-          <a:ln w="28575"/>
-        </p:spPr>
-        <p:style>
-          <a:lnRef idx="1">
-            <a:schemeClr val="dk1"/>
-          </a:lnRef>
-          <a:fillRef idx="0">
-            <a:schemeClr val="dk1"/>
-          </a:fillRef>
-          <a:effectRef idx="0">
-            <a:schemeClr val="dk1"/>
-          </a:effectRef>
-          <a:fontRef idx="minor">
-            <a:schemeClr val="tx1"/>
-          </a:fontRef>
-        </p:style>
-      </p:cxnSp>
-      <p:cxnSp>
-        <p:nvCxnSpPr>
-          <p:cNvPr id="577" name="Straight Connector 576">
-            <a:extLst>
-              <a:ext uri="{FF2B5EF4-FFF2-40B4-BE49-F238E27FC236}">
-                <a16:creationId xmlns:a16="http://schemas.microsoft.com/office/drawing/2014/main" id="{CA8E42D5-03A2-1786-AC06-B3FCE1CF58E4}"/>
-              </a:ext>
-            </a:extLst>
-          </p:cNvPr>
-          <p:cNvCxnSpPr>
-            <a:cxnSpLocks/>
-          </p:cNvCxnSpPr>
-          <p:nvPr/>
-        </p:nvCxnSpPr>
-        <p:spPr>
-          <a:xfrm>
-            <a:off x="7031434" y="8800907"/>
-            <a:ext cx="5357" cy="701789"/>
-          </a:xfrm>
-          <a:prstGeom prst="line">
-            <a:avLst/>
-          </a:prstGeom>
-          <a:ln w="28575"/>
-        </p:spPr>
-        <p:style>
-          <a:lnRef idx="1">
-            <a:schemeClr val="dk1"/>
-          </a:lnRef>
-          <a:fillRef idx="0">
-            <a:schemeClr val="dk1"/>
-          </a:fillRef>
-          <a:effectRef idx="0">
-            <a:schemeClr val="dk1"/>
-          </a:effectRef>
-          <a:fontRef idx="minor">
-            <a:schemeClr val="tx1"/>
-          </a:fontRef>
-        </p:style>
-      </p:cxnSp>
-      <p:cxnSp>
-        <p:nvCxnSpPr>
-          <p:cNvPr id="578" name="Straight Connector 577">
-            <a:extLst>
-              <a:ext uri="{FF2B5EF4-FFF2-40B4-BE49-F238E27FC236}">
-                <a16:creationId xmlns:a16="http://schemas.microsoft.com/office/drawing/2014/main" id="{27EA79BC-625C-1A43-7527-9B19A003E9BC}"/>
-              </a:ext>
-            </a:extLst>
-          </p:cNvPr>
-          <p:cNvCxnSpPr>
-            <a:cxnSpLocks/>
-          </p:cNvCxnSpPr>
-          <p:nvPr/>
-        </p:nvCxnSpPr>
-        <p:spPr>
-          <a:xfrm>
-            <a:off x="7371476" y="8800907"/>
-            <a:ext cx="0" cy="854189"/>
-          </a:xfrm>
-          <a:prstGeom prst="line">
-            <a:avLst/>
-          </a:prstGeom>
-          <a:ln w="28575"/>
-        </p:spPr>
-        <p:style>
-          <a:lnRef idx="1">
-            <a:schemeClr val="dk1"/>
-          </a:lnRef>
-          <a:fillRef idx="0">
-            <a:schemeClr val="dk1"/>
-          </a:fillRef>
-          <a:effectRef idx="0">
-            <a:schemeClr val="dk1"/>
-          </a:effectRef>
-          <a:fontRef idx="minor">
-            <a:schemeClr val="tx1"/>
-          </a:fontRef>
-        </p:style>
-      </p:cxnSp>
-      <p:cxnSp>
-        <p:nvCxnSpPr>
-          <p:cNvPr id="580" name="Straight Connector 579">
-            <a:extLst>
-              <a:ext uri="{FF2B5EF4-FFF2-40B4-BE49-F238E27FC236}">
-                <a16:creationId xmlns:a16="http://schemas.microsoft.com/office/drawing/2014/main" id="{BAB087DE-5B56-C2BD-D028-669BFC2713EF}"/>
-              </a:ext>
-            </a:extLst>
-          </p:cNvPr>
-          <p:cNvCxnSpPr>
-            <a:cxnSpLocks/>
-          </p:cNvCxnSpPr>
-          <p:nvPr/>
-        </p:nvCxnSpPr>
-        <p:spPr>
-          <a:xfrm>
-            <a:off x="7943294" y="9196883"/>
-            <a:ext cx="0" cy="431384"/>
-          </a:xfrm>
-          <a:prstGeom prst="line">
-            <a:avLst/>
-          </a:prstGeom>
-          <a:ln w="28575"/>
-        </p:spPr>
-        <p:style>
-          <a:lnRef idx="1">
-            <a:schemeClr val="dk1"/>
-          </a:lnRef>
-          <a:fillRef idx="0">
-            <a:schemeClr val="dk1"/>
-          </a:fillRef>
-          <a:effectRef idx="0">
-            <a:schemeClr val="dk1"/>
-          </a:effectRef>
-          <a:fontRef idx="minor">
-            <a:schemeClr val="tx1"/>
-          </a:fontRef>
-        </p:style>
-      </p:cxnSp>
-      <p:cxnSp>
-        <p:nvCxnSpPr>
-          <p:cNvPr id="581" name="Straight Connector 580">
-            <a:extLst>
-              <a:ext uri="{FF2B5EF4-FFF2-40B4-BE49-F238E27FC236}">
-                <a16:creationId xmlns:a16="http://schemas.microsoft.com/office/drawing/2014/main" id="{8B435891-6841-4A2C-6957-5C4EDFE7BE76}"/>
-              </a:ext>
-            </a:extLst>
-          </p:cNvPr>
-          <p:cNvCxnSpPr>
-            <a:cxnSpLocks/>
-          </p:cNvCxnSpPr>
-          <p:nvPr/>
-        </p:nvCxnSpPr>
-        <p:spPr>
-          <a:xfrm>
-            <a:off x="8276986" y="9198153"/>
-            <a:ext cx="0" cy="423764"/>
-          </a:xfrm>
-          <a:prstGeom prst="line">
-            <a:avLst/>
-          </a:prstGeom>
-          <a:ln w="28575"/>
-        </p:spPr>
-        <p:style>
-          <a:lnRef idx="1">
-            <a:schemeClr val="dk1"/>
-          </a:lnRef>
-          <a:fillRef idx="0">
-            <a:schemeClr val="dk1"/>
-          </a:fillRef>
-          <a:effectRef idx="0">
-            <a:schemeClr val="dk1"/>
-          </a:effectRef>
-          <a:fontRef idx="minor">
-            <a:schemeClr val="tx1"/>
-          </a:fontRef>
-        </p:style>
-      </p:cxnSp>
-      <p:cxnSp>
-        <p:nvCxnSpPr>
-          <p:cNvPr id="589" name="Straight Connector 588">
-            <a:extLst>
-              <a:ext uri="{FF2B5EF4-FFF2-40B4-BE49-F238E27FC236}">
-                <a16:creationId xmlns:a16="http://schemas.microsoft.com/office/drawing/2014/main" id="{E2EF270C-B1C2-FFC5-8E60-41B8074E0852}"/>
-              </a:ext>
-            </a:extLst>
-          </p:cNvPr>
-          <p:cNvCxnSpPr>
-            <a:cxnSpLocks/>
-          </p:cNvCxnSpPr>
-          <p:nvPr/>
-        </p:nvCxnSpPr>
-        <p:spPr>
-          <a:xfrm>
-            <a:off x="6312732" y="8458864"/>
-            <a:ext cx="322025" cy="0"/>
-          </a:xfrm>
-          <a:prstGeom prst="line">
-            <a:avLst/>
-          </a:prstGeom>
-          <a:ln w="28575"/>
-        </p:spPr>
-        <p:style>
-          <a:lnRef idx="1">
-            <a:schemeClr val="dk1"/>
-          </a:lnRef>
-          <a:fillRef idx="0">
-            <a:schemeClr val="dk1"/>
-          </a:fillRef>
-          <a:effectRef idx="0">
-            <a:schemeClr val="dk1"/>
-          </a:effectRef>
-          <a:fontRef idx="minor">
-            <a:schemeClr val="tx1"/>
-          </a:fontRef>
-        </p:style>
-      </p:cxnSp>
-      <p:cxnSp>
-        <p:nvCxnSpPr>
-          <p:cNvPr id="591" name="Straight Connector 590">
-            <a:extLst>
-              <a:ext uri="{FF2B5EF4-FFF2-40B4-BE49-F238E27FC236}">
-                <a16:creationId xmlns:a16="http://schemas.microsoft.com/office/drawing/2014/main" id="{7A64E399-57DD-3338-AD6A-2982E857BB67}"/>
-              </a:ext>
-            </a:extLst>
-          </p:cNvPr>
-          <p:cNvCxnSpPr>
-            <a:cxnSpLocks/>
-          </p:cNvCxnSpPr>
-          <p:nvPr/>
-        </p:nvCxnSpPr>
-        <p:spPr>
-          <a:xfrm>
-            <a:off x="7036791" y="8813607"/>
-            <a:ext cx="322025" cy="0"/>
-          </a:xfrm>
-          <a:prstGeom prst="line">
-            <a:avLst/>
-          </a:prstGeom>
-          <a:ln w="28575"/>
-        </p:spPr>
-        <p:style>
-          <a:lnRef idx="1">
-            <a:schemeClr val="dk1"/>
-          </a:lnRef>
-          <a:fillRef idx="0">
-            <a:schemeClr val="dk1"/>
-          </a:fillRef>
-          <a:effectRef idx="0">
-            <a:schemeClr val="dk1"/>
-          </a:effectRef>
-          <a:fontRef idx="minor">
-            <a:schemeClr val="tx1"/>
-          </a:fontRef>
-        </p:style>
-      </p:cxnSp>
-      <p:cxnSp>
-        <p:nvCxnSpPr>
-          <p:cNvPr id="592" name="Straight Connector 591">
-            <a:extLst>
-              <a:ext uri="{FF2B5EF4-FFF2-40B4-BE49-F238E27FC236}">
-                <a16:creationId xmlns:a16="http://schemas.microsoft.com/office/drawing/2014/main" id="{E8C55E4C-4DF3-12AE-9000-E027753029DC}"/>
-              </a:ext>
-            </a:extLst>
-          </p:cNvPr>
-          <p:cNvCxnSpPr>
-            <a:cxnSpLocks/>
-          </p:cNvCxnSpPr>
-          <p:nvPr/>
-        </p:nvCxnSpPr>
-        <p:spPr>
-          <a:xfrm>
-            <a:off x="7947856" y="9207740"/>
-            <a:ext cx="322025" cy="0"/>
-          </a:xfrm>
-          <a:prstGeom prst="line">
-            <a:avLst/>
-          </a:prstGeom>
-          <a:ln w="28575"/>
-        </p:spPr>
-        <p:style>
-          <a:lnRef idx="1">
-            <a:schemeClr val="dk1"/>
-          </a:lnRef>
-          <a:fillRef idx="0">
-            <a:schemeClr val="dk1"/>
-          </a:fillRef>
-          <a:effectRef idx="0">
-            <a:schemeClr val="dk1"/>
-          </a:effectRef>
-          <a:fontRef idx="minor">
-            <a:schemeClr val="tx1"/>
-          </a:fontRef>
-        </p:style>
-      </p:cxnSp>
-      <p:cxnSp>
-        <p:nvCxnSpPr>
-          <p:cNvPr id="595" name="Straight Connector 594">
-            <a:extLst>
-              <a:ext uri="{FF2B5EF4-FFF2-40B4-BE49-F238E27FC236}">
-                <a16:creationId xmlns:a16="http://schemas.microsoft.com/office/drawing/2014/main" id="{E338373A-0901-6E9A-295D-C9E42A4A909E}"/>
-              </a:ext>
-            </a:extLst>
-          </p:cNvPr>
-          <p:cNvCxnSpPr>
-            <a:cxnSpLocks/>
-          </p:cNvCxnSpPr>
-          <p:nvPr/>
-        </p:nvCxnSpPr>
-        <p:spPr>
-          <a:xfrm>
-            <a:off x="6875779" y="9487971"/>
-            <a:ext cx="322025" cy="0"/>
-          </a:xfrm>
-          <a:prstGeom prst="line">
-            <a:avLst/>
-          </a:prstGeom>
-          <a:ln w="28575"/>
-        </p:spPr>
-        <p:style>
-          <a:lnRef idx="1">
-            <a:schemeClr val="dk1"/>
-          </a:lnRef>
-          <a:fillRef idx="0">
-            <a:schemeClr val="dk1"/>
-          </a:fillRef>
-          <a:effectRef idx="0">
-            <a:schemeClr val="dk1"/>
-          </a:effectRef>
-          <a:fontRef idx="minor">
-            <a:schemeClr val="tx1"/>
-          </a:fontRef>
-        </p:style>
-      </p:cxnSp>
-      <p:cxnSp>
-        <p:nvCxnSpPr>
-          <p:cNvPr id="596" name="Straight Connector 595">
-            <a:extLst>
-              <a:ext uri="{FF2B5EF4-FFF2-40B4-BE49-F238E27FC236}">
-                <a16:creationId xmlns:a16="http://schemas.microsoft.com/office/drawing/2014/main" id="{AD93D329-74A3-DAF7-C8D9-272EF765F09D}"/>
-              </a:ext>
-            </a:extLst>
-          </p:cNvPr>
-          <p:cNvCxnSpPr>
-            <a:cxnSpLocks/>
-          </p:cNvCxnSpPr>
-          <p:nvPr/>
-        </p:nvCxnSpPr>
-        <p:spPr>
-          <a:xfrm>
-            <a:off x="7189191" y="9480957"/>
-            <a:ext cx="0" cy="167789"/>
-          </a:xfrm>
-          <a:prstGeom prst="line">
-            <a:avLst/>
-          </a:prstGeom>
-          <a:ln w="28575"/>
-        </p:spPr>
-        <p:style>
-          <a:lnRef idx="1">
-            <a:schemeClr val="dk1"/>
-          </a:lnRef>
-          <a:fillRef idx="0">
-            <a:schemeClr val="dk1"/>
-          </a:fillRef>
-          <a:effectRef idx="0">
-            <a:schemeClr val="dk1"/>
-          </a:effectRef>
-          <a:fontRef idx="minor">
-            <a:schemeClr val="tx1"/>
-          </a:fontRef>
-        </p:style>
-      </p:cxnSp>
-      <p:cxnSp>
-        <p:nvCxnSpPr>
-          <p:cNvPr id="598" name="Straight Connector 597">
-            <a:extLst>
-              <a:ext uri="{FF2B5EF4-FFF2-40B4-BE49-F238E27FC236}">
-                <a16:creationId xmlns:a16="http://schemas.microsoft.com/office/drawing/2014/main" id="{37CA5E2A-E086-A72F-AFBB-8848C866F1DF}"/>
-              </a:ext>
-            </a:extLst>
-          </p:cNvPr>
-          <p:cNvCxnSpPr>
-            <a:cxnSpLocks/>
-          </p:cNvCxnSpPr>
-          <p:nvPr/>
-        </p:nvCxnSpPr>
-        <p:spPr>
-          <a:xfrm>
-            <a:off x="6883120" y="9480957"/>
-            <a:ext cx="0" cy="167789"/>
-          </a:xfrm>
-          <a:prstGeom prst="line">
-            <a:avLst/>
-          </a:prstGeom>
-          <a:ln w="28575"/>
-        </p:spPr>
-        <p:style>
-          <a:lnRef idx="1">
-            <a:schemeClr val="dk1"/>
-          </a:lnRef>
-          <a:fillRef idx="0">
-            <a:schemeClr val="dk1"/>
-          </a:fillRef>
-          <a:effectRef idx="0">
-            <a:schemeClr val="dk1"/>
-          </a:effectRef>
-          <a:fontRef idx="minor">
-            <a:schemeClr val="tx1"/>
-          </a:fontRef>
-        </p:style>
-      </p:cxnSp>
-      <p:cxnSp>
-        <p:nvCxnSpPr>
-          <p:cNvPr id="601" name="Straight Connector 600">
-            <a:extLst>
-              <a:ext uri="{FF2B5EF4-FFF2-40B4-BE49-F238E27FC236}">
-                <a16:creationId xmlns:a16="http://schemas.microsoft.com/office/drawing/2014/main" id="{011358C1-7000-F30F-78B1-D43856F98EE6}"/>
-              </a:ext>
-            </a:extLst>
-          </p:cNvPr>
-          <p:cNvCxnSpPr>
-            <a:cxnSpLocks/>
-          </p:cNvCxnSpPr>
-          <p:nvPr/>
-        </p:nvCxnSpPr>
-        <p:spPr>
-          <a:xfrm>
-            <a:off x="6625688" y="8452514"/>
-            <a:ext cx="0" cy="1202582"/>
-          </a:xfrm>
-          <a:prstGeom prst="line">
-            <a:avLst/>
-          </a:prstGeom>
-          <a:ln w="28575"/>
-        </p:spPr>
-        <p:style>
-          <a:lnRef idx="1">
-            <a:schemeClr val="dk1"/>
-          </a:lnRef>
-          <a:fillRef idx="0">
-            <a:schemeClr val="dk1"/>
-          </a:fillRef>
-          <a:effectRef idx="0">
-            <a:schemeClr val="dk1"/>
-          </a:effectRef>
-          <a:fontRef idx="minor">
-            <a:schemeClr val="tx1"/>
-          </a:fontRef>
-        </p:style>
-      </p:cxnSp>
-      <p:cxnSp>
-        <p:nvCxnSpPr>
-          <p:cNvPr id="604" name="Straight Connector 603">
-            <a:extLst>
-              <a:ext uri="{FF2B5EF4-FFF2-40B4-BE49-F238E27FC236}">
-                <a16:creationId xmlns:a16="http://schemas.microsoft.com/office/drawing/2014/main" id="{30C27DFC-C26F-13AF-97C3-9C72015BB73F}"/>
-              </a:ext>
-            </a:extLst>
-          </p:cNvPr>
-          <p:cNvCxnSpPr>
-            <a:cxnSpLocks/>
-          </p:cNvCxnSpPr>
-          <p:nvPr/>
-        </p:nvCxnSpPr>
-        <p:spPr>
-          <a:xfrm>
-            <a:off x="6319082" y="8446164"/>
-            <a:ext cx="0" cy="1202582"/>
-          </a:xfrm>
-          <a:prstGeom prst="line">
-            <a:avLst/>
-          </a:prstGeom>
-          <a:ln w="28575"/>
-        </p:spPr>
-        <p:style>
-          <a:lnRef idx="1">
-            <a:schemeClr val="dk1"/>
-          </a:lnRef>
-          <a:fillRef idx="0">
-            <a:schemeClr val="dk1"/>
-          </a:fillRef>
-          <a:effectRef idx="0">
-            <a:schemeClr val="dk1"/>
-          </a:effectRef>
-          <a:fontRef idx="minor">
-            <a:schemeClr val="tx1"/>
-          </a:fontRef>
-        </p:style>
-      </p:cxnSp>
-      <p:sp>
-        <p:nvSpPr>
-          <p:cNvPr id="605" name="TextBox 604">
-            <a:extLst>
-              <a:ext uri="{FF2B5EF4-FFF2-40B4-BE49-F238E27FC236}">
-                <a16:creationId xmlns:a16="http://schemas.microsoft.com/office/drawing/2014/main" id="{845BCD1A-0AE7-CA83-5C96-5186D0CE7F60}"/>
-              </a:ext>
-            </a:extLst>
-          </p:cNvPr>
-          <p:cNvSpPr txBox="1"/>
-          <p:nvPr/>
-        </p:nvSpPr>
-        <p:spPr>
-          <a:xfrm>
-            <a:off x="12463677" y="1796421"/>
-            <a:ext cx="1512161" cy="338554"/>
-          </a:xfrm>
-          <a:prstGeom prst="rect">
-            <a:avLst/>
-          </a:prstGeom>
-          <a:noFill/>
-        </p:spPr>
-        <p:txBody>
-          <a:bodyPr wrap="square" rtlCol="0">
-            <a:spAutoFit/>
-          </a:bodyPr>
-          <a:lstStyle>
-            <a:defPPr>
-              <a:defRPr lang="en-US"/>
-            </a:defPPr>
-            <a:lvl1pPr marL="0" algn="l" defTabSz="457200" rtl="0" eaLnBrk="1" latinLnBrk="0" hangingPunct="1">
-              <a:defRPr sz="1800" kern="1200">
-                <a:solidFill>
-                  <a:schemeClr val="tx1"/>
-                </a:solidFill>
-                <a:latin typeface="+mn-lt"/>
-                <a:ea typeface="+mn-ea"/>
-                <a:cs typeface="+mn-cs"/>
-              </a:defRPr>
-            </a:lvl1pPr>
-            <a:lvl2pPr marL="457200" algn="l" defTabSz="457200" rtl="0" eaLnBrk="1" latinLnBrk="0" hangingPunct="1">
-              <a:defRPr sz="1800" kern="1200">
-                <a:solidFill>
-                  <a:schemeClr val="tx1"/>
-                </a:solidFill>
-                <a:latin typeface="+mn-lt"/>
-                <a:ea typeface="+mn-ea"/>
-                <a:cs typeface="+mn-cs"/>
-              </a:defRPr>
-            </a:lvl2pPr>
-            <a:lvl3pPr marL="914400" algn="l" defTabSz="457200" rtl="0" eaLnBrk="1" latinLnBrk="0" hangingPunct="1">
-              <a:defRPr sz="1800" kern="1200">
-                <a:solidFill>
-                  <a:schemeClr val="tx1"/>
-                </a:solidFill>
-                <a:latin typeface="+mn-lt"/>
-                <a:ea typeface="+mn-ea"/>
-                <a:cs typeface="+mn-cs"/>
-              </a:defRPr>
-            </a:lvl3pPr>
-            <a:lvl4pPr marL="1371600" algn="l" defTabSz="457200" rtl="0" eaLnBrk="1" latinLnBrk="0" hangingPunct="1">
-              <a:defRPr sz="1800" kern="1200">
-                <a:solidFill>
-                  <a:schemeClr val="tx1"/>
-                </a:solidFill>
-                <a:latin typeface="+mn-lt"/>
-                <a:ea typeface="+mn-ea"/>
-                <a:cs typeface="+mn-cs"/>
-              </a:defRPr>
-            </a:lvl4pPr>
-            <a:lvl5pPr marL="1828800" algn="l" defTabSz="457200" rtl="0" eaLnBrk="1" latinLnBrk="0" hangingPunct="1">
-              <a:defRPr sz="1800" kern="1200">
-                <a:solidFill>
-                  <a:schemeClr val="tx1"/>
-                </a:solidFill>
-                <a:latin typeface="+mn-lt"/>
-                <a:ea typeface="+mn-ea"/>
-                <a:cs typeface="+mn-cs"/>
-              </a:defRPr>
-            </a:lvl5pPr>
-            <a:lvl6pPr marL="2286000" algn="l" defTabSz="457200" rtl="0" eaLnBrk="1" latinLnBrk="0" hangingPunct="1">
-              <a:defRPr sz="1800" kern="1200">
-                <a:solidFill>
-                  <a:schemeClr val="tx1"/>
-                </a:solidFill>
-                <a:latin typeface="+mn-lt"/>
-                <a:ea typeface="+mn-ea"/>
-                <a:cs typeface="+mn-cs"/>
-              </a:defRPr>
-            </a:lvl6pPr>
-            <a:lvl7pPr marL="2743200" algn="l" defTabSz="457200" rtl="0" eaLnBrk="1" latinLnBrk="0" hangingPunct="1">
-              <a:defRPr sz="1800" kern="1200">
-                <a:solidFill>
-                  <a:schemeClr val="tx1"/>
-                </a:solidFill>
-                <a:latin typeface="+mn-lt"/>
-                <a:ea typeface="+mn-ea"/>
-                <a:cs typeface="+mn-cs"/>
-              </a:defRPr>
-            </a:lvl7pPr>
-            <a:lvl8pPr marL="3200400" algn="l" defTabSz="457200" rtl="0" eaLnBrk="1" latinLnBrk="0" hangingPunct="1">
-              <a:defRPr sz="1800" kern="1200">
-                <a:solidFill>
-                  <a:schemeClr val="tx1"/>
-                </a:solidFill>
-                <a:latin typeface="+mn-lt"/>
-                <a:ea typeface="+mn-ea"/>
-                <a:cs typeface="+mn-cs"/>
-              </a:defRPr>
-            </a:lvl8pPr>
-            <a:lvl9pPr marL="3657600" algn="l" defTabSz="457200" rtl="0" eaLnBrk="1" latinLnBrk="0" hangingPunct="1">
-              <a:defRPr sz="1800" kern="1200">
-                <a:solidFill>
-                  <a:schemeClr val="tx1"/>
-                </a:solidFill>
-                <a:latin typeface="+mn-lt"/>
-                <a:ea typeface="+mn-ea"/>
-                <a:cs typeface="+mn-cs"/>
-              </a:defRPr>
-            </a:lvl9pPr>
-          </a:lstStyle>
-          <a:p>
-            <a:r>
-              <a:rPr lang="en-US" sz="1600" b="1" dirty="0">
-                <a:latin typeface="Arial" panose="020B0604020202020204" pitchFamily="34" charset="0"/>
-                <a:ea typeface="Yu Gothic" panose="020B0400000000000000" pitchFamily="34" charset="-128"/>
-                <a:cs typeface="Arial" panose="020B0604020202020204" pitchFamily="34" charset="0"/>
-              </a:rPr>
-              <a:t>Two-epoch</a:t>
-            </a:r>
-          </a:p>
-        </p:txBody>
-      </p:sp>
-      <p:sp>
-        <p:nvSpPr>
-          <p:cNvPr id="606" name="TextBox 605">
-            <a:extLst>
-              <a:ext uri="{FF2B5EF4-FFF2-40B4-BE49-F238E27FC236}">
-                <a16:creationId xmlns:a16="http://schemas.microsoft.com/office/drawing/2014/main" id="{44AD9D2E-DB42-58B3-E088-DD447AB0C8D1}"/>
-              </a:ext>
-            </a:extLst>
-          </p:cNvPr>
-          <p:cNvSpPr txBox="1"/>
-          <p:nvPr/>
-        </p:nvSpPr>
-        <p:spPr>
-          <a:xfrm>
-            <a:off x="12181683" y="9331421"/>
-            <a:ext cx="2016648" cy="584775"/>
-          </a:xfrm>
-          <a:prstGeom prst="rect">
-            <a:avLst/>
-          </a:prstGeom>
-          <a:noFill/>
-        </p:spPr>
-        <p:txBody>
-          <a:bodyPr wrap="square">
-            <a:spAutoFit/>
-          </a:bodyPr>
-          <a:lstStyle>
-            <a:defPPr>
-              <a:defRPr lang="en-US"/>
-            </a:defPPr>
-            <a:lvl1pPr marL="0" algn="l" defTabSz="457200" rtl="0" eaLnBrk="1" latinLnBrk="0" hangingPunct="1">
-              <a:defRPr sz="1800" kern="1200">
-                <a:solidFill>
-                  <a:schemeClr val="tx1"/>
-                </a:solidFill>
-                <a:latin typeface="+mn-lt"/>
-                <a:ea typeface="+mn-ea"/>
-                <a:cs typeface="+mn-cs"/>
-              </a:defRPr>
-            </a:lvl1pPr>
-            <a:lvl2pPr marL="457200" algn="l" defTabSz="457200" rtl="0" eaLnBrk="1" latinLnBrk="0" hangingPunct="1">
-              <a:defRPr sz="1800" kern="1200">
-                <a:solidFill>
-                  <a:schemeClr val="tx1"/>
-                </a:solidFill>
-                <a:latin typeface="+mn-lt"/>
-                <a:ea typeface="+mn-ea"/>
-                <a:cs typeface="+mn-cs"/>
-              </a:defRPr>
-            </a:lvl2pPr>
-            <a:lvl3pPr marL="914400" algn="l" defTabSz="457200" rtl="0" eaLnBrk="1" latinLnBrk="0" hangingPunct="1">
-              <a:defRPr sz="1800" kern="1200">
-                <a:solidFill>
-                  <a:schemeClr val="tx1"/>
-                </a:solidFill>
-                <a:latin typeface="+mn-lt"/>
-                <a:ea typeface="+mn-ea"/>
-                <a:cs typeface="+mn-cs"/>
-              </a:defRPr>
-            </a:lvl3pPr>
-            <a:lvl4pPr marL="1371600" algn="l" defTabSz="457200" rtl="0" eaLnBrk="1" latinLnBrk="0" hangingPunct="1">
-              <a:defRPr sz="1800" kern="1200">
-                <a:solidFill>
-                  <a:schemeClr val="tx1"/>
-                </a:solidFill>
-                <a:latin typeface="+mn-lt"/>
-                <a:ea typeface="+mn-ea"/>
-                <a:cs typeface="+mn-cs"/>
-              </a:defRPr>
-            </a:lvl4pPr>
-            <a:lvl5pPr marL="1828800" algn="l" defTabSz="457200" rtl="0" eaLnBrk="1" latinLnBrk="0" hangingPunct="1">
-              <a:defRPr sz="1800" kern="1200">
-                <a:solidFill>
-                  <a:schemeClr val="tx1"/>
-                </a:solidFill>
-                <a:latin typeface="+mn-lt"/>
-                <a:ea typeface="+mn-ea"/>
-                <a:cs typeface="+mn-cs"/>
-              </a:defRPr>
-            </a:lvl5pPr>
-            <a:lvl6pPr marL="2286000" algn="l" defTabSz="457200" rtl="0" eaLnBrk="1" latinLnBrk="0" hangingPunct="1">
-              <a:defRPr sz="1800" kern="1200">
-                <a:solidFill>
-                  <a:schemeClr val="tx1"/>
-                </a:solidFill>
-                <a:latin typeface="+mn-lt"/>
-                <a:ea typeface="+mn-ea"/>
-                <a:cs typeface="+mn-cs"/>
-              </a:defRPr>
-            </a:lvl6pPr>
-            <a:lvl7pPr marL="2743200" algn="l" defTabSz="457200" rtl="0" eaLnBrk="1" latinLnBrk="0" hangingPunct="1">
-              <a:defRPr sz="1800" kern="1200">
-                <a:solidFill>
-                  <a:schemeClr val="tx1"/>
-                </a:solidFill>
-                <a:latin typeface="+mn-lt"/>
-                <a:ea typeface="+mn-ea"/>
-                <a:cs typeface="+mn-cs"/>
-              </a:defRPr>
-            </a:lvl7pPr>
-            <a:lvl8pPr marL="3200400" algn="l" defTabSz="457200" rtl="0" eaLnBrk="1" latinLnBrk="0" hangingPunct="1">
-              <a:defRPr sz="1800" kern="1200">
-                <a:solidFill>
-                  <a:schemeClr val="tx1"/>
-                </a:solidFill>
-                <a:latin typeface="+mn-lt"/>
-                <a:ea typeface="+mn-ea"/>
-                <a:cs typeface="+mn-cs"/>
-              </a:defRPr>
-            </a:lvl8pPr>
-            <a:lvl9pPr marL="3657600" algn="l" defTabSz="457200" rtl="0" eaLnBrk="1" latinLnBrk="0" hangingPunct="1">
-              <a:defRPr sz="1800" kern="1200">
-                <a:solidFill>
-                  <a:schemeClr val="tx1"/>
-                </a:solidFill>
-                <a:latin typeface="+mn-lt"/>
-                <a:ea typeface="+mn-ea"/>
-                <a:cs typeface="+mn-cs"/>
-              </a:defRPr>
-            </a:lvl9pPr>
-          </a:lstStyle>
-          <a:p>
-            <a:pPr algn="ctr"/>
-            <a:r>
-              <a:rPr lang="en-US" sz="1600" b="1" dirty="0">
-                <a:latin typeface="Arial" panose="020B0604020202020204" pitchFamily="34" charset="0"/>
-                <a:ea typeface="Yu Gothic" panose="020B0400000000000000" pitchFamily="34" charset="-128"/>
-                <a:cs typeface="Arial" panose="020B0604020202020204" pitchFamily="34" charset="0"/>
-              </a:rPr>
-              <a:t>One size </a:t>
-            </a:r>
-          </a:p>
-          <a:p>
-            <a:pPr algn="ctr"/>
-            <a:r>
-              <a:rPr lang="en-US" sz="1600" b="1" dirty="0">
-                <a:latin typeface="Arial" panose="020B0604020202020204" pitchFamily="34" charset="0"/>
-                <a:ea typeface="Yu Gothic" panose="020B0400000000000000" pitchFamily="34" charset="-128"/>
-                <a:cs typeface="Arial" panose="020B0604020202020204" pitchFamily="34" charset="0"/>
-              </a:rPr>
-              <a:t>change</a:t>
-            </a:r>
-          </a:p>
-        </p:txBody>
-      </p:sp>
-      <p:sp>
-        <p:nvSpPr>
-          <p:cNvPr id="607" name="Rectangle 606">
-            <a:extLst>
-              <a:ext uri="{FF2B5EF4-FFF2-40B4-BE49-F238E27FC236}">
-                <a16:creationId xmlns:a16="http://schemas.microsoft.com/office/drawing/2014/main" id="{699ADAEC-A47E-DBDF-C35F-1E56C289782A}"/>
-              </a:ext>
-            </a:extLst>
-          </p:cNvPr>
-          <p:cNvSpPr/>
-          <p:nvPr/>
-        </p:nvSpPr>
-        <p:spPr>
-          <a:xfrm>
-            <a:off x="12460488" y="2738577"/>
-            <a:ext cx="1466961" cy="974798"/>
-          </a:xfrm>
-          <a:prstGeom prst="rect">
-            <a:avLst/>
-          </a:prstGeom>
-          <a:solidFill>
-            <a:schemeClr val="accent1">
-              <a:lumMod val="40000"/>
-              <a:lumOff val="60000"/>
-            </a:schemeClr>
-          </a:solidFill>
-          <a:ln>
-            <a:noFill/>
-          </a:ln>
-        </p:spPr>
-        <p:style>
-          <a:lnRef idx="2">
-            <a:schemeClr val="accent1">
-              <a:shade val="15000"/>
-            </a:schemeClr>
-          </a:lnRef>
-          <a:fillRef idx="1">
-            <a:schemeClr val="accent1"/>
-          </a:fillRef>
-          <a:effectRef idx="0">
-            <a:schemeClr val="accent1"/>
-          </a:effectRef>
-          <a:fontRef idx="minor">
-            <a:schemeClr val="lt1"/>
-          </a:fontRef>
-        </p:style>
-        <p:txBody>
-          <a:bodyPr rtlCol="0" anchor="ctr"/>
-          <a:lstStyle>
-            <a:defPPr>
-              <a:defRPr lang="en-US"/>
-            </a:defPPr>
-            <a:lvl1pPr marL="0" algn="l" defTabSz="457200" rtl="0" eaLnBrk="1" latinLnBrk="0" hangingPunct="1">
-              <a:defRPr sz="1800" kern="1200">
-                <a:solidFill>
-                  <a:schemeClr val="lt1"/>
-                </a:solidFill>
-                <a:latin typeface="+mn-lt"/>
-                <a:ea typeface="+mn-ea"/>
-                <a:cs typeface="+mn-cs"/>
-              </a:defRPr>
-            </a:lvl1pPr>
-            <a:lvl2pPr marL="457200" algn="l" defTabSz="457200" rtl="0" eaLnBrk="1" latinLnBrk="0" hangingPunct="1">
-              <a:defRPr sz="1800" kern="1200">
-                <a:solidFill>
-                  <a:schemeClr val="lt1"/>
-                </a:solidFill>
-                <a:latin typeface="+mn-lt"/>
-                <a:ea typeface="+mn-ea"/>
-                <a:cs typeface="+mn-cs"/>
-              </a:defRPr>
-            </a:lvl2pPr>
-            <a:lvl3pPr marL="914400" algn="l" defTabSz="457200" rtl="0" eaLnBrk="1" latinLnBrk="0" hangingPunct="1">
-              <a:defRPr sz="1800" kern="1200">
-                <a:solidFill>
-                  <a:schemeClr val="lt1"/>
-                </a:solidFill>
-                <a:latin typeface="+mn-lt"/>
-                <a:ea typeface="+mn-ea"/>
-                <a:cs typeface="+mn-cs"/>
-              </a:defRPr>
-            </a:lvl3pPr>
-            <a:lvl4pPr marL="1371600" algn="l" defTabSz="457200" rtl="0" eaLnBrk="1" latinLnBrk="0" hangingPunct="1">
-              <a:defRPr sz="1800" kern="1200">
-                <a:solidFill>
-                  <a:schemeClr val="lt1"/>
-                </a:solidFill>
-                <a:latin typeface="+mn-lt"/>
-                <a:ea typeface="+mn-ea"/>
-                <a:cs typeface="+mn-cs"/>
-              </a:defRPr>
-            </a:lvl4pPr>
-            <a:lvl5pPr marL="1828800" algn="l" defTabSz="457200" rtl="0" eaLnBrk="1" latinLnBrk="0" hangingPunct="1">
-              <a:defRPr sz="1800" kern="1200">
-                <a:solidFill>
-                  <a:schemeClr val="lt1"/>
-                </a:solidFill>
-                <a:latin typeface="+mn-lt"/>
-                <a:ea typeface="+mn-ea"/>
-                <a:cs typeface="+mn-cs"/>
-              </a:defRPr>
-            </a:lvl5pPr>
-            <a:lvl6pPr marL="2286000" algn="l" defTabSz="457200" rtl="0" eaLnBrk="1" latinLnBrk="0" hangingPunct="1">
-              <a:defRPr sz="1800" kern="1200">
-                <a:solidFill>
-                  <a:schemeClr val="lt1"/>
-                </a:solidFill>
-                <a:latin typeface="+mn-lt"/>
-                <a:ea typeface="+mn-ea"/>
-                <a:cs typeface="+mn-cs"/>
-              </a:defRPr>
-            </a:lvl6pPr>
-            <a:lvl7pPr marL="2743200" algn="l" defTabSz="457200" rtl="0" eaLnBrk="1" latinLnBrk="0" hangingPunct="1">
-              <a:defRPr sz="1800" kern="1200">
-                <a:solidFill>
-                  <a:schemeClr val="lt1"/>
-                </a:solidFill>
-                <a:latin typeface="+mn-lt"/>
-                <a:ea typeface="+mn-ea"/>
-                <a:cs typeface="+mn-cs"/>
-              </a:defRPr>
-            </a:lvl7pPr>
-            <a:lvl8pPr marL="3200400" algn="l" defTabSz="457200" rtl="0" eaLnBrk="1" latinLnBrk="0" hangingPunct="1">
-              <a:defRPr sz="1800" kern="1200">
-                <a:solidFill>
-                  <a:schemeClr val="lt1"/>
-                </a:solidFill>
-                <a:latin typeface="+mn-lt"/>
-                <a:ea typeface="+mn-ea"/>
-                <a:cs typeface="+mn-cs"/>
-              </a:defRPr>
-            </a:lvl8pPr>
-            <a:lvl9pPr marL="3657600" algn="l" defTabSz="457200" rtl="0" eaLnBrk="1" latinLnBrk="0" hangingPunct="1">
-              <a:defRPr sz="1800" kern="1200">
-                <a:solidFill>
-                  <a:schemeClr val="lt1"/>
-                </a:solidFill>
-                <a:latin typeface="+mn-lt"/>
-                <a:ea typeface="+mn-ea"/>
-                <a:cs typeface="+mn-cs"/>
-              </a:defRPr>
-            </a:lvl9pPr>
-          </a:lstStyle>
-          <a:p>
-            <a:pPr algn="ctr"/>
-            <a:endParaRPr lang="en-US" sz="1600" dirty="0">
-              <a:latin typeface="Arial" panose="020B0604020202020204" pitchFamily="34" charset="0"/>
-              <a:cs typeface="Arial" panose="020B0604020202020204" pitchFamily="34" charset="0"/>
-            </a:endParaRPr>
-          </a:p>
-        </p:txBody>
-      </p:sp>
-      <p:sp>
-        <p:nvSpPr>
-          <p:cNvPr id="608" name="Rectangle 607">
-            <a:extLst>
-              <a:ext uri="{FF2B5EF4-FFF2-40B4-BE49-F238E27FC236}">
-                <a16:creationId xmlns:a16="http://schemas.microsoft.com/office/drawing/2014/main" id="{54E1AFF0-1B4E-9352-2401-CCA98F2E5134}"/>
-              </a:ext>
-            </a:extLst>
-          </p:cNvPr>
-          <p:cNvSpPr/>
-          <p:nvPr/>
-        </p:nvSpPr>
-        <p:spPr>
-          <a:xfrm>
-            <a:off x="12784171" y="3710008"/>
-            <a:ext cx="823931" cy="1673832"/>
-          </a:xfrm>
-          <a:prstGeom prst="rect">
-            <a:avLst/>
-          </a:prstGeom>
-          <a:solidFill>
-            <a:schemeClr val="accent1">
-              <a:lumMod val="40000"/>
-              <a:lumOff val="60000"/>
-            </a:schemeClr>
-          </a:solidFill>
-          <a:ln>
-            <a:noFill/>
-          </a:ln>
-        </p:spPr>
-        <p:style>
-          <a:lnRef idx="2">
-            <a:schemeClr val="accent1">
-              <a:shade val="15000"/>
-            </a:schemeClr>
-          </a:lnRef>
-          <a:fillRef idx="1">
-            <a:schemeClr val="accent1"/>
-          </a:fillRef>
-          <a:effectRef idx="0">
-            <a:schemeClr val="accent1"/>
-          </a:effectRef>
-          <a:fontRef idx="minor">
-            <a:schemeClr val="lt1"/>
-          </a:fontRef>
-        </p:style>
-        <p:txBody>
-          <a:bodyPr rtlCol="0" anchor="ctr"/>
-          <a:lstStyle>
-            <a:defPPr>
-              <a:defRPr lang="en-US"/>
-            </a:defPPr>
-            <a:lvl1pPr marL="0" algn="l" defTabSz="457200" rtl="0" eaLnBrk="1" latinLnBrk="0" hangingPunct="1">
-              <a:defRPr sz="1800" kern="1200">
-                <a:solidFill>
-                  <a:schemeClr val="lt1"/>
-                </a:solidFill>
-                <a:latin typeface="+mn-lt"/>
-                <a:ea typeface="+mn-ea"/>
-                <a:cs typeface="+mn-cs"/>
-              </a:defRPr>
-            </a:lvl1pPr>
-            <a:lvl2pPr marL="457200" algn="l" defTabSz="457200" rtl="0" eaLnBrk="1" latinLnBrk="0" hangingPunct="1">
-              <a:defRPr sz="1800" kern="1200">
-                <a:solidFill>
-                  <a:schemeClr val="lt1"/>
-                </a:solidFill>
-                <a:latin typeface="+mn-lt"/>
-                <a:ea typeface="+mn-ea"/>
-                <a:cs typeface="+mn-cs"/>
-              </a:defRPr>
-            </a:lvl2pPr>
-            <a:lvl3pPr marL="914400" algn="l" defTabSz="457200" rtl="0" eaLnBrk="1" latinLnBrk="0" hangingPunct="1">
-              <a:defRPr sz="1800" kern="1200">
-                <a:solidFill>
-                  <a:schemeClr val="lt1"/>
-                </a:solidFill>
-                <a:latin typeface="+mn-lt"/>
-                <a:ea typeface="+mn-ea"/>
-                <a:cs typeface="+mn-cs"/>
-              </a:defRPr>
-            </a:lvl3pPr>
-            <a:lvl4pPr marL="1371600" algn="l" defTabSz="457200" rtl="0" eaLnBrk="1" latinLnBrk="0" hangingPunct="1">
-              <a:defRPr sz="1800" kern="1200">
-                <a:solidFill>
-                  <a:schemeClr val="lt1"/>
-                </a:solidFill>
-                <a:latin typeface="+mn-lt"/>
-                <a:ea typeface="+mn-ea"/>
-                <a:cs typeface="+mn-cs"/>
-              </a:defRPr>
-            </a:lvl4pPr>
-            <a:lvl5pPr marL="1828800" algn="l" defTabSz="457200" rtl="0" eaLnBrk="1" latinLnBrk="0" hangingPunct="1">
-              <a:defRPr sz="1800" kern="1200">
-                <a:solidFill>
-                  <a:schemeClr val="lt1"/>
-                </a:solidFill>
-                <a:latin typeface="+mn-lt"/>
-                <a:ea typeface="+mn-ea"/>
-                <a:cs typeface="+mn-cs"/>
-              </a:defRPr>
-            </a:lvl5pPr>
-            <a:lvl6pPr marL="2286000" algn="l" defTabSz="457200" rtl="0" eaLnBrk="1" latinLnBrk="0" hangingPunct="1">
-              <a:defRPr sz="1800" kern="1200">
-                <a:solidFill>
-                  <a:schemeClr val="lt1"/>
-                </a:solidFill>
-                <a:latin typeface="+mn-lt"/>
-                <a:ea typeface="+mn-ea"/>
-                <a:cs typeface="+mn-cs"/>
-              </a:defRPr>
-            </a:lvl6pPr>
-            <a:lvl7pPr marL="2743200" algn="l" defTabSz="457200" rtl="0" eaLnBrk="1" latinLnBrk="0" hangingPunct="1">
-              <a:defRPr sz="1800" kern="1200">
-                <a:solidFill>
-                  <a:schemeClr val="lt1"/>
-                </a:solidFill>
-                <a:latin typeface="+mn-lt"/>
-                <a:ea typeface="+mn-ea"/>
-                <a:cs typeface="+mn-cs"/>
-              </a:defRPr>
-            </a:lvl7pPr>
-            <a:lvl8pPr marL="3200400" algn="l" defTabSz="457200" rtl="0" eaLnBrk="1" latinLnBrk="0" hangingPunct="1">
-              <a:defRPr sz="1800" kern="1200">
-                <a:solidFill>
-                  <a:schemeClr val="lt1"/>
-                </a:solidFill>
-                <a:latin typeface="+mn-lt"/>
-                <a:ea typeface="+mn-ea"/>
-                <a:cs typeface="+mn-cs"/>
-              </a:defRPr>
-            </a:lvl8pPr>
-            <a:lvl9pPr marL="3657600" algn="l" defTabSz="457200" rtl="0" eaLnBrk="1" latinLnBrk="0" hangingPunct="1">
-              <a:defRPr sz="1800" kern="1200">
-                <a:solidFill>
-                  <a:schemeClr val="lt1"/>
-                </a:solidFill>
-                <a:latin typeface="+mn-lt"/>
-                <a:ea typeface="+mn-ea"/>
-                <a:cs typeface="+mn-cs"/>
-              </a:defRPr>
-            </a:lvl9pPr>
-          </a:lstStyle>
-          <a:p>
-            <a:pPr algn="ctr"/>
-            <a:endParaRPr lang="en-US" sz="1600" dirty="0">
-              <a:latin typeface="Arial" panose="020B0604020202020204" pitchFamily="34" charset="0"/>
-              <a:cs typeface="Arial" panose="020B0604020202020204" pitchFamily="34" charset="0"/>
-            </a:endParaRPr>
-          </a:p>
-        </p:txBody>
-      </p:sp>
-      <p:sp>
-        <p:nvSpPr>
-          <p:cNvPr id="609" name="Rectangle 608">
-            <a:extLst>
-              <a:ext uri="{FF2B5EF4-FFF2-40B4-BE49-F238E27FC236}">
-                <a16:creationId xmlns:a16="http://schemas.microsoft.com/office/drawing/2014/main" id="{C11E6C42-96FD-12BA-6421-2DA0BF9EF21A}"/>
-              </a:ext>
-            </a:extLst>
-          </p:cNvPr>
-          <p:cNvSpPr/>
-          <p:nvPr/>
-        </p:nvSpPr>
-        <p:spPr>
-          <a:xfrm>
-            <a:off x="12883890" y="6662106"/>
-            <a:ext cx="581883" cy="2373529"/>
-          </a:xfrm>
-          <a:prstGeom prst="rect">
-            <a:avLst/>
-          </a:prstGeom>
-          <a:solidFill>
-            <a:schemeClr val="accent1">
-              <a:lumMod val="40000"/>
-              <a:lumOff val="60000"/>
-            </a:schemeClr>
-          </a:solidFill>
-          <a:ln>
-            <a:noFill/>
-          </a:ln>
-        </p:spPr>
-        <p:style>
-          <a:lnRef idx="2">
-            <a:schemeClr val="accent1">
-              <a:shade val="15000"/>
-            </a:schemeClr>
-          </a:lnRef>
-          <a:fillRef idx="1">
-            <a:schemeClr val="accent1"/>
-          </a:fillRef>
-          <a:effectRef idx="0">
-            <a:schemeClr val="accent1"/>
-          </a:effectRef>
-          <a:fontRef idx="minor">
-            <a:schemeClr val="lt1"/>
-          </a:fontRef>
-        </p:style>
-        <p:txBody>
-          <a:bodyPr rtlCol="0" anchor="ctr"/>
-          <a:lstStyle>
-            <a:defPPr>
-              <a:defRPr lang="en-US"/>
-            </a:defPPr>
-            <a:lvl1pPr marL="0" algn="l" defTabSz="457200" rtl="0" eaLnBrk="1" latinLnBrk="0" hangingPunct="1">
-              <a:defRPr sz="1800" kern="1200">
-                <a:solidFill>
-                  <a:schemeClr val="lt1"/>
-                </a:solidFill>
-                <a:latin typeface="+mn-lt"/>
-                <a:ea typeface="+mn-ea"/>
-                <a:cs typeface="+mn-cs"/>
-              </a:defRPr>
-            </a:lvl1pPr>
-            <a:lvl2pPr marL="457200" algn="l" defTabSz="457200" rtl="0" eaLnBrk="1" latinLnBrk="0" hangingPunct="1">
-              <a:defRPr sz="1800" kern="1200">
-                <a:solidFill>
-                  <a:schemeClr val="lt1"/>
-                </a:solidFill>
-                <a:latin typeface="+mn-lt"/>
-                <a:ea typeface="+mn-ea"/>
-                <a:cs typeface="+mn-cs"/>
-              </a:defRPr>
-            </a:lvl2pPr>
-            <a:lvl3pPr marL="914400" algn="l" defTabSz="457200" rtl="0" eaLnBrk="1" latinLnBrk="0" hangingPunct="1">
-              <a:defRPr sz="1800" kern="1200">
-                <a:solidFill>
-                  <a:schemeClr val="lt1"/>
-                </a:solidFill>
-                <a:latin typeface="+mn-lt"/>
-                <a:ea typeface="+mn-ea"/>
-                <a:cs typeface="+mn-cs"/>
-              </a:defRPr>
-            </a:lvl3pPr>
-            <a:lvl4pPr marL="1371600" algn="l" defTabSz="457200" rtl="0" eaLnBrk="1" latinLnBrk="0" hangingPunct="1">
-              <a:defRPr sz="1800" kern="1200">
-                <a:solidFill>
-                  <a:schemeClr val="lt1"/>
-                </a:solidFill>
-                <a:latin typeface="+mn-lt"/>
-                <a:ea typeface="+mn-ea"/>
-                <a:cs typeface="+mn-cs"/>
-              </a:defRPr>
-            </a:lvl4pPr>
-            <a:lvl5pPr marL="1828800" algn="l" defTabSz="457200" rtl="0" eaLnBrk="1" latinLnBrk="0" hangingPunct="1">
-              <a:defRPr sz="1800" kern="1200">
-                <a:solidFill>
-                  <a:schemeClr val="lt1"/>
-                </a:solidFill>
-                <a:latin typeface="+mn-lt"/>
-                <a:ea typeface="+mn-ea"/>
-                <a:cs typeface="+mn-cs"/>
-              </a:defRPr>
-            </a:lvl5pPr>
-            <a:lvl6pPr marL="2286000" algn="l" defTabSz="457200" rtl="0" eaLnBrk="1" latinLnBrk="0" hangingPunct="1">
-              <a:defRPr sz="1800" kern="1200">
-                <a:solidFill>
-                  <a:schemeClr val="lt1"/>
-                </a:solidFill>
-                <a:latin typeface="+mn-lt"/>
-                <a:ea typeface="+mn-ea"/>
-                <a:cs typeface="+mn-cs"/>
-              </a:defRPr>
-            </a:lvl6pPr>
-            <a:lvl7pPr marL="2743200" algn="l" defTabSz="457200" rtl="0" eaLnBrk="1" latinLnBrk="0" hangingPunct="1">
-              <a:defRPr sz="1800" kern="1200">
-                <a:solidFill>
-                  <a:schemeClr val="lt1"/>
-                </a:solidFill>
-                <a:latin typeface="+mn-lt"/>
-                <a:ea typeface="+mn-ea"/>
-                <a:cs typeface="+mn-cs"/>
-              </a:defRPr>
-            </a:lvl7pPr>
-            <a:lvl8pPr marL="3200400" algn="l" defTabSz="457200" rtl="0" eaLnBrk="1" latinLnBrk="0" hangingPunct="1">
-              <a:defRPr sz="1800" kern="1200">
-                <a:solidFill>
-                  <a:schemeClr val="lt1"/>
-                </a:solidFill>
-                <a:latin typeface="+mn-lt"/>
-                <a:ea typeface="+mn-ea"/>
-                <a:cs typeface="+mn-cs"/>
-              </a:defRPr>
-            </a:lvl8pPr>
-            <a:lvl9pPr marL="3657600" algn="l" defTabSz="457200" rtl="0" eaLnBrk="1" latinLnBrk="0" hangingPunct="1">
-              <a:defRPr sz="1800" kern="1200">
-                <a:solidFill>
-                  <a:schemeClr val="lt1"/>
-                </a:solidFill>
-                <a:latin typeface="+mn-lt"/>
-                <a:ea typeface="+mn-ea"/>
-                <a:cs typeface="+mn-cs"/>
-              </a:defRPr>
-            </a:lvl9pPr>
-          </a:lstStyle>
-          <a:p>
-            <a:pPr algn="ctr"/>
-            <a:endParaRPr lang="en-US" sz="1600" dirty="0">
-              <a:latin typeface="Arial" panose="020B0604020202020204" pitchFamily="34" charset="0"/>
-              <a:cs typeface="Arial" panose="020B0604020202020204" pitchFamily="34" charset="0"/>
-            </a:endParaRPr>
-          </a:p>
-        </p:txBody>
-      </p:sp>
-      <p:sp>
-        <p:nvSpPr>
-          <p:cNvPr id="610" name="Rectangle 609">
-            <a:extLst>
-              <a:ext uri="{FF2B5EF4-FFF2-40B4-BE49-F238E27FC236}">
-                <a16:creationId xmlns:a16="http://schemas.microsoft.com/office/drawing/2014/main" id="{11865559-E351-B484-FB2D-0405E5E1652C}"/>
-              </a:ext>
-            </a:extLst>
-          </p:cNvPr>
-          <p:cNvSpPr/>
-          <p:nvPr/>
-        </p:nvSpPr>
-        <p:spPr>
-          <a:xfrm>
-            <a:off x="12485575" y="9029351"/>
-            <a:ext cx="1371600" cy="286531"/>
-          </a:xfrm>
-          <a:prstGeom prst="rect">
-            <a:avLst/>
-          </a:prstGeom>
-          <a:solidFill>
-            <a:schemeClr val="accent1">
-              <a:lumMod val="40000"/>
-              <a:lumOff val="60000"/>
-            </a:schemeClr>
-          </a:solidFill>
-          <a:ln>
-            <a:noFill/>
-          </a:ln>
-        </p:spPr>
-        <p:style>
-          <a:lnRef idx="2">
-            <a:schemeClr val="accent1">
-              <a:shade val="15000"/>
-            </a:schemeClr>
-          </a:lnRef>
-          <a:fillRef idx="1">
-            <a:schemeClr val="accent1"/>
-          </a:fillRef>
-          <a:effectRef idx="0">
-            <a:schemeClr val="accent1"/>
-          </a:effectRef>
-          <a:fontRef idx="minor">
-            <a:schemeClr val="lt1"/>
-          </a:fontRef>
-        </p:style>
-        <p:txBody>
-          <a:bodyPr rtlCol="0" anchor="ctr"/>
-          <a:lstStyle>
-            <a:defPPr>
-              <a:defRPr lang="en-US"/>
-            </a:defPPr>
-            <a:lvl1pPr marL="0" algn="l" defTabSz="457200" rtl="0" eaLnBrk="1" latinLnBrk="0" hangingPunct="1">
-              <a:defRPr sz="1800" kern="1200">
-                <a:solidFill>
-                  <a:schemeClr val="lt1"/>
-                </a:solidFill>
-                <a:latin typeface="+mn-lt"/>
-                <a:ea typeface="+mn-ea"/>
-                <a:cs typeface="+mn-cs"/>
-              </a:defRPr>
-            </a:lvl1pPr>
-            <a:lvl2pPr marL="457200" algn="l" defTabSz="457200" rtl="0" eaLnBrk="1" latinLnBrk="0" hangingPunct="1">
-              <a:defRPr sz="1800" kern="1200">
-                <a:solidFill>
-                  <a:schemeClr val="lt1"/>
-                </a:solidFill>
-                <a:latin typeface="+mn-lt"/>
-                <a:ea typeface="+mn-ea"/>
-                <a:cs typeface="+mn-cs"/>
-              </a:defRPr>
-            </a:lvl2pPr>
-            <a:lvl3pPr marL="914400" algn="l" defTabSz="457200" rtl="0" eaLnBrk="1" latinLnBrk="0" hangingPunct="1">
-              <a:defRPr sz="1800" kern="1200">
-                <a:solidFill>
-                  <a:schemeClr val="lt1"/>
-                </a:solidFill>
-                <a:latin typeface="+mn-lt"/>
-                <a:ea typeface="+mn-ea"/>
-                <a:cs typeface="+mn-cs"/>
-              </a:defRPr>
-            </a:lvl3pPr>
-            <a:lvl4pPr marL="1371600" algn="l" defTabSz="457200" rtl="0" eaLnBrk="1" latinLnBrk="0" hangingPunct="1">
-              <a:defRPr sz="1800" kern="1200">
-                <a:solidFill>
-                  <a:schemeClr val="lt1"/>
-                </a:solidFill>
-                <a:latin typeface="+mn-lt"/>
-                <a:ea typeface="+mn-ea"/>
-                <a:cs typeface="+mn-cs"/>
-              </a:defRPr>
-            </a:lvl4pPr>
-            <a:lvl5pPr marL="1828800" algn="l" defTabSz="457200" rtl="0" eaLnBrk="1" latinLnBrk="0" hangingPunct="1">
-              <a:defRPr sz="1800" kern="1200">
-                <a:solidFill>
-                  <a:schemeClr val="lt1"/>
-                </a:solidFill>
-                <a:latin typeface="+mn-lt"/>
-                <a:ea typeface="+mn-ea"/>
-                <a:cs typeface="+mn-cs"/>
-              </a:defRPr>
-            </a:lvl5pPr>
-            <a:lvl6pPr marL="2286000" algn="l" defTabSz="457200" rtl="0" eaLnBrk="1" latinLnBrk="0" hangingPunct="1">
-              <a:defRPr sz="1800" kern="1200">
-                <a:solidFill>
-                  <a:schemeClr val="lt1"/>
-                </a:solidFill>
-                <a:latin typeface="+mn-lt"/>
-                <a:ea typeface="+mn-ea"/>
-                <a:cs typeface="+mn-cs"/>
-              </a:defRPr>
-            </a:lvl6pPr>
-            <a:lvl7pPr marL="2743200" algn="l" defTabSz="457200" rtl="0" eaLnBrk="1" latinLnBrk="0" hangingPunct="1">
-              <a:defRPr sz="1800" kern="1200">
-                <a:solidFill>
-                  <a:schemeClr val="lt1"/>
-                </a:solidFill>
-                <a:latin typeface="+mn-lt"/>
-                <a:ea typeface="+mn-ea"/>
-                <a:cs typeface="+mn-cs"/>
-              </a:defRPr>
-            </a:lvl7pPr>
-            <a:lvl8pPr marL="3200400" algn="l" defTabSz="457200" rtl="0" eaLnBrk="1" latinLnBrk="0" hangingPunct="1">
-              <a:defRPr sz="1800" kern="1200">
-                <a:solidFill>
-                  <a:schemeClr val="lt1"/>
-                </a:solidFill>
-                <a:latin typeface="+mn-lt"/>
-                <a:ea typeface="+mn-ea"/>
-                <a:cs typeface="+mn-cs"/>
-              </a:defRPr>
-            </a:lvl8pPr>
-            <a:lvl9pPr marL="3657600" algn="l" defTabSz="457200" rtl="0" eaLnBrk="1" latinLnBrk="0" hangingPunct="1">
-              <a:defRPr sz="1800" kern="1200">
-                <a:solidFill>
-                  <a:schemeClr val="lt1"/>
-                </a:solidFill>
-                <a:latin typeface="+mn-lt"/>
-                <a:ea typeface="+mn-ea"/>
-                <a:cs typeface="+mn-cs"/>
-              </a:defRPr>
-            </a:lvl9pPr>
-          </a:lstStyle>
-          <a:p>
-            <a:pPr algn="ctr"/>
-            <a:endParaRPr lang="en-US" sz="1600" dirty="0">
-              <a:latin typeface="Arial" panose="020B0604020202020204" pitchFamily="34" charset="0"/>
-              <a:cs typeface="Arial" panose="020B0604020202020204" pitchFamily="34" charset="0"/>
-            </a:endParaRPr>
-          </a:p>
-        </p:txBody>
-      </p:sp>
-      <p:sp>
-        <p:nvSpPr>
-          <p:cNvPr id="19" name="TextBox 18">
-            <a:extLst>
-              <a:ext uri="{FF2B5EF4-FFF2-40B4-BE49-F238E27FC236}">
-                <a16:creationId xmlns:a16="http://schemas.microsoft.com/office/drawing/2014/main" id="{4F3CF3B3-25BC-33DB-C891-F584E2566307}"/>
-              </a:ext>
-            </a:extLst>
-          </p:cNvPr>
-          <p:cNvSpPr txBox="1"/>
-          <p:nvPr/>
-        </p:nvSpPr>
-        <p:spPr>
-          <a:xfrm>
-            <a:off x="5245232" y="1913864"/>
-            <a:ext cx="1090166" cy="830997"/>
-          </a:xfrm>
-          <a:prstGeom prst="rect">
-            <a:avLst/>
-          </a:prstGeom>
-          <a:noFill/>
-        </p:spPr>
-        <p:txBody>
-          <a:bodyPr wrap="square" rtlCol="0">
-            <a:spAutoFit/>
-          </a:bodyPr>
-          <a:lstStyle>
-            <a:defPPr>
-              <a:defRPr lang="en-US"/>
-            </a:defPPr>
-            <a:lvl1pPr marL="0" algn="l" defTabSz="457200" rtl="0" eaLnBrk="1" latinLnBrk="0" hangingPunct="1">
-              <a:defRPr sz="1800" kern="1200">
-                <a:solidFill>
-                  <a:schemeClr val="tx1"/>
-                </a:solidFill>
-                <a:latin typeface="+mn-lt"/>
-                <a:ea typeface="+mn-ea"/>
-                <a:cs typeface="+mn-cs"/>
-              </a:defRPr>
-            </a:lvl1pPr>
-            <a:lvl2pPr marL="457200" algn="l" defTabSz="457200" rtl="0" eaLnBrk="1" latinLnBrk="0" hangingPunct="1">
-              <a:defRPr sz="1800" kern="1200">
-                <a:solidFill>
-                  <a:schemeClr val="tx1"/>
-                </a:solidFill>
-                <a:latin typeface="+mn-lt"/>
-                <a:ea typeface="+mn-ea"/>
-                <a:cs typeface="+mn-cs"/>
-              </a:defRPr>
-            </a:lvl2pPr>
-            <a:lvl3pPr marL="914400" algn="l" defTabSz="457200" rtl="0" eaLnBrk="1" latinLnBrk="0" hangingPunct="1">
-              <a:defRPr sz="1800" kern="1200">
-                <a:solidFill>
-                  <a:schemeClr val="tx1"/>
-                </a:solidFill>
-                <a:latin typeface="+mn-lt"/>
-                <a:ea typeface="+mn-ea"/>
-                <a:cs typeface="+mn-cs"/>
-              </a:defRPr>
-            </a:lvl3pPr>
-            <a:lvl4pPr marL="1371600" algn="l" defTabSz="457200" rtl="0" eaLnBrk="1" latinLnBrk="0" hangingPunct="1">
-              <a:defRPr sz="1800" kern="1200">
-                <a:solidFill>
-                  <a:schemeClr val="tx1"/>
-                </a:solidFill>
-                <a:latin typeface="+mn-lt"/>
-                <a:ea typeface="+mn-ea"/>
-                <a:cs typeface="+mn-cs"/>
-              </a:defRPr>
-            </a:lvl4pPr>
-            <a:lvl5pPr marL="1828800" algn="l" defTabSz="457200" rtl="0" eaLnBrk="1" latinLnBrk="0" hangingPunct="1">
-              <a:defRPr sz="1800" kern="1200">
-                <a:solidFill>
-                  <a:schemeClr val="tx1"/>
-                </a:solidFill>
-                <a:latin typeface="+mn-lt"/>
-                <a:ea typeface="+mn-ea"/>
-                <a:cs typeface="+mn-cs"/>
-              </a:defRPr>
-            </a:lvl5pPr>
-            <a:lvl6pPr marL="2286000" algn="l" defTabSz="457200" rtl="0" eaLnBrk="1" latinLnBrk="0" hangingPunct="1">
-              <a:defRPr sz="1800" kern="1200">
-                <a:solidFill>
-                  <a:schemeClr val="tx1"/>
-                </a:solidFill>
-                <a:latin typeface="+mn-lt"/>
-                <a:ea typeface="+mn-ea"/>
-                <a:cs typeface="+mn-cs"/>
-              </a:defRPr>
-            </a:lvl6pPr>
-            <a:lvl7pPr marL="2743200" algn="l" defTabSz="457200" rtl="0" eaLnBrk="1" latinLnBrk="0" hangingPunct="1">
-              <a:defRPr sz="1800" kern="1200">
-                <a:solidFill>
-                  <a:schemeClr val="tx1"/>
-                </a:solidFill>
-                <a:latin typeface="+mn-lt"/>
-                <a:ea typeface="+mn-ea"/>
-                <a:cs typeface="+mn-cs"/>
-              </a:defRPr>
-            </a:lvl7pPr>
-            <a:lvl8pPr marL="3200400" algn="l" defTabSz="457200" rtl="0" eaLnBrk="1" latinLnBrk="0" hangingPunct="1">
-              <a:defRPr sz="1800" kern="1200">
-                <a:solidFill>
-                  <a:schemeClr val="tx1"/>
-                </a:solidFill>
-                <a:latin typeface="+mn-lt"/>
-                <a:ea typeface="+mn-ea"/>
-                <a:cs typeface="+mn-cs"/>
-              </a:defRPr>
-            </a:lvl8pPr>
-            <a:lvl9pPr marL="3657600" algn="l" defTabSz="457200" rtl="0" eaLnBrk="1" latinLnBrk="0" hangingPunct="1">
-              <a:defRPr sz="1800" kern="1200">
-                <a:solidFill>
-                  <a:schemeClr val="tx1"/>
-                </a:solidFill>
-                <a:latin typeface="+mn-lt"/>
-                <a:ea typeface="+mn-ea"/>
-                <a:cs typeface="+mn-cs"/>
-              </a:defRPr>
-            </a:lvl9pPr>
-          </a:lstStyle>
-          <a:p>
-            <a:r>
-              <a:rPr lang="en-US" sz="4800" b="1" dirty="0">
-                <a:latin typeface="Arial" panose="020B0604020202020204" pitchFamily="34" charset="0"/>
-                <a:ea typeface="Yu Gothic" panose="020B0400000000000000" pitchFamily="34" charset="-128"/>
-                <a:cs typeface="Arial" panose="020B0604020202020204" pitchFamily="34" charset="0"/>
-              </a:rPr>
-              <a:t>(a)</a:t>
-            </a:r>
-          </a:p>
-        </p:txBody>
-      </p:sp>
-      <p:sp>
-        <p:nvSpPr>
-          <p:cNvPr id="20" name="TextBox 19">
-            <a:extLst>
-              <a:ext uri="{FF2B5EF4-FFF2-40B4-BE49-F238E27FC236}">
-                <a16:creationId xmlns:a16="http://schemas.microsoft.com/office/drawing/2014/main" id="{E8CF6B0E-911C-599A-EAF8-949FD3151EE7}"/>
-              </a:ext>
-            </a:extLst>
-          </p:cNvPr>
-          <p:cNvSpPr txBox="1"/>
-          <p:nvPr/>
-        </p:nvSpPr>
-        <p:spPr>
-          <a:xfrm>
-            <a:off x="5224682" y="5597367"/>
-            <a:ext cx="1090166" cy="830997"/>
-          </a:xfrm>
-          <a:prstGeom prst="rect">
-            <a:avLst/>
-          </a:prstGeom>
-          <a:noFill/>
-        </p:spPr>
-        <p:txBody>
-          <a:bodyPr wrap="square" rtlCol="0">
-            <a:spAutoFit/>
-          </a:bodyPr>
-          <a:lstStyle>
-            <a:defPPr>
-              <a:defRPr lang="en-US"/>
-            </a:defPPr>
-            <a:lvl1pPr marL="0" algn="l" defTabSz="457200" rtl="0" eaLnBrk="1" latinLnBrk="0" hangingPunct="1">
-              <a:defRPr sz="1800" kern="1200">
-                <a:solidFill>
-                  <a:schemeClr val="tx1"/>
-                </a:solidFill>
-                <a:latin typeface="+mn-lt"/>
-                <a:ea typeface="+mn-ea"/>
-                <a:cs typeface="+mn-cs"/>
-              </a:defRPr>
-            </a:lvl1pPr>
-            <a:lvl2pPr marL="457200" algn="l" defTabSz="457200" rtl="0" eaLnBrk="1" latinLnBrk="0" hangingPunct="1">
-              <a:defRPr sz="1800" kern="1200">
-                <a:solidFill>
-                  <a:schemeClr val="tx1"/>
-                </a:solidFill>
-                <a:latin typeface="+mn-lt"/>
-                <a:ea typeface="+mn-ea"/>
-                <a:cs typeface="+mn-cs"/>
-              </a:defRPr>
-            </a:lvl2pPr>
-            <a:lvl3pPr marL="914400" algn="l" defTabSz="457200" rtl="0" eaLnBrk="1" latinLnBrk="0" hangingPunct="1">
-              <a:defRPr sz="1800" kern="1200">
-                <a:solidFill>
-                  <a:schemeClr val="tx1"/>
-                </a:solidFill>
-                <a:latin typeface="+mn-lt"/>
-                <a:ea typeface="+mn-ea"/>
-                <a:cs typeface="+mn-cs"/>
-              </a:defRPr>
-            </a:lvl3pPr>
-            <a:lvl4pPr marL="1371600" algn="l" defTabSz="457200" rtl="0" eaLnBrk="1" latinLnBrk="0" hangingPunct="1">
-              <a:defRPr sz="1800" kern="1200">
-                <a:solidFill>
-                  <a:schemeClr val="tx1"/>
-                </a:solidFill>
-                <a:latin typeface="+mn-lt"/>
-                <a:ea typeface="+mn-ea"/>
-                <a:cs typeface="+mn-cs"/>
-              </a:defRPr>
-            </a:lvl4pPr>
-            <a:lvl5pPr marL="1828800" algn="l" defTabSz="457200" rtl="0" eaLnBrk="1" latinLnBrk="0" hangingPunct="1">
-              <a:defRPr sz="1800" kern="1200">
-                <a:solidFill>
-                  <a:schemeClr val="tx1"/>
-                </a:solidFill>
-                <a:latin typeface="+mn-lt"/>
-                <a:ea typeface="+mn-ea"/>
-                <a:cs typeface="+mn-cs"/>
-              </a:defRPr>
-            </a:lvl5pPr>
-            <a:lvl6pPr marL="2286000" algn="l" defTabSz="457200" rtl="0" eaLnBrk="1" latinLnBrk="0" hangingPunct="1">
-              <a:defRPr sz="1800" kern="1200">
-                <a:solidFill>
-                  <a:schemeClr val="tx1"/>
-                </a:solidFill>
-                <a:latin typeface="+mn-lt"/>
-                <a:ea typeface="+mn-ea"/>
-                <a:cs typeface="+mn-cs"/>
-              </a:defRPr>
-            </a:lvl6pPr>
-            <a:lvl7pPr marL="2743200" algn="l" defTabSz="457200" rtl="0" eaLnBrk="1" latinLnBrk="0" hangingPunct="1">
-              <a:defRPr sz="1800" kern="1200">
-                <a:solidFill>
-                  <a:schemeClr val="tx1"/>
-                </a:solidFill>
-                <a:latin typeface="+mn-lt"/>
-                <a:ea typeface="+mn-ea"/>
-                <a:cs typeface="+mn-cs"/>
-              </a:defRPr>
-            </a:lvl7pPr>
-            <a:lvl8pPr marL="3200400" algn="l" defTabSz="457200" rtl="0" eaLnBrk="1" latinLnBrk="0" hangingPunct="1">
-              <a:defRPr sz="1800" kern="1200">
-                <a:solidFill>
-                  <a:schemeClr val="tx1"/>
-                </a:solidFill>
-                <a:latin typeface="+mn-lt"/>
-                <a:ea typeface="+mn-ea"/>
-                <a:cs typeface="+mn-cs"/>
-              </a:defRPr>
-            </a:lvl8pPr>
-            <a:lvl9pPr marL="3657600" algn="l" defTabSz="457200" rtl="0" eaLnBrk="1" latinLnBrk="0" hangingPunct="1">
-              <a:defRPr sz="1800" kern="1200">
-                <a:solidFill>
-                  <a:schemeClr val="tx1"/>
-                </a:solidFill>
-                <a:latin typeface="+mn-lt"/>
-                <a:ea typeface="+mn-ea"/>
-                <a:cs typeface="+mn-cs"/>
-              </a:defRPr>
-            </a:lvl9pPr>
-          </a:lstStyle>
-          <a:p>
-            <a:r>
-              <a:rPr lang="en-US" sz="4800" b="1" dirty="0">
-                <a:latin typeface="Arial" panose="020B0604020202020204" pitchFamily="34" charset="0"/>
-                <a:ea typeface="Yu Gothic" panose="020B0400000000000000" pitchFamily="34" charset="-128"/>
-                <a:cs typeface="Arial" panose="020B0604020202020204" pitchFamily="34" charset="0"/>
-              </a:rPr>
-              <a:t>(b)</a:t>
-            </a:r>
-          </a:p>
-        </p:txBody>
-      </p:sp>
-    </p:spTree>
-    <p:extLst>
-      <p:ext uri="{BB962C8B-B14F-4D97-AF65-F5344CB8AC3E}">
-        <p14:creationId xmlns:p14="http://schemas.microsoft.com/office/powerpoint/2010/main" val="1663706368"/>
-      </p:ext>
-    </p:extLst>
-  </p:cSld>
-  <p:clrMapOvr>
-    <a:masterClrMapping/>
-  </p:clrMapOvr>
-</p:sld>
-</file>
-
-<file path=ppt/slides/slide14.xml><?xml version="1.0" encoding="utf-8"?>
 <p:sld xmlns:a="http://schemas.openxmlformats.org/drawingml/2006/main" xmlns:r="http://schemas.openxmlformats.org/officeDocument/2006/relationships" xmlns:p="http://schemas.openxmlformats.org/presentationml/2006/main">
   <p:cSld>
     <p:spTree>
@@ -14468,7 +9377,7 @@
         </p:nvSpPr>
         <p:spPr>
           <a:xfrm>
-            <a:off x="6350132" y="1913864"/>
+            <a:off x="185305" y="2061347"/>
             <a:ext cx="1090166" cy="830997"/>
           </a:xfrm>
           <a:prstGeom prst="rect">
@@ -14601,7 +9510,7 @@
         </p:nvSpPr>
         <p:spPr>
           <a:xfrm>
-            <a:off x="6329582" y="5873139"/>
+            <a:off x="164755" y="6020622"/>
             <a:ext cx="1090166" cy="830997"/>
           </a:xfrm>
           <a:prstGeom prst="rect">
@@ -14734,7 +9643,7 @@
         </p:nvSpPr>
         <p:spPr>
           <a:xfrm>
-            <a:off x="11869546" y="6852946"/>
+            <a:off x="5704719" y="7413385"/>
             <a:ext cx="1960793" cy="553998"/>
           </a:xfrm>
           <a:prstGeom prst="rect">
@@ -14775,7 +9684,7 @@
         </p:nvSpPr>
         <p:spPr>
           <a:xfrm>
-            <a:off x="11875896" y="8119272"/>
+            <a:off x="5711069" y="8679711"/>
             <a:ext cx="2207656" cy="553998"/>
           </a:xfrm>
           <a:prstGeom prst="rect">
@@ -14816,7 +9725,7 @@
         </p:nvSpPr>
         <p:spPr>
           <a:xfrm>
-            <a:off x="11875896" y="9302202"/>
+            <a:off x="5711069" y="9862641"/>
             <a:ext cx="1608133" cy="553998"/>
           </a:xfrm>
           <a:prstGeom prst="rect">
@@ -14857,7 +9766,7 @@
         </p:nvSpPr>
         <p:spPr>
           <a:xfrm>
-            <a:off x="15781256" y="6646436"/>
+            <a:off x="18966910" y="7206875"/>
             <a:ext cx="581883" cy="2596450"/>
           </a:xfrm>
           <a:prstGeom prst="rect">
@@ -15009,7 +9918,7 @@
         </p:nvSpPr>
         <p:spPr>
           <a:xfrm>
-            <a:off x="15353258" y="9242886"/>
+            <a:off x="18538912" y="9803325"/>
             <a:ext cx="1459154" cy="623826"/>
           </a:xfrm>
           <a:prstGeom prst="rect">
@@ -15161,7 +10070,7 @@
         </p:nvSpPr>
         <p:spPr>
           <a:xfrm>
-            <a:off x="14282130" y="6518666"/>
+            <a:off x="17467784" y="7079105"/>
             <a:ext cx="479983" cy="3575844"/>
           </a:xfrm>
           <a:prstGeom prst="rightBrace">
@@ -15206,7 +10115,7 @@
         </p:nvSpPr>
         <p:spPr>
           <a:xfrm>
-            <a:off x="11907646" y="2661946"/>
+            <a:off x="5742819" y="2809429"/>
             <a:ext cx="1960793" cy="553998"/>
           </a:xfrm>
           <a:prstGeom prst="rect">
@@ -15247,7 +10156,7 @@
         </p:nvSpPr>
         <p:spPr>
           <a:xfrm>
-            <a:off x="11913996" y="3928272"/>
+            <a:off x="5749169" y="4075755"/>
             <a:ext cx="2207656" cy="553998"/>
           </a:xfrm>
           <a:prstGeom prst="rect">
@@ -15288,7 +10197,7 @@
         </p:nvSpPr>
         <p:spPr>
           <a:xfrm>
-            <a:off x="11913996" y="5092152"/>
+            <a:off x="5749169" y="5239635"/>
             <a:ext cx="1608133" cy="553998"/>
           </a:xfrm>
           <a:prstGeom prst="rect">
@@ -15329,7 +10238,7 @@
         </p:nvSpPr>
         <p:spPr>
           <a:xfrm>
-            <a:off x="14320230" y="2327666"/>
+            <a:off x="17505884" y="2475149"/>
             <a:ext cx="479983" cy="3575844"/>
           </a:xfrm>
           <a:prstGeom prst="rightBrace">
@@ -15374,7 +10283,7 @@
         </p:nvSpPr>
         <p:spPr>
           <a:xfrm>
-            <a:off x="10620692" y="2443450"/>
+            <a:off x="4455865" y="2590933"/>
             <a:ext cx="1051254" cy="1222849"/>
           </a:xfrm>
           <a:prstGeom prst="rect">
@@ -15523,7 +10432,7 @@
         </p:nvSpPr>
         <p:spPr>
           <a:xfrm>
-            <a:off x="10416742" y="5040255"/>
+            <a:off x="4251915" y="5187738"/>
             <a:ext cx="1459154" cy="646331"/>
           </a:xfrm>
           <a:prstGeom prst="rect">
@@ -15672,7 +10581,7 @@
         </p:nvSpPr>
         <p:spPr>
           <a:xfrm>
-            <a:off x="10858328" y="3666300"/>
+            <a:off x="4693501" y="3813783"/>
             <a:ext cx="575982" cy="1373955"/>
           </a:xfrm>
           <a:prstGeom prst="rect">
@@ -15821,7 +10730,7 @@
         </p:nvSpPr>
         <p:spPr>
           <a:xfrm>
-            <a:off x="7479428" y="5040255"/>
+            <a:off x="1314601" y="5187738"/>
             <a:ext cx="2797151" cy="646331"/>
           </a:xfrm>
           <a:prstGeom prst="rect">
@@ -15874,7 +10783,7 @@
         </p:nvSpPr>
         <p:spPr>
           <a:xfrm>
-            <a:off x="7479428" y="3666300"/>
+            <a:off x="1314601" y="3813783"/>
             <a:ext cx="2797151" cy="1373955"/>
           </a:xfrm>
           <a:prstGeom prst="rect">
@@ -15927,7 +10836,7 @@
         </p:nvSpPr>
         <p:spPr>
           <a:xfrm>
-            <a:off x="7479427" y="2451070"/>
+            <a:off x="1314600" y="2598553"/>
             <a:ext cx="2797151" cy="1222849"/>
           </a:xfrm>
           <a:prstGeom prst="rect">
@@ -15980,7 +10889,7 @@
         </p:nvSpPr>
         <p:spPr>
           <a:xfrm>
-            <a:off x="15325421" y="2466580"/>
+            <a:off x="18511075" y="2614063"/>
             <a:ext cx="1466961" cy="1207339"/>
           </a:xfrm>
           <a:prstGeom prst="rect">
@@ -16132,7 +11041,7 @@
         </p:nvSpPr>
         <p:spPr>
           <a:xfrm>
-            <a:off x="15656078" y="3673919"/>
+            <a:off x="18841732" y="3821402"/>
             <a:ext cx="823931" cy="2012667"/>
           </a:xfrm>
           <a:prstGeom prst="rect">
@@ -16284,7 +11193,7 @@
         </p:nvSpPr>
         <p:spPr>
           <a:xfrm>
-            <a:off x="10614342" y="6646080"/>
+            <a:off x="4449515" y="7206519"/>
             <a:ext cx="1051254" cy="1222849"/>
           </a:xfrm>
           <a:prstGeom prst="rect">
@@ -16433,7 +11342,7 @@
         </p:nvSpPr>
         <p:spPr>
           <a:xfrm>
-            <a:off x="10410392" y="9242885"/>
+            <a:off x="4245565" y="9803324"/>
             <a:ext cx="1459154" cy="646331"/>
           </a:xfrm>
           <a:prstGeom prst="rect">
@@ -16582,7 +11491,7 @@
         </p:nvSpPr>
         <p:spPr>
           <a:xfrm>
-            <a:off x="10851978" y="7868930"/>
+            <a:off x="4687151" y="8429369"/>
             <a:ext cx="575982" cy="1373955"/>
           </a:xfrm>
           <a:prstGeom prst="rect">
@@ -16731,7 +11640,7 @@
         </p:nvSpPr>
         <p:spPr>
           <a:xfrm>
-            <a:off x="7473078" y="9242885"/>
+            <a:off x="1308251" y="9803324"/>
             <a:ext cx="2797151" cy="646331"/>
           </a:xfrm>
           <a:prstGeom prst="rect">
@@ -16784,7 +11693,7 @@
         </p:nvSpPr>
         <p:spPr>
           <a:xfrm>
-            <a:off x="7473078" y="7868930"/>
+            <a:off x="1308251" y="8429369"/>
             <a:ext cx="2797151" cy="1373955"/>
           </a:xfrm>
           <a:prstGeom prst="rect">
@@ -16837,7 +11746,7 @@
         </p:nvSpPr>
         <p:spPr>
           <a:xfrm>
-            <a:off x="7473077" y="6653700"/>
+            <a:off x="1308250" y="7214139"/>
             <a:ext cx="2797151" cy="1222849"/>
           </a:xfrm>
           <a:prstGeom prst="rect">
@@ -16890,7 +11799,7 @@
         </p:nvSpPr>
         <p:spPr>
           <a:xfrm>
-            <a:off x="10416742" y="1458012"/>
+            <a:off x="4251915" y="1605495"/>
             <a:ext cx="4063650" cy="830997"/>
           </a:xfrm>
           <a:prstGeom prst="rect">
@@ -17035,7 +11944,7 @@
         </p:nvSpPr>
         <p:spPr>
           <a:xfrm>
-            <a:off x="14102478" y="1395576"/>
+            <a:off x="17467784" y="1605494"/>
             <a:ext cx="4063650" cy="830997"/>
           </a:xfrm>
           <a:prstGeom prst="rect">
@@ -17194,7 +12103,7 @@
         </p:blipFill>
         <p:spPr>
           <a:xfrm>
-            <a:off x="7793858" y="6406590"/>
+            <a:off x="1629031" y="6967029"/>
             <a:ext cx="1983990" cy="3482625"/>
           </a:xfrm>
           <a:prstGeom prst="rect">
@@ -17230,7 +12139,7 @@
         </p:blipFill>
         <p:spPr>
           <a:xfrm>
-            <a:off x="7908174" y="2226573"/>
+            <a:off x="1743347" y="2374056"/>
             <a:ext cx="1939655" cy="3511910"/>
           </a:xfrm>
           <a:prstGeom prst="rect">
@@ -17238,10 +12147,1280 @@
           </a:prstGeom>
         </p:spPr>
       </p:pic>
+      <p:pic>
+        <p:nvPicPr>
+          <p:cNvPr id="3" name="Picture 2">
+            <a:extLst>
+              <a:ext uri="{FF2B5EF4-FFF2-40B4-BE49-F238E27FC236}">
+                <a16:creationId xmlns:a16="http://schemas.microsoft.com/office/drawing/2014/main" id="{597EFDAB-6DB5-D669-E95C-64C5ACF1B48E}"/>
+              </a:ext>
+            </a:extLst>
+          </p:cNvPr>
+          <p:cNvPicPr>
+            <a:picLocks noChangeAspect="1"/>
+          </p:cNvPicPr>
+          <p:nvPr/>
+        </p:nvPicPr>
+        <p:blipFill>
+          <a:blip r:embed="rId4">
+            <a:extLst>
+              <a:ext uri="{28A0092B-C50C-407E-A947-70E740481C1C}">
+                <a14:useLocalDpi xmlns:a14="http://schemas.microsoft.com/office/drawing/2010/main" val="0"/>
+              </a:ext>
+            </a:extLst>
+          </a:blip>
+          <a:stretch>
+            <a:fillRect/>
+          </a:stretch>
+        </p:blipFill>
+        <p:spPr>
+          <a:xfrm>
+            <a:off x="8669720" y="2242735"/>
+            <a:ext cx="8966039" cy="8966039"/>
+          </a:xfrm>
+          <a:prstGeom prst="rect">
+            <a:avLst/>
+          </a:prstGeom>
+        </p:spPr>
+      </p:pic>
+      <p:sp>
+        <p:nvSpPr>
+          <p:cNvPr id="4" name="Right Brace 3">
+            <a:extLst>
+              <a:ext uri="{FF2B5EF4-FFF2-40B4-BE49-F238E27FC236}">
+                <a16:creationId xmlns:a16="http://schemas.microsoft.com/office/drawing/2014/main" id="{45BE83D9-0901-790F-C335-67392430DBF5}"/>
+              </a:ext>
+            </a:extLst>
+          </p:cNvPr>
+          <p:cNvSpPr/>
+          <p:nvPr/>
+        </p:nvSpPr>
+        <p:spPr>
+          <a:xfrm>
+            <a:off x="8360451" y="7079105"/>
+            <a:ext cx="479983" cy="3575844"/>
+          </a:xfrm>
+          <a:prstGeom prst="rightBrace">
+            <a:avLst/>
+          </a:prstGeom>
+          <a:ln w="76200"/>
+        </p:spPr>
+        <p:style>
+          <a:lnRef idx="1">
+            <a:schemeClr val="dk1"/>
+          </a:lnRef>
+          <a:fillRef idx="0">
+            <a:schemeClr val="dk1"/>
+          </a:fillRef>
+          <a:effectRef idx="0">
+            <a:schemeClr val="dk1"/>
+          </a:effectRef>
+          <a:fontRef idx="minor">
+            <a:schemeClr val="tx1"/>
+          </a:fontRef>
+        </p:style>
+        <p:txBody>
+          <a:bodyPr rtlCol="0" anchor="ctr"/>
+          <a:lstStyle/>
+          <a:p>
+            <a:pPr algn="ctr"/>
+            <a:endParaRPr lang="en-US"/>
+          </a:p>
+        </p:txBody>
+      </p:sp>
+      <p:sp>
+        <p:nvSpPr>
+          <p:cNvPr id="5" name="Right Brace 4">
+            <a:extLst>
+              <a:ext uri="{FF2B5EF4-FFF2-40B4-BE49-F238E27FC236}">
+                <a16:creationId xmlns:a16="http://schemas.microsoft.com/office/drawing/2014/main" id="{7CE18130-3E01-6536-9924-05E96FBCAD96}"/>
+              </a:ext>
+            </a:extLst>
+          </p:cNvPr>
+          <p:cNvSpPr/>
+          <p:nvPr/>
+        </p:nvSpPr>
+        <p:spPr>
+          <a:xfrm>
+            <a:off x="8398551" y="2475149"/>
+            <a:ext cx="479983" cy="3575844"/>
+          </a:xfrm>
+          <a:prstGeom prst="rightBrace">
+            <a:avLst/>
+          </a:prstGeom>
+          <a:ln w="76200"/>
+        </p:spPr>
+        <p:style>
+          <a:lnRef idx="1">
+            <a:schemeClr val="dk1"/>
+          </a:lnRef>
+          <a:fillRef idx="0">
+            <a:schemeClr val="dk1"/>
+          </a:fillRef>
+          <a:effectRef idx="0">
+            <a:schemeClr val="dk1"/>
+          </a:effectRef>
+          <a:fontRef idx="minor">
+            <a:schemeClr val="tx1"/>
+          </a:fontRef>
+        </p:style>
+        <p:txBody>
+          <a:bodyPr rtlCol="0" anchor="ctr"/>
+          <a:lstStyle/>
+          <a:p>
+            <a:pPr algn="ctr"/>
+            <a:endParaRPr lang="en-US"/>
+          </a:p>
+        </p:txBody>
+      </p:sp>
+      <p:sp>
+        <p:nvSpPr>
+          <p:cNvPr id="6" name="TextBox 5">
+            <a:extLst>
+              <a:ext uri="{FF2B5EF4-FFF2-40B4-BE49-F238E27FC236}">
+                <a16:creationId xmlns:a16="http://schemas.microsoft.com/office/drawing/2014/main" id="{345385C6-425D-3B2A-EAE2-2DF85A727844}"/>
+              </a:ext>
+            </a:extLst>
+          </p:cNvPr>
+          <p:cNvSpPr txBox="1"/>
+          <p:nvPr/>
+        </p:nvSpPr>
+        <p:spPr>
+          <a:xfrm>
+            <a:off x="675000" y="1819569"/>
+            <a:ext cx="4063650" cy="461665"/>
+          </a:xfrm>
+          <a:prstGeom prst="rect">
+            <a:avLst/>
+          </a:prstGeom>
+          <a:noFill/>
+        </p:spPr>
+        <p:txBody>
+          <a:bodyPr wrap="square" rtlCol="0">
+            <a:spAutoFit/>
+          </a:bodyPr>
+          <a:lstStyle>
+            <a:defPPr>
+              <a:defRPr lang="en-US"/>
+            </a:defPPr>
+            <a:lvl1pPr marL="0" algn="l" defTabSz="457200" rtl="0" eaLnBrk="1" latinLnBrk="0" hangingPunct="1">
+              <a:defRPr sz="1800" kern="1200">
+                <a:solidFill>
+                  <a:schemeClr val="tx1"/>
+                </a:solidFill>
+                <a:latin typeface="+mn-lt"/>
+                <a:ea typeface="+mn-ea"/>
+                <a:cs typeface="+mn-cs"/>
+              </a:defRPr>
+            </a:lvl1pPr>
+            <a:lvl2pPr marL="457200" algn="l" defTabSz="457200" rtl="0" eaLnBrk="1" latinLnBrk="0" hangingPunct="1">
+              <a:defRPr sz="1800" kern="1200">
+                <a:solidFill>
+                  <a:schemeClr val="tx1"/>
+                </a:solidFill>
+                <a:latin typeface="+mn-lt"/>
+                <a:ea typeface="+mn-ea"/>
+                <a:cs typeface="+mn-cs"/>
+              </a:defRPr>
+            </a:lvl2pPr>
+            <a:lvl3pPr marL="914400" algn="l" defTabSz="457200" rtl="0" eaLnBrk="1" latinLnBrk="0" hangingPunct="1">
+              <a:defRPr sz="1800" kern="1200">
+                <a:solidFill>
+                  <a:schemeClr val="tx1"/>
+                </a:solidFill>
+                <a:latin typeface="+mn-lt"/>
+                <a:ea typeface="+mn-ea"/>
+                <a:cs typeface="+mn-cs"/>
+              </a:defRPr>
+            </a:lvl3pPr>
+            <a:lvl4pPr marL="1371600" algn="l" defTabSz="457200" rtl="0" eaLnBrk="1" latinLnBrk="0" hangingPunct="1">
+              <a:defRPr sz="1800" kern="1200">
+                <a:solidFill>
+                  <a:schemeClr val="tx1"/>
+                </a:solidFill>
+                <a:latin typeface="+mn-lt"/>
+                <a:ea typeface="+mn-ea"/>
+                <a:cs typeface="+mn-cs"/>
+              </a:defRPr>
+            </a:lvl4pPr>
+            <a:lvl5pPr marL="1828800" algn="l" defTabSz="457200" rtl="0" eaLnBrk="1" latinLnBrk="0" hangingPunct="1">
+              <a:defRPr sz="1800" kern="1200">
+                <a:solidFill>
+                  <a:schemeClr val="tx1"/>
+                </a:solidFill>
+                <a:latin typeface="+mn-lt"/>
+                <a:ea typeface="+mn-ea"/>
+                <a:cs typeface="+mn-cs"/>
+              </a:defRPr>
+            </a:lvl5pPr>
+            <a:lvl6pPr marL="2286000" algn="l" defTabSz="457200" rtl="0" eaLnBrk="1" latinLnBrk="0" hangingPunct="1">
+              <a:defRPr sz="1800" kern="1200">
+                <a:solidFill>
+                  <a:schemeClr val="tx1"/>
+                </a:solidFill>
+                <a:latin typeface="+mn-lt"/>
+                <a:ea typeface="+mn-ea"/>
+                <a:cs typeface="+mn-cs"/>
+              </a:defRPr>
+            </a:lvl6pPr>
+            <a:lvl7pPr marL="2743200" algn="l" defTabSz="457200" rtl="0" eaLnBrk="1" latinLnBrk="0" hangingPunct="1">
+              <a:defRPr sz="1800" kern="1200">
+                <a:solidFill>
+                  <a:schemeClr val="tx1"/>
+                </a:solidFill>
+                <a:latin typeface="+mn-lt"/>
+                <a:ea typeface="+mn-ea"/>
+                <a:cs typeface="+mn-cs"/>
+              </a:defRPr>
+            </a:lvl7pPr>
+            <a:lvl8pPr marL="3200400" algn="l" defTabSz="457200" rtl="0" eaLnBrk="1" latinLnBrk="0" hangingPunct="1">
+              <a:defRPr sz="1800" kern="1200">
+                <a:solidFill>
+                  <a:schemeClr val="tx1"/>
+                </a:solidFill>
+                <a:latin typeface="+mn-lt"/>
+                <a:ea typeface="+mn-ea"/>
+                <a:cs typeface="+mn-cs"/>
+              </a:defRPr>
+            </a:lvl8pPr>
+            <a:lvl9pPr marL="3657600" algn="l" defTabSz="457200" rtl="0" eaLnBrk="1" latinLnBrk="0" hangingPunct="1">
+              <a:defRPr sz="1800" kern="1200">
+                <a:solidFill>
+                  <a:schemeClr val="tx1"/>
+                </a:solidFill>
+                <a:latin typeface="+mn-lt"/>
+                <a:ea typeface="+mn-ea"/>
+                <a:cs typeface="+mn-cs"/>
+              </a:defRPr>
+            </a:lvl9pPr>
+          </a:lstStyle>
+          <a:p>
+            <a:pPr algn="ctr"/>
+            <a:r>
+              <a:rPr lang="en-US" sz="2400" b="1" dirty="0">
+                <a:latin typeface="Yu Gothic" panose="020B0400000000000000" pitchFamily="34" charset="-128"/>
+                <a:ea typeface="Yu Gothic" panose="020B0400000000000000" pitchFamily="34" charset="-128"/>
+                <a:cs typeface="Arial" panose="020B0604020202020204" pitchFamily="34" charset="0"/>
+              </a:rPr>
+              <a:t>Smaller sample</a:t>
+            </a:r>
+          </a:p>
+        </p:txBody>
+      </p:sp>
+      <p:sp>
+        <p:nvSpPr>
+          <p:cNvPr id="7" name="TextBox 6">
+            <a:extLst>
+              <a:ext uri="{FF2B5EF4-FFF2-40B4-BE49-F238E27FC236}">
+                <a16:creationId xmlns:a16="http://schemas.microsoft.com/office/drawing/2014/main" id="{702FB91F-3125-88C6-67FF-FA234FD9A05C}"/>
+              </a:ext>
+            </a:extLst>
+          </p:cNvPr>
+          <p:cNvSpPr txBox="1"/>
+          <p:nvPr/>
+        </p:nvSpPr>
+        <p:spPr>
+          <a:xfrm>
+            <a:off x="681350" y="6366010"/>
+            <a:ext cx="4063650" cy="461665"/>
+          </a:xfrm>
+          <a:prstGeom prst="rect">
+            <a:avLst/>
+          </a:prstGeom>
+          <a:noFill/>
+        </p:spPr>
+        <p:txBody>
+          <a:bodyPr wrap="square" rtlCol="0">
+            <a:spAutoFit/>
+          </a:bodyPr>
+          <a:lstStyle>
+            <a:defPPr>
+              <a:defRPr lang="en-US"/>
+            </a:defPPr>
+            <a:lvl1pPr marL="0" algn="l" defTabSz="457200" rtl="0" eaLnBrk="1" latinLnBrk="0" hangingPunct="1">
+              <a:defRPr sz="1800" kern="1200">
+                <a:solidFill>
+                  <a:schemeClr val="tx1"/>
+                </a:solidFill>
+                <a:latin typeface="+mn-lt"/>
+                <a:ea typeface="+mn-ea"/>
+                <a:cs typeface="+mn-cs"/>
+              </a:defRPr>
+            </a:lvl1pPr>
+            <a:lvl2pPr marL="457200" algn="l" defTabSz="457200" rtl="0" eaLnBrk="1" latinLnBrk="0" hangingPunct="1">
+              <a:defRPr sz="1800" kern="1200">
+                <a:solidFill>
+                  <a:schemeClr val="tx1"/>
+                </a:solidFill>
+                <a:latin typeface="+mn-lt"/>
+                <a:ea typeface="+mn-ea"/>
+                <a:cs typeface="+mn-cs"/>
+              </a:defRPr>
+            </a:lvl2pPr>
+            <a:lvl3pPr marL="914400" algn="l" defTabSz="457200" rtl="0" eaLnBrk="1" latinLnBrk="0" hangingPunct="1">
+              <a:defRPr sz="1800" kern="1200">
+                <a:solidFill>
+                  <a:schemeClr val="tx1"/>
+                </a:solidFill>
+                <a:latin typeface="+mn-lt"/>
+                <a:ea typeface="+mn-ea"/>
+                <a:cs typeface="+mn-cs"/>
+              </a:defRPr>
+            </a:lvl3pPr>
+            <a:lvl4pPr marL="1371600" algn="l" defTabSz="457200" rtl="0" eaLnBrk="1" latinLnBrk="0" hangingPunct="1">
+              <a:defRPr sz="1800" kern="1200">
+                <a:solidFill>
+                  <a:schemeClr val="tx1"/>
+                </a:solidFill>
+                <a:latin typeface="+mn-lt"/>
+                <a:ea typeface="+mn-ea"/>
+                <a:cs typeface="+mn-cs"/>
+              </a:defRPr>
+            </a:lvl4pPr>
+            <a:lvl5pPr marL="1828800" algn="l" defTabSz="457200" rtl="0" eaLnBrk="1" latinLnBrk="0" hangingPunct="1">
+              <a:defRPr sz="1800" kern="1200">
+                <a:solidFill>
+                  <a:schemeClr val="tx1"/>
+                </a:solidFill>
+                <a:latin typeface="+mn-lt"/>
+                <a:ea typeface="+mn-ea"/>
+                <a:cs typeface="+mn-cs"/>
+              </a:defRPr>
+            </a:lvl5pPr>
+            <a:lvl6pPr marL="2286000" algn="l" defTabSz="457200" rtl="0" eaLnBrk="1" latinLnBrk="0" hangingPunct="1">
+              <a:defRPr sz="1800" kern="1200">
+                <a:solidFill>
+                  <a:schemeClr val="tx1"/>
+                </a:solidFill>
+                <a:latin typeface="+mn-lt"/>
+                <a:ea typeface="+mn-ea"/>
+                <a:cs typeface="+mn-cs"/>
+              </a:defRPr>
+            </a:lvl6pPr>
+            <a:lvl7pPr marL="2743200" algn="l" defTabSz="457200" rtl="0" eaLnBrk="1" latinLnBrk="0" hangingPunct="1">
+              <a:defRPr sz="1800" kern="1200">
+                <a:solidFill>
+                  <a:schemeClr val="tx1"/>
+                </a:solidFill>
+                <a:latin typeface="+mn-lt"/>
+                <a:ea typeface="+mn-ea"/>
+                <a:cs typeface="+mn-cs"/>
+              </a:defRPr>
+            </a:lvl7pPr>
+            <a:lvl8pPr marL="3200400" algn="l" defTabSz="457200" rtl="0" eaLnBrk="1" latinLnBrk="0" hangingPunct="1">
+              <a:defRPr sz="1800" kern="1200">
+                <a:solidFill>
+                  <a:schemeClr val="tx1"/>
+                </a:solidFill>
+                <a:latin typeface="+mn-lt"/>
+                <a:ea typeface="+mn-ea"/>
+                <a:cs typeface="+mn-cs"/>
+              </a:defRPr>
+            </a:lvl8pPr>
+            <a:lvl9pPr marL="3657600" algn="l" defTabSz="457200" rtl="0" eaLnBrk="1" latinLnBrk="0" hangingPunct="1">
+              <a:defRPr sz="1800" kern="1200">
+                <a:solidFill>
+                  <a:schemeClr val="tx1"/>
+                </a:solidFill>
+                <a:latin typeface="+mn-lt"/>
+                <a:ea typeface="+mn-ea"/>
+                <a:cs typeface="+mn-cs"/>
+              </a:defRPr>
+            </a:lvl9pPr>
+          </a:lstStyle>
+          <a:p>
+            <a:pPr algn="ctr"/>
+            <a:r>
+              <a:rPr lang="en-US" sz="2400" b="1" dirty="0">
+                <a:latin typeface="Yu Gothic" panose="020B0400000000000000" pitchFamily="34" charset="-128"/>
+                <a:ea typeface="Yu Gothic" panose="020B0400000000000000" pitchFamily="34" charset="-128"/>
+                <a:cs typeface="Arial" panose="020B0604020202020204" pitchFamily="34" charset="0"/>
+              </a:rPr>
+              <a:t>Larger sample</a:t>
+            </a:r>
+          </a:p>
+        </p:txBody>
+      </p:sp>
+      <p:sp>
+        <p:nvSpPr>
+          <p:cNvPr id="8" name="TextBox 7">
+            <a:extLst>
+              <a:ext uri="{FF2B5EF4-FFF2-40B4-BE49-F238E27FC236}">
+                <a16:creationId xmlns:a16="http://schemas.microsoft.com/office/drawing/2014/main" id="{4F2B3C38-B5A3-CACD-639F-C1E95A53A5C4}"/>
+              </a:ext>
+            </a:extLst>
+          </p:cNvPr>
+          <p:cNvSpPr txBox="1"/>
+          <p:nvPr/>
+        </p:nvSpPr>
+        <p:spPr>
+          <a:xfrm>
+            <a:off x="8963492" y="1645848"/>
+            <a:ext cx="7676713" cy="830997"/>
+          </a:xfrm>
+          <a:prstGeom prst="rect">
+            <a:avLst/>
+          </a:prstGeom>
+          <a:noFill/>
+        </p:spPr>
+        <p:txBody>
+          <a:bodyPr wrap="square" rtlCol="0">
+            <a:spAutoFit/>
+          </a:bodyPr>
+          <a:lstStyle>
+            <a:defPPr>
+              <a:defRPr lang="en-US"/>
+            </a:defPPr>
+            <a:lvl1pPr marL="0" algn="l" defTabSz="457200" rtl="0" eaLnBrk="1" latinLnBrk="0" hangingPunct="1">
+              <a:defRPr sz="1800" kern="1200">
+                <a:solidFill>
+                  <a:schemeClr val="tx1"/>
+                </a:solidFill>
+                <a:latin typeface="+mn-lt"/>
+                <a:ea typeface="+mn-ea"/>
+                <a:cs typeface="+mn-cs"/>
+              </a:defRPr>
+            </a:lvl1pPr>
+            <a:lvl2pPr marL="457200" algn="l" defTabSz="457200" rtl="0" eaLnBrk="1" latinLnBrk="0" hangingPunct="1">
+              <a:defRPr sz="1800" kern="1200">
+                <a:solidFill>
+                  <a:schemeClr val="tx1"/>
+                </a:solidFill>
+                <a:latin typeface="+mn-lt"/>
+                <a:ea typeface="+mn-ea"/>
+                <a:cs typeface="+mn-cs"/>
+              </a:defRPr>
+            </a:lvl2pPr>
+            <a:lvl3pPr marL="914400" algn="l" defTabSz="457200" rtl="0" eaLnBrk="1" latinLnBrk="0" hangingPunct="1">
+              <a:defRPr sz="1800" kern="1200">
+                <a:solidFill>
+                  <a:schemeClr val="tx1"/>
+                </a:solidFill>
+                <a:latin typeface="+mn-lt"/>
+                <a:ea typeface="+mn-ea"/>
+                <a:cs typeface="+mn-cs"/>
+              </a:defRPr>
+            </a:lvl3pPr>
+            <a:lvl4pPr marL="1371600" algn="l" defTabSz="457200" rtl="0" eaLnBrk="1" latinLnBrk="0" hangingPunct="1">
+              <a:defRPr sz="1800" kern="1200">
+                <a:solidFill>
+                  <a:schemeClr val="tx1"/>
+                </a:solidFill>
+                <a:latin typeface="+mn-lt"/>
+                <a:ea typeface="+mn-ea"/>
+                <a:cs typeface="+mn-cs"/>
+              </a:defRPr>
+            </a:lvl4pPr>
+            <a:lvl5pPr marL="1828800" algn="l" defTabSz="457200" rtl="0" eaLnBrk="1" latinLnBrk="0" hangingPunct="1">
+              <a:defRPr sz="1800" kern="1200">
+                <a:solidFill>
+                  <a:schemeClr val="tx1"/>
+                </a:solidFill>
+                <a:latin typeface="+mn-lt"/>
+                <a:ea typeface="+mn-ea"/>
+                <a:cs typeface="+mn-cs"/>
+              </a:defRPr>
+            </a:lvl5pPr>
+            <a:lvl6pPr marL="2286000" algn="l" defTabSz="457200" rtl="0" eaLnBrk="1" latinLnBrk="0" hangingPunct="1">
+              <a:defRPr sz="1800" kern="1200">
+                <a:solidFill>
+                  <a:schemeClr val="tx1"/>
+                </a:solidFill>
+                <a:latin typeface="+mn-lt"/>
+                <a:ea typeface="+mn-ea"/>
+                <a:cs typeface="+mn-cs"/>
+              </a:defRPr>
+            </a:lvl6pPr>
+            <a:lvl7pPr marL="2743200" algn="l" defTabSz="457200" rtl="0" eaLnBrk="1" latinLnBrk="0" hangingPunct="1">
+              <a:defRPr sz="1800" kern="1200">
+                <a:solidFill>
+                  <a:schemeClr val="tx1"/>
+                </a:solidFill>
+                <a:latin typeface="+mn-lt"/>
+                <a:ea typeface="+mn-ea"/>
+                <a:cs typeface="+mn-cs"/>
+              </a:defRPr>
+            </a:lvl7pPr>
+            <a:lvl8pPr marL="3200400" algn="l" defTabSz="457200" rtl="0" eaLnBrk="1" latinLnBrk="0" hangingPunct="1">
+              <a:defRPr sz="1800" kern="1200">
+                <a:solidFill>
+                  <a:schemeClr val="tx1"/>
+                </a:solidFill>
+                <a:latin typeface="+mn-lt"/>
+                <a:ea typeface="+mn-ea"/>
+                <a:cs typeface="+mn-cs"/>
+              </a:defRPr>
+            </a:lvl8pPr>
+            <a:lvl9pPr marL="3657600" algn="l" defTabSz="457200" rtl="0" eaLnBrk="1" latinLnBrk="0" hangingPunct="1">
+              <a:defRPr sz="1800" kern="1200">
+                <a:solidFill>
+                  <a:schemeClr val="tx1"/>
+                </a:solidFill>
+                <a:latin typeface="+mn-lt"/>
+                <a:ea typeface="+mn-ea"/>
+                <a:cs typeface="+mn-cs"/>
+              </a:defRPr>
+            </a:lvl9pPr>
+          </a:lstStyle>
+          <a:p>
+            <a:pPr algn="ctr"/>
+            <a:r>
+              <a:rPr lang="en-US" sz="2400" b="1" dirty="0">
+                <a:latin typeface="Yu Gothic" panose="020B0400000000000000" pitchFamily="34" charset="-128"/>
+                <a:ea typeface="Yu Gothic" panose="020B0400000000000000" pitchFamily="34" charset="-128"/>
+                <a:cs typeface="Arial" panose="020B0604020202020204" pitchFamily="34" charset="0"/>
+              </a:rPr>
+              <a:t>Sample-size dependent distribution </a:t>
+            </a:r>
+          </a:p>
+          <a:p>
+            <a:pPr algn="ctr"/>
+            <a:r>
+              <a:rPr lang="en-US" sz="2400" b="1" dirty="0">
+                <a:latin typeface="Yu Gothic" panose="020B0400000000000000" pitchFamily="34" charset="-128"/>
+                <a:ea typeface="Yu Gothic" panose="020B0400000000000000" pitchFamily="34" charset="-128"/>
+                <a:cs typeface="Arial" panose="020B0604020202020204" pitchFamily="34" charset="0"/>
+              </a:rPr>
+              <a:t>of coalescent branch lengths</a:t>
+            </a:r>
+          </a:p>
+        </p:txBody>
+      </p:sp>
     </p:spTree>
     <p:extLst>
       <p:ext uri="{BB962C8B-B14F-4D97-AF65-F5344CB8AC3E}">
         <p14:creationId xmlns:p14="http://schemas.microsoft.com/office/powerpoint/2010/main" val="2539197924"/>
+      </p:ext>
+    </p:extLst>
+  </p:cSld>
+  <p:clrMapOvr>
+    <a:masterClrMapping/>
+  </p:clrMapOvr>
+</p:sld>
+</file>
+
+<file path=ppt/slides/slide14.xml><?xml version="1.0" encoding="utf-8"?>
+<p:sld xmlns:a="http://schemas.openxmlformats.org/drawingml/2006/main" xmlns:r="http://schemas.openxmlformats.org/officeDocument/2006/relationships" xmlns:p="http://schemas.openxmlformats.org/presentationml/2006/main">
+  <p:cSld>
+    <p:spTree>
+      <p:nvGrpSpPr>
+        <p:cNvPr id="1" name=""/>
+        <p:cNvGrpSpPr/>
+        <p:nvPr/>
+      </p:nvGrpSpPr>
+      <p:grpSpPr>
+        <a:xfrm>
+          <a:off x="0" y="0"/>
+          <a:ext cx="0" cy="0"/>
+          <a:chOff x="0" y="0"/>
+          <a:chExt cx="0" cy="0"/>
+        </a:xfrm>
+      </p:grpSpPr>
+      <p:pic>
+        <p:nvPicPr>
+          <p:cNvPr id="10" name="Picture 9">
+            <a:extLst>
+              <a:ext uri="{FF2B5EF4-FFF2-40B4-BE49-F238E27FC236}">
+                <a16:creationId xmlns:a16="http://schemas.microsoft.com/office/drawing/2014/main" id="{D670D136-D4B1-2F03-CA3A-B0F61CBF5C84}"/>
+              </a:ext>
+            </a:extLst>
+          </p:cNvPr>
+          <p:cNvPicPr>
+            <a:picLocks noChangeAspect="1"/>
+          </p:cNvPicPr>
+          <p:nvPr/>
+        </p:nvPicPr>
+        <p:blipFill>
+          <a:blip r:embed="rId2">
+            <a:extLst>
+              <a:ext uri="{28A0092B-C50C-407E-A947-70E740481C1C}">
+                <a14:useLocalDpi xmlns:a14="http://schemas.microsoft.com/office/drawing/2010/main" val="0"/>
+              </a:ext>
+            </a:extLst>
+          </a:blip>
+          <a:stretch>
+            <a:fillRect/>
+          </a:stretch>
+        </p:blipFill>
+        <p:spPr>
+          <a:xfrm>
+            <a:off x="5598090" y="2315001"/>
+            <a:ext cx="11431595" cy="7621064"/>
+          </a:xfrm>
+          <a:prstGeom prst="rect">
+            <a:avLst/>
+          </a:prstGeom>
+        </p:spPr>
+      </p:pic>
+      <p:sp>
+        <p:nvSpPr>
+          <p:cNvPr id="4" name="TextBox 3">
+            <a:extLst>
+              <a:ext uri="{FF2B5EF4-FFF2-40B4-BE49-F238E27FC236}">
+                <a16:creationId xmlns:a16="http://schemas.microsoft.com/office/drawing/2014/main" id="{938C211B-7F27-04D0-AEF3-A99829D8F0B0}"/>
+              </a:ext>
+            </a:extLst>
+          </p:cNvPr>
+          <p:cNvSpPr txBox="1"/>
+          <p:nvPr/>
+        </p:nvSpPr>
+        <p:spPr>
+          <a:xfrm>
+            <a:off x="5756151" y="2140834"/>
+            <a:ext cx="1090166" cy="646331"/>
+          </a:xfrm>
+          <a:prstGeom prst="rect">
+            <a:avLst/>
+          </a:prstGeom>
+          <a:noFill/>
+        </p:spPr>
+        <p:txBody>
+          <a:bodyPr wrap="square" rtlCol="0">
+            <a:spAutoFit/>
+          </a:bodyPr>
+          <a:lstStyle>
+            <a:defPPr>
+              <a:defRPr lang="en-US"/>
+            </a:defPPr>
+            <a:lvl1pPr marL="0" algn="l" defTabSz="457200" rtl="0" eaLnBrk="1" latinLnBrk="0" hangingPunct="1">
+              <a:defRPr sz="1800" kern="1200">
+                <a:solidFill>
+                  <a:schemeClr val="tx1"/>
+                </a:solidFill>
+                <a:latin typeface="+mn-lt"/>
+                <a:ea typeface="+mn-ea"/>
+                <a:cs typeface="+mn-cs"/>
+              </a:defRPr>
+            </a:lvl1pPr>
+            <a:lvl2pPr marL="457200" algn="l" defTabSz="457200" rtl="0" eaLnBrk="1" latinLnBrk="0" hangingPunct="1">
+              <a:defRPr sz="1800" kern="1200">
+                <a:solidFill>
+                  <a:schemeClr val="tx1"/>
+                </a:solidFill>
+                <a:latin typeface="+mn-lt"/>
+                <a:ea typeface="+mn-ea"/>
+                <a:cs typeface="+mn-cs"/>
+              </a:defRPr>
+            </a:lvl2pPr>
+            <a:lvl3pPr marL="914400" algn="l" defTabSz="457200" rtl="0" eaLnBrk="1" latinLnBrk="0" hangingPunct="1">
+              <a:defRPr sz="1800" kern="1200">
+                <a:solidFill>
+                  <a:schemeClr val="tx1"/>
+                </a:solidFill>
+                <a:latin typeface="+mn-lt"/>
+                <a:ea typeface="+mn-ea"/>
+                <a:cs typeface="+mn-cs"/>
+              </a:defRPr>
+            </a:lvl3pPr>
+            <a:lvl4pPr marL="1371600" algn="l" defTabSz="457200" rtl="0" eaLnBrk="1" latinLnBrk="0" hangingPunct="1">
+              <a:defRPr sz="1800" kern="1200">
+                <a:solidFill>
+                  <a:schemeClr val="tx1"/>
+                </a:solidFill>
+                <a:latin typeface="+mn-lt"/>
+                <a:ea typeface="+mn-ea"/>
+                <a:cs typeface="+mn-cs"/>
+              </a:defRPr>
+            </a:lvl4pPr>
+            <a:lvl5pPr marL="1828800" algn="l" defTabSz="457200" rtl="0" eaLnBrk="1" latinLnBrk="0" hangingPunct="1">
+              <a:defRPr sz="1800" kern="1200">
+                <a:solidFill>
+                  <a:schemeClr val="tx1"/>
+                </a:solidFill>
+                <a:latin typeface="+mn-lt"/>
+                <a:ea typeface="+mn-ea"/>
+                <a:cs typeface="+mn-cs"/>
+              </a:defRPr>
+            </a:lvl5pPr>
+            <a:lvl6pPr marL="2286000" algn="l" defTabSz="457200" rtl="0" eaLnBrk="1" latinLnBrk="0" hangingPunct="1">
+              <a:defRPr sz="1800" kern="1200">
+                <a:solidFill>
+                  <a:schemeClr val="tx1"/>
+                </a:solidFill>
+                <a:latin typeface="+mn-lt"/>
+                <a:ea typeface="+mn-ea"/>
+                <a:cs typeface="+mn-cs"/>
+              </a:defRPr>
+            </a:lvl6pPr>
+            <a:lvl7pPr marL="2743200" algn="l" defTabSz="457200" rtl="0" eaLnBrk="1" latinLnBrk="0" hangingPunct="1">
+              <a:defRPr sz="1800" kern="1200">
+                <a:solidFill>
+                  <a:schemeClr val="tx1"/>
+                </a:solidFill>
+                <a:latin typeface="+mn-lt"/>
+                <a:ea typeface="+mn-ea"/>
+                <a:cs typeface="+mn-cs"/>
+              </a:defRPr>
+            </a:lvl7pPr>
+            <a:lvl8pPr marL="3200400" algn="l" defTabSz="457200" rtl="0" eaLnBrk="1" latinLnBrk="0" hangingPunct="1">
+              <a:defRPr sz="1800" kern="1200">
+                <a:solidFill>
+                  <a:schemeClr val="tx1"/>
+                </a:solidFill>
+                <a:latin typeface="+mn-lt"/>
+                <a:ea typeface="+mn-ea"/>
+                <a:cs typeface="+mn-cs"/>
+              </a:defRPr>
+            </a:lvl8pPr>
+            <a:lvl9pPr marL="3657600" algn="l" defTabSz="457200" rtl="0" eaLnBrk="1" latinLnBrk="0" hangingPunct="1">
+              <a:defRPr sz="1800" kern="1200">
+                <a:solidFill>
+                  <a:schemeClr val="tx1"/>
+                </a:solidFill>
+                <a:latin typeface="+mn-lt"/>
+                <a:ea typeface="+mn-ea"/>
+                <a:cs typeface="+mn-cs"/>
+              </a:defRPr>
+            </a:lvl9pPr>
+          </a:lstStyle>
+          <a:p>
+            <a:r>
+              <a:rPr lang="en-US" sz="3600" b="1" dirty="0">
+                <a:latin typeface="Arial" panose="020B0604020202020204" pitchFamily="34" charset="0"/>
+                <a:ea typeface="Yu Gothic" panose="020B0400000000000000" pitchFamily="34" charset="-128"/>
+                <a:cs typeface="Arial" panose="020B0604020202020204" pitchFamily="34" charset="0"/>
+              </a:rPr>
+              <a:t>(a)</a:t>
+            </a:r>
+          </a:p>
+        </p:txBody>
+      </p:sp>
+      <p:sp>
+        <p:nvSpPr>
+          <p:cNvPr id="5" name="TextBox 4">
+            <a:extLst>
+              <a:ext uri="{FF2B5EF4-FFF2-40B4-BE49-F238E27FC236}">
+                <a16:creationId xmlns:a16="http://schemas.microsoft.com/office/drawing/2014/main" id="{9344E134-DB25-1435-1F80-AE9EC97A1CAD}"/>
+              </a:ext>
+            </a:extLst>
+          </p:cNvPr>
+          <p:cNvSpPr txBox="1"/>
+          <p:nvPr/>
+        </p:nvSpPr>
+        <p:spPr>
+          <a:xfrm>
+            <a:off x="5756151" y="4541134"/>
+            <a:ext cx="1090166" cy="646331"/>
+          </a:xfrm>
+          <a:prstGeom prst="rect">
+            <a:avLst/>
+          </a:prstGeom>
+          <a:noFill/>
+        </p:spPr>
+        <p:txBody>
+          <a:bodyPr wrap="square" rtlCol="0">
+            <a:spAutoFit/>
+          </a:bodyPr>
+          <a:lstStyle>
+            <a:defPPr>
+              <a:defRPr lang="en-US"/>
+            </a:defPPr>
+            <a:lvl1pPr marL="0" algn="l" defTabSz="457200" rtl="0" eaLnBrk="1" latinLnBrk="0" hangingPunct="1">
+              <a:defRPr sz="1800" kern="1200">
+                <a:solidFill>
+                  <a:schemeClr val="tx1"/>
+                </a:solidFill>
+                <a:latin typeface="+mn-lt"/>
+                <a:ea typeface="+mn-ea"/>
+                <a:cs typeface="+mn-cs"/>
+              </a:defRPr>
+            </a:lvl1pPr>
+            <a:lvl2pPr marL="457200" algn="l" defTabSz="457200" rtl="0" eaLnBrk="1" latinLnBrk="0" hangingPunct="1">
+              <a:defRPr sz="1800" kern="1200">
+                <a:solidFill>
+                  <a:schemeClr val="tx1"/>
+                </a:solidFill>
+                <a:latin typeface="+mn-lt"/>
+                <a:ea typeface="+mn-ea"/>
+                <a:cs typeface="+mn-cs"/>
+              </a:defRPr>
+            </a:lvl2pPr>
+            <a:lvl3pPr marL="914400" algn="l" defTabSz="457200" rtl="0" eaLnBrk="1" latinLnBrk="0" hangingPunct="1">
+              <a:defRPr sz="1800" kern="1200">
+                <a:solidFill>
+                  <a:schemeClr val="tx1"/>
+                </a:solidFill>
+                <a:latin typeface="+mn-lt"/>
+                <a:ea typeface="+mn-ea"/>
+                <a:cs typeface="+mn-cs"/>
+              </a:defRPr>
+            </a:lvl3pPr>
+            <a:lvl4pPr marL="1371600" algn="l" defTabSz="457200" rtl="0" eaLnBrk="1" latinLnBrk="0" hangingPunct="1">
+              <a:defRPr sz="1800" kern="1200">
+                <a:solidFill>
+                  <a:schemeClr val="tx1"/>
+                </a:solidFill>
+                <a:latin typeface="+mn-lt"/>
+                <a:ea typeface="+mn-ea"/>
+                <a:cs typeface="+mn-cs"/>
+              </a:defRPr>
+            </a:lvl4pPr>
+            <a:lvl5pPr marL="1828800" algn="l" defTabSz="457200" rtl="0" eaLnBrk="1" latinLnBrk="0" hangingPunct="1">
+              <a:defRPr sz="1800" kern="1200">
+                <a:solidFill>
+                  <a:schemeClr val="tx1"/>
+                </a:solidFill>
+                <a:latin typeface="+mn-lt"/>
+                <a:ea typeface="+mn-ea"/>
+                <a:cs typeface="+mn-cs"/>
+              </a:defRPr>
+            </a:lvl5pPr>
+            <a:lvl6pPr marL="2286000" algn="l" defTabSz="457200" rtl="0" eaLnBrk="1" latinLnBrk="0" hangingPunct="1">
+              <a:defRPr sz="1800" kern="1200">
+                <a:solidFill>
+                  <a:schemeClr val="tx1"/>
+                </a:solidFill>
+                <a:latin typeface="+mn-lt"/>
+                <a:ea typeface="+mn-ea"/>
+                <a:cs typeface="+mn-cs"/>
+              </a:defRPr>
+            </a:lvl6pPr>
+            <a:lvl7pPr marL="2743200" algn="l" defTabSz="457200" rtl="0" eaLnBrk="1" latinLnBrk="0" hangingPunct="1">
+              <a:defRPr sz="1800" kern="1200">
+                <a:solidFill>
+                  <a:schemeClr val="tx1"/>
+                </a:solidFill>
+                <a:latin typeface="+mn-lt"/>
+                <a:ea typeface="+mn-ea"/>
+                <a:cs typeface="+mn-cs"/>
+              </a:defRPr>
+            </a:lvl7pPr>
+            <a:lvl8pPr marL="3200400" algn="l" defTabSz="457200" rtl="0" eaLnBrk="1" latinLnBrk="0" hangingPunct="1">
+              <a:defRPr sz="1800" kern="1200">
+                <a:solidFill>
+                  <a:schemeClr val="tx1"/>
+                </a:solidFill>
+                <a:latin typeface="+mn-lt"/>
+                <a:ea typeface="+mn-ea"/>
+                <a:cs typeface="+mn-cs"/>
+              </a:defRPr>
+            </a:lvl8pPr>
+            <a:lvl9pPr marL="3657600" algn="l" defTabSz="457200" rtl="0" eaLnBrk="1" latinLnBrk="0" hangingPunct="1">
+              <a:defRPr sz="1800" kern="1200">
+                <a:solidFill>
+                  <a:schemeClr val="tx1"/>
+                </a:solidFill>
+                <a:latin typeface="+mn-lt"/>
+                <a:ea typeface="+mn-ea"/>
+                <a:cs typeface="+mn-cs"/>
+              </a:defRPr>
+            </a:lvl9pPr>
+          </a:lstStyle>
+          <a:p>
+            <a:r>
+              <a:rPr lang="en-US" sz="3600" b="1" dirty="0">
+                <a:latin typeface="Arial" panose="020B0604020202020204" pitchFamily="34" charset="0"/>
+                <a:ea typeface="Yu Gothic" panose="020B0400000000000000" pitchFamily="34" charset="-128"/>
+                <a:cs typeface="Arial" panose="020B0604020202020204" pitchFamily="34" charset="0"/>
+              </a:rPr>
+              <a:t>(b)</a:t>
+            </a:r>
+          </a:p>
+        </p:txBody>
+      </p:sp>
+      <p:sp>
+        <p:nvSpPr>
+          <p:cNvPr id="6" name="TextBox 5">
+            <a:extLst>
+              <a:ext uri="{FF2B5EF4-FFF2-40B4-BE49-F238E27FC236}">
+                <a16:creationId xmlns:a16="http://schemas.microsoft.com/office/drawing/2014/main" id="{D100421F-DBCB-1115-3C97-63A846250854}"/>
+              </a:ext>
+            </a:extLst>
+          </p:cNvPr>
+          <p:cNvSpPr txBox="1"/>
+          <p:nvPr/>
+        </p:nvSpPr>
+        <p:spPr>
+          <a:xfrm>
+            <a:off x="5756151" y="7199141"/>
+            <a:ext cx="1090166" cy="646331"/>
+          </a:xfrm>
+          <a:prstGeom prst="rect">
+            <a:avLst/>
+          </a:prstGeom>
+          <a:noFill/>
+        </p:spPr>
+        <p:txBody>
+          <a:bodyPr wrap="square" rtlCol="0">
+            <a:spAutoFit/>
+          </a:bodyPr>
+          <a:lstStyle>
+            <a:defPPr>
+              <a:defRPr lang="en-US"/>
+            </a:defPPr>
+            <a:lvl1pPr marL="0" algn="l" defTabSz="457200" rtl="0" eaLnBrk="1" latinLnBrk="0" hangingPunct="1">
+              <a:defRPr sz="1800" kern="1200">
+                <a:solidFill>
+                  <a:schemeClr val="tx1"/>
+                </a:solidFill>
+                <a:latin typeface="+mn-lt"/>
+                <a:ea typeface="+mn-ea"/>
+                <a:cs typeface="+mn-cs"/>
+              </a:defRPr>
+            </a:lvl1pPr>
+            <a:lvl2pPr marL="457200" algn="l" defTabSz="457200" rtl="0" eaLnBrk="1" latinLnBrk="0" hangingPunct="1">
+              <a:defRPr sz="1800" kern="1200">
+                <a:solidFill>
+                  <a:schemeClr val="tx1"/>
+                </a:solidFill>
+                <a:latin typeface="+mn-lt"/>
+                <a:ea typeface="+mn-ea"/>
+                <a:cs typeface="+mn-cs"/>
+              </a:defRPr>
+            </a:lvl2pPr>
+            <a:lvl3pPr marL="914400" algn="l" defTabSz="457200" rtl="0" eaLnBrk="1" latinLnBrk="0" hangingPunct="1">
+              <a:defRPr sz="1800" kern="1200">
+                <a:solidFill>
+                  <a:schemeClr val="tx1"/>
+                </a:solidFill>
+                <a:latin typeface="+mn-lt"/>
+                <a:ea typeface="+mn-ea"/>
+                <a:cs typeface="+mn-cs"/>
+              </a:defRPr>
+            </a:lvl3pPr>
+            <a:lvl4pPr marL="1371600" algn="l" defTabSz="457200" rtl="0" eaLnBrk="1" latinLnBrk="0" hangingPunct="1">
+              <a:defRPr sz="1800" kern="1200">
+                <a:solidFill>
+                  <a:schemeClr val="tx1"/>
+                </a:solidFill>
+                <a:latin typeface="+mn-lt"/>
+                <a:ea typeface="+mn-ea"/>
+                <a:cs typeface="+mn-cs"/>
+              </a:defRPr>
+            </a:lvl4pPr>
+            <a:lvl5pPr marL="1828800" algn="l" defTabSz="457200" rtl="0" eaLnBrk="1" latinLnBrk="0" hangingPunct="1">
+              <a:defRPr sz="1800" kern="1200">
+                <a:solidFill>
+                  <a:schemeClr val="tx1"/>
+                </a:solidFill>
+                <a:latin typeface="+mn-lt"/>
+                <a:ea typeface="+mn-ea"/>
+                <a:cs typeface="+mn-cs"/>
+              </a:defRPr>
+            </a:lvl5pPr>
+            <a:lvl6pPr marL="2286000" algn="l" defTabSz="457200" rtl="0" eaLnBrk="1" latinLnBrk="0" hangingPunct="1">
+              <a:defRPr sz="1800" kern="1200">
+                <a:solidFill>
+                  <a:schemeClr val="tx1"/>
+                </a:solidFill>
+                <a:latin typeface="+mn-lt"/>
+                <a:ea typeface="+mn-ea"/>
+                <a:cs typeface="+mn-cs"/>
+              </a:defRPr>
+            </a:lvl6pPr>
+            <a:lvl7pPr marL="2743200" algn="l" defTabSz="457200" rtl="0" eaLnBrk="1" latinLnBrk="0" hangingPunct="1">
+              <a:defRPr sz="1800" kern="1200">
+                <a:solidFill>
+                  <a:schemeClr val="tx1"/>
+                </a:solidFill>
+                <a:latin typeface="+mn-lt"/>
+                <a:ea typeface="+mn-ea"/>
+                <a:cs typeface="+mn-cs"/>
+              </a:defRPr>
+            </a:lvl7pPr>
+            <a:lvl8pPr marL="3200400" algn="l" defTabSz="457200" rtl="0" eaLnBrk="1" latinLnBrk="0" hangingPunct="1">
+              <a:defRPr sz="1800" kern="1200">
+                <a:solidFill>
+                  <a:schemeClr val="tx1"/>
+                </a:solidFill>
+                <a:latin typeface="+mn-lt"/>
+                <a:ea typeface="+mn-ea"/>
+                <a:cs typeface="+mn-cs"/>
+              </a:defRPr>
+            </a:lvl8pPr>
+            <a:lvl9pPr marL="3657600" algn="l" defTabSz="457200" rtl="0" eaLnBrk="1" latinLnBrk="0" hangingPunct="1">
+              <a:defRPr sz="1800" kern="1200">
+                <a:solidFill>
+                  <a:schemeClr val="tx1"/>
+                </a:solidFill>
+                <a:latin typeface="+mn-lt"/>
+                <a:ea typeface="+mn-ea"/>
+                <a:cs typeface="+mn-cs"/>
+              </a:defRPr>
+            </a:lvl9pPr>
+          </a:lstStyle>
+          <a:p>
+            <a:r>
+              <a:rPr lang="en-US" sz="3600" b="1" dirty="0">
+                <a:latin typeface="Arial" panose="020B0604020202020204" pitchFamily="34" charset="0"/>
+                <a:ea typeface="Yu Gothic" panose="020B0400000000000000" pitchFamily="34" charset="-128"/>
+                <a:cs typeface="Arial" panose="020B0604020202020204" pitchFamily="34" charset="0"/>
+              </a:rPr>
+              <a:t>(c)</a:t>
+            </a:r>
+          </a:p>
+        </p:txBody>
+      </p:sp>
+      <p:sp>
+        <p:nvSpPr>
+          <p:cNvPr id="7" name="TextBox 6">
+            <a:extLst>
+              <a:ext uri="{FF2B5EF4-FFF2-40B4-BE49-F238E27FC236}">
+                <a16:creationId xmlns:a16="http://schemas.microsoft.com/office/drawing/2014/main" id="{5DC75018-13AE-91AF-ADF2-52005CAF8B08}"/>
+              </a:ext>
+            </a:extLst>
+          </p:cNvPr>
+          <p:cNvSpPr txBox="1"/>
+          <p:nvPr/>
+        </p:nvSpPr>
+        <p:spPr>
+          <a:xfrm>
+            <a:off x="10671051" y="2140833"/>
+            <a:ext cx="1090166" cy="646331"/>
+          </a:xfrm>
+          <a:prstGeom prst="rect">
+            <a:avLst/>
+          </a:prstGeom>
+          <a:noFill/>
+        </p:spPr>
+        <p:txBody>
+          <a:bodyPr wrap="square" rtlCol="0">
+            <a:spAutoFit/>
+          </a:bodyPr>
+          <a:lstStyle>
+            <a:defPPr>
+              <a:defRPr lang="en-US"/>
+            </a:defPPr>
+            <a:lvl1pPr marL="0" algn="l" defTabSz="457200" rtl="0" eaLnBrk="1" latinLnBrk="0" hangingPunct="1">
+              <a:defRPr sz="1800" kern="1200">
+                <a:solidFill>
+                  <a:schemeClr val="tx1"/>
+                </a:solidFill>
+                <a:latin typeface="+mn-lt"/>
+                <a:ea typeface="+mn-ea"/>
+                <a:cs typeface="+mn-cs"/>
+              </a:defRPr>
+            </a:lvl1pPr>
+            <a:lvl2pPr marL="457200" algn="l" defTabSz="457200" rtl="0" eaLnBrk="1" latinLnBrk="0" hangingPunct="1">
+              <a:defRPr sz="1800" kern="1200">
+                <a:solidFill>
+                  <a:schemeClr val="tx1"/>
+                </a:solidFill>
+                <a:latin typeface="+mn-lt"/>
+                <a:ea typeface="+mn-ea"/>
+                <a:cs typeface="+mn-cs"/>
+              </a:defRPr>
+            </a:lvl2pPr>
+            <a:lvl3pPr marL="914400" algn="l" defTabSz="457200" rtl="0" eaLnBrk="1" latinLnBrk="0" hangingPunct="1">
+              <a:defRPr sz="1800" kern="1200">
+                <a:solidFill>
+                  <a:schemeClr val="tx1"/>
+                </a:solidFill>
+                <a:latin typeface="+mn-lt"/>
+                <a:ea typeface="+mn-ea"/>
+                <a:cs typeface="+mn-cs"/>
+              </a:defRPr>
+            </a:lvl3pPr>
+            <a:lvl4pPr marL="1371600" algn="l" defTabSz="457200" rtl="0" eaLnBrk="1" latinLnBrk="0" hangingPunct="1">
+              <a:defRPr sz="1800" kern="1200">
+                <a:solidFill>
+                  <a:schemeClr val="tx1"/>
+                </a:solidFill>
+                <a:latin typeface="+mn-lt"/>
+                <a:ea typeface="+mn-ea"/>
+                <a:cs typeface="+mn-cs"/>
+              </a:defRPr>
+            </a:lvl4pPr>
+            <a:lvl5pPr marL="1828800" algn="l" defTabSz="457200" rtl="0" eaLnBrk="1" latinLnBrk="0" hangingPunct="1">
+              <a:defRPr sz="1800" kern="1200">
+                <a:solidFill>
+                  <a:schemeClr val="tx1"/>
+                </a:solidFill>
+                <a:latin typeface="+mn-lt"/>
+                <a:ea typeface="+mn-ea"/>
+                <a:cs typeface="+mn-cs"/>
+              </a:defRPr>
+            </a:lvl5pPr>
+            <a:lvl6pPr marL="2286000" algn="l" defTabSz="457200" rtl="0" eaLnBrk="1" latinLnBrk="0" hangingPunct="1">
+              <a:defRPr sz="1800" kern="1200">
+                <a:solidFill>
+                  <a:schemeClr val="tx1"/>
+                </a:solidFill>
+                <a:latin typeface="+mn-lt"/>
+                <a:ea typeface="+mn-ea"/>
+                <a:cs typeface="+mn-cs"/>
+              </a:defRPr>
+            </a:lvl6pPr>
+            <a:lvl7pPr marL="2743200" algn="l" defTabSz="457200" rtl="0" eaLnBrk="1" latinLnBrk="0" hangingPunct="1">
+              <a:defRPr sz="1800" kern="1200">
+                <a:solidFill>
+                  <a:schemeClr val="tx1"/>
+                </a:solidFill>
+                <a:latin typeface="+mn-lt"/>
+                <a:ea typeface="+mn-ea"/>
+                <a:cs typeface="+mn-cs"/>
+              </a:defRPr>
+            </a:lvl7pPr>
+            <a:lvl8pPr marL="3200400" algn="l" defTabSz="457200" rtl="0" eaLnBrk="1" latinLnBrk="0" hangingPunct="1">
+              <a:defRPr sz="1800" kern="1200">
+                <a:solidFill>
+                  <a:schemeClr val="tx1"/>
+                </a:solidFill>
+                <a:latin typeface="+mn-lt"/>
+                <a:ea typeface="+mn-ea"/>
+                <a:cs typeface="+mn-cs"/>
+              </a:defRPr>
+            </a:lvl8pPr>
+            <a:lvl9pPr marL="3657600" algn="l" defTabSz="457200" rtl="0" eaLnBrk="1" latinLnBrk="0" hangingPunct="1">
+              <a:defRPr sz="1800" kern="1200">
+                <a:solidFill>
+                  <a:schemeClr val="tx1"/>
+                </a:solidFill>
+                <a:latin typeface="+mn-lt"/>
+                <a:ea typeface="+mn-ea"/>
+                <a:cs typeface="+mn-cs"/>
+              </a:defRPr>
+            </a:lvl9pPr>
+          </a:lstStyle>
+          <a:p>
+            <a:r>
+              <a:rPr lang="en-US" sz="3600" b="1" dirty="0">
+                <a:latin typeface="Arial" panose="020B0604020202020204" pitchFamily="34" charset="0"/>
+                <a:ea typeface="Yu Gothic" panose="020B0400000000000000" pitchFamily="34" charset="-128"/>
+                <a:cs typeface="Arial" panose="020B0604020202020204" pitchFamily="34" charset="0"/>
+              </a:rPr>
+              <a:t>(d)</a:t>
+            </a:r>
+          </a:p>
+        </p:txBody>
+      </p:sp>
+      <p:sp>
+        <p:nvSpPr>
+          <p:cNvPr id="8" name="TextBox 7">
+            <a:extLst>
+              <a:ext uri="{FF2B5EF4-FFF2-40B4-BE49-F238E27FC236}">
+                <a16:creationId xmlns:a16="http://schemas.microsoft.com/office/drawing/2014/main" id="{F4F296B7-A555-E66D-5A23-03DE708F05A4}"/>
+              </a:ext>
+            </a:extLst>
+          </p:cNvPr>
+          <p:cNvSpPr txBox="1"/>
+          <p:nvPr/>
+        </p:nvSpPr>
+        <p:spPr>
+          <a:xfrm>
+            <a:off x="10671051" y="4541134"/>
+            <a:ext cx="1090166" cy="646331"/>
+          </a:xfrm>
+          <a:prstGeom prst="rect">
+            <a:avLst/>
+          </a:prstGeom>
+          <a:noFill/>
+        </p:spPr>
+        <p:txBody>
+          <a:bodyPr wrap="square" rtlCol="0">
+            <a:spAutoFit/>
+          </a:bodyPr>
+          <a:lstStyle>
+            <a:defPPr>
+              <a:defRPr lang="en-US"/>
+            </a:defPPr>
+            <a:lvl1pPr marL="0" algn="l" defTabSz="457200" rtl="0" eaLnBrk="1" latinLnBrk="0" hangingPunct="1">
+              <a:defRPr sz="1800" kern="1200">
+                <a:solidFill>
+                  <a:schemeClr val="tx1"/>
+                </a:solidFill>
+                <a:latin typeface="+mn-lt"/>
+                <a:ea typeface="+mn-ea"/>
+                <a:cs typeface="+mn-cs"/>
+              </a:defRPr>
+            </a:lvl1pPr>
+            <a:lvl2pPr marL="457200" algn="l" defTabSz="457200" rtl="0" eaLnBrk="1" latinLnBrk="0" hangingPunct="1">
+              <a:defRPr sz="1800" kern="1200">
+                <a:solidFill>
+                  <a:schemeClr val="tx1"/>
+                </a:solidFill>
+                <a:latin typeface="+mn-lt"/>
+                <a:ea typeface="+mn-ea"/>
+                <a:cs typeface="+mn-cs"/>
+              </a:defRPr>
+            </a:lvl2pPr>
+            <a:lvl3pPr marL="914400" algn="l" defTabSz="457200" rtl="0" eaLnBrk="1" latinLnBrk="0" hangingPunct="1">
+              <a:defRPr sz="1800" kern="1200">
+                <a:solidFill>
+                  <a:schemeClr val="tx1"/>
+                </a:solidFill>
+                <a:latin typeface="+mn-lt"/>
+                <a:ea typeface="+mn-ea"/>
+                <a:cs typeface="+mn-cs"/>
+              </a:defRPr>
+            </a:lvl3pPr>
+            <a:lvl4pPr marL="1371600" algn="l" defTabSz="457200" rtl="0" eaLnBrk="1" latinLnBrk="0" hangingPunct="1">
+              <a:defRPr sz="1800" kern="1200">
+                <a:solidFill>
+                  <a:schemeClr val="tx1"/>
+                </a:solidFill>
+                <a:latin typeface="+mn-lt"/>
+                <a:ea typeface="+mn-ea"/>
+                <a:cs typeface="+mn-cs"/>
+              </a:defRPr>
+            </a:lvl4pPr>
+            <a:lvl5pPr marL="1828800" algn="l" defTabSz="457200" rtl="0" eaLnBrk="1" latinLnBrk="0" hangingPunct="1">
+              <a:defRPr sz="1800" kern="1200">
+                <a:solidFill>
+                  <a:schemeClr val="tx1"/>
+                </a:solidFill>
+                <a:latin typeface="+mn-lt"/>
+                <a:ea typeface="+mn-ea"/>
+                <a:cs typeface="+mn-cs"/>
+              </a:defRPr>
+            </a:lvl5pPr>
+            <a:lvl6pPr marL="2286000" algn="l" defTabSz="457200" rtl="0" eaLnBrk="1" latinLnBrk="0" hangingPunct="1">
+              <a:defRPr sz="1800" kern="1200">
+                <a:solidFill>
+                  <a:schemeClr val="tx1"/>
+                </a:solidFill>
+                <a:latin typeface="+mn-lt"/>
+                <a:ea typeface="+mn-ea"/>
+                <a:cs typeface="+mn-cs"/>
+              </a:defRPr>
+            </a:lvl6pPr>
+            <a:lvl7pPr marL="2743200" algn="l" defTabSz="457200" rtl="0" eaLnBrk="1" latinLnBrk="0" hangingPunct="1">
+              <a:defRPr sz="1800" kern="1200">
+                <a:solidFill>
+                  <a:schemeClr val="tx1"/>
+                </a:solidFill>
+                <a:latin typeface="+mn-lt"/>
+                <a:ea typeface="+mn-ea"/>
+                <a:cs typeface="+mn-cs"/>
+              </a:defRPr>
+            </a:lvl7pPr>
+            <a:lvl8pPr marL="3200400" algn="l" defTabSz="457200" rtl="0" eaLnBrk="1" latinLnBrk="0" hangingPunct="1">
+              <a:defRPr sz="1800" kern="1200">
+                <a:solidFill>
+                  <a:schemeClr val="tx1"/>
+                </a:solidFill>
+                <a:latin typeface="+mn-lt"/>
+                <a:ea typeface="+mn-ea"/>
+                <a:cs typeface="+mn-cs"/>
+              </a:defRPr>
+            </a:lvl8pPr>
+            <a:lvl9pPr marL="3657600" algn="l" defTabSz="457200" rtl="0" eaLnBrk="1" latinLnBrk="0" hangingPunct="1">
+              <a:defRPr sz="1800" kern="1200">
+                <a:solidFill>
+                  <a:schemeClr val="tx1"/>
+                </a:solidFill>
+                <a:latin typeface="+mn-lt"/>
+                <a:ea typeface="+mn-ea"/>
+                <a:cs typeface="+mn-cs"/>
+              </a:defRPr>
+            </a:lvl9pPr>
+          </a:lstStyle>
+          <a:p>
+            <a:r>
+              <a:rPr lang="en-US" sz="3600" b="1" dirty="0">
+                <a:latin typeface="Arial" panose="020B0604020202020204" pitchFamily="34" charset="0"/>
+                <a:ea typeface="Yu Gothic" panose="020B0400000000000000" pitchFamily="34" charset="-128"/>
+                <a:cs typeface="Arial" panose="020B0604020202020204" pitchFamily="34" charset="0"/>
+              </a:rPr>
+              <a:t>(e)</a:t>
+            </a:r>
+          </a:p>
+        </p:txBody>
+      </p:sp>
+    </p:spTree>
+    <p:extLst>
+      <p:ext uri="{BB962C8B-B14F-4D97-AF65-F5344CB8AC3E}">
+        <p14:creationId xmlns:p14="http://schemas.microsoft.com/office/powerpoint/2010/main" val="2504765150"/>
       </p:ext>
     </p:extLst>
   </p:cSld>
@@ -17270,737 +13449,6 @@
       </p:grpSpPr>
       <p:pic>
         <p:nvPicPr>
-          <p:cNvPr id="10" name="Picture 9">
-            <a:extLst>
-              <a:ext uri="{FF2B5EF4-FFF2-40B4-BE49-F238E27FC236}">
-                <a16:creationId xmlns:a16="http://schemas.microsoft.com/office/drawing/2014/main" id="{D670D136-D4B1-2F03-CA3A-B0F61CBF5C84}"/>
-              </a:ext>
-            </a:extLst>
-          </p:cNvPr>
-          <p:cNvPicPr>
-            <a:picLocks noChangeAspect="1"/>
-          </p:cNvPicPr>
-          <p:nvPr/>
-        </p:nvPicPr>
-        <p:blipFill>
-          <a:blip r:embed="rId2">
-            <a:extLst>
-              <a:ext uri="{28A0092B-C50C-407E-A947-70E740481C1C}">
-                <a14:useLocalDpi xmlns:a14="http://schemas.microsoft.com/office/drawing/2010/main" val="0"/>
-              </a:ext>
-            </a:extLst>
-          </a:blip>
-          <a:stretch>
-            <a:fillRect/>
-          </a:stretch>
-        </p:blipFill>
-        <p:spPr>
-          <a:xfrm>
-            <a:off x="5598090" y="2315001"/>
-            <a:ext cx="11431595" cy="7621064"/>
-          </a:xfrm>
-          <a:prstGeom prst="rect">
-            <a:avLst/>
-          </a:prstGeom>
-        </p:spPr>
-      </p:pic>
-      <p:sp>
-        <p:nvSpPr>
-          <p:cNvPr id="4" name="TextBox 3">
-            <a:extLst>
-              <a:ext uri="{FF2B5EF4-FFF2-40B4-BE49-F238E27FC236}">
-                <a16:creationId xmlns:a16="http://schemas.microsoft.com/office/drawing/2014/main" id="{938C211B-7F27-04D0-AEF3-A99829D8F0B0}"/>
-              </a:ext>
-            </a:extLst>
-          </p:cNvPr>
-          <p:cNvSpPr txBox="1"/>
-          <p:nvPr/>
-        </p:nvSpPr>
-        <p:spPr>
-          <a:xfrm>
-            <a:off x="5756151" y="2140834"/>
-            <a:ext cx="1090166" cy="646331"/>
-          </a:xfrm>
-          <a:prstGeom prst="rect">
-            <a:avLst/>
-          </a:prstGeom>
-          <a:noFill/>
-        </p:spPr>
-        <p:txBody>
-          <a:bodyPr wrap="square" rtlCol="0">
-            <a:spAutoFit/>
-          </a:bodyPr>
-          <a:lstStyle>
-            <a:defPPr>
-              <a:defRPr lang="en-US"/>
-            </a:defPPr>
-            <a:lvl1pPr marL="0" algn="l" defTabSz="457200" rtl="0" eaLnBrk="1" latinLnBrk="0" hangingPunct="1">
-              <a:defRPr sz="1800" kern="1200">
-                <a:solidFill>
-                  <a:schemeClr val="tx1"/>
-                </a:solidFill>
-                <a:latin typeface="+mn-lt"/>
-                <a:ea typeface="+mn-ea"/>
-                <a:cs typeface="+mn-cs"/>
-              </a:defRPr>
-            </a:lvl1pPr>
-            <a:lvl2pPr marL="457200" algn="l" defTabSz="457200" rtl="0" eaLnBrk="1" latinLnBrk="0" hangingPunct="1">
-              <a:defRPr sz="1800" kern="1200">
-                <a:solidFill>
-                  <a:schemeClr val="tx1"/>
-                </a:solidFill>
-                <a:latin typeface="+mn-lt"/>
-                <a:ea typeface="+mn-ea"/>
-                <a:cs typeface="+mn-cs"/>
-              </a:defRPr>
-            </a:lvl2pPr>
-            <a:lvl3pPr marL="914400" algn="l" defTabSz="457200" rtl="0" eaLnBrk="1" latinLnBrk="0" hangingPunct="1">
-              <a:defRPr sz="1800" kern="1200">
-                <a:solidFill>
-                  <a:schemeClr val="tx1"/>
-                </a:solidFill>
-                <a:latin typeface="+mn-lt"/>
-                <a:ea typeface="+mn-ea"/>
-                <a:cs typeface="+mn-cs"/>
-              </a:defRPr>
-            </a:lvl3pPr>
-            <a:lvl4pPr marL="1371600" algn="l" defTabSz="457200" rtl="0" eaLnBrk="1" latinLnBrk="0" hangingPunct="1">
-              <a:defRPr sz="1800" kern="1200">
-                <a:solidFill>
-                  <a:schemeClr val="tx1"/>
-                </a:solidFill>
-                <a:latin typeface="+mn-lt"/>
-                <a:ea typeface="+mn-ea"/>
-                <a:cs typeface="+mn-cs"/>
-              </a:defRPr>
-            </a:lvl4pPr>
-            <a:lvl5pPr marL="1828800" algn="l" defTabSz="457200" rtl="0" eaLnBrk="1" latinLnBrk="0" hangingPunct="1">
-              <a:defRPr sz="1800" kern="1200">
-                <a:solidFill>
-                  <a:schemeClr val="tx1"/>
-                </a:solidFill>
-                <a:latin typeface="+mn-lt"/>
-                <a:ea typeface="+mn-ea"/>
-                <a:cs typeface="+mn-cs"/>
-              </a:defRPr>
-            </a:lvl5pPr>
-            <a:lvl6pPr marL="2286000" algn="l" defTabSz="457200" rtl="0" eaLnBrk="1" latinLnBrk="0" hangingPunct="1">
-              <a:defRPr sz="1800" kern="1200">
-                <a:solidFill>
-                  <a:schemeClr val="tx1"/>
-                </a:solidFill>
-                <a:latin typeface="+mn-lt"/>
-                <a:ea typeface="+mn-ea"/>
-                <a:cs typeface="+mn-cs"/>
-              </a:defRPr>
-            </a:lvl6pPr>
-            <a:lvl7pPr marL="2743200" algn="l" defTabSz="457200" rtl="0" eaLnBrk="1" latinLnBrk="0" hangingPunct="1">
-              <a:defRPr sz="1800" kern="1200">
-                <a:solidFill>
-                  <a:schemeClr val="tx1"/>
-                </a:solidFill>
-                <a:latin typeface="+mn-lt"/>
-                <a:ea typeface="+mn-ea"/>
-                <a:cs typeface="+mn-cs"/>
-              </a:defRPr>
-            </a:lvl7pPr>
-            <a:lvl8pPr marL="3200400" algn="l" defTabSz="457200" rtl="0" eaLnBrk="1" latinLnBrk="0" hangingPunct="1">
-              <a:defRPr sz="1800" kern="1200">
-                <a:solidFill>
-                  <a:schemeClr val="tx1"/>
-                </a:solidFill>
-                <a:latin typeface="+mn-lt"/>
-                <a:ea typeface="+mn-ea"/>
-                <a:cs typeface="+mn-cs"/>
-              </a:defRPr>
-            </a:lvl8pPr>
-            <a:lvl9pPr marL="3657600" algn="l" defTabSz="457200" rtl="0" eaLnBrk="1" latinLnBrk="0" hangingPunct="1">
-              <a:defRPr sz="1800" kern="1200">
-                <a:solidFill>
-                  <a:schemeClr val="tx1"/>
-                </a:solidFill>
-                <a:latin typeface="+mn-lt"/>
-                <a:ea typeface="+mn-ea"/>
-                <a:cs typeface="+mn-cs"/>
-              </a:defRPr>
-            </a:lvl9pPr>
-          </a:lstStyle>
-          <a:p>
-            <a:r>
-              <a:rPr lang="en-US" sz="3600" b="1" dirty="0">
-                <a:latin typeface="Arial" panose="020B0604020202020204" pitchFamily="34" charset="0"/>
-                <a:ea typeface="Yu Gothic" panose="020B0400000000000000" pitchFamily="34" charset="-128"/>
-                <a:cs typeface="Arial" panose="020B0604020202020204" pitchFamily="34" charset="0"/>
-              </a:rPr>
-              <a:t>(a)</a:t>
-            </a:r>
-          </a:p>
-        </p:txBody>
-      </p:sp>
-      <p:sp>
-        <p:nvSpPr>
-          <p:cNvPr id="5" name="TextBox 4">
-            <a:extLst>
-              <a:ext uri="{FF2B5EF4-FFF2-40B4-BE49-F238E27FC236}">
-                <a16:creationId xmlns:a16="http://schemas.microsoft.com/office/drawing/2014/main" id="{9344E134-DB25-1435-1F80-AE9EC97A1CAD}"/>
-              </a:ext>
-            </a:extLst>
-          </p:cNvPr>
-          <p:cNvSpPr txBox="1"/>
-          <p:nvPr/>
-        </p:nvSpPr>
-        <p:spPr>
-          <a:xfrm>
-            <a:off x="5756151" y="4541134"/>
-            <a:ext cx="1090166" cy="646331"/>
-          </a:xfrm>
-          <a:prstGeom prst="rect">
-            <a:avLst/>
-          </a:prstGeom>
-          <a:noFill/>
-        </p:spPr>
-        <p:txBody>
-          <a:bodyPr wrap="square" rtlCol="0">
-            <a:spAutoFit/>
-          </a:bodyPr>
-          <a:lstStyle>
-            <a:defPPr>
-              <a:defRPr lang="en-US"/>
-            </a:defPPr>
-            <a:lvl1pPr marL="0" algn="l" defTabSz="457200" rtl="0" eaLnBrk="1" latinLnBrk="0" hangingPunct="1">
-              <a:defRPr sz="1800" kern="1200">
-                <a:solidFill>
-                  <a:schemeClr val="tx1"/>
-                </a:solidFill>
-                <a:latin typeface="+mn-lt"/>
-                <a:ea typeface="+mn-ea"/>
-                <a:cs typeface="+mn-cs"/>
-              </a:defRPr>
-            </a:lvl1pPr>
-            <a:lvl2pPr marL="457200" algn="l" defTabSz="457200" rtl="0" eaLnBrk="1" latinLnBrk="0" hangingPunct="1">
-              <a:defRPr sz="1800" kern="1200">
-                <a:solidFill>
-                  <a:schemeClr val="tx1"/>
-                </a:solidFill>
-                <a:latin typeface="+mn-lt"/>
-                <a:ea typeface="+mn-ea"/>
-                <a:cs typeface="+mn-cs"/>
-              </a:defRPr>
-            </a:lvl2pPr>
-            <a:lvl3pPr marL="914400" algn="l" defTabSz="457200" rtl="0" eaLnBrk="1" latinLnBrk="0" hangingPunct="1">
-              <a:defRPr sz="1800" kern="1200">
-                <a:solidFill>
-                  <a:schemeClr val="tx1"/>
-                </a:solidFill>
-                <a:latin typeface="+mn-lt"/>
-                <a:ea typeface="+mn-ea"/>
-                <a:cs typeface="+mn-cs"/>
-              </a:defRPr>
-            </a:lvl3pPr>
-            <a:lvl4pPr marL="1371600" algn="l" defTabSz="457200" rtl="0" eaLnBrk="1" latinLnBrk="0" hangingPunct="1">
-              <a:defRPr sz="1800" kern="1200">
-                <a:solidFill>
-                  <a:schemeClr val="tx1"/>
-                </a:solidFill>
-                <a:latin typeface="+mn-lt"/>
-                <a:ea typeface="+mn-ea"/>
-                <a:cs typeface="+mn-cs"/>
-              </a:defRPr>
-            </a:lvl4pPr>
-            <a:lvl5pPr marL="1828800" algn="l" defTabSz="457200" rtl="0" eaLnBrk="1" latinLnBrk="0" hangingPunct="1">
-              <a:defRPr sz="1800" kern="1200">
-                <a:solidFill>
-                  <a:schemeClr val="tx1"/>
-                </a:solidFill>
-                <a:latin typeface="+mn-lt"/>
-                <a:ea typeface="+mn-ea"/>
-                <a:cs typeface="+mn-cs"/>
-              </a:defRPr>
-            </a:lvl5pPr>
-            <a:lvl6pPr marL="2286000" algn="l" defTabSz="457200" rtl="0" eaLnBrk="1" latinLnBrk="0" hangingPunct="1">
-              <a:defRPr sz="1800" kern="1200">
-                <a:solidFill>
-                  <a:schemeClr val="tx1"/>
-                </a:solidFill>
-                <a:latin typeface="+mn-lt"/>
-                <a:ea typeface="+mn-ea"/>
-                <a:cs typeface="+mn-cs"/>
-              </a:defRPr>
-            </a:lvl6pPr>
-            <a:lvl7pPr marL="2743200" algn="l" defTabSz="457200" rtl="0" eaLnBrk="1" latinLnBrk="0" hangingPunct="1">
-              <a:defRPr sz="1800" kern="1200">
-                <a:solidFill>
-                  <a:schemeClr val="tx1"/>
-                </a:solidFill>
-                <a:latin typeface="+mn-lt"/>
-                <a:ea typeface="+mn-ea"/>
-                <a:cs typeface="+mn-cs"/>
-              </a:defRPr>
-            </a:lvl7pPr>
-            <a:lvl8pPr marL="3200400" algn="l" defTabSz="457200" rtl="0" eaLnBrk="1" latinLnBrk="0" hangingPunct="1">
-              <a:defRPr sz="1800" kern="1200">
-                <a:solidFill>
-                  <a:schemeClr val="tx1"/>
-                </a:solidFill>
-                <a:latin typeface="+mn-lt"/>
-                <a:ea typeface="+mn-ea"/>
-                <a:cs typeface="+mn-cs"/>
-              </a:defRPr>
-            </a:lvl8pPr>
-            <a:lvl9pPr marL="3657600" algn="l" defTabSz="457200" rtl="0" eaLnBrk="1" latinLnBrk="0" hangingPunct="1">
-              <a:defRPr sz="1800" kern="1200">
-                <a:solidFill>
-                  <a:schemeClr val="tx1"/>
-                </a:solidFill>
-                <a:latin typeface="+mn-lt"/>
-                <a:ea typeface="+mn-ea"/>
-                <a:cs typeface="+mn-cs"/>
-              </a:defRPr>
-            </a:lvl9pPr>
-          </a:lstStyle>
-          <a:p>
-            <a:r>
-              <a:rPr lang="en-US" sz="3600" b="1" dirty="0">
-                <a:latin typeface="Arial" panose="020B0604020202020204" pitchFamily="34" charset="0"/>
-                <a:ea typeface="Yu Gothic" panose="020B0400000000000000" pitchFamily="34" charset="-128"/>
-                <a:cs typeface="Arial" panose="020B0604020202020204" pitchFamily="34" charset="0"/>
-              </a:rPr>
-              <a:t>(b)</a:t>
-            </a:r>
-          </a:p>
-        </p:txBody>
-      </p:sp>
-      <p:sp>
-        <p:nvSpPr>
-          <p:cNvPr id="6" name="TextBox 5">
-            <a:extLst>
-              <a:ext uri="{FF2B5EF4-FFF2-40B4-BE49-F238E27FC236}">
-                <a16:creationId xmlns:a16="http://schemas.microsoft.com/office/drawing/2014/main" id="{D100421F-DBCB-1115-3C97-63A846250854}"/>
-              </a:ext>
-            </a:extLst>
-          </p:cNvPr>
-          <p:cNvSpPr txBox="1"/>
-          <p:nvPr/>
-        </p:nvSpPr>
-        <p:spPr>
-          <a:xfrm>
-            <a:off x="5756151" y="7199141"/>
-            <a:ext cx="1090166" cy="646331"/>
-          </a:xfrm>
-          <a:prstGeom prst="rect">
-            <a:avLst/>
-          </a:prstGeom>
-          <a:noFill/>
-        </p:spPr>
-        <p:txBody>
-          <a:bodyPr wrap="square" rtlCol="0">
-            <a:spAutoFit/>
-          </a:bodyPr>
-          <a:lstStyle>
-            <a:defPPr>
-              <a:defRPr lang="en-US"/>
-            </a:defPPr>
-            <a:lvl1pPr marL="0" algn="l" defTabSz="457200" rtl="0" eaLnBrk="1" latinLnBrk="0" hangingPunct="1">
-              <a:defRPr sz="1800" kern="1200">
-                <a:solidFill>
-                  <a:schemeClr val="tx1"/>
-                </a:solidFill>
-                <a:latin typeface="+mn-lt"/>
-                <a:ea typeface="+mn-ea"/>
-                <a:cs typeface="+mn-cs"/>
-              </a:defRPr>
-            </a:lvl1pPr>
-            <a:lvl2pPr marL="457200" algn="l" defTabSz="457200" rtl="0" eaLnBrk="1" latinLnBrk="0" hangingPunct="1">
-              <a:defRPr sz="1800" kern="1200">
-                <a:solidFill>
-                  <a:schemeClr val="tx1"/>
-                </a:solidFill>
-                <a:latin typeface="+mn-lt"/>
-                <a:ea typeface="+mn-ea"/>
-                <a:cs typeface="+mn-cs"/>
-              </a:defRPr>
-            </a:lvl2pPr>
-            <a:lvl3pPr marL="914400" algn="l" defTabSz="457200" rtl="0" eaLnBrk="1" latinLnBrk="0" hangingPunct="1">
-              <a:defRPr sz="1800" kern="1200">
-                <a:solidFill>
-                  <a:schemeClr val="tx1"/>
-                </a:solidFill>
-                <a:latin typeface="+mn-lt"/>
-                <a:ea typeface="+mn-ea"/>
-                <a:cs typeface="+mn-cs"/>
-              </a:defRPr>
-            </a:lvl3pPr>
-            <a:lvl4pPr marL="1371600" algn="l" defTabSz="457200" rtl="0" eaLnBrk="1" latinLnBrk="0" hangingPunct="1">
-              <a:defRPr sz="1800" kern="1200">
-                <a:solidFill>
-                  <a:schemeClr val="tx1"/>
-                </a:solidFill>
-                <a:latin typeface="+mn-lt"/>
-                <a:ea typeface="+mn-ea"/>
-                <a:cs typeface="+mn-cs"/>
-              </a:defRPr>
-            </a:lvl4pPr>
-            <a:lvl5pPr marL="1828800" algn="l" defTabSz="457200" rtl="0" eaLnBrk="1" latinLnBrk="0" hangingPunct="1">
-              <a:defRPr sz="1800" kern="1200">
-                <a:solidFill>
-                  <a:schemeClr val="tx1"/>
-                </a:solidFill>
-                <a:latin typeface="+mn-lt"/>
-                <a:ea typeface="+mn-ea"/>
-                <a:cs typeface="+mn-cs"/>
-              </a:defRPr>
-            </a:lvl5pPr>
-            <a:lvl6pPr marL="2286000" algn="l" defTabSz="457200" rtl="0" eaLnBrk="1" latinLnBrk="0" hangingPunct="1">
-              <a:defRPr sz="1800" kern="1200">
-                <a:solidFill>
-                  <a:schemeClr val="tx1"/>
-                </a:solidFill>
-                <a:latin typeface="+mn-lt"/>
-                <a:ea typeface="+mn-ea"/>
-                <a:cs typeface="+mn-cs"/>
-              </a:defRPr>
-            </a:lvl6pPr>
-            <a:lvl7pPr marL="2743200" algn="l" defTabSz="457200" rtl="0" eaLnBrk="1" latinLnBrk="0" hangingPunct="1">
-              <a:defRPr sz="1800" kern="1200">
-                <a:solidFill>
-                  <a:schemeClr val="tx1"/>
-                </a:solidFill>
-                <a:latin typeface="+mn-lt"/>
-                <a:ea typeface="+mn-ea"/>
-                <a:cs typeface="+mn-cs"/>
-              </a:defRPr>
-            </a:lvl7pPr>
-            <a:lvl8pPr marL="3200400" algn="l" defTabSz="457200" rtl="0" eaLnBrk="1" latinLnBrk="0" hangingPunct="1">
-              <a:defRPr sz="1800" kern="1200">
-                <a:solidFill>
-                  <a:schemeClr val="tx1"/>
-                </a:solidFill>
-                <a:latin typeface="+mn-lt"/>
-                <a:ea typeface="+mn-ea"/>
-                <a:cs typeface="+mn-cs"/>
-              </a:defRPr>
-            </a:lvl8pPr>
-            <a:lvl9pPr marL="3657600" algn="l" defTabSz="457200" rtl="0" eaLnBrk="1" latinLnBrk="0" hangingPunct="1">
-              <a:defRPr sz="1800" kern="1200">
-                <a:solidFill>
-                  <a:schemeClr val="tx1"/>
-                </a:solidFill>
-                <a:latin typeface="+mn-lt"/>
-                <a:ea typeface="+mn-ea"/>
-                <a:cs typeface="+mn-cs"/>
-              </a:defRPr>
-            </a:lvl9pPr>
-          </a:lstStyle>
-          <a:p>
-            <a:r>
-              <a:rPr lang="en-US" sz="3600" b="1" dirty="0">
-                <a:latin typeface="Arial" panose="020B0604020202020204" pitchFamily="34" charset="0"/>
-                <a:ea typeface="Yu Gothic" panose="020B0400000000000000" pitchFamily="34" charset="-128"/>
-                <a:cs typeface="Arial" panose="020B0604020202020204" pitchFamily="34" charset="0"/>
-              </a:rPr>
-              <a:t>(c)</a:t>
-            </a:r>
-          </a:p>
-        </p:txBody>
-      </p:sp>
-      <p:sp>
-        <p:nvSpPr>
-          <p:cNvPr id="7" name="TextBox 6">
-            <a:extLst>
-              <a:ext uri="{FF2B5EF4-FFF2-40B4-BE49-F238E27FC236}">
-                <a16:creationId xmlns:a16="http://schemas.microsoft.com/office/drawing/2014/main" id="{5DC75018-13AE-91AF-ADF2-52005CAF8B08}"/>
-              </a:ext>
-            </a:extLst>
-          </p:cNvPr>
-          <p:cNvSpPr txBox="1"/>
-          <p:nvPr/>
-        </p:nvSpPr>
-        <p:spPr>
-          <a:xfrm>
-            <a:off x="10671051" y="2140833"/>
-            <a:ext cx="1090166" cy="646331"/>
-          </a:xfrm>
-          <a:prstGeom prst="rect">
-            <a:avLst/>
-          </a:prstGeom>
-          <a:noFill/>
-        </p:spPr>
-        <p:txBody>
-          <a:bodyPr wrap="square" rtlCol="0">
-            <a:spAutoFit/>
-          </a:bodyPr>
-          <a:lstStyle>
-            <a:defPPr>
-              <a:defRPr lang="en-US"/>
-            </a:defPPr>
-            <a:lvl1pPr marL="0" algn="l" defTabSz="457200" rtl="0" eaLnBrk="1" latinLnBrk="0" hangingPunct="1">
-              <a:defRPr sz="1800" kern="1200">
-                <a:solidFill>
-                  <a:schemeClr val="tx1"/>
-                </a:solidFill>
-                <a:latin typeface="+mn-lt"/>
-                <a:ea typeface="+mn-ea"/>
-                <a:cs typeface="+mn-cs"/>
-              </a:defRPr>
-            </a:lvl1pPr>
-            <a:lvl2pPr marL="457200" algn="l" defTabSz="457200" rtl="0" eaLnBrk="1" latinLnBrk="0" hangingPunct="1">
-              <a:defRPr sz="1800" kern="1200">
-                <a:solidFill>
-                  <a:schemeClr val="tx1"/>
-                </a:solidFill>
-                <a:latin typeface="+mn-lt"/>
-                <a:ea typeface="+mn-ea"/>
-                <a:cs typeface="+mn-cs"/>
-              </a:defRPr>
-            </a:lvl2pPr>
-            <a:lvl3pPr marL="914400" algn="l" defTabSz="457200" rtl="0" eaLnBrk="1" latinLnBrk="0" hangingPunct="1">
-              <a:defRPr sz="1800" kern="1200">
-                <a:solidFill>
-                  <a:schemeClr val="tx1"/>
-                </a:solidFill>
-                <a:latin typeface="+mn-lt"/>
-                <a:ea typeface="+mn-ea"/>
-                <a:cs typeface="+mn-cs"/>
-              </a:defRPr>
-            </a:lvl3pPr>
-            <a:lvl4pPr marL="1371600" algn="l" defTabSz="457200" rtl="0" eaLnBrk="1" latinLnBrk="0" hangingPunct="1">
-              <a:defRPr sz="1800" kern="1200">
-                <a:solidFill>
-                  <a:schemeClr val="tx1"/>
-                </a:solidFill>
-                <a:latin typeface="+mn-lt"/>
-                <a:ea typeface="+mn-ea"/>
-                <a:cs typeface="+mn-cs"/>
-              </a:defRPr>
-            </a:lvl4pPr>
-            <a:lvl5pPr marL="1828800" algn="l" defTabSz="457200" rtl="0" eaLnBrk="1" latinLnBrk="0" hangingPunct="1">
-              <a:defRPr sz="1800" kern="1200">
-                <a:solidFill>
-                  <a:schemeClr val="tx1"/>
-                </a:solidFill>
-                <a:latin typeface="+mn-lt"/>
-                <a:ea typeface="+mn-ea"/>
-                <a:cs typeface="+mn-cs"/>
-              </a:defRPr>
-            </a:lvl5pPr>
-            <a:lvl6pPr marL="2286000" algn="l" defTabSz="457200" rtl="0" eaLnBrk="1" latinLnBrk="0" hangingPunct="1">
-              <a:defRPr sz="1800" kern="1200">
-                <a:solidFill>
-                  <a:schemeClr val="tx1"/>
-                </a:solidFill>
-                <a:latin typeface="+mn-lt"/>
-                <a:ea typeface="+mn-ea"/>
-                <a:cs typeface="+mn-cs"/>
-              </a:defRPr>
-            </a:lvl6pPr>
-            <a:lvl7pPr marL="2743200" algn="l" defTabSz="457200" rtl="0" eaLnBrk="1" latinLnBrk="0" hangingPunct="1">
-              <a:defRPr sz="1800" kern="1200">
-                <a:solidFill>
-                  <a:schemeClr val="tx1"/>
-                </a:solidFill>
-                <a:latin typeface="+mn-lt"/>
-                <a:ea typeface="+mn-ea"/>
-                <a:cs typeface="+mn-cs"/>
-              </a:defRPr>
-            </a:lvl7pPr>
-            <a:lvl8pPr marL="3200400" algn="l" defTabSz="457200" rtl="0" eaLnBrk="1" latinLnBrk="0" hangingPunct="1">
-              <a:defRPr sz="1800" kern="1200">
-                <a:solidFill>
-                  <a:schemeClr val="tx1"/>
-                </a:solidFill>
-                <a:latin typeface="+mn-lt"/>
-                <a:ea typeface="+mn-ea"/>
-                <a:cs typeface="+mn-cs"/>
-              </a:defRPr>
-            </a:lvl8pPr>
-            <a:lvl9pPr marL="3657600" algn="l" defTabSz="457200" rtl="0" eaLnBrk="1" latinLnBrk="0" hangingPunct="1">
-              <a:defRPr sz="1800" kern="1200">
-                <a:solidFill>
-                  <a:schemeClr val="tx1"/>
-                </a:solidFill>
-                <a:latin typeface="+mn-lt"/>
-                <a:ea typeface="+mn-ea"/>
-                <a:cs typeface="+mn-cs"/>
-              </a:defRPr>
-            </a:lvl9pPr>
-          </a:lstStyle>
-          <a:p>
-            <a:r>
-              <a:rPr lang="en-US" sz="3600" b="1" dirty="0">
-                <a:latin typeface="Arial" panose="020B0604020202020204" pitchFamily="34" charset="0"/>
-                <a:ea typeface="Yu Gothic" panose="020B0400000000000000" pitchFamily="34" charset="-128"/>
-                <a:cs typeface="Arial" panose="020B0604020202020204" pitchFamily="34" charset="0"/>
-              </a:rPr>
-              <a:t>(d)</a:t>
-            </a:r>
-          </a:p>
-        </p:txBody>
-      </p:sp>
-      <p:sp>
-        <p:nvSpPr>
-          <p:cNvPr id="8" name="TextBox 7">
-            <a:extLst>
-              <a:ext uri="{FF2B5EF4-FFF2-40B4-BE49-F238E27FC236}">
-                <a16:creationId xmlns:a16="http://schemas.microsoft.com/office/drawing/2014/main" id="{F4F296B7-A555-E66D-5A23-03DE708F05A4}"/>
-              </a:ext>
-            </a:extLst>
-          </p:cNvPr>
-          <p:cNvSpPr txBox="1"/>
-          <p:nvPr/>
-        </p:nvSpPr>
-        <p:spPr>
-          <a:xfrm>
-            <a:off x="10671051" y="4541134"/>
-            <a:ext cx="1090166" cy="646331"/>
-          </a:xfrm>
-          <a:prstGeom prst="rect">
-            <a:avLst/>
-          </a:prstGeom>
-          <a:noFill/>
-        </p:spPr>
-        <p:txBody>
-          <a:bodyPr wrap="square" rtlCol="0">
-            <a:spAutoFit/>
-          </a:bodyPr>
-          <a:lstStyle>
-            <a:defPPr>
-              <a:defRPr lang="en-US"/>
-            </a:defPPr>
-            <a:lvl1pPr marL="0" algn="l" defTabSz="457200" rtl="0" eaLnBrk="1" latinLnBrk="0" hangingPunct="1">
-              <a:defRPr sz="1800" kern="1200">
-                <a:solidFill>
-                  <a:schemeClr val="tx1"/>
-                </a:solidFill>
-                <a:latin typeface="+mn-lt"/>
-                <a:ea typeface="+mn-ea"/>
-                <a:cs typeface="+mn-cs"/>
-              </a:defRPr>
-            </a:lvl1pPr>
-            <a:lvl2pPr marL="457200" algn="l" defTabSz="457200" rtl="0" eaLnBrk="1" latinLnBrk="0" hangingPunct="1">
-              <a:defRPr sz="1800" kern="1200">
-                <a:solidFill>
-                  <a:schemeClr val="tx1"/>
-                </a:solidFill>
-                <a:latin typeface="+mn-lt"/>
-                <a:ea typeface="+mn-ea"/>
-                <a:cs typeface="+mn-cs"/>
-              </a:defRPr>
-            </a:lvl2pPr>
-            <a:lvl3pPr marL="914400" algn="l" defTabSz="457200" rtl="0" eaLnBrk="1" latinLnBrk="0" hangingPunct="1">
-              <a:defRPr sz="1800" kern="1200">
-                <a:solidFill>
-                  <a:schemeClr val="tx1"/>
-                </a:solidFill>
-                <a:latin typeface="+mn-lt"/>
-                <a:ea typeface="+mn-ea"/>
-                <a:cs typeface="+mn-cs"/>
-              </a:defRPr>
-            </a:lvl3pPr>
-            <a:lvl4pPr marL="1371600" algn="l" defTabSz="457200" rtl="0" eaLnBrk="1" latinLnBrk="0" hangingPunct="1">
-              <a:defRPr sz="1800" kern="1200">
-                <a:solidFill>
-                  <a:schemeClr val="tx1"/>
-                </a:solidFill>
-                <a:latin typeface="+mn-lt"/>
-                <a:ea typeface="+mn-ea"/>
-                <a:cs typeface="+mn-cs"/>
-              </a:defRPr>
-            </a:lvl4pPr>
-            <a:lvl5pPr marL="1828800" algn="l" defTabSz="457200" rtl="0" eaLnBrk="1" latinLnBrk="0" hangingPunct="1">
-              <a:defRPr sz="1800" kern="1200">
-                <a:solidFill>
-                  <a:schemeClr val="tx1"/>
-                </a:solidFill>
-                <a:latin typeface="+mn-lt"/>
-                <a:ea typeface="+mn-ea"/>
-                <a:cs typeface="+mn-cs"/>
-              </a:defRPr>
-            </a:lvl5pPr>
-            <a:lvl6pPr marL="2286000" algn="l" defTabSz="457200" rtl="0" eaLnBrk="1" latinLnBrk="0" hangingPunct="1">
-              <a:defRPr sz="1800" kern="1200">
-                <a:solidFill>
-                  <a:schemeClr val="tx1"/>
-                </a:solidFill>
-                <a:latin typeface="+mn-lt"/>
-                <a:ea typeface="+mn-ea"/>
-                <a:cs typeface="+mn-cs"/>
-              </a:defRPr>
-            </a:lvl6pPr>
-            <a:lvl7pPr marL="2743200" algn="l" defTabSz="457200" rtl="0" eaLnBrk="1" latinLnBrk="0" hangingPunct="1">
-              <a:defRPr sz="1800" kern="1200">
-                <a:solidFill>
-                  <a:schemeClr val="tx1"/>
-                </a:solidFill>
-                <a:latin typeface="+mn-lt"/>
-                <a:ea typeface="+mn-ea"/>
-                <a:cs typeface="+mn-cs"/>
-              </a:defRPr>
-            </a:lvl7pPr>
-            <a:lvl8pPr marL="3200400" algn="l" defTabSz="457200" rtl="0" eaLnBrk="1" latinLnBrk="0" hangingPunct="1">
-              <a:defRPr sz="1800" kern="1200">
-                <a:solidFill>
-                  <a:schemeClr val="tx1"/>
-                </a:solidFill>
-                <a:latin typeface="+mn-lt"/>
-                <a:ea typeface="+mn-ea"/>
-                <a:cs typeface="+mn-cs"/>
-              </a:defRPr>
-            </a:lvl8pPr>
-            <a:lvl9pPr marL="3657600" algn="l" defTabSz="457200" rtl="0" eaLnBrk="1" latinLnBrk="0" hangingPunct="1">
-              <a:defRPr sz="1800" kern="1200">
-                <a:solidFill>
-                  <a:schemeClr val="tx1"/>
-                </a:solidFill>
-                <a:latin typeface="+mn-lt"/>
-                <a:ea typeface="+mn-ea"/>
-                <a:cs typeface="+mn-cs"/>
-              </a:defRPr>
-            </a:lvl9pPr>
-          </a:lstStyle>
-          <a:p>
-            <a:r>
-              <a:rPr lang="en-US" sz="3600" b="1" dirty="0">
-                <a:latin typeface="Arial" panose="020B0604020202020204" pitchFamily="34" charset="0"/>
-                <a:ea typeface="Yu Gothic" panose="020B0400000000000000" pitchFamily="34" charset="-128"/>
-                <a:cs typeface="Arial" panose="020B0604020202020204" pitchFamily="34" charset="0"/>
-              </a:rPr>
-              <a:t>(e)</a:t>
-            </a:r>
-          </a:p>
-        </p:txBody>
-      </p:sp>
-    </p:spTree>
-    <p:extLst>
-      <p:ext uri="{BB962C8B-B14F-4D97-AF65-F5344CB8AC3E}">
-        <p14:creationId xmlns:p14="http://schemas.microsoft.com/office/powerpoint/2010/main" val="2504765150"/>
-      </p:ext>
-    </p:extLst>
-  </p:cSld>
-  <p:clrMapOvr>
-    <a:masterClrMapping/>
-  </p:clrMapOvr>
-</p:sld>
-</file>
-
-<file path=ppt/slides/slide16.xml><?xml version="1.0" encoding="utf-8"?>
-<p:sld xmlns:a="http://schemas.openxmlformats.org/drawingml/2006/main" xmlns:r="http://schemas.openxmlformats.org/officeDocument/2006/relationships" xmlns:p="http://schemas.openxmlformats.org/presentationml/2006/main">
-  <p:cSld>
-    <p:spTree>
-      <p:nvGrpSpPr>
-        <p:cNvPr id="1" name=""/>
-        <p:cNvGrpSpPr/>
-        <p:nvPr/>
-      </p:nvGrpSpPr>
-      <p:grpSpPr>
-        <a:xfrm>
-          <a:off x="0" y="0"/>
-          <a:ext cx="0" cy="0"/>
-          <a:chOff x="0" y="0"/>
-          <a:chExt cx="0" cy="0"/>
-        </a:xfrm>
-      </p:grpSpPr>
-      <p:pic>
-        <p:nvPicPr>
           <p:cNvPr id="5" name="Picture 4">
             <a:extLst>
               <a:ext uri="{FF2B5EF4-FFF2-40B4-BE49-F238E27FC236}">
@@ -19112,7 +14560,7 @@
 </p:sld>
 </file>
 
-<file path=ppt/slides/slide17.xml><?xml version="1.0" encoding="utf-8"?>
+<file path=ppt/slides/slide16.xml><?xml version="1.0" encoding="utf-8"?>
 <p:sld xmlns:a="http://schemas.openxmlformats.org/drawingml/2006/main" xmlns:r="http://schemas.openxmlformats.org/officeDocument/2006/relationships" xmlns:p="http://schemas.openxmlformats.org/presentationml/2006/main">
   <p:cSld>
     <p:spTree>
@@ -41407,10 +36855,10 @@
           <p:nvPr/>
         </p:nvPicPr>
         <p:blipFill>
-          <a:blip r:embed="rId2">
+          <a:blip>
             <a:extLst>
               <a:ext uri="{96DAC541-7B7A-43D3-8B79-37D633B846F1}">
-                <asvg:svgBlip xmlns:asvg="http://schemas.microsoft.com/office/drawing/2016/SVG/main" r:embed="rId3"/>
+                <asvg:svgBlip xmlns:asvg="http://schemas.microsoft.com/office/drawing/2016/SVG/main" r:embed="rId2"/>
               </a:ext>
             </a:extLst>
           </a:blip>
@@ -41576,10 +37024,10 @@
           <p:nvPr/>
         </p:nvPicPr>
         <p:blipFill>
-          <a:blip r:embed="rId2">
+          <a:blip>
             <a:extLst>
               <a:ext uri="{96DAC541-7B7A-43D3-8B79-37D633B846F1}">
-                <asvg:svgBlip xmlns:asvg="http://schemas.microsoft.com/office/drawing/2016/SVG/main" r:embed="rId3"/>
+                <asvg:svgBlip xmlns:asvg="http://schemas.microsoft.com/office/drawing/2016/SVG/main" r:embed="rId2"/>
               </a:ext>
             </a:extLst>
           </a:blip>
@@ -41612,10 +37060,10 @@
           <p:nvPr/>
         </p:nvPicPr>
         <p:blipFill>
-          <a:blip r:embed="rId2">
+          <a:blip>
             <a:extLst>
               <a:ext uri="{96DAC541-7B7A-43D3-8B79-37D633B846F1}">
-                <asvg:svgBlip xmlns:asvg="http://schemas.microsoft.com/office/drawing/2016/SVG/main" r:embed="rId3"/>
+                <asvg:svgBlip xmlns:asvg="http://schemas.microsoft.com/office/drawing/2016/SVG/main" r:embed="rId2"/>
               </a:ext>
             </a:extLst>
           </a:blip>
@@ -44025,10 +39473,10 @@
           <p:nvPr/>
         </p:nvPicPr>
         <p:blipFill>
-          <a:blip r:embed="rId2">
+          <a:blip>
             <a:extLst>
               <a:ext uri="{96DAC541-7B7A-43D3-8B79-37D633B846F1}">
-                <asvg:svgBlip xmlns:asvg="http://schemas.microsoft.com/office/drawing/2016/SVG/main" r:embed="rId3"/>
+                <asvg:svgBlip xmlns:asvg="http://schemas.microsoft.com/office/drawing/2016/SVG/main" r:embed="rId2"/>
               </a:ext>
             </a:extLst>
           </a:blip>
@@ -44593,10 +40041,10 @@
           <p:nvPr/>
         </p:nvPicPr>
         <p:blipFill>
-          <a:blip r:embed="rId2">
+          <a:blip>
             <a:extLst>
               <a:ext uri="{96DAC541-7B7A-43D3-8B79-37D633B846F1}">
-                <asvg:svgBlip xmlns:asvg="http://schemas.microsoft.com/office/drawing/2016/SVG/main" r:embed="rId3"/>
+                <asvg:svgBlip xmlns:asvg="http://schemas.microsoft.com/office/drawing/2016/SVG/main" r:embed="rId2"/>
               </a:ext>
             </a:extLst>
           </a:blip>
@@ -44629,10 +40077,10 @@
           <p:nvPr/>
         </p:nvPicPr>
         <p:blipFill>
-          <a:blip r:embed="rId2">
+          <a:blip>
             <a:extLst>
               <a:ext uri="{96DAC541-7B7A-43D3-8B79-37D633B846F1}">
-                <asvg:svgBlip xmlns:asvg="http://schemas.microsoft.com/office/drawing/2016/SVG/main" r:embed="rId3"/>
+                <asvg:svgBlip xmlns:asvg="http://schemas.microsoft.com/office/drawing/2016/SVG/main" r:embed="rId2"/>
               </a:ext>
             </a:extLst>
           </a:blip>

--- a/Summary/figures.pptx
+++ b/Summary/figures.pptx
@@ -207,7 +207,7 @@
   <pc:docChgLst>
     <pc:chgData name="Jonathan Mah" userId="5261b2f2f3e51194" providerId="LiveId" clId="{DB9BCF8B-E91B-491C-8171-92D39BBC1534}"/>
     <pc:docChg chg="undo redo custSel addSld delSld modSld sldOrd modSection">
-      <pc:chgData name="Jonathan Mah" userId="5261b2f2f3e51194" providerId="LiveId" clId="{DB9BCF8B-E91B-491C-8171-92D39BBC1534}" dt="2026-03-25T23:37:21.726" v="1455" actId="1076"/>
+      <pc:chgData name="Jonathan Mah" userId="5261b2f2f3e51194" providerId="LiveId" clId="{DB9BCF8B-E91B-491C-8171-92D39BBC1534}" dt="2026-03-26T22:46:19.234" v="1463" actId="1076"/>
       <pc:docMkLst>
         <pc:docMk/>
       </pc:docMkLst>
@@ -513,7 +513,7 @@
         </pc:picChg>
       </pc:sldChg>
       <pc:sldChg chg="addSp delSp modSp mod">
-        <pc:chgData name="Jonathan Mah" userId="5261b2f2f3e51194" providerId="LiveId" clId="{DB9BCF8B-E91B-491C-8171-92D39BBC1534}" dt="2026-03-25T23:35:07.845" v="1443" actId="478"/>
+        <pc:chgData name="Jonathan Mah" userId="5261b2f2f3e51194" providerId="LiveId" clId="{DB9BCF8B-E91B-491C-8171-92D39BBC1534}" dt="2026-03-26T22:46:19.234" v="1463" actId="1076"/>
         <pc:sldMkLst>
           <pc:docMk/>
           <pc:sldMk cId="2504765150" sldId="521"/>
@@ -526,12 +526,28 @@
             <ac:picMk id="3" creationId="{D663E820-768A-05EE-8FBF-FFB4F17919C0}"/>
           </ac:picMkLst>
         </pc:picChg>
+        <pc:picChg chg="add del mod">
+          <ac:chgData name="Jonathan Mah" userId="5261b2f2f3e51194" providerId="LiveId" clId="{DB9BCF8B-E91B-491C-8171-92D39BBC1534}" dt="2026-03-26T22:24:53.773" v="1459" actId="478"/>
+          <ac:picMkLst>
+            <pc:docMk/>
+            <pc:sldMk cId="2504765150" sldId="521"/>
+            <ac:picMk id="3" creationId="{D7B268D6-9011-0529-0F69-4F92DE42BDF2}"/>
+          </ac:picMkLst>
+        </pc:picChg>
         <pc:picChg chg="add del">
-          <ac:chgData name="Jonathan Mah" userId="5261b2f2f3e51194" providerId="LiveId" clId="{DB9BCF8B-E91B-491C-8171-92D39BBC1534}" dt="2026-03-25T23:35:07.845" v="1443" actId="478"/>
+          <ac:chgData name="Jonathan Mah" userId="5261b2f2f3e51194" providerId="LiveId" clId="{DB9BCF8B-E91B-491C-8171-92D39BBC1534}" dt="2026-03-26T22:22:16.698" v="1456" actId="478"/>
           <ac:picMkLst>
             <pc:docMk/>
             <pc:sldMk cId="2504765150" sldId="521"/>
             <ac:picMk id="10" creationId="{D670D136-D4B1-2F03-CA3A-B0F61CBF5C84}"/>
+          </ac:picMkLst>
+        </pc:picChg>
+        <pc:picChg chg="add mod ord">
+          <ac:chgData name="Jonathan Mah" userId="5261b2f2f3e51194" providerId="LiveId" clId="{DB9BCF8B-E91B-491C-8171-92D39BBC1534}" dt="2026-03-26T22:46:19.234" v="1463" actId="1076"/>
+          <ac:picMkLst>
+            <pc:docMk/>
+            <pc:sldMk cId="2504765150" sldId="521"/>
+            <ac:picMk id="11" creationId="{236AFD76-191F-03BB-39DB-7D56743A2B8A}"/>
           </ac:picMkLst>
         </pc:picChg>
       </pc:sldChg>
@@ -739,7 +755,7 @@
           <a:p>
             <a:fld id="{224F4B04-6A50-4A51-B675-D86EC6563060}" type="datetimeFigureOut">
               <a:rPr lang="en-US" smtClean="0"/>
-              <a:t>3/25/2026</a:t>
+              <a:t>3/26/2026</a:t>
             </a:fld>
             <a:endParaRPr lang="en-US"/>
           </a:p>
@@ -1249,7 +1265,7 @@
           <a:p>
             <a:fld id="{54E435BD-4569-4C00-96FD-DE6EEAA430DA}" type="datetimeFigureOut">
               <a:rPr lang="en-US" smtClean="0"/>
-              <a:t>3/25/2026</a:t>
+              <a:t>3/26/2026</a:t>
             </a:fld>
             <a:endParaRPr lang="en-US"/>
           </a:p>
@@ -1419,7 +1435,7 @@
           <a:p>
             <a:fld id="{54E435BD-4569-4C00-96FD-DE6EEAA430DA}" type="datetimeFigureOut">
               <a:rPr lang="en-US" smtClean="0"/>
-              <a:t>3/25/2026</a:t>
+              <a:t>3/26/2026</a:t>
             </a:fld>
             <a:endParaRPr lang="en-US"/>
           </a:p>
@@ -1599,7 +1615,7 @@
           <a:p>
             <a:fld id="{54E435BD-4569-4C00-96FD-DE6EEAA430DA}" type="datetimeFigureOut">
               <a:rPr lang="en-US" smtClean="0"/>
-              <a:t>3/25/2026</a:t>
+              <a:t>3/26/2026</a:t>
             </a:fld>
             <a:endParaRPr lang="en-US"/>
           </a:p>
@@ -1769,7 +1785,7 @@
           <a:p>
             <a:fld id="{54E435BD-4569-4C00-96FD-DE6EEAA430DA}" type="datetimeFigureOut">
               <a:rPr lang="en-US" smtClean="0"/>
-              <a:t>3/25/2026</a:t>
+              <a:t>3/26/2026</a:t>
             </a:fld>
             <a:endParaRPr lang="en-US"/>
           </a:p>
@@ -2013,7 +2029,7 @@
           <a:p>
             <a:fld id="{54E435BD-4569-4C00-96FD-DE6EEAA430DA}" type="datetimeFigureOut">
               <a:rPr lang="en-US" smtClean="0"/>
-              <a:t>3/25/2026</a:t>
+              <a:t>3/26/2026</a:t>
             </a:fld>
             <a:endParaRPr lang="en-US"/>
           </a:p>
@@ -2245,7 +2261,7 @@
           <a:p>
             <a:fld id="{54E435BD-4569-4C00-96FD-DE6EEAA430DA}" type="datetimeFigureOut">
               <a:rPr lang="en-US" smtClean="0"/>
-              <a:t>3/25/2026</a:t>
+              <a:t>3/26/2026</a:t>
             </a:fld>
             <a:endParaRPr lang="en-US"/>
           </a:p>
@@ -2612,7 +2628,7 @@
           <a:p>
             <a:fld id="{54E435BD-4569-4C00-96FD-DE6EEAA430DA}" type="datetimeFigureOut">
               <a:rPr lang="en-US" smtClean="0"/>
-              <a:t>3/25/2026</a:t>
+              <a:t>3/26/2026</a:t>
             </a:fld>
             <a:endParaRPr lang="en-US"/>
           </a:p>
@@ -2730,7 +2746,7 @@
           <a:p>
             <a:fld id="{54E435BD-4569-4C00-96FD-DE6EEAA430DA}" type="datetimeFigureOut">
               <a:rPr lang="en-US" smtClean="0"/>
-              <a:t>3/25/2026</a:t>
+              <a:t>3/26/2026</a:t>
             </a:fld>
             <a:endParaRPr lang="en-US"/>
           </a:p>
@@ -2825,7 +2841,7 @@
           <a:p>
             <a:fld id="{54E435BD-4569-4C00-96FD-DE6EEAA430DA}" type="datetimeFigureOut">
               <a:rPr lang="en-US" smtClean="0"/>
-              <a:t>3/25/2026</a:t>
+              <a:t>3/26/2026</a:t>
             </a:fld>
             <a:endParaRPr lang="en-US"/>
           </a:p>
@@ -3102,7 +3118,7 @@
           <a:p>
             <a:fld id="{54E435BD-4569-4C00-96FD-DE6EEAA430DA}" type="datetimeFigureOut">
               <a:rPr lang="en-US" smtClean="0"/>
-              <a:t>3/25/2026</a:t>
+              <a:t>3/26/2026</a:t>
             </a:fld>
             <a:endParaRPr lang="en-US"/>
           </a:p>
@@ -3359,7 +3375,7 @@
           <a:p>
             <a:fld id="{54E435BD-4569-4C00-96FD-DE6EEAA430DA}" type="datetimeFigureOut">
               <a:rPr lang="en-US" smtClean="0"/>
-              <a:t>3/25/2026</a:t>
+              <a:t>3/26/2026</a:t>
             </a:fld>
             <a:endParaRPr lang="en-US"/>
           </a:p>
@@ -3572,7 +3588,7 @@
           <a:p>
             <a:fld id="{54E435BD-4569-4C00-96FD-DE6EEAA430DA}" type="datetimeFigureOut">
               <a:rPr lang="en-US" smtClean="0"/>
-              <a:t>3/25/2026</a:t>
+              <a:t>3/26/2026</a:t>
             </a:fld>
             <a:endParaRPr lang="en-US"/>
           </a:p>
@@ -12718,10 +12734,10 @@
       </p:grpSpPr>
       <p:pic>
         <p:nvPicPr>
-          <p:cNvPr id="10" name="Picture 9">
-            <a:extLst>
-              <a:ext uri="{FF2B5EF4-FFF2-40B4-BE49-F238E27FC236}">
-                <a16:creationId xmlns:a16="http://schemas.microsoft.com/office/drawing/2014/main" id="{D670D136-D4B1-2F03-CA3A-B0F61CBF5C84}"/>
+          <p:cNvPr id="11" name="Graphic 10">
+            <a:extLst>
+              <a:ext uri="{FF2B5EF4-FFF2-40B4-BE49-F238E27FC236}">
+                <a16:creationId xmlns:a16="http://schemas.microsoft.com/office/drawing/2014/main" id="{236AFD76-191F-03BB-39DB-7D56743A2B8A}"/>
               </a:ext>
             </a:extLst>
           </p:cNvPr>
@@ -12731,10 +12747,10 @@
           <p:nvPr/>
         </p:nvPicPr>
         <p:blipFill>
-          <a:blip r:embed="rId2">
-            <a:extLst>
-              <a:ext uri="{28A0092B-C50C-407E-A947-70E740481C1C}">
-                <a14:useLocalDpi xmlns:a14="http://schemas.microsoft.com/office/drawing/2010/main" val="0"/>
+          <a:blip>
+            <a:extLst>
+              <a:ext uri="{96DAC541-7B7A-43D3-8B79-37D633B846F1}">
+                <asvg:svgBlip xmlns:asvg="http://schemas.microsoft.com/office/drawing/2016/SVG/main" r:embed="rId2"/>
               </a:ext>
             </a:extLst>
           </a:blip>
@@ -12744,8 +12760,8 @@
         </p:blipFill>
         <p:spPr>
           <a:xfrm>
-            <a:off x="5598090" y="2315001"/>
-            <a:ext cx="11431595" cy="7621064"/>
+            <a:off x="5943600" y="2463998"/>
+            <a:ext cx="10972800" cy="7315200"/>
           </a:xfrm>
           <a:prstGeom prst="rect">
             <a:avLst/>

--- a/Summary/figures.pptx
+++ b/Summary/figures.pptx
@@ -149,7 +149,7 @@
 <file path=ppt/revisionInfo.xml><?xml version="1.0" encoding="utf-8"?>
 <p1510:revInfo xmlns:a="http://schemas.openxmlformats.org/drawingml/2006/main" xmlns:r="http://schemas.openxmlformats.org/officeDocument/2006/relationships" xmlns:p1510="http://schemas.microsoft.com/office/powerpoint/2015/10/main">
   <p1510:revLst>
-    <p1510:client id="{AF93BDFE-E7B1-48C6-AB80-E9611D4B0775}" v="4" dt="2026-03-25T22:45:32.638"/>
+    <p1510:client id="{AF93BDFE-E7B1-48C6-AB80-E9611D4B0775}" v="8" dt="2026-04-07T18:52:54.548"/>
   </p1510:revLst>
 </p1510:revInfo>
 </file>
@@ -159,7 +159,7 @@
   <pc:docChgLst>
     <pc:chgData name="Jonathan Mah" userId="5261b2f2f3e51194" providerId="LiveId" clId="{DB9BCF8B-E91B-491C-8171-92D39BBC1534}"/>
     <pc:docChg chg="undo redo custSel addSld delSld modSld sldOrd modSection">
-      <pc:chgData name="Jonathan Mah" userId="5261b2f2f3e51194" providerId="LiveId" clId="{DB9BCF8B-E91B-491C-8171-92D39BBC1534}" dt="2026-04-06T19:01:41.481" v="1469"/>
+      <pc:chgData name="Jonathan Mah" userId="5261b2f2f3e51194" providerId="LiveId" clId="{DB9BCF8B-E91B-491C-8171-92D39BBC1534}" dt="2026-04-07T18:53:03.011" v="1522" actId="1076"/>
       <pc:docMkLst>
         <pc:docMk/>
       </pc:docMkLst>
@@ -176,6 +176,189 @@
           <pc:docMk/>
           <pc:sldMk cId="2126933953" sldId="423"/>
         </pc:sldMkLst>
+      </pc:sldChg>
+      <pc:sldChg chg="addSp delSp modSp mod">
+        <pc:chgData name="Jonathan Mah" userId="5261b2f2f3e51194" providerId="LiveId" clId="{DB9BCF8B-E91B-491C-8171-92D39BBC1534}" dt="2026-04-07T18:53:03.011" v="1522" actId="1076"/>
+        <pc:sldMkLst>
+          <pc:docMk/>
+          <pc:sldMk cId="1601061642" sldId="512"/>
+        </pc:sldMkLst>
+        <pc:spChg chg="add mod">
+          <ac:chgData name="Jonathan Mah" userId="5261b2f2f3e51194" providerId="LiveId" clId="{DB9BCF8B-E91B-491C-8171-92D39BBC1534}" dt="2026-04-07T18:52:33.412" v="1517" actId="1076"/>
+          <ac:spMkLst>
+            <pc:docMk/>
+            <pc:sldMk cId="1601061642" sldId="512"/>
+            <ac:spMk id="18" creationId="{E693494A-1F6E-3828-5FF9-CDAB056D0BCE}"/>
+          </ac:spMkLst>
+        </pc:spChg>
+        <pc:spChg chg="add mod">
+          <ac:chgData name="Jonathan Mah" userId="5261b2f2f3e51194" providerId="LiveId" clId="{DB9BCF8B-E91B-491C-8171-92D39BBC1534}" dt="2026-04-07T18:52:33.412" v="1517" actId="1076"/>
+          <ac:spMkLst>
+            <pc:docMk/>
+            <pc:sldMk cId="1601061642" sldId="512"/>
+            <ac:spMk id="19" creationId="{C1E6029E-39DA-FD90-8B4A-32E98571088F}"/>
+          </ac:spMkLst>
+        </pc:spChg>
+        <pc:spChg chg="add mod">
+          <ac:chgData name="Jonathan Mah" userId="5261b2f2f3e51194" providerId="LiveId" clId="{DB9BCF8B-E91B-491C-8171-92D39BBC1534}" dt="2026-04-07T18:52:33.412" v="1517" actId="1076"/>
+          <ac:spMkLst>
+            <pc:docMk/>
+            <pc:sldMk cId="1601061642" sldId="512"/>
+            <ac:spMk id="22" creationId="{1CE5FA1F-948A-538B-E275-31FE8E471619}"/>
+          </ac:spMkLst>
+        </pc:spChg>
+        <pc:spChg chg="add mod">
+          <ac:chgData name="Jonathan Mah" userId="5261b2f2f3e51194" providerId="LiveId" clId="{DB9BCF8B-E91B-491C-8171-92D39BBC1534}" dt="2026-04-07T18:52:33.412" v="1517" actId="1076"/>
+          <ac:spMkLst>
+            <pc:docMk/>
+            <pc:sldMk cId="1601061642" sldId="512"/>
+            <ac:spMk id="23" creationId="{FE72382F-F6F9-66C7-4183-4E055D409F7D}"/>
+          </ac:spMkLst>
+        </pc:spChg>
+        <pc:spChg chg="mod">
+          <ac:chgData name="Jonathan Mah" userId="5261b2f2f3e51194" providerId="LiveId" clId="{DB9BCF8B-E91B-491C-8171-92D39BBC1534}" dt="2026-04-07T18:52:40.930" v="1518" actId="1076"/>
+          <ac:spMkLst>
+            <pc:docMk/>
+            <pc:sldMk cId="1601061642" sldId="512"/>
+            <ac:spMk id="24" creationId="{ACB078C8-4156-AC31-CFB4-4A88C1B62115}"/>
+          </ac:spMkLst>
+        </pc:spChg>
+        <pc:spChg chg="add mod">
+          <ac:chgData name="Jonathan Mah" userId="5261b2f2f3e51194" providerId="LiveId" clId="{DB9BCF8B-E91B-491C-8171-92D39BBC1534}" dt="2026-04-07T18:52:33.412" v="1517" actId="1076"/>
+          <ac:spMkLst>
+            <pc:docMk/>
+            <pc:sldMk cId="1601061642" sldId="512"/>
+            <ac:spMk id="38" creationId="{FC0509F7-8873-EC72-329F-1640ED6E36B3}"/>
+          </ac:spMkLst>
+        </pc:spChg>
+        <pc:spChg chg="add mod">
+          <ac:chgData name="Jonathan Mah" userId="5261b2f2f3e51194" providerId="LiveId" clId="{DB9BCF8B-E91B-491C-8171-92D39BBC1534}" dt="2026-04-07T18:52:33.412" v="1517" actId="1076"/>
+          <ac:spMkLst>
+            <pc:docMk/>
+            <pc:sldMk cId="1601061642" sldId="512"/>
+            <ac:spMk id="39" creationId="{5680E036-C301-C623-414E-BC2D5E341D9A}"/>
+          </ac:spMkLst>
+        </pc:spChg>
+        <pc:spChg chg="add mod">
+          <ac:chgData name="Jonathan Mah" userId="5261b2f2f3e51194" providerId="LiveId" clId="{DB9BCF8B-E91B-491C-8171-92D39BBC1534}" dt="2026-04-07T18:52:52.005" v="1520" actId="1076"/>
+          <ac:spMkLst>
+            <pc:docMk/>
+            <pc:sldMk cId="1601061642" sldId="512"/>
+            <ac:spMk id="40" creationId="{7688E15F-1386-C937-0163-2EC5DDC4ACE1}"/>
+          </ac:spMkLst>
+        </pc:spChg>
+        <pc:spChg chg="add mod">
+          <ac:chgData name="Jonathan Mah" userId="5261b2f2f3e51194" providerId="LiveId" clId="{DB9BCF8B-E91B-491C-8171-92D39BBC1534}" dt="2026-04-07T18:52:52.005" v="1520" actId="1076"/>
+          <ac:spMkLst>
+            <pc:docMk/>
+            <pc:sldMk cId="1601061642" sldId="512"/>
+            <ac:spMk id="41" creationId="{B641507C-62A6-FF4F-D8BC-CDF153439BD5}"/>
+          </ac:spMkLst>
+        </pc:spChg>
+        <pc:spChg chg="add mod">
+          <ac:chgData name="Jonathan Mah" userId="5261b2f2f3e51194" providerId="LiveId" clId="{DB9BCF8B-E91B-491C-8171-92D39BBC1534}" dt="2026-04-07T18:52:52.005" v="1520" actId="1076"/>
+          <ac:spMkLst>
+            <pc:docMk/>
+            <pc:sldMk cId="1601061642" sldId="512"/>
+            <ac:spMk id="42" creationId="{DE6853C4-E8CA-CF2A-8099-234DC2B4E289}"/>
+          </ac:spMkLst>
+        </pc:spChg>
+        <pc:spChg chg="add mod">
+          <ac:chgData name="Jonathan Mah" userId="5261b2f2f3e51194" providerId="LiveId" clId="{DB9BCF8B-E91B-491C-8171-92D39BBC1534}" dt="2026-04-07T18:52:52.005" v="1520" actId="1076"/>
+          <ac:spMkLst>
+            <pc:docMk/>
+            <pc:sldMk cId="1601061642" sldId="512"/>
+            <ac:spMk id="43" creationId="{305571C5-AE62-5FEB-178F-92AF31427263}"/>
+          </ac:spMkLst>
+        </pc:spChg>
+        <pc:spChg chg="add mod">
+          <ac:chgData name="Jonathan Mah" userId="5261b2f2f3e51194" providerId="LiveId" clId="{DB9BCF8B-E91B-491C-8171-92D39BBC1534}" dt="2026-04-07T18:52:52.005" v="1520" actId="1076"/>
+          <ac:spMkLst>
+            <pc:docMk/>
+            <pc:sldMk cId="1601061642" sldId="512"/>
+            <ac:spMk id="44" creationId="{A5BD21AD-9160-37C5-E402-1912AF878518}"/>
+          </ac:spMkLst>
+        </pc:spChg>
+        <pc:spChg chg="add mod">
+          <ac:chgData name="Jonathan Mah" userId="5261b2f2f3e51194" providerId="LiveId" clId="{DB9BCF8B-E91B-491C-8171-92D39BBC1534}" dt="2026-04-07T18:52:52.005" v="1520" actId="1076"/>
+          <ac:spMkLst>
+            <pc:docMk/>
+            <pc:sldMk cId="1601061642" sldId="512"/>
+            <ac:spMk id="45" creationId="{871380D0-3166-4CAB-8D48-B8B10A1216F4}"/>
+          </ac:spMkLst>
+        </pc:spChg>
+        <pc:spChg chg="add mod">
+          <ac:chgData name="Jonathan Mah" userId="5261b2f2f3e51194" providerId="LiveId" clId="{DB9BCF8B-E91B-491C-8171-92D39BBC1534}" dt="2026-04-07T18:53:03.011" v="1522" actId="1076"/>
+          <ac:spMkLst>
+            <pc:docMk/>
+            <pc:sldMk cId="1601061642" sldId="512"/>
+            <ac:spMk id="46" creationId="{669993EF-587D-E4B8-4DCB-745E77C10007}"/>
+          </ac:spMkLst>
+        </pc:spChg>
+        <pc:spChg chg="add mod">
+          <ac:chgData name="Jonathan Mah" userId="5261b2f2f3e51194" providerId="LiveId" clId="{DB9BCF8B-E91B-491C-8171-92D39BBC1534}" dt="2026-04-07T18:53:03.011" v="1522" actId="1076"/>
+          <ac:spMkLst>
+            <pc:docMk/>
+            <pc:sldMk cId="1601061642" sldId="512"/>
+            <ac:spMk id="47" creationId="{4315D537-113D-8E6A-1582-C204AA39D1FF}"/>
+          </ac:spMkLst>
+        </pc:spChg>
+        <pc:spChg chg="add mod">
+          <ac:chgData name="Jonathan Mah" userId="5261b2f2f3e51194" providerId="LiveId" clId="{DB9BCF8B-E91B-491C-8171-92D39BBC1534}" dt="2026-04-07T18:53:03.011" v="1522" actId="1076"/>
+          <ac:spMkLst>
+            <pc:docMk/>
+            <pc:sldMk cId="1601061642" sldId="512"/>
+            <ac:spMk id="48" creationId="{963E9682-998A-6596-A3B2-CF7BDC9DF45C}"/>
+          </ac:spMkLst>
+        </pc:spChg>
+        <pc:spChg chg="add mod">
+          <ac:chgData name="Jonathan Mah" userId="5261b2f2f3e51194" providerId="LiveId" clId="{DB9BCF8B-E91B-491C-8171-92D39BBC1534}" dt="2026-04-07T18:53:03.011" v="1522" actId="1076"/>
+          <ac:spMkLst>
+            <pc:docMk/>
+            <pc:sldMk cId="1601061642" sldId="512"/>
+            <ac:spMk id="49" creationId="{BB2FCBC0-DF2A-1EB3-1EB7-9D014B509F6B}"/>
+          </ac:spMkLst>
+        </pc:spChg>
+        <pc:spChg chg="add mod">
+          <ac:chgData name="Jonathan Mah" userId="5261b2f2f3e51194" providerId="LiveId" clId="{DB9BCF8B-E91B-491C-8171-92D39BBC1534}" dt="2026-04-07T18:53:03.011" v="1522" actId="1076"/>
+          <ac:spMkLst>
+            <pc:docMk/>
+            <pc:sldMk cId="1601061642" sldId="512"/>
+            <ac:spMk id="50" creationId="{380B9967-3D2A-6290-9C24-45B1B3248F5A}"/>
+          </ac:spMkLst>
+        </pc:spChg>
+        <pc:spChg chg="add mod">
+          <ac:chgData name="Jonathan Mah" userId="5261b2f2f3e51194" providerId="LiveId" clId="{DB9BCF8B-E91B-491C-8171-92D39BBC1534}" dt="2026-04-07T18:53:03.011" v="1522" actId="1076"/>
+          <ac:spMkLst>
+            <pc:docMk/>
+            <pc:sldMk cId="1601061642" sldId="512"/>
+            <ac:spMk id="51" creationId="{9BBB25C2-AD51-EF46-0526-6F8284826624}"/>
+          </ac:spMkLst>
+        </pc:spChg>
+        <pc:picChg chg="del">
+          <ac:chgData name="Jonathan Mah" userId="5261b2f2f3e51194" providerId="LiveId" clId="{DB9BCF8B-E91B-491C-8171-92D39BBC1534}" dt="2026-04-07T18:50:16.367" v="1472" actId="478"/>
+          <ac:picMkLst>
+            <pc:docMk/>
+            <pc:sldMk cId="1601061642" sldId="512"/>
+            <ac:picMk id="20" creationId="{63E7276F-F01B-934A-CFDD-FB6D5F2EC7FE}"/>
+          </ac:picMkLst>
+        </pc:picChg>
+        <pc:picChg chg="del">
+          <ac:chgData name="Jonathan Mah" userId="5261b2f2f3e51194" providerId="LiveId" clId="{DB9BCF8B-E91B-491C-8171-92D39BBC1534}" dt="2026-04-07T18:50:15.402" v="1470" actId="478"/>
+          <ac:picMkLst>
+            <pc:docMk/>
+            <pc:sldMk cId="1601061642" sldId="512"/>
+            <ac:picMk id="27" creationId="{2D97DDCB-7229-9321-0F73-E66F51B159CC}"/>
+          </ac:picMkLst>
+        </pc:picChg>
+        <pc:picChg chg="del">
+          <ac:chgData name="Jonathan Mah" userId="5261b2f2f3e51194" providerId="LiveId" clId="{DB9BCF8B-E91B-491C-8171-92D39BBC1534}" dt="2026-04-07T18:50:15.709" v="1471" actId="478"/>
+          <ac:picMkLst>
+            <pc:docMk/>
+            <pc:sldMk cId="1601061642" sldId="512"/>
+            <ac:picMk id="28" creationId="{D84EF3F0-23DB-F3D5-FE38-1150762ADF3E}"/>
+          </ac:picMkLst>
+        </pc:picChg>
       </pc:sldChg>
       <pc:sldChg chg="del">
         <pc:chgData name="Jonathan Mah" userId="5261b2f2f3e51194" providerId="LiveId" clId="{DB9BCF8B-E91B-491C-8171-92D39BBC1534}" dt="2026-04-06T19:00:30.307" v="1466" actId="47"/>
@@ -562,7 +745,7 @@
           <a:p>
             <a:fld id="{224F4B04-6A50-4A51-B675-D86EC6563060}" type="datetimeFigureOut">
               <a:rPr lang="en-US" smtClean="0"/>
-              <a:t>4/6/2026</a:t>
+              <a:t>4/7/2026</a:t>
             </a:fld>
             <a:endParaRPr lang="en-US"/>
           </a:p>
@@ -960,7 +1143,7 @@
           <a:p>
             <a:fld id="{54E435BD-4569-4C00-96FD-DE6EEAA430DA}" type="datetimeFigureOut">
               <a:rPr lang="en-US" smtClean="0"/>
-              <a:t>4/6/2026</a:t>
+              <a:t>4/7/2026</a:t>
             </a:fld>
             <a:endParaRPr lang="en-US"/>
           </a:p>
@@ -1130,7 +1313,7 @@
           <a:p>
             <a:fld id="{54E435BD-4569-4C00-96FD-DE6EEAA430DA}" type="datetimeFigureOut">
               <a:rPr lang="en-US" smtClean="0"/>
-              <a:t>4/6/2026</a:t>
+              <a:t>4/7/2026</a:t>
             </a:fld>
             <a:endParaRPr lang="en-US"/>
           </a:p>
@@ -1310,7 +1493,7 @@
           <a:p>
             <a:fld id="{54E435BD-4569-4C00-96FD-DE6EEAA430DA}" type="datetimeFigureOut">
               <a:rPr lang="en-US" smtClean="0"/>
-              <a:t>4/6/2026</a:t>
+              <a:t>4/7/2026</a:t>
             </a:fld>
             <a:endParaRPr lang="en-US"/>
           </a:p>
@@ -1480,7 +1663,7 @@
           <a:p>
             <a:fld id="{54E435BD-4569-4C00-96FD-DE6EEAA430DA}" type="datetimeFigureOut">
               <a:rPr lang="en-US" smtClean="0"/>
-              <a:t>4/6/2026</a:t>
+              <a:t>4/7/2026</a:t>
             </a:fld>
             <a:endParaRPr lang="en-US"/>
           </a:p>
@@ -1724,7 +1907,7 @@
           <a:p>
             <a:fld id="{54E435BD-4569-4C00-96FD-DE6EEAA430DA}" type="datetimeFigureOut">
               <a:rPr lang="en-US" smtClean="0"/>
-              <a:t>4/6/2026</a:t>
+              <a:t>4/7/2026</a:t>
             </a:fld>
             <a:endParaRPr lang="en-US"/>
           </a:p>
@@ -1956,7 +2139,7 @@
           <a:p>
             <a:fld id="{54E435BD-4569-4C00-96FD-DE6EEAA430DA}" type="datetimeFigureOut">
               <a:rPr lang="en-US" smtClean="0"/>
-              <a:t>4/6/2026</a:t>
+              <a:t>4/7/2026</a:t>
             </a:fld>
             <a:endParaRPr lang="en-US"/>
           </a:p>
@@ -2323,7 +2506,7 @@
           <a:p>
             <a:fld id="{54E435BD-4569-4C00-96FD-DE6EEAA430DA}" type="datetimeFigureOut">
               <a:rPr lang="en-US" smtClean="0"/>
-              <a:t>4/6/2026</a:t>
+              <a:t>4/7/2026</a:t>
             </a:fld>
             <a:endParaRPr lang="en-US"/>
           </a:p>
@@ -2441,7 +2624,7 @@
           <a:p>
             <a:fld id="{54E435BD-4569-4C00-96FD-DE6EEAA430DA}" type="datetimeFigureOut">
               <a:rPr lang="en-US" smtClean="0"/>
-              <a:t>4/6/2026</a:t>
+              <a:t>4/7/2026</a:t>
             </a:fld>
             <a:endParaRPr lang="en-US"/>
           </a:p>
@@ -2536,7 +2719,7 @@
           <a:p>
             <a:fld id="{54E435BD-4569-4C00-96FD-DE6EEAA430DA}" type="datetimeFigureOut">
               <a:rPr lang="en-US" smtClean="0"/>
-              <a:t>4/6/2026</a:t>
+              <a:t>4/7/2026</a:t>
             </a:fld>
             <a:endParaRPr lang="en-US"/>
           </a:p>
@@ -2813,7 +2996,7 @@
           <a:p>
             <a:fld id="{54E435BD-4569-4C00-96FD-DE6EEAA430DA}" type="datetimeFigureOut">
               <a:rPr lang="en-US" smtClean="0"/>
-              <a:t>4/6/2026</a:t>
+              <a:t>4/7/2026</a:t>
             </a:fld>
             <a:endParaRPr lang="en-US"/>
           </a:p>
@@ -3070,7 +3253,7 @@
           <a:p>
             <a:fld id="{54E435BD-4569-4C00-96FD-DE6EEAA430DA}" type="datetimeFigureOut">
               <a:rPr lang="en-US" smtClean="0"/>
-              <a:t>4/6/2026</a:t>
+              <a:t>4/7/2026</a:t>
             </a:fld>
             <a:endParaRPr lang="en-US"/>
           </a:p>
@@ -3283,7 +3466,7 @@
           <a:p>
             <a:fld id="{54E435BD-4569-4C00-96FD-DE6EEAA430DA}" type="datetimeFigureOut">
               <a:rPr lang="en-US" smtClean="0"/>
-              <a:t>4/6/2026</a:t>
+              <a:t>4/7/2026</a:t>
             </a:fld>
             <a:endParaRPr lang="en-US"/>
           </a:p>
@@ -21780,42 +21963,6 @@
           </a:p>
         </p:txBody>
       </p:sp>
-      <p:pic>
-        <p:nvPicPr>
-          <p:cNvPr id="20" name="Graphic 19" descr="Group of men with solid fill">
-            <a:extLst>
-              <a:ext uri="{FF2B5EF4-FFF2-40B4-BE49-F238E27FC236}">
-                <a16:creationId xmlns:a16="http://schemas.microsoft.com/office/drawing/2014/main" id="{63E7276F-F01B-934A-CFDD-FB6D5F2EC7FE}"/>
-              </a:ext>
-            </a:extLst>
-          </p:cNvPr>
-          <p:cNvPicPr>
-            <a:picLocks noChangeAspect="1"/>
-          </p:cNvPicPr>
-          <p:nvPr/>
-        </p:nvPicPr>
-        <p:blipFill>
-          <a:blip>
-            <a:extLst>
-              <a:ext uri="{96DAC541-7B7A-43D3-8B79-37D633B846F1}">
-                <asvg:svgBlip xmlns:asvg="http://schemas.microsoft.com/office/drawing/2016/SVG/main" r:embed="rId2"/>
-              </a:ext>
-            </a:extLst>
-          </a:blip>
-          <a:stretch>
-            <a:fillRect/>
-          </a:stretch>
-        </p:blipFill>
-        <p:spPr>
-          <a:xfrm>
-            <a:off x="8069442" y="5507421"/>
-            <a:ext cx="914400" cy="914400"/>
-          </a:xfrm>
-          <a:prstGeom prst="rect">
-            <a:avLst/>
-          </a:prstGeom>
-        </p:spPr>
-      </p:pic>
       <p:sp>
         <p:nvSpPr>
           <p:cNvPr id="21" name="TextBox 20">
@@ -21963,7 +22110,7 @@
         </p:nvSpPr>
         <p:spPr>
           <a:xfrm>
-            <a:off x="8983842" y="4247190"/>
+            <a:off x="9025740" y="4253664"/>
             <a:ext cx="1474307" cy="338554"/>
           </a:xfrm>
           <a:prstGeom prst="rect">
@@ -22348,78 +22495,6 @@
           </a:p>
         </p:txBody>
       </p:sp>
-      <p:pic>
-        <p:nvPicPr>
-          <p:cNvPr id="27" name="Graphic 26" descr="Group of men with solid fill">
-            <a:extLst>
-              <a:ext uri="{FF2B5EF4-FFF2-40B4-BE49-F238E27FC236}">
-                <a16:creationId xmlns:a16="http://schemas.microsoft.com/office/drawing/2014/main" id="{2D97DDCB-7229-9321-0F73-E66F51B159CC}"/>
-              </a:ext>
-            </a:extLst>
-          </p:cNvPr>
-          <p:cNvPicPr>
-            <a:picLocks noChangeAspect="1"/>
-          </p:cNvPicPr>
-          <p:nvPr/>
-        </p:nvPicPr>
-        <p:blipFill>
-          <a:blip>
-            <a:extLst>
-              <a:ext uri="{96DAC541-7B7A-43D3-8B79-37D633B846F1}">
-                <asvg:svgBlip xmlns:asvg="http://schemas.microsoft.com/office/drawing/2016/SVG/main" r:embed="rId2"/>
-              </a:ext>
-            </a:extLst>
-          </a:blip>
-          <a:stretch>
-            <a:fillRect/>
-          </a:stretch>
-        </p:blipFill>
-        <p:spPr>
-          <a:xfrm>
-            <a:off x="8069442" y="3239342"/>
-            <a:ext cx="914400" cy="914400"/>
-          </a:xfrm>
-          <a:prstGeom prst="rect">
-            <a:avLst/>
-          </a:prstGeom>
-        </p:spPr>
-      </p:pic>
-      <p:pic>
-        <p:nvPicPr>
-          <p:cNvPr id="28" name="Graphic 27" descr="Group of men with solid fill">
-            <a:extLst>
-              <a:ext uri="{FF2B5EF4-FFF2-40B4-BE49-F238E27FC236}">
-                <a16:creationId xmlns:a16="http://schemas.microsoft.com/office/drawing/2014/main" id="{D84EF3F0-23DB-F3D5-FE38-1150762ADF3E}"/>
-              </a:ext>
-            </a:extLst>
-          </p:cNvPr>
-          <p:cNvPicPr>
-            <a:picLocks noChangeAspect="1"/>
-          </p:cNvPicPr>
-          <p:nvPr/>
-        </p:nvPicPr>
-        <p:blipFill>
-          <a:blip>
-            <a:extLst>
-              <a:ext uri="{96DAC541-7B7A-43D3-8B79-37D633B846F1}">
-                <asvg:svgBlip xmlns:asvg="http://schemas.microsoft.com/office/drawing/2016/SVG/main" r:embed="rId2"/>
-              </a:ext>
-            </a:extLst>
-          </a:blip>
-          <a:stretch>
-            <a:fillRect/>
-          </a:stretch>
-        </p:blipFill>
-        <p:spPr>
-          <a:xfrm>
-            <a:off x="8069442" y="4097609"/>
-            <a:ext cx="914400" cy="914400"/>
-          </a:xfrm>
-          <a:prstGeom prst="rect">
-            <a:avLst/>
-          </a:prstGeom>
-        </p:spPr>
-      </p:pic>
       <p:sp>
         <p:nvSpPr>
           <p:cNvPr id="29" name="TextBox 28">
@@ -23567,6 +23642,1032 @@
               </a:rPr>
               <a:t>Bottleneck</a:t>
             </a:r>
+          </a:p>
+        </p:txBody>
+      </p:sp>
+      <p:sp>
+        <p:nvSpPr>
+          <p:cNvPr id="18" name="Oval 17">
+            <a:extLst>
+              <a:ext uri="{FF2B5EF4-FFF2-40B4-BE49-F238E27FC236}">
+                <a16:creationId xmlns:a16="http://schemas.microsoft.com/office/drawing/2014/main" id="{E693494A-1F6E-3828-5FF9-CDAB056D0BCE}"/>
+              </a:ext>
+            </a:extLst>
+          </p:cNvPr>
+          <p:cNvSpPr/>
+          <p:nvPr/>
+        </p:nvSpPr>
+        <p:spPr>
+          <a:xfrm>
+            <a:off x="8072848" y="3330879"/>
+            <a:ext cx="182880" cy="182880"/>
+          </a:xfrm>
+          <a:prstGeom prst="ellipse">
+            <a:avLst/>
+          </a:prstGeom>
+          <a:solidFill>
+            <a:schemeClr val="tx1">
+              <a:lumMod val="50000"/>
+              <a:lumOff val="50000"/>
+            </a:schemeClr>
+          </a:solidFill>
+          <a:ln>
+            <a:solidFill>
+              <a:schemeClr val="tx1"/>
+            </a:solidFill>
+          </a:ln>
+        </p:spPr>
+        <p:style>
+          <a:lnRef idx="2">
+            <a:schemeClr val="accent1">
+              <a:shade val="15000"/>
+            </a:schemeClr>
+          </a:lnRef>
+          <a:fillRef idx="1">
+            <a:schemeClr val="accent1"/>
+          </a:fillRef>
+          <a:effectRef idx="0">
+            <a:schemeClr val="accent1"/>
+          </a:effectRef>
+          <a:fontRef idx="minor">
+            <a:schemeClr val="lt1"/>
+          </a:fontRef>
+        </p:style>
+        <p:txBody>
+          <a:bodyPr rtlCol="0" anchor="ctr"/>
+          <a:lstStyle/>
+          <a:p>
+            <a:pPr algn="ctr"/>
+            <a:endParaRPr lang="en-US"/>
+          </a:p>
+        </p:txBody>
+      </p:sp>
+      <p:sp>
+        <p:nvSpPr>
+          <p:cNvPr id="19" name="Rectangle: Top Corners Snipped 18">
+            <a:extLst>
+              <a:ext uri="{FF2B5EF4-FFF2-40B4-BE49-F238E27FC236}">
+                <a16:creationId xmlns:a16="http://schemas.microsoft.com/office/drawing/2014/main" id="{C1E6029E-39DA-FD90-8B4A-32E98571088F}"/>
+              </a:ext>
+            </a:extLst>
+          </p:cNvPr>
+          <p:cNvSpPr/>
+          <p:nvPr/>
+        </p:nvSpPr>
+        <p:spPr>
+          <a:xfrm>
+            <a:off x="7987125" y="3548262"/>
+            <a:ext cx="365760" cy="365760"/>
+          </a:xfrm>
+          <a:prstGeom prst="snip2SameRect">
+            <a:avLst/>
+          </a:prstGeom>
+          <a:solidFill>
+            <a:schemeClr val="tx1">
+              <a:lumMod val="50000"/>
+              <a:lumOff val="50000"/>
+            </a:schemeClr>
+          </a:solidFill>
+          <a:ln>
+            <a:solidFill>
+              <a:schemeClr val="tx1"/>
+            </a:solidFill>
+          </a:ln>
+        </p:spPr>
+        <p:style>
+          <a:lnRef idx="2">
+            <a:schemeClr val="accent1">
+              <a:shade val="15000"/>
+            </a:schemeClr>
+          </a:lnRef>
+          <a:fillRef idx="1">
+            <a:schemeClr val="accent1"/>
+          </a:fillRef>
+          <a:effectRef idx="0">
+            <a:schemeClr val="accent1"/>
+          </a:effectRef>
+          <a:fontRef idx="minor">
+            <a:schemeClr val="lt1"/>
+          </a:fontRef>
+        </p:style>
+        <p:txBody>
+          <a:bodyPr rtlCol="0" anchor="ctr"/>
+          <a:lstStyle/>
+          <a:p>
+            <a:pPr algn="ctr"/>
+            <a:endParaRPr lang="en-US"/>
+          </a:p>
+        </p:txBody>
+      </p:sp>
+      <p:sp>
+        <p:nvSpPr>
+          <p:cNvPr id="22" name="Oval 21">
+            <a:extLst>
+              <a:ext uri="{FF2B5EF4-FFF2-40B4-BE49-F238E27FC236}">
+                <a16:creationId xmlns:a16="http://schemas.microsoft.com/office/drawing/2014/main" id="{1CE5FA1F-948A-538B-E275-31FE8E471619}"/>
+              </a:ext>
+            </a:extLst>
+          </p:cNvPr>
+          <p:cNvSpPr/>
+          <p:nvPr/>
+        </p:nvSpPr>
+        <p:spPr>
+          <a:xfrm>
+            <a:off x="8313803" y="3362907"/>
+            <a:ext cx="182880" cy="182880"/>
+          </a:xfrm>
+          <a:prstGeom prst="ellipse">
+            <a:avLst/>
+          </a:prstGeom>
+          <a:solidFill>
+            <a:schemeClr val="tx1">
+              <a:lumMod val="50000"/>
+              <a:lumOff val="50000"/>
+            </a:schemeClr>
+          </a:solidFill>
+          <a:ln>
+            <a:solidFill>
+              <a:schemeClr val="tx1"/>
+            </a:solidFill>
+          </a:ln>
+        </p:spPr>
+        <p:style>
+          <a:lnRef idx="2">
+            <a:schemeClr val="accent1">
+              <a:shade val="15000"/>
+            </a:schemeClr>
+          </a:lnRef>
+          <a:fillRef idx="1">
+            <a:schemeClr val="accent1"/>
+          </a:fillRef>
+          <a:effectRef idx="0">
+            <a:schemeClr val="accent1"/>
+          </a:effectRef>
+          <a:fontRef idx="minor">
+            <a:schemeClr val="lt1"/>
+          </a:fontRef>
+        </p:style>
+        <p:txBody>
+          <a:bodyPr rtlCol="0" anchor="ctr"/>
+          <a:lstStyle/>
+          <a:p>
+            <a:pPr algn="ctr"/>
+            <a:endParaRPr lang="en-US"/>
+          </a:p>
+        </p:txBody>
+      </p:sp>
+      <p:sp>
+        <p:nvSpPr>
+          <p:cNvPr id="23" name="Rectangle: Top Corners Snipped 22">
+            <a:extLst>
+              <a:ext uri="{FF2B5EF4-FFF2-40B4-BE49-F238E27FC236}">
+                <a16:creationId xmlns:a16="http://schemas.microsoft.com/office/drawing/2014/main" id="{FE72382F-F6F9-66C7-4183-4E055D409F7D}"/>
+              </a:ext>
+            </a:extLst>
+          </p:cNvPr>
+          <p:cNvSpPr/>
+          <p:nvPr/>
+        </p:nvSpPr>
+        <p:spPr>
+          <a:xfrm>
+            <a:off x="8228080" y="3580290"/>
+            <a:ext cx="365760" cy="365760"/>
+          </a:xfrm>
+          <a:prstGeom prst="snip2SameRect">
+            <a:avLst/>
+          </a:prstGeom>
+          <a:solidFill>
+            <a:schemeClr val="tx1">
+              <a:lumMod val="50000"/>
+              <a:lumOff val="50000"/>
+            </a:schemeClr>
+          </a:solidFill>
+          <a:ln>
+            <a:solidFill>
+              <a:schemeClr val="tx1"/>
+            </a:solidFill>
+          </a:ln>
+        </p:spPr>
+        <p:style>
+          <a:lnRef idx="2">
+            <a:schemeClr val="accent1">
+              <a:shade val="15000"/>
+            </a:schemeClr>
+          </a:lnRef>
+          <a:fillRef idx="1">
+            <a:schemeClr val="accent1"/>
+          </a:fillRef>
+          <a:effectRef idx="0">
+            <a:schemeClr val="accent1"/>
+          </a:effectRef>
+          <a:fontRef idx="minor">
+            <a:schemeClr val="lt1"/>
+          </a:fontRef>
+        </p:style>
+        <p:txBody>
+          <a:bodyPr rtlCol="0" anchor="ctr"/>
+          <a:lstStyle/>
+          <a:p>
+            <a:pPr algn="ctr"/>
+            <a:endParaRPr lang="en-US"/>
+          </a:p>
+        </p:txBody>
+      </p:sp>
+      <p:sp>
+        <p:nvSpPr>
+          <p:cNvPr id="38" name="Oval 37">
+            <a:extLst>
+              <a:ext uri="{FF2B5EF4-FFF2-40B4-BE49-F238E27FC236}">
+                <a16:creationId xmlns:a16="http://schemas.microsoft.com/office/drawing/2014/main" id="{FC0509F7-8873-EC72-329F-1640ED6E36B3}"/>
+              </a:ext>
+            </a:extLst>
+          </p:cNvPr>
+          <p:cNvSpPr/>
+          <p:nvPr/>
+        </p:nvSpPr>
+        <p:spPr>
+          <a:xfrm>
+            <a:off x="8548725" y="3398838"/>
+            <a:ext cx="182880" cy="182880"/>
+          </a:xfrm>
+          <a:prstGeom prst="ellipse">
+            <a:avLst/>
+          </a:prstGeom>
+          <a:solidFill>
+            <a:schemeClr val="tx1">
+              <a:lumMod val="50000"/>
+              <a:lumOff val="50000"/>
+            </a:schemeClr>
+          </a:solidFill>
+          <a:ln>
+            <a:solidFill>
+              <a:schemeClr val="tx1"/>
+            </a:solidFill>
+          </a:ln>
+        </p:spPr>
+        <p:style>
+          <a:lnRef idx="2">
+            <a:schemeClr val="accent1">
+              <a:shade val="15000"/>
+            </a:schemeClr>
+          </a:lnRef>
+          <a:fillRef idx="1">
+            <a:schemeClr val="accent1"/>
+          </a:fillRef>
+          <a:effectRef idx="0">
+            <a:schemeClr val="accent1"/>
+          </a:effectRef>
+          <a:fontRef idx="minor">
+            <a:schemeClr val="lt1"/>
+          </a:fontRef>
+        </p:style>
+        <p:txBody>
+          <a:bodyPr rtlCol="0" anchor="ctr"/>
+          <a:lstStyle/>
+          <a:p>
+            <a:pPr algn="ctr"/>
+            <a:endParaRPr lang="en-US"/>
+          </a:p>
+        </p:txBody>
+      </p:sp>
+      <p:sp>
+        <p:nvSpPr>
+          <p:cNvPr id="39" name="Rectangle: Top Corners Snipped 38">
+            <a:extLst>
+              <a:ext uri="{FF2B5EF4-FFF2-40B4-BE49-F238E27FC236}">
+                <a16:creationId xmlns:a16="http://schemas.microsoft.com/office/drawing/2014/main" id="{5680E036-C301-C623-414E-BC2D5E341D9A}"/>
+              </a:ext>
+            </a:extLst>
+          </p:cNvPr>
+          <p:cNvSpPr/>
+          <p:nvPr/>
+        </p:nvSpPr>
+        <p:spPr>
+          <a:xfrm>
+            <a:off x="8463002" y="3616221"/>
+            <a:ext cx="365760" cy="365760"/>
+          </a:xfrm>
+          <a:prstGeom prst="snip2SameRect">
+            <a:avLst/>
+          </a:prstGeom>
+          <a:solidFill>
+            <a:schemeClr val="tx1">
+              <a:lumMod val="50000"/>
+              <a:lumOff val="50000"/>
+            </a:schemeClr>
+          </a:solidFill>
+          <a:ln>
+            <a:solidFill>
+              <a:schemeClr val="tx1"/>
+            </a:solidFill>
+          </a:ln>
+        </p:spPr>
+        <p:style>
+          <a:lnRef idx="2">
+            <a:schemeClr val="accent1">
+              <a:shade val="15000"/>
+            </a:schemeClr>
+          </a:lnRef>
+          <a:fillRef idx="1">
+            <a:schemeClr val="accent1"/>
+          </a:fillRef>
+          <a:effectRef idx="0">
+            <a:schemeClr val="accent1"/>
+          </a:effectRef>
+          <a:fontRef idx="minor">
+            <a:schemeClr val="lt1"/>
+          </a:fontRef>
+        </p:style>
+        <p:txBody>
+          <a:bodyPr rtlCol="0" anchor="ctr"/>
+          <a:lstStyle/>
+          <a:p>
+            <a:pPr algn="ctr"/>
+            <a:endParaRPr lang="en-US"/>
+          </a:p>
+        </p:txBody>
+      </p:sp>
+      <p:sp>
+        <p:nvSpPr>
+          <p:cNvPr id="40" name="Oval 39">
+            <a:extLst>
+              <a:ext uri="{FF2B5EF4-FFF2-40B4-BE49-F238E27FC236}">
+                <a16:creationId xmlns:a16="http://schemas.microsoft.com/office/drawing/2014/main" id="{7688E15F-1386-C937-0163-2EC5DDC4ACE1}"/>
+              </a:ext>
+            </a:extLst>
+          </p:cNvPr>
+          <p:cNvSpPr/>
+          <p:nvPr/>
+        </p:nvSpPr>
+        <p:spPr>
+          <a:xfrm>
+            <a:off x="8079670" y="4124127"/>
+            <a:ext cx="182880" cy="182880"/>
+          </a:xfrm>
+          <a:prstGeom prst="ellipse">
+            <a:avLst/>
+          </a:prstGeom>
+          <a:solidFill>
+            <a:schemeClr val="tx1">
+              <a:lumMod val="50000"/>
+              <a:lumOff val="50000"/>
+            </a:schemeClr>
+          </a:solidFill>
+          <a:ln>
+            <a:solidFill>
+              <a:schemeClr val="tx1"/>
+            </a:solidFill>
+          </a:ln>
+        </p:spPr>
+        <p:style>
+          <a:lnRef idx="2">
+            <a:schemeClr val="accent1">
+              <a:shade val="15000"/>
+            </a:schemeClr>
+          </a:lnRef>
+          <a:fillRef idx="1">
+            <a:schemeClr val="accent1"/>
+          </a:fillRef>
+          <a:effectRef idx="0">
+            <a:schemeClr val="accent1"/>
+          </a:effectRef>
+          <a:fontRef idx="minor">
+            <a:schemeClr val="lt1"/>
+          </a:fontRef>
+        </p:style>
+        <p:txBody>
+          <a:bodyPr rtlCol="0" anchor="ctr"/>
+          <a:lstStyle/>
+          <a:p>
+            <a:pPr algn="ctr"/>
+            <a:endParaRPr lang="en-US"/>
+          </a:p>
+        </p:txBody>
+      </p:sp>
+      <p:sp>
+        <p:nvSpPr>
+          <p:cNvPr id="41" name="Rectangle: Top Corners Snipped 40">
+            <a:extLst>
+              <a:ext uri="{FF2B5EF4-FFF2-40B4-BE49-F238E27FC236}">
+                <a16:creationId xmlns:a16="http://schemas.microsoft.com/office/drawing/2014/main" id="{B641507C-62A6-FF4F-D8BC-CDF153439BD5}"/>
+              </a:ext>
+            </a:extLst>
+          </p:cNvPr>
+          <p:cNvSpPr/>
+          <p:nvPr/>
+        </p:nvSpPr>
+        <p:spPr>
+          <a:xfrm>
+            <a:off x="7993947" y="4341510"/>
+            <a:ext cx="365760" cy="365760"/>
+          </a:xfrm>
+          <a:prstGeom prst="snip2SameRect">
+            <a:avLst/>
+          </a:prstGeom>
+          <a:solidFill>
+            <a:schemeClr val="tx1">
+              <a:lumMod val="50000"/>
+              <a:lumOff val="50000"/>
+            </a:schemeClr>
+          </a:solidFill>
+          <a:ln>
+            <a:solidFill>
+              <a:schemeClr val="tx1"/>
+            </a:solidFill>
+          </a:ln>
+        </p:spPr>
+        <p:style>
+          <a:lnRef idx="2">
+            <a:schemeClr val="accent1">
+              <a:shade val="15000"/>
+            </a:schemeClr>
+          </a:lnRef>
+          <a:fillRef idx="1">
+            <a:schemeClr val="accent1"/>
+          </a:fillRef>
+          <a:effectRef idx="0">
+            <a:schemeClr val="accent1"/>
+          </a:effectRef>
+          <a:fontRef idx="minor">
+            <a:schemeClr val="lt1"/>
+          </a:fontRef>
+        </p:style>
+        <p:txBody>
+          <a:bodyPr rtlCol="0" anchor="ctr"/>
+          <a:lstStyle/>
+          <a:p>
+            <a:pPr algn="ctr"/>
+            <a:endParaRPr lang="en-US"/>
+          </a:p>
+        </p:txBody>
+      </p:sp>
+      <p:sp>
+        <p:nvSpPr>
+          <p:cNvPr id="42" name="Oval 41">
+            <a:extLst>
+              <a:ext uri="{FF2B5EF4-FFF2-40B4-BE49-F238E27FC236}">
+                <a16:creationId xmlns:a16="http://schemas.microsoft.com/office/drawing/2014/main" id="{DE6853C4-E8CA-CF2A-8099-234DC2B4E289}"/>
+              </a:ext>
+            </a:extLst>
+          </p:cNvPr>
+          <p:cNvSpPr/>
+          <p:nvPr/>
+        </p:nvSpPr>
+        <p:spPr>
+          <a:xfrm>
+            <a:off x="8320625" y="4156155"/>
+            <a:ext cx="182880" cy="182880"/>
+          </a:xfrm>
+          <a:prstGeom prst="ellipse">
+            <a:avLst/>
+          </a:prstGeom>
+          <a:solidFill>
+            <a:schemeClr val="tx1">
+              <a:lumMod val="50000"/>
+              <a:lumOff val="50000"/>
+            </a:schemeClr>
+          </a:solidFill>
+          <a:ln>
+            <a:solidFill>
+              <a:schemeClr val="tx1"/>
+            </a:solidFill>
+          </a:ln>
+        </p:spPr>
+        <p:style>
+          <a:lnRef idx="2">
+            <a:schemeClr val="accent1">
+              <a:shade val="15000"/>
+            </a:schemeClr>
+          </a:lnRef>
+          <a:fillRef idx="1">
+            <a:schemeClr val="accent1"/>
+          </a:fillRef>
+          <a:effectRef idx="0">
+            <a:schemeClr val="accent1"/>
+          </a:effectRef>
+          <a:fontRef idx="minor">
+            <a:schemeClr val="lt1"/>
+          </a:fontRef>
+        </p:style>
+        <p:txBody>
+          <a:bodyPr rtlCol="0" anchor="ctr"/>
+          <a:lstStyle/>
+          <a:p>
+            <a:pPr algn="ctr"/>
+            <a:endParaRPr lang="en-US"/>
+          </a:p>
+        </p:txBody>
+      </p:sp>
+      <p:sp>
+        <p:nvSpPr>
+          <p:cNvPr id="43" name="Rectangle: Top Corners Snipped 42">
+            <a:extLst>
+              <a:ext uri="{FF2B5EF4-FFF2-40B4-BE49-F238E27FC236}">
+                <a16:creationId xmlns:a16="http://schemas.microsoft.com/office/drawing/2014/main" id="{305571C5-AE62-5FEB-178F-92AF31427263}"/>
+              </a:ext>
+            </a:extLst>
+          </p:cNvPr>
+          <p:cNvSpPr/>
+          <p:nvPr/>
+        </p:nvSpPr>
+        <p:spPr>
+          <a:xfrm>
+            <a:off x="8234902" y="4373538"/>
+            <a:ext cx="365760" cy="365760"/>
+          </a:xfrm>
+          <a:prstGeom prst="snip2SameRect">
+            <a:avLst/>
+          </a:prstGeom>
+          <a:solidFill>
+            <a:schemeClr val="tx1">
+              <a:lumMod val="50000"/>
+              <a:lumOff val="50000"/>
+            </a:schemeClr>
+          </a:solidFill>
+          <a:ln>
+            <a:solidFill>
+              <a:schemeClr val="tx1"/>
+            </a:solidFill>
+          </a:ln>
+        </p:spPr>
+        <p:style>
+          <a:lnRef idx="2">
+            <a:schemeClr val="accent1">
+              <a:shade val="15000"/>
+            </a:schemeClr>
+          </a:lnRef>
+          <a:fillRef idx="1">
+            <a:schemeClr val="accent1"/>
+          </a:fillRef>
+          <a:effectRef idx="0">
+            <a:schemeClr val="accent1"/>
+          </a:effectRef>
+          <a:fontRef idx="minor">
+            <a:schemeClr val="lt1"/>
+          </a:fontRef>
+        </p:style>
+        <p:txBody>
+          <a:bodyPr rtlCol="0" anchor="ctr"/>
+          <a:lstStyle/>
+          <a:p>
+            <a:pPr algn="ctr"/>
+            <a:endParaRPr lang="en-US"/>
+          </a:p>
+        </p:txBody>
+      </p:sp>
+      <p:sp>
+        <p:nvSpPr>
+          <p:cNvPr id="44" name="Oval 43">
+            <a:extLst>
+              <a:ext uri="{FF2B5EF4-FFF2-40B4-BE49-F238E27FC236}">
+                <a16:creationId xmlns:a16="http://schemas.microsoft.com/office/drawing/2014/main" id="{A5BD21AD-9160-37C5-E402-1912AF878518}"/>
+              </a:ext>
+            </a:extLst>
+          </p:cNvPr>
+          <p:cNvSpPr/>
+          <p:nvPr/>
+        </p:nvSpPr>
+        <p:spPr>
+          <a:xfrm>
+            <a:off x="8555547" y="4192086"/>
+            <a:ext cx="182880" cy="182880"/>
+          </a:xfrm>
+          <a:prstGeom prst="ellipse">
+            <a:avLst/>
+          </a:prstGeom>
+          <a:solidFill>
+            <a:schemeClr val="tx1">
+              <a:lumMod val="50000"/>
+              <a:lumOff val="50000"/>
+            </a:schemeClr>
+          </a:solidFill>
+          <a:ln>
+            <a:solidFill>
+              <a:schemeClr val="tx1"/>
+            </a:solidFill>
+          </a:ln>
+        </p:spPr>
+        <p:style>
+          <a:lnRef idx="2">
+            <a:schemeClr val="accent1">
+              <a:shade val="15000"/>
+            </a:schemeClr>
+          </a:lnRef>
+          <a:fillRef idx="1">
+            <a:schemeClr val="accent1"/>
+          </a:fillRef>
+          <a:effectRef idx="0">
+            <a:schemeClr val="accent1"/>
+          </a:effectRef>
+          <a:fontRef idx="minor">
+            <a:schemeClr val="lt1"/>
+          </a:fontRef>
+        </p:style>
+        <p:txBody>
+          <a:bodyPr rtlCol="0" anchor="ctr"/>
+          <a:lstStyle/>
+          <a:p>
+            <a:pPr algn="ctr"/>
+            <a:endParaRPr lang="en-US"/>
+          </a:p>
+        </p:txBody>
+      </p:sp>
+      <p:sp>
+        <p:nvSpPr>
+          <p:cNvPr id="45" name="Rectangle: Top Corners Snipped 44">
+            <a:extLst>
+              <a:ext uri="{FF2B5EF4-FFF2-40B4-BE49-F238E27FC236}">
+                <a16:creationId xmlns:a16="http://schemas.microsoft.com/office/drawing/2014/main" id="{871380D0-3166-4CAB-8D48-B8B10A1216F4}"/>
+              </a:ext>
+            </a:extLst>
+          </p:cNvPr>
+          <p:cNvSpPr/>
+          <p:nvPr/>
+        </p:nvSpPr>
+        <p:spPr>
+          <a:xfrm>
+            <a:off x="8469824" y="4409469"/>
+            <a:ext cx="365760" cy="365760"/>
+          </a:xfrm>
+          <a:prstGeom prst="snip2SameRect">
+            <a:avLst/>
+          </a:prstGeom>
+          <a:solidFill>
+            <a:schemeClr val="tx1">
+              <a:lumMod val="50000"/>
+              <a:lumOff val="50000"/>
+            </a:schemeClr>
+          </a:solidFill>
+          <a:ln>
+            <a:solidFill>
+              <a:schemeClr val="tx1"/>
+            </a:solidFill>
+          </a:ln>
+        </p:spPr>
+        <p:style>
+          <a:lnRef idx="2">
+            <a:schemeClr val="accent1">
+              <a:shade val="15000"/>
+            </a:schemeClr>
+          </a:lnRef>
+          <a:fillRef idx="1">
+            <a:schemeClr val="accent1"/>
+          </a:fillRef>
+          <a:effectRef idx="0">
+            <a:schemeClr val="accent1"/>
+          </a:effectRef>
+          <a:fontRef idx="minor">
+            <a:schemeClr val="lt1"/>
+          </a:fontRef>
+        </p:style>
+        <p:txBody>
+          <a:bodyPr rtlCol="0" anchor="ctr"/>
+          <a:lstStyle/>
+          <a:p>
+            <a:pPr algn="ctr"/>
+            <a:endParaRPr lang="en-US"/>
+          </a:p>
+        </p:txBody>
+      </p:sp>
+      <p:sp>
+        <p:nvSpPr>
+          <p:cNvPr id="46" name="Oval 45">
+            <a:extLst>
+              <a:ext uri="{FF2B5EF4-FFF2-40B4-BE49-F238E27FC236}">
+                <a16:creationId xmlns:a16="http://schemas.microsoft.com/office/drawing/2014/main" id="{669993EF-587D-E4B8-4DCB-745E77C10007}"/>
+              </a:ext>
+            </a:extLst>
+          </p:cNvPr>
+          <p:cNvSpPr/>
+          <p:nvPr/>
+        </p:nvSpPr>
+        <p:spPr>
+          <a:xfrm>
+            <a:off x="8112475" y="5531389"/>
+            <a:ext cx="182880" cy="182880"/>
+          </a:xfrm>
+          <a:prstGeom prst="ellipse">
+            <a:avLst/>
+          </a:prstGeom>
+          <a:solidFill>
+            <a:schemeClr val="tx1">
+              <a:lumMod val="50000"/>
+              <a:lumOff val="50000"/>
+            </a:schemeClr>
+          </a:solidFill>
+          <a:ln>
+            <a:solidFill>
+              <a:schemeClr val="tx1"/>
+            </a:solidFill>
+          </a:ln>
+        </p:spPr>
+        <p:style>
+          <a:lnRef idx="2">
+            <a:schemeClr val="accent1">
+              <a:shade val="15000"/>
+            </a:schemeClr>
+          </a:lnRef>
+          <a:fillRef idx="1">
+            <a:schemeClr val="accent1"/>
+          </a:fillRef>
+          <a:effectRef idx="0">
+            <a:schemeClr val="accent1"/>
+          </a:effectRef>
+          <a:fontRef idx="minor">
+            <a:schemeClr val="lt1"/>
+          </a:fontRef>
+        </p:style>
+        <p:txBody>
+          <a:bodyPr rtlCol="0" anchor="ctr"/>
+          <a:lstStyle/>
+          <a:p>
+            <a:pPr algn="ctr"/>
+            <a:endParaRPr lang="en-US"/>
+          </a:p>
+        </p:txBody>
+      </p:sp>
+      <p:sp>
+        <p:nvSpPr>
+          <p:cNvPr id="47" name="Rectangle: Top Corners Snipped 46">
+            <a:extLst>
+              <a:ext uri="{FF2B5EF4-FFF2-40B4-BE49-F238E27FC236}">
+                <a16:creationId xmlns:a16="http://schemas.microsoft.com/office/drawing/2014/main" id="{4315D537-113D-8E6A-1582-C204AA39D1FF}"/>
+              </a:ext>
+            </a:extLst>
+          </p:cNvPr>
+          <p:cNvSpPr/>
+          <p:nvPr/>
+        </p:nvSpPr>
+        <p:spPr>
+          <a:xfrm>
+            <a:off x="8026752" y="5748772"/>
+            <a:ext cx="365760" cy="365760"/>
+          </a:xfrm>
+          <a:prstGeom prst="snip2SameRect">
+            <a:avLst/>
+          </a:prstGeom>
+          <a:solidFill>
+            <a:schemeClr val="tx1">
+              <a:lumMod val="50000"/>
+              <a:lumOff val="50000"/>
+            </a:schemeClr>
+          </a:solidFill>
+          <a:ln>
+            <a:solidFill>
+              <a:schemeClr val="tx1"/>
+            </a:solidFill>
+          </a:ln>
+        </p:spPr>
+        <p:style>
+          <a:lnRef idx="2">
+            <a:schemeClr val="accent1">
+              <a:shade val="15000"/>
+            </a:schemeClr>
+          </a:lnRef>
+          <a:fillRef idx="1">
+            <a:schemeClr val="accent1"/>
+          </a:fillRef>
+          <a:effectRef idx="0">
+            <a:schemeClr val="accent1"/>
+          </a:effectRef>
+          <a:fontRef idx="minor">
+            <a:schemeClr val="lt1"/>
+          </a:fontRef>
+        </p:style>
+        <p:txBody>
+          <a:bodyPr rtlCol="0" anchor="ctr"/>
+          <a:lstStyle/>
+          <a:p>
+            <a:pPr algn="ctr"/>
+            <a:endParaRPr lang="en-US"/>
+          </a:p>
+        </p:txBody>
+      </p:sp>
+      <p:sp>
+        <p:nvSpPr>
+          <p:cNvPr id="48" name="Oval 47">
+            <a:extLst>
+              <a:ext uri="{FF2B5EF4-FFF2-40B4-BE49-F238E27FC236}">
+                <a16:creationId xmlns:a16="http://schemas.microsoft.com/office/drawing/2014/main" id="{963E9682-998A-6596-A3B2-CF7BDC9DF45C}"/>
+              </a:ext>
+            </a:extLst>
+          </p:cNvPr>
+          <p:cNvSpPr/>
+          <p:nvPr/>
+        </p:nvSpPr>
+        <p:spPr>
+          <a:xfrm>
+            <a:off x="8353430" y="5563417"/>
+            <a:ext cx="182880" cy="182880"/>
+          </a:xfrm>
+          <a:prstGeom prst="ellipse">
+            <a:avLst/>
+          </a:prstGeom>
+          <a:solidFill>
+            <a:schemeClr val="tx1">
+              <a:lumMod val="50000"/>
+              <a:lumOff val="50000"/>
+            </a:schemeClr>
+          </a:solidFill>
+          <a:ln>
+            <a:solidFill>
+              <a:schemeClr val="tx1"/>
+            </a:solidFill>
+          </a:ln>
+        </p:spPr>
+        <p:style>
+          <a:lnRef idx="2">
+            <a:schemeClr val="accent1">
+              <a:shade val="15000"/>
+            </a:schemeClr>
+          </a:lnRef>
+          <a:fillRef idx="1">
+            <a:schemeClr val="accent1"/>
+          </a:fillRef>
+          <a:effectRef idx="0">
+            <a:schemeClr val="accent1"/>
+          </a:effectRef>
+          <a:fontRef idx="minor">
+            <a:schemeClr val="lt1"/>
+          </a:fontRef>
+        </p:style>
+        <p:txBody>
+          <a:bodyPr rtlCol="0" anchor="ctr"/>
+          <a:lstStyle/>
+          <a:p>
+            <a:pPr algn="ctr"/>
+            <a:endParaRPr lang="en-US"/>
+          </a:p>
+        </p:txBody>
+      </p:sp>
+      <p:sp>
+        <p:nvSpPr>
+          <p:cNvPr id="49" name="Rectangle: Top Corners Snipped 48">
+            <a:extLst>
+              <a:ext uri="{FF2B5EF4-FFF2-40B4-BE49-F238E27FC236}">
+                <a16:creationId xmlns:a16="http://schemas.microsoft.com/office/drawing/2014/main" id="{BB2FCBC0-DF2A-1EB3-1EB7-9D014B509F6B}"/>
+              </a:ext>
+            </a:extLst>
+          </p:cNvPr>
+          <p:cNvSpPr/>
+          <p:nvPr/>
+        </p:nvSpPr>
+        <p:spPr>
+          <a:xfrm>
+            <a:off x="8267707" y="5780800"/>
+            <a:ext cx="365760" cy="365760"/>
+          </a:xfrm>
+          <a:prstGeom prst="snip2SameRect">
+            <a:avLst/>
+          </a:prstGeom>
+          <a:solidFill>
+            <a:schemeClr val="tx1">
+              <a:lumMod val="50000"/>
+              <a:lumOff val="50000"/>
+            </a:schemeClr>
+          </a:solidFill>
+          <a:ln>
+            <a:solidFill>
+              <a:schemeClr val="tx1"/>
+            </a:solidFill>
+          </a:ln>
+        </p:spPr>
+        <p:style>
+          <a:lnRef idx="2">
+            <a:schemeClr val="accent1">
+              <a:shade val="15000"/>
+            </a:schemeClr>
+          </a:lnRef>
+          <a:fillRef idx="1">
+            <a:schemeClr val="accent1"/>
+          </a:fillRef>
+          <a:effectRef idx="0">
+            <a:schemeClr val="accent1"/>
+          </a:effectRef>
+          <a:fontRef idx="minor">
+            <a:schemeClr val="lt1"/>
+          </a:fontRef>
+        </p:style>
+        <p:txBody>
+          <a:bodyPr rtlCol="0" anchor="ctr"/>
+          <a:lstStyle/>
+          <a:p>
+            <a:pPr algn="ctr"/>
+            <a:endParaRPr lang="en-US"/>
+          </a:p>
+        </p:txBody>
+      </p:sp>
+      <p:sp>
+        <p:nvSpPr>
+          <p:cNvPr id="50" name="Oval 49">
+            <a:extLst>
+              <a:ext uri="{FF2B5EF4-FFF2-40B4-BE49-F238E27FC236}">
+                <a16:creationId xmlns:a16="http://schemas.microsoft.com/office/drawing/2014/main" id="{380B9967-3D2A-6290-9C24-45B1B3248F5A}"/>
+              </a:ext>
+            </a:extLst>
+          </p:cNvPr>
+          <p:cNvSpPr/>
+          <p:nvPr/>
+        </p:nvSpPr>
+        <p:spPr>
+          <a:xfrm>
+            <a:off x="8588352" y="5599348"/>
+            <a:ext cx="182880" cy="182880"/>
+          </a:xfrm>
+          <a:prstGeom prst="ellipse">
+            <a:avLst/>
+          </a:prstGeom>
+          <a:solidFill>
+            <a:schemeClr val="tx1">
+              <a:lumMod val="50000"/>
+              <a:lumOff val="50000"/>
+            </a:schemeClr>
+          </a:solidFill>
+          <a:ln>
+            <a:solidFill>
+              <a:schemeClr val="tx1"/>
+            </a:solidFill>
+          </a:ln>
+        </p:spPr>
+        <p:style>
+          <a:lnRef idx="2">
+            <a:schemeClr val="accent1">
+              <a:shade val="15000"/>
+            </a:schemeClr>
+          </a:lnRef>
+          <a:fillRef idx="1">
+            <a:schemeClr val="accent1"/>
+          </a:fillRef>
+          <a:effectRef idx="0">
+            <a:schemeClr val="accent1"/>
+          </a:effectRef>
+          <a:fontRef idx="minor">
+            <a:schemeClr val="lt1"/>
+          </a:fontRef>
+        </p:style>
+        <p:txBody>
+          <a:bodyPr rtlCol="0" anchor="ctr"/>
+          <a:lstStyle/>
+          <a:p>
+            <a:pPr algn="ctr"/>
+            <a:endParaRPr lang="en-US"/>
+          </a:p>
+        </p:txBody>
+      </p:sp>
+      <p:sp>
+        <p:nvSpPr>
+          <p:cNvPr id="51" name="Rectangle: Top Corners Snipped 50">
+            <a:extLst>
+              <a:ext uri="{FF2B5EF4-FFF2-40B4-BE49-F238E27FC236}">
+                <a16:creationId xmlns:a16="http://schemas.microsoft.com/office/drawing/2014/main" id="{9BBB25C2-AD51-EF46-0526-6F8284826624}"/>
+              </a:ext>
+            </a:extLst>
+          </p:cNvPr>
+          <p:cNvSpPr/>
+          <p:nvPr/>
+        </p:nvSpPr>
+        <p:spPr>
+          <a:xfrm>
+            <a:off x="8502629" y="5816731"/>
+            <a:ext cx="365760" cy="365760"/>
+          </a:xfrm>
+          <a:prstGeom prst="snip2SameRect">
+            <a:avLst/>
+          </a:prstGeom>
+          <a:solidFill>
+            <a:schemeClr val="tx1">
+              <a:lumMod val="50000"/>
+              <a:lumOff val="50000"/>
+            </a:schemeClr>
+          </a:solidFill>
+          <a:ln>
+            <a:solidFill>
+              <a:schemeClr val="tx1"/>
+            </a:solidFill>
+          </a:ln>
+        </p:spPr>
+        <p:style>
+          <a:lnRef idx="2">
+            <a:schemeClr val="accent1">
+              <a:shade val="15000"/>
+            </a:schemeClr>
+          </a:lnRef>
+          <a:fillRef idx="1">
+            <a:schemeClr val="accent1"/>
+          </a:fillRef>
+          <a:effectRef idx="0">
+            <a:schemeClr val="accent1"/>
+          </a:effectRef>
+          <a:fontRef idx="minor">
+            <a:schemeClr val="lt1"/>
+          </a:fontRef>
+        </p:style>
+        <p:txBody>
+          <a:bodyPr rtlCol="0" anchor="ctr"/>
+          <a:lstStyle/>
+          <a:p>
+            <a:pPr algn="ctr"/>
+            <a:endParaRPr lang="en-US"/>
           </a:p>
         </p:txBody>
       </p:sp>
